--- a/docs/test/stress/e2e-outputs/income_pro_pr02.pptx
+++ b/docs/test/stress/e2e-outputs/income_pro_pr02.pptx
@@ -5290,11 +5290,11 @@
         <p:spPr>
           <a:xfrm>
             <a:off x="566928" y="1417320"/>
-            <a:ext cx="5391760" cy="3611880"/>
+            <a:ext cx="5400904" cy="3657600"/>
           </a:xfrm>
           <a:prstGeom prst="roundRect">
             <a:avLst>
-              <a:gd name="adj" fmla="val 1519"/>
+              <a:gd name="adj" fmla="val 1500"/>
             </a:avLst>
           </a:prstGeom>
           <a:solidFill>
@@ -5317,7 +5317,7 @@
         <p:spPr>
           <a:xfrm>
             <a:off x="566928" y="1417320"/>
-            <a:ext cx="5391760" cy="45720"/>
+            <a:ext cx="5400904" cy="45720"/>
           </a:xfrm>
           <a:prstGeom prst="rect">
             <a:avLst/>
@@ -5337,7 +5337,7 @@
         <p:spPr>
           <a:xfrm>
             <a:off x="795528" y="1618488"/>
-            <a:ext cx="4934560" cy="292608"/>
+            <a:ext cx="4943704" cy="292608"/>
           </a:xfrm>
           <a:prstGeom prst="rect">
             <a:avLst/>
@@ -5375,8 +5375,8 @@
         </p:nvSpPr>
         <p:spPr>
           <a:xfrm>
-            <a:off x="795528" y="1911096"/>
-            <a:ext cx="4934560" cy="402336"/>
+            <a:off x="795528" y="1947672"/>
+            <a:ext cx="4943704" cy="365760"/>
           </a:xfrm>
           <a:prstGeom prst="rect">
             <a:avLst/>
@@ -5394,7 +5394,7 @@
               <a:buNone/>
             </a:pPr>
             <a:r>
-              <a:rPr lang="en-US" sz="1350" b="1" dirty="0">
+              <a:rPr lang="en-US" sz="1250" b="1" dirty="0">
                 <a:solidFill>
                   <a:srgbClr val="10161F"/>
                 </a:solidFill>
@@ -5404,7 +5404,7 @@
               </a:rPr>
               <a:t>전층 의료</a:t>
             </a:r>
-            <a:endParaRPr lang="en-US" sz="1350" dirty="0"/>
+            <a:endParaRPr lang="en-US" sz="1250" dirty="0"/>
           </a:p>
         </p:txBody>
       </p:sp>
@@ -5417,7 +5417,7 @@
         <p:spPr>
           <a:xfrm>
             <a:off x="795528" y="2377440"/>
-            <a:ext cx="4934560" cy="2560320"/>
+            <a:ext cx="4943704" cy="2606040"/>
           </a:xfrm>
           <a:prstGeom prst="rect">
             <a:avLst/>
@@ -5439,7 +5439,7 @@
               <a:buChar char="•"/>
             </a:pPr>
             <a:r>
-              <a:rPr lang="en-US" sz="1200" dirty="0">
+              <a:rPr lang="en-US" sz="1100" dirty="0">
                 <a:solidFill>
                   <a:srgbClr val="10161F"/>
                 </a:solidFill>
@@ -5449,7 +5449,7 @@
               </a:rPr>
               <a:t>업종 다각화 검토</a:t>
             </a:r>
-            <a:endParaRPr lang="en-US" sz="1200" dirty="0"/>
+            <a:endParaRPr lang="en-US" sz="1100" dirty="0"/>
           </a:p>
         </p:txBody>
       </p:sp>
@@ -5461,12 +5461,12 @@
         </p:nvSpPr>
         <p:spPr>
           <a:xfrm>
-            <a:off x="6233008" y="1417320"/>
-            <a:ext cx="5391760" cy="3611880"/>
+            <a:off x="6223864" y="1417320"/>
+            <a:ext cx="5400904" cy="3657600"/>
           </a:xfrm>
           <a:prstGeom prst="roundRect">
             <a:avLst>
-              <a:gd name="adj" fmla="val 1519"/>
+              <a:gd name="adj" fmla="val 1500"/>
             </a:avLst>
           </a:prstGeom>
           <a:solidFill>
@@ -5488,8 +5488,8 @@
         </p:nvSpPr>
         <p:spPr>
           <a:xfrm>
-            <a:off x="6233008" y="1417320"/>
-            <a:ext cx="5391760" cy="45720"/>
+            <a:off x="6223864" y="1417320"/>
+            <a:ext cx="5400904" cy="45720"/>
           </a:xfrm>
           <a:prstGeom prst="rect">
             <a:avLst/>
@@ -5508,8 +5508,8 @@
         </p:nvSpPr>
         <p:spPr>
           <a:xfrm>
-            <a:off x="6461608" y="1618488"/>
-            <a:ext cx="4934560" cy="292608"/>
+            <a:off x="6452464" y="1618488"/>
+            <a:ext cx="4943704" cy="292608"/>
           </a:xfrm>
           <a:prstGeom prst="rect">
             <a:avLst/>
@@ -5547,8 +5547,8 @@
         </p:nvSpPr>
         <p:spPr>
           <a:xfrm>
-            <a:off x="6461608" y="1911096"/>
-            <a:ext cx="4934560" cy="402336"/>
+            <a:off x="6452464" y="1947672"/>
+            <a:ext cx="4943704" cy="365760"/>
           </a:xfrm>
           <a:prstGeom prst="rect">
             <a:avLst/>
@@ -5566,7 +5566,7 @@
               <a:buNone/>
             </a:pPr>
             <a:r>
-              <a:rPr lang="en-US" sz="1350" b="1" dirty="0">
+              <a:rPr lang="en-US" sz="1250" b="1" dirty="0">
                 <a:solidFill>
                   <a:srgbClr val="10161F"/>
                 </a:solidFill>
@@ -5576,7 +5576,7 @@
               </a:rPr>
               <a:t>4.1% 고정</a:t>
             </a:r>
-            <a:endParaRPr lang="en-US" sz="1350" dirty="0"/>
+            <a:endParaRPr lang="en-US" sz="1250" dirty="0"/>
           </a:p>
         </p:txBody>
       </p:sp>
@@ -5588,8 +5588,8 @@
         </p:nvSpPr>
         <p:spPr>
           <a:xfrm>
-            <a:off x="6461608" y="2377440"/>
-            <a:ext cx="4934560" cy="2560320"/>
+            <a:off x="6452464" y="2377440"/>
+            <a:ext cx="4943704" cy="2606040"/>
           </a:xfrm>
           <a:prstGeom prst="rect">
             <a:avLst/>
@@ -5611,7 +5611,7 @@
               <a:buChar char="•"/>
             </a:pPr>
             <a:r>
-              <a:rPr lang="en-US" sz="1200" dirty="0">
+              <a:rPr lang="en-US" sz="1100" dirty="0">
                 <a:solidFill>
                   <a:srgbClr val="10161F"/>
                 </a:solidFill>
@@ -5621,20 +5621,47 @@
               </a:rPr>
               <a:t>승계 대출 활용</a:t>
             </a:r>
-            <a:endParaRPr lang="en-US" sz="1200" dirty="0"/>
-          </a:p>
-        </p:txBody>
-      </p:sp>
-      <p:sp>
-        <p:nvSpPr>
-          <p:cNvPr id="16" name="Text 14"/>
-          <p:cNvSpPr/>
-          <p:nvPr/>
-        </p:nvSpPr>
-        <p:spPr>
-          <a:xfrm>
-            <a:off x="566928" y="6382512"/>
-            <a:ext cx="7315200" cy="219456"/>
+            <a:endParaRPr lang="en-US" sz="1100" dirty="0"/>
+          </a:p>
+        </p:txBody>
+      </p:sp>
+      <p:sp>
+        <p:nvSpPr>
+          <p:cNvPr id="16" name="Shape 14"/>
+          <p:cNvSpPr/>
+          <p:nvPr/>
+        </p:nvSpPr>
+        <p:spPr>
+          <a:xfrm>
+            <a:off x="566928" y="5193792"/>
+            <a:ext cx="11057839" cy="621792"/>
+          </a:xfrm>
+          <a:prstGeom prst="roundRect">
+            <a:avLst>
+              <a:gd name="adj" fmla="val 8824"/>
+            </a:avLst>
+          </a:prstGeom>
+          <a:solidFill>
+            <a:srgbClr val="F7FAFC"/>
+          </a:solidFill>
+          <a:ln w="6350">
+            <a:solidFill>
+              <a:srgbClr val="CBD5E0"/>
+            </a:solidFill>
+            <a:prstDash val="solid"/>
+          </a:ln>
+        </p:spPr>
+      </p:sp>
+      <p:sp>
+        <p:nvSpPr>
+          <p:cNvPr id="17" name="Text 15"/>
+          <p:cNvSpPr/>
+          <p:nvPr/>
+        </p:nvSpPr>
+        <p:spPr>
+          <a:xfrm>
+            <a:off x="795528" y="5193792"/>
+            <a:ext cx="10600639" cy="621792"/>
           </a:xfrm>
           <a:prstGeom prst="rect">
             <a:avLst/>
@@ -5650,14 +5677,53 @@
               <a:buNone/>
             </a:pPr>
             <a:r>
-              <a:rPr lang="en-US" sz="800" dirty="0">
-                <a:solidFill>
-                  <a:srgbClr val="718096"/>
+              <a:rPr lang="en-US" sz="1100" dirty="0">
+                <a:solidFill>
+                  <a:srgbClr val="10161F"/>
                 </a:solidFill>
                 <a:latin typeface="Pretendard" pitchFamily="34" charset="0"/>
                 <a:ea typeface="Pretendard" pitchFamily="34" charset="-122"/>
                 <a:cs typeface="Pretendard" pitchFamily="34" charset="-120"/>
               </a:rPr>
+              <a:t>※ 본 리스크 체크는 공부 및 브로커 확인 기반이며, 매수 전 전문 실사팀(변호사/건축사)을 통한 정밀 실사가 필요합니다.</a:t>
+            </a:r>
+            <a:endParaRPr lang="en-US" sz="1100" dirty="0"/>
+          </a:p>
+        </p:txBody>
+      </p:sp>
+      <p:sp>
+        <p:nvSpPr>
+          <p:cNvPr id="18" name="Text 16"/>
+          <p:cNvSpPr/>
+          <p:nvPr/>
+        </p:nvSpPr>
+        <p:spPr>
+          <a:xfrm>
+            <a:off x="566928" y="6382512"/>
+            <a:ext cx="7315200" cy="219456"/>
+          </a:xfrm>
+          <a:prstGeom prst="rect">
+            <a:avLst/>
+          </a:prstGeom>
+          <a:noFill/>
+          <a:ln/>
+        </p:spPr>
+        <p:txBody>
+          <a:bodyPr wrap="square" lIns="0" tIns="0" rIns="0" bIns="0" rtlCol="0" anchor="ctr"/>
+          <a:lstStyle/>
+          <a:p>
+            <a:pPr indent="0" marL="0">
+              <a:buNone/>
+            </a:pPr>
+            <a:r>
+              <a:rPr lang="en-US" sz="800" dirty="0">
+                <a:solidFill>
+                  <a:srgbClr val="718096"/>
+                </a:solidFill>
+                <a:latin typeface="Pretendard" pitchFamily="34" charset="0"/>
+                <a:ea typeface="Pretendard" pitchFamily="34" charset="-122"/>
+                <a:cs typeface="Pretendard" pitchFamily="34" charset="-120"/>
+              </a:rPr>
               <a:t>크리딜   |   </a:t>
             </a:r>
             <a:endParaRPr lang="en-US" sz="800" dirty="0"/>
@@ -5666,7 +5732,7 @@
       </p:sp>
       <p:sp>
         <p:nvSpPr>
-          <p:cNvPr id="17" name="Text 15"/>
+          <p:cNvPr id="19" name="Text 17"/>
           <p:cNvSpPr/>
           <p:nvPr/>
         </p:nvSpPr>
@@ -10931,7 +10997,7 @@
                 <a:gridCol w="3071622"/>
                 <a:gridCol w="3071622"/>
               </a:tblGrid>
-              <a:tr h="457200">
+              <a:tr h="438912">
                 <a:tc>
                   <a:txBody>
                     <a:bodyPr/>
@@ -11205,7 +11271,7 @@
                   </a:tcPr>
                 </a:tc>
               </a:tr>
-              <a:tr h="457200">
+              <a:tr h="438912">
                 <a:tc>
                   <a:txBody>
                     <a:bodyPr/>
@@ -11479,7 +11545,7 @@
                   </a:tcPr>
                 </a:tc>
               </a:tr>
-              <a:tr h="457200">
+              <a:tr h="438912">
                 <a:tc>
                   <a:txBody>
                     <a:bodyPr/>

--- a/docs/test/stress/e2e-outputs/income_pro_pr02.pptx
+++ b/docs/test/stress/e2e-outputs/income_pro_pr02.pptx
@@ -3150,56 +3150,14 @@
       </p:sp>
       <p:sp>
         <p:nvSpPr>
-          <p:cNvPr id="7" name="Shape 5"/>
-          <p:cNvSpPr/>
-          <p:nvPr/>
-        </p:nvSpPr>
-        <p:spPr>
-          <a:xfrm>
-            <a:off x="566928" y="1645920"/>
-            <a:ext cx="11057839" cy="1280160"/>
-          </a:xfrm>
-          <a:prstGeom prst="roundRect">
-            <a:avLst>
-              <a:gd name="adj" fmla="val 4286"/>
-            </a:avLst>
-          </a:prstGeom>
-          <a:solidFill>
-            <a:srgbClr val="BEE3F8"/>
-          </a:solidFill>
-          <a:ln/>
-        </p:spPr>
-      </p:sp>
-      <p:sp>
-        <p:nvSpPr>
-          <p:cNvPr id="8" name="Shape 6"/>
-          <p:cNvSpPr/>
-          <p:nvPr/>
-        </p:nvSpPr>
-        <p:spPr>
-          <a:xfrm>
-            <a:off x="566928" y="1700784"/>
-            <a:ext cx="36576" cy="1170432"/>
-          </a:xfrm>
-          <a:prstGeom prst="rect">
-            <a:avLst/>
-          </a:prstGeom>
-          <a:solidFill>
-            <a:srgbClr val="2B6CB0"/>
-          </a:solidFill>
-          <a:ln/>
-        </p:spPr>
-      </p:sp>
-      <p:sp>
-        <p:nvSpPr>
-          <p:cNvPr id="9" name="Text 7"/>
-          <p:cNvSpPr/>
-          <p:nvPr/>
-        </p:nvSpPr>
-        <p:spPr>
-          <a:xfrm>
-            <a:off x="749808" y="1755648"/>
-            <a:ext cx="10728655" cy="201168"/>
+          <p:cNvPr id="7" name="Text 5"/>
+          <p:cNvSpPr/>
+          <p:nvPr/>
+        </p:nvSpPr>
+        <p:spPr>
+          <a:xfrm>
+            <a:off x="566928" y="6382512"/>
+            <a:ext cx="7315200" cy="219456"/>
           </a:xfrm>
           <a:prstGeom prst="rect">
             <a:avLst/>
@@ -3215,95 +3173,14 @@
               <a:buNone/>
             </a:pPr>
             <a:r>
-              <a:rPr lang="en-US" sz="1050" b="1" dirty="0">
-                <a:solidFill>
-                  <a:srgbClr val="2B6CB0"/>
+              <a:rPr lang="en-US" sz="800" dirty="0">
+                <a:solidFill>
+                  <a:srgbClr val="718096"/>
                 </a:solidFill>
                 <a:latin typeface="Pretendard" pitchFamily="34" charset="0"/>
                 <a:ea typeface="Pretendard" pitchFamily="34" charset="-122"/>
                 <a:cs typeface="Pretendard" pitchFamily="34" charset="-120"/>
               </a:rPr>
-              <a:t>투자 가치 제안</a:t>
-            </a:r>
-            <a:endParaRPr lang="en-US" sz="1050" dirty="0"/>
-          </a:p>
-        </p:txBody>
-      </p:sp>
-      <p:sp>
-        <p:nvSpPr>
-          <p:cNvPr id="10" name="Text 8"/>
-          <p:cNvSpPr/>
-          <p:nvPr/>
-        </p:nvSpPr>
-        <p:spPr>
-          <a:xfrm>
-            <a:off x="749808" y="1975104"/>
-            <a:ext cx="10728655" cy="877824"/>
-          </a:xfrm>
-          <a:prstGeom prst="rect">
-            <a:avLst/>
-          </a:prstGeom>
-          <a:noFill/>
-          <a:ln/>
-        </p:spPr>
-        <p:txBody>
-          <a:bodyPr wrap="square" lIns="0" tIns="0" rIns="0" bIns="0" rtlCol="0" anchor="t"/>
-          <a:lstStyle/>
-          <a:p>
-            <a:pPr indent="0" marL="0">
-              <a:lnSpc>
-                <a:spcPct val="120000"/>
-              </a:lnSpc>
-              <a:buNone/>
-            </a:pPr>
-            <a:r>
-              <a:rPr lang="en-US" sz="930" dirty="0">
-                <a:solidFill>
-                  <a:srgbClr val="10161F"/>
-                </a:solidFill>
-                <a:latin typeface="Pretendard" pitchFamily="34" charset="0"/>
-                <a:ea typeface="Pretendard" pitchFamily="34" charset="-122"/>
-                <a:cs typeface="Pretendard" pitchFamily="34" charset="-120"/>
-              </a:rPr>
-              <a:t>본 자산은 우수한 입지 경쟁력과 견고한 펀더멘털을 바탕으로 안정적인 현금흐름 창출과 중장기 자산 가치 상승을 동시에 실현할 수 있는 우량 투자 기회입니다.</a:t>
-            </a:r>
-            <a:endParaRPr lang="en-US" sz="930" dirty="0"/>
-          </a:p>
-        </p:txBody>
-      </p:sp>
-      <p:sp>
-        <p:nvSpPr>
-          <p:cNvPr id="11" name="Text 9"/>
-          <p:cNvSpPr/>
-          <p:nvPr/>
-        </p:nvSpPr>
-        <p:spPr>
-          <a:xfrm>
-            <a:off x="566928" y="6382512"/>
-            <a:ext cx="7315200" cy="219456"/>
-          </a:xfrm>
-          <a:prstGeom prst="rect">
-            <a:avLst/>
-          </a:prstGeom>
-          <a:noFill/>
-          <a:ln/>
-        </p:spPr>
-        <p:txBody>
-          <a:bodyPr wrap="square" lIns="0" tIns="0" rIns="0" bIns="0" rtlCol="0" anchor="ctr"/>
-          <a:lstStyle/>
-          <a:p>
-            <a:pPr indent="0" marL="0">
-              <a:buNone/>
-            </a:pPr>
-            <a:r>
-              <a:rPr lang="en-US" sz="800" dirty="0">
-                <a:solidFill>
-                  <a:srgbClr val="718096"/>
-                </a:solidFill>
-                <a:latin typeface="Pretendard" pitchFamily="34" charset="0"/>
-                <a:ea typeface="Pretendard" pitchFamily="34" charset="-122"/>
-                <a:cs typeface="Pretendard" pitchFamily="34" charset="-120"/>
-              </a:rPr>
               <a:t>크리딜   |   </a:t>
             </a:r>
             <a:endParaRPr lang="en-US" sz="800" dirty="0"/>
@@ -3312,7 +3189,7 @@
       </p:sp>
       <p:sp>
         <p:nvSpPr>
-          <p:cNvPr id="12" name="Text 10"/>
+          <p:cNvPr id="8" name="Text 6"/>
           <p:cNvSpPr/>
           <p:nvPr/>
         </p:nvSpPr>
@@ -3589,7 +3466,7 @@
         <p:spPr>
           <a:xfrm>
             <a:off x="566928" y="2057400"/>
-            <a:ext cx="5437480" cy="1280160"/>
+            <a:ext cx="11057839" cy="1280160"/>
           </a:xfrm>
           <a:prstGeom prst="roundRect">
             <a:avLst>
@@ -3631,7 +3508,7 @@
         <p:spPr>
           <a:xfrm>
             <a:off x="749808" y="2167128"/>
-            <a:ext cx="5108296" cy="201168"/>
+            <a:ext cx="10728655" cy="201168"/>
           </a:xfrm>
           <a:prstGeom prst="rect">
             <a:avLst/>
@@ -3655,7 +3532,7 @@
                 <a:ea typeface="Pretendard" pitchFamily="34" charset="-122"/>
                 <a:cs typeface="Pretendard" pitchFamily="34" charset="-120"/>
               </a:rPr>
-              <a:t>투자 가치 제안</a:t>
+              <a:t>주의</a:t>
             </a:r>
             <a:endParaRPr lang="en-US" sz="1050" dirty="0"/>
           </a:p>
@@ -3670,7 +3547,7 @@
         <p:spPr>
           <a:xfrm>
             <a:off x="749808" y="2386584"/>
-            <a:ext cx="5108296" cy="877824"/>
+            <a:ext cx="10728655" cy="877824"/>
           </a:xfrm>
           <a:prstGeom prst="rect">
             <a:avLst/>
@@ -3697,7 +3574,7 @@
                 <a:ea typeface="Pretendard" pitchFamily="34" charset="-122"/>
                 <a:cs typeface="Pretendard" pitchFamily="34" charset="-120"/>
               </a:rPr>
-              <a:t>본 자산은 우수한 입지 경쟁력과 견고한 펀더멘털을 바탕으로 안정적인 현금흐름 창출과 중장기 자산 가치 상승을 동시에 실현할 수 있는 우량 투자 기회입니다.</a:t>
+              <a:t>실제 민감도는 Pro IM 상세 정보 입력 후 산출됩니다.</a:t>
             </a:r>
             <a:endParaRPr lang="en-US" sz="930" dirty="0"/>
           </a:p>
@@ -3705,56 +3582,14 @@
       </p:sp>
       <p:sp>
         <p:nvSpPr>
-          <p:cNvPr id="12" name="Shape 10"/>
-          <p:cNvSpPr/>
-          <p:nvPr/>
-        </p:nvSpPr>
-        <p:spPr>
-          <a:xfrm>
-            <a:off x="6187288" y="2057400"/>
-            <a:ext cx="5437480" cy="1280160"/>
-          </a:xfrm>
-          <a:prstGeom prst="roundRect">
-            <a:avLst>
-              <a:gd name="adj" fmla="val 4286"/>
-            </a:avLst>
-          </a:prstGeom>
-          <a:solidFill>
-            <a:srgbClr val="BEE3F8"/>
-          </a:solidFill>
-          <a:ln/>
-        </p:spPr>
-      </p:sp>
-      <p:sp>
-        <p:nvSpPr>
-          <p:cNvPr id="13" name="Shape 11"/>
-          <p:cNvSpPr/>
-          <p:nvPr/>
-        </p:nvSpPr>
-        <p:spPr>
-          <a:xfrm>
-            <a:off x="6187288" y="2112264"/>
-            <a:ext cx="36576" cy="1170432"/>
-          </a:xfrm>
-          <a:prstGeom prst="rect">
-            <a:avLst/>
-          </a:prstGeom>
-          <a:solidFill>
-            <a:srgbClr val="2B6CB0"/>
-          </a:solidFill>
-          <a:ln/>
-        </p:spPr>
-      </p:sp>
-      <p:sp>
-        <p:nvSpPr>
-          <p:cNvPr id="14" name="Text 12"/>
-          <p:cNvSpPr/>
-          <p:nvPr/>
-        </p:nvSpPr>
-        <p:spPr>
-          <a:xfrm>
-            <a:off x="6370168" y="2167128"/>
-            <a:ext cx="5108296" cy="201168"/>
+          <p:cNvPr id="12" name="Text 10"/>
+          <p:cNvSpPr/>
+          <p:nvPr/>
+        </p:nvSpPr>
+        <p:spPr>
+          <a:xfrm>
+            <a:off x="566928" y="6382512"/>
+            <a:ext cx="7315200" cy="219456"/>
           </a:xfrm>
           <a:prstGeom prst="rect">
             <a:avLst/>
@@ -3770,95 +3605,14 @@
               <a:buNone/>
             </a:pPr>
             <a:r>
-              <a:rPr lang="en-US" sz="1050" b="1" dirty="0">
-                <a:solidFill>
-                  <a:srgbClr val="2B6CB0"/>
+              <a:rPr lang="en-US" sz="800" dirty="0">
+                <a:solidFill>
+                  <a:srgbClr val="718096"/>
                 </a:solidFill>
                 <a:latin typeface="Pretendard" pitchFamily="34" charset="0"/>
                 <a:ea typeface="Pretendard" pitchFamily="34" charset="-122"/>
                 <a:cs typeface="Pretendard" pitchFamily="34" charset="-120"/>
               </a:rPr>
-              <a:t>주의</a:t>
-            </a:r>
-            <a:endParaRPr lang="en-US" sz="1050" dirty="0"/>
-          </a:p>
-        </p:txBody>
-      </p:sp>
-      <p:sp>
-        <p:nvSpPr>
-          <p:cNvPr id="15" name="Text 13"/>
-          <p:cNvSpPr/>
-          <p:nvPr/>
-        </p:nvSpPr>
-        <p:spPr>
-          <a:xfrm>
-            <a:off x="6370168" y="2386584"/>
-            <a:ext cx="5108296" cy="877824"/>
-          </a:xfrm>
-          <a:prstGeom prst="rect">
-            <a:avLst/>
-          </a:prstGeom>
-          <a:noFill/>
-          <a:ln/>
-        </p:spPr>
-        <p:txBody>
-          <a:bodyPr wrap="square" lIns="0" tIns="0" rIns="0" bIns="0" rtlCol="0" anchor="t"/>
-          <a:lstStyle/>
-          <a:p>
-            <a:pPr indent="0" marL="0">
-              <a:lnSpc>
-                <a:spcPct val="120000"/>
-              </a:lnSpc>
-              <a:buNone/>
-            </a:pPr>
-            <a:r>
-              <a:rPr lang="en-US" sz="930" dirty="0">
-                <a:solidFill>
-                  <a:srgbClr val="10161F"/>
-                </a:solidFill>
-                <a:latin typeface="Pretendard" pitchFamily="34" charset="0"/>
-                <a:ea typeface="Pretendard" pitchFamily="34" charset="-122"/>
-                <a:cs typeface="Pretendard" pitchFamily="34" charset="-120"/>
-              </a:rPr>
-              <a:t>실제 민감도는 Pro IM 상세 정보 입력 후 산출됩니다.</a:t>
-            </a:r>
-            <a:endParaRPr lang="en-US" sz="930" dirty="0"/>
-          </a:p>
-        </p:txBody>
-      </p:sp>
-      <p:sp>
-        <p:nvSpPr>
-          <p:cNvPr id="16" name="Text 14"/>
-          <p:cNvSpPr/>
-          <p:nvPr/>
-        </p:nvSpPr>
-        <p:spPr>
-          <a:xfrm>
-            <a:off x="566928" y="6382512"/>
-            <a:ext cx="7315200" cy="219456"/>
-          </a:xfrm>
-          <a:prstGeom prst="rect">
-            <a:avLst/>
-          </a:prstGeom>
-          <a:noFill/>
-          <a:ln/>
-        </p:spPr>
-        <p:txBody>
-          <a:bodyPr wrap="square" lIns="0" tIns="0" rIns="0" bIns="0" rtlCol="0" anchor="ctr"/>
-          <a:lstStyle/>
-          <a:p>
-            <a:pPr indent="0" marL="0">
-              <a:buNone/>
-            </a:pPr>
-            <a:r>
-              <a:rPr lang="en-US" sz="800" dirty="0">
-                <a:solidFill>
-                  <a:srgbClr val="718096"/>
-                </a:solidFill>
-                <a:latin typeface="Pretendard" pitchFamily="34" charset="0"/>
-                <a:ea typeface="Pretendard" pitchFamily="34" charset="-122"/>
-                <a:cs typeface="Pretendard" pitchFamily="34" charset="-120"/>
-              </a:rPr>
               <a:t>크리딜   |   </a:t>
             </a:r>
             <a:endParaRPr lang="en-US" sz="800" dirty="0"/>
@@ -3867,7 +3621,7 @@
       </p:sp>
       <p:sp>
         <p:nvSpPr>
-          <p:cNvPr id="17" name="Text 15"/>
+          <p:cNvPr id="13" name="Text 11"/>
           <p:cNvSpPr/>
           <p:nvPr/>
         </p:nvSpPr>
@@ -5974,7 +5728,7 @@
         <p:spPr>
           <a:xfrm>
             <a:off x="786384" y="1792224"/>
-            <a:ext cx="384048" cy="384048"/>
+            <a:ext cx="438912" cy="438912"/>
           </a:xfrm>
           <a:prstGeom prst="ellipse">
             <a:avLst/>
@@ -5994,7 +5748,7 @@
         <p:spPr>
           <a:xfrm>
             <a:off x="786384" y="1792224"/>
-            <a:ext cx="384048" cy="384048"/>
+            <a:ext cx="438912" cy="438912"/>
           </a:xfrm>
           <a:prstGeom prst="rect">
             <a:avLst/>
@@ -6010,7 +5764,7 @@
               <a:buNone/>
             </a:pPr>
             <a:r>
-              <a:rPr lang="en-US" sz="1300" b="1" dirty="0">
+              <a:rPr lang="en-US" sz="1400" b="1" dirty="0">
                 <a:solidFill>
                   <a:srgbClr val="FFFFFF"/>
                 </a:solidFill>
@@ -6018,9 +5772,9 @@
                 <a:ea typeface="Arial" pitchFamily="34" charset="-122"/>
                 <a:cs typeface="Arial" pitchFamily="34" charset="-120"/>
               </a:rPr>
-              <a:t>STEP 1</a:t>
-            </a:r>
-            <a:endParaRPr lang="en-US" sz="1300" dirty="0"/>
+              <a:t>01</a:t>
+            </a:r>
+            <a:endParaRPr lang="en-US" sz="1400" dirty="0"/>
           </a:p>
         </p:txBody>
       </p:sp>
@@ -6057,7 +5811,7 @@
                 <a:ea typeface="Pretendard" pitchFamily="34" charset="-122"/>
                 <a:cs typeface="Pretendard" pitchFamily="34" charset="-120"/>
               </a:rPr>
-              <a:t>현장 실사 및 임대차계약서 원본 확인을 권장합니다.</a:t>
+              <a:t>1단계</a:t>
             </a:r>
             <a:endParaRPr lang="en-US" sz="1600" dirty="0"/>
           </a:p>
@@ -6083,6 +5837,23 @@
         <p:txBody>
           <a:bodyPr wrap="square" rtlCol="0" anchor="t"/>
           <a:lstStyle/>
+          <a:p>
+            <a:pPr indent="0" marL="0">
+              <a:buNone/>
+            </a:pPr>
+            <a:r>
+              <a:rPr lang="en-US" sz="1100" dirty="0">
+                <a:solidFill>
+                  <a:srgbClr val="10161F"/>
+                </a:solidFill>
+                <a:latin typeface="Pretendard" pitchFamily="34" charset="0"/>
+                <a:ea typeface="Pretendard" pitchFamily="34" charset="-122"/>
+                <a:cs typeface="Pretendard" pitchFamily="34" charset="-120"/>
+              </a:rPr>
+              <a:t>현장 실사 및 임대차계약서 원본 확인을 권장합니다.</a:t>
+            </a:r>
+            <a:endParaRPr lang="en-US" sz="1100" dirty="0"/>
+          </a:p>
           <a:p>
             <a:pPr indent="0" marL="0">
               <a:buNone/>
@@ -8507,7 +8278,7 @@
                 <a:ea typeface="Pretendard" pitchFamily="34" charset="-122"/>
                 <a:cs typeface="Pretendard" pitchFamily="34" charset="-120"/>
               </a:rPr>
-              <a:t>원금 안전판: 핵심권역 핵심 입지 및 우량 대지 지분 가치로 하방 경직성 확보</a:t>
+              <a:t>입지 분석: 핵심권역 소재 자산의 입지 특성 및 대지 지분 가치 확인 필요</a:t>
             </a:r>
             <a:endParaRPr lang="en-US" sz="1150" dirty="0"/>
           </a:p>
@@ -8639,7 +8410,7 @@
                 <a:ea typeface="Pretendard" pitchFamily="34" charset="-122"/>
                 <a:cs typeface="Pretendard" pitchFamily="34" charset="-120"/>
               </a:rPr>
-              <a:t>수익 안정성: 매매 시장 적정가 수준 대비 안정적 월 임대수익 창출 기반</a:t>
+              <a:t>수익 구조: 매매 시장 적정가 수준 대비 임대수익 현황 분석 필요</a:t>
             </a:r>
             <a:endParaRPr lang="en-US" sz="1150" dirty="0"/>
           </a:p>
@@ -8771,7 +8542,7 @@
                 <a:ea typeface="Pretendard" pitchFamily="34" charset="-122"/>
                 <a:cs typeface="Pretendard" pitchFamily="34" charset="-120"/>
               </a:rPr>
-              <a:t>미래 가치: 향후 권역 지가 상승 및 공법상 밸류업을 통한 자본이득 실현 가능</a:t>
+              <a:t>향후 검토: 권역 개발 동향 및 공법상 변경 가능성 확인 필요</a:t>
             </a:r>
             <a:endParaRPr lang="en-US" sz="1150" dirty="0"/>
           </a:p>

--- a/docs/test/stress/e2e-outputs/income_pro_pr02.pptx
+++ b/docs/test/stress/e2e-outputs/income_pro_pr02.pptx
@@ -19,12 +19,9 @@
     <p:sldId id="267" r:id="rId13"/>
     <p:sldId id="268" r:id="rId14"/>
     <p:sldId id="269" r:id="rId15"/>
-    <p:sldId id="270" r:id="rId16"/>
-    <p:sldId id="271" r:id="rId17"/>
-    <p:sldId id="272" r:id="rId18"/>
   </p:sldIdLst>
   <p:notesMasterIdLst>
-    <p:notesMasterId r:id="rId19"/>
+    <p:notesMasterId r:id="rId16"/>
   </p:notesMasterIdLst>
   <p:sldSz cx="12192000" cy="6858000"/>
   <p:notesSz cx="6858000" cy="12192000"/>
@@ -982,270 +979,6 @@
             <a:fld id="{F7021451-1387-4CA6-816F-3879F97B5CBC}" type="slidenum">
               <a:rPr lang="en-US"/>
               <a:t>14</a:t>
-            </a:fld>
-            <a:endParaRPr lang="en-US"/>
-          </a:p>
-        </p:txBody>
-      </p:sp>
-    </p:spTree>
-    <p:extLst>
-      <p:ext uri="{BB962C8B-B14F-4D97-AF65-F5344CB8AC3E}">
-        <p14:creationId xmlns:p14="http://schemas.microsoft.com/office/powerpoint/2010/main" val="1024086991"/>
-      </p:ext>
-    </p:extLst>
-  </p:cSld>
-  <p:clrMapOvr>
-    <a:masterClrMapping/>
-  </p:clrMapOvr>
-</p:notes>
-</file>
-
-<file path=ppt/notesSlides/notesSlide15.xml><?xml version="1.0" encoding="utf-8"?>
-<p:notes xmlns:a="http://schemas.openxmlformats.org/drawingml/2006/main" xmlns:r="http://schemas.openxmlformats.org/officeDocument/2006/relationships" xmlns:p="http://schemas.openxmlformats.org/presentationml/2006/main">
-  <p:cSld>
-    <p:spTree>
-      <p:nvGrpSpPr>
-        <p:cNvPr id="1" name=""/>
-        <p:cNvGrpSpPr/>
-        <p:nvPr/>
-      </p:nvGrpSpPr>
-      <p:grpSpPr>
-        <a:xfrm>
-          <a:off x="0" y="0"/>
-          <a:ext cx="0" cy="0"/>
-          <a:chOff x="0" y="0"/>
-          <a:chExt cx="0" cy="0"/>
-        </a:xfrm>
-      </p:grpSpPr>
-      <p:sp>
-        <p:nvSpPr>
-          <p:cNvPr id="2" name="Slide Image Placeholder 1"/>
-          <p:cNvSpPr>
-            <a:spLocks noGrp="1" noRot="1" noChangeAspect="1"/>
-          </p:cNvSpPr>
-          <p:nvPr>
-            <p:ph type="sldImg"/>
-          </p:nvPr>
-        </p:nvSpPr>
-        <p:spPr/>
-      </p:sp>
-      <p:sp>
-        <p:nvSpPr>
-          <p:cNvPr id="3" name="Notes Placeholder 2"/>
-          <p:cNvSpPr>
-            <a:spLocks noGrp="1"/>
-          </p:cNvSpPr>
-          <p:nvPr>
-            <p:ph type="body" idx="1"/>
-          </p:nvPr>
-        </p:nvSpPr>
-        <p:spPr/>
-        <p:txBody>
-          <a:bodyPr/>
-          <a:lstStyle/>
-          <a:p>
-            <a:r>
-              <a:rPr lang="en-US" dirty="0"/>
-              <a:t/>
-            </a:r>
-            <a:endParaRPr lang="en-US" dirty="0"/>
-          </a:p>
-        </p:txBody>
-      </p:sp>
-      <p:sp>
-        <p:nvSpPr>
-          <p:cNvPr id="4" name="Slide Number Placeholder 3"/>
-          <p:cNvSpPr>
-            <a:spLocks noGrp="1"/>
-          </p:cNvSpPr>
-          <p:nvPr>
-            <p:ph type="sldNum" sz="quarter" idx="10"/>
-          </p:nvPr>
-        </p:nvSpPr>
-        <p:spPr/>
-        <p:txBody>
-          <a:bodyPr/>
-          <a:lstStyle/>
-          <a:p>
-            <a:fld id="{F7021451-1387-4CA6-816F-3879F97B5CBC}" type="slidenum">
-              <a:rPr lang="en-US"/>
-              <a:t>15</a:t>
-            </a:fld>
-            <a:endParaRPr lang="en-US"/>
-          </a:p>
-        </p:txBody>
-      </p:sp>
-    </p:spTree>
-    <p:extLst>
-      <p:ext uri="{BB962C8B-B14F-4D97-AF65-F5344CB8AC3E}">
-        <p14:creationId xmlns:p14="http://schemas.microsoft.com/office/powerpoint/2010/main" val="1024086991"/>
-      </p:ext>
-    </p:extLst>
-  </p:cSld>
-  <p:clrMapOvr>
-    <a:masterClrMapping/>
-  </p:clrMapOvr>
-</p:notes>
-</file>
-
-<file path=ppt/notesSlides/notesSlide16.xml><?xml version="1.0" encoding="utf-8"?>
-<p:notes xmlns:a="http://schemas.openxmlformats.org/drawingml/2006/main" xmlns:r="http://schemas.openxmlformats.org/officeDocument/2006/relationships" xmlns:p="http://schemas.openxmlformats.org/presentationml/2006/main">
-  <p:cSld>
-    <p:spTree>
-      <p:nvGrpSpPr>
-        <p:cNvPr id="1" name=""/>
-        <p:cNvGrpSpPr/>
-        <p:nvPr/>
-      </p:nvGrpSpPr>
-      <p:grpSpPr>
-        <a:xfrm>
-          <a:off x="0" y="0"/>
-          <a:ext cx="0" cy="0"/>
-          <a:chOff x="0" y="0"/>
-          <a:chExt cx="0" cy="0"/>
-        </a:xfrm>
-      </p:grpSpPr>
-      <p:sp>
-        <p:nvSpPr>
-          <p:cNvPr id="2" name="Slide Image Placeholder 1"/>
-          <p:cNvSpPr>
-            <a:spLocks noGrp="1" noRot="1" noChangeAspect="1"/>
-          </p:cNvSpPr>
-          <p:nvPr>
-            <p:ph type="sldImg"/>
-          </p:nvPr>
-        </p:nvSpPr>
-        <p:spPr/>
-      </p:sp>
-      <p:sp>
-        <p:nvSpPr>
-          <p:cNvPr id="3" name="Notes Placeholder 2"/>
-          <p:cNvSpPr>
-            <a:spLocks noGrp="1"/>
-          </p:cNvSpPr>
-          <p:nvPr>
-            <p:ph type="body" idx="1"/>
-          </p:nvPr>
-        </p:nvSpPr>
-        <p:spPr/>
-        <p:txBody>
-          <a:bodyPr/>
-          <a:lstStyle/>
-          <a:p>
-            <a:r>
-              <a:rPr lang="en-US" dirty="0"/>
-              <a:t/>
-            </a:r>
-            <a:endParaRPr lang="en-US" dirty="0"/>
-          </a:p>
-        </p:txBody>
-      </p:sp>
-      <p:sp>
-        <p:nvSpPr>
-          <p:cNvPr id="4" name="Slide Number Placeholder 3"/>
-          <p:cNvSpPr>
-            <a:spLocks noGrp="1"/>
-          </p:cNvSpPr>
-          <p:nvPr>
-            <p:ph type="sldNum" sz="quarter" idx="10"/>
-          </p:nvPr>
-        </p:nvSpPr>
-        <p:spPr/>
-        <p:txBody>
-          <a:bodyPr/>
-          <a:lstStyle/>
-          <a:p>
-            <a:fld id="{F7021451-1387-4CA6-816F-3879F97B5CBC}" type="slidenum">
-              <a:rPr lang="en-US"/>
-              <a:t>16</a:t>
-            </a:fld>
-            <a:endParaRPr lang="en-US"/>
-          </a:p>
-        </p:txBody>
-      </p:sp>
-    </p:spTree>
-    <p:extLst>
-      <p:ext uri="{BB962C8B-B14F-4D97-AF65-F5344CB8AC3E}">
-        <p14:creationId xmlns:p14="http://schemas.microsoft.com/office/powerpoint/2010/main" val="1024086991"/>
-      </p:ext>
-    </p:extLst>
-  </p:cSld>
-  <p:clrMapOvr>
-    <a:masterClrMapping/>
-  </p:clrMapOvr>
-</p:notes>
-</file>
-
-<file path=ppt/notesSlides/notesSlide17.xml><?xml version="1.0" encoding="utf-8"?>
-<p:notes xmlns:a="http://schemas.openxmlformats.org/drawingml/2006/main" xmlns:r="http://schemas.openxmlformats.org/officeDocument/2006/relationships" xmlns:p="http://schemas.openxmlformats.org/presentationml/2006/main">
-  <p:cSld>
-    <p:spTree>
-      <p:nvGrpSpPr>
-        <p:cNvPr id="1" name=""/>
-        <p:cNvGrpSpPr/>
-        <p:nvPr/>
-      </p:nvGrpSpPr>
-      <p:grpSpPr>
-        <a:xfrm>
-          <a:off x="0" y="0"/>
-          <a:ext cx="0" cy="0"/>
-          <a:chOff x="0" y="0"/>
-          <a:chExt cx="0" cy="0"/>
-        </a:xfrm>
-      </p:grpSpPr>
-      <p:sp>
-        <p:nvSpPr>
-          <p:cNvPr id="2" name="Slide Image Placeholder 1"/>
-          <p:cNvSpPr>
-            <a:spLocks noGrp="1" noRot="1" noChangeAspect="1"/>
-          </p:cNvSpPr>
-          <p:nvPr>
-            <p:ph type="sldImg"/>
-          </p:nvPr>
-        </p:nvSpPr>
-        <p:spPr/>
-      </p:sp>
-      <p:sp>
-        <p:nvSpPr>
-          <p:cNvPr id="3" name="Notes Placeholder 2"/>
-          <p:cNvSpPr>
-            <a:spLocks noGrp="1"/>
-          </p:cNvSpPr>
-          <p:nvPr>
-            <p:ph type="body" idx="1"/>
-          </p:nvPr>
-        </p:nvSpPr>
-        <p:spPr/>
-        <p:txBody>
-          <a:bodyPr/>
-          <a:lstStyle/>
-          <a:p>
-            <a:r>
-              <a:rPr lang="en-US" dirty="0"/>
-              <a:t/>
-            </a:r>
-            <a:endParaRPr lang="en-US" dirty="0"/>
-          </a:p>
-        </p:txBody>
-      </p:sp>
-      <p:sp>
-        <p:nvSpPr>
-          <p:cNvPr id="4" name="Slide Number Placeholder 3"/>
-          <p:cNvSpPr>
-            <a:spLocks noGrp="1"/>
-          </p:cNvSpPr>
-          <p:nvPr>
-            <p:ph type="sldNum" sz="quarter" idx="10"/>
-          </p:nvPr>
-        </p:nvSpPr>
-        <p:spPr/>
-        <p:txBody>
-          <a:bodyPr/>
-          <a:lstStyle/>
-          <a:p>
-            <a:fld id="{F7021451-1387-4CA6-816F-3879F97B5CBC}" type="slidenum">
-              <a:rPr lang="en-US"/>
-              <a:t>17</a:t>
             </a:fld>
             <a:endParaRPr lang="en-US"/>
           </a:p>
@@ -3350,7 +3083,7 @@
                 <a:ea typeface="Arial" pitchFamily="34" charset="-122"/>
                 <a:cs typeface="Arial" pitchFamily="34" charset="-120"/>
               </a:rPr>
-              <a:t>Sensitivity</a:t>
+              <a:t>Thesis</a:t>
             </a:r>
             <a:endParaRPr lang="en-US" sz="950" dirty="0"/>
           </a:p>
@@ -3389,7 +3122,7 @@
                 <a:ea typeface="Pretendard" pitchFamily="34" charset="-122"/>
                 <a:cs typeface="Pretendard" pitchFamily="34" charset="-120"/>
               </a:rPr>
-              <a:t>수익률 민감도</a:t>
+              <a:t>투자 포인트</a:t>
             </a:r>
             <a:endParaRPr lang="en-US" sz="2300" dirty="0"/>
           </a:p>
@@ -3397,14 +3130,41 @@
       </p:sp>
       <p:sp>
         <p:nvSpPr>
-          <p:cNvPr id="6" name="Text 4"/>
-          <p:cNvSpPr/>
-          <p:nvPr/>
-        </p:nvSpPr>
-        <p:spPr>
-          <a:xfrm>
-            <a:off x="566928" y="1325880"/>
-            <a:ext cx="11057839" cy="237744"/>
+          <p:cNvPr id="6" name="Shape 4"/>
+          <p:cNvSpPr/>
+          <p:nvPr/>
+        </p:nvSpPr>
+        <p:spPr>
+          <a:xfrm>
+            <a:off x="566928" y="4983480"/>
+            <a:ext cx="11057839" cy="804672"/>
+          </a:xfrm>
+          <a:prstGeom prst="roundRect">
+            <a:avLst>
+              <a:gd name="adj" fmla="val 6818"/>
+            </a:avLst>
+          </a:prstGeom>
+          <a:solidFill>
+            <a:srgbClr val="F3EBDA"/>
+          </a:solidFill>
+          <a:ln w="10160">
+            <a:solidFill>
+              <a:srgbClr val="D9B668"/>
+            </a:solidFill>
+            <a:prstDash val="solid"/>
+          </a:ln>
+        </p:spPr>
+      </p:sp>
+      <p:sp>
+        <p:nvSpPr>
+          <p:cNvPr id="7" name="Text 5"/>
+          <p:cNvSpPr/>
+          <p:nvPr/>
+        </p:nvSpPr>
+        <p:spPr>
+          <a:xfrm>
+            <a:off x="749808" y="5093208"/>
+            <a:ext cx="1691640" cy="256032"/>
           </a:xfrm>
           <a:prstGeom prst="rect">
             <a:avLst/>
@@ -3420,95 +3180,30 @@
               <a:buNone/>
             </a:pPr>
             <a:r>
-              <a:rPr lang="en-US" sz="1100" b="1" dirty="0">
-                <a:solidFill>
-                  <a:srgbClr val="10161F"/>
+              <a:rPr lang="en-US" sz="1050" b="1" dirty="0">
+                <a:solidFill>
+                  <a:srgbClr val="977024"/>
                 </a:solidFill>
                 <a:latin typeface="Pretendard" pitchFamily="34" charset="0"/>
                 <a:ea typeface="Pretendard" pitchFamily="34" charset="-122"/>
                 <a:cs typeface="Pretendard" pitchFamily="34" charset="-120"/>
               </a:rPr>
-              <a:t>수익률 민감도 분석</a:t>
-            </a:r>
-            <a:endParaRPr lang="en-US" sz="1100" dirty="0"/>
-          </a:p>
-        </p:txBody>
-      </p:sp>
-      <p:sp>
-        <p:nvSpPr>
-          <p:cNvPr id="7" name="Shape 5"/>
-          <p:cNvSpPr/>
-          <p:nvPr/>
-        </p:nvSpPr>
-        <p:spPr>
-          <a:xfrm>
-            <a:off x="566928" y="1737360"/>
-            <a:ext cx="11057839" cy="0"/>
-          </a:xfrm>
-          <a:prstGeom prst="line">
-            <a:avLst/>
-          </a:prstGeom>
-          <a:noFill/>
-          <a:ln w="19050">
-            <a:solidFill>
-              <a:srgbClr val="B98A2E"/>
-            </a:solidFill>
-            <a:prstDash val="solid"/>
-          </a:ln>
-        </p:spPr>
-      </p:sp>
-      <p:sp>
-        <p:nvSpPr>
-          <p:cNvPr id="8" name="Shape 6"/>
-          <p:cNvSpPr/>
-          <p:nvPr/>
-        </p:nvSpPr>
-        <p:spPr>
-          <a:xfrm>
-            <a:off x="566928" y="2057400"/>
-            <a:ext cx="11057839" cy="1280160"/>
-          </a:xfrm>
-          <a:prstGeom prst="roundRect">
-            <a:avLst>
-              <a:gd name="adj" fmla="val 4286"/>
-            </a:avLst>
-          </a:prstGeom>
-          <a:solidFill>
-            <a:srgbClr val="BEE3F8"/>
-          </a:solidFill>
-          <a:ln/>
-        </p:spPr>
-      </p:sp>
-      <p:sp>
-        <p:nvSpPr>
-          <p:cNvPr id="9" name="Shape 7"/>
-          <p:cNvSpPr/>
-          <p:nvPr/>
-        </p:nvSpPr>
-        <p:spPr>
-          <a:xfrm>
-            <a:off x="566928" y="2112264"/>
-            <a:ext cx="36576" cy="1170432"/>
-          </a:xfrm>
-          <a:prstGeom prst="rect">
-            <a:avLst/>
-          </a:prstGeom>
-          <a:solidFill>
-            <a:srgbClr val="2B6CB0"/>
-          </a:solidFill>
-          <a:ln/>
-        </p:spPr>
-      </p:sp>
-      <p:sp>
-        <p:nvSpPr>
-          <p:cNvPr id="10" name="Text 8"/>
-          <p:cNvSpPr/>
-          <p:nvPr/>
-        </p:nvSpPr>
-        <p:spPr>
-          <a:xfrm>
-            <a:off x="749808" y="2167128"/>
-            <a:ext cx="10728655" cy="201168"/>
+              <a:t>종합 가치 제안</a:t>
+            </a:r>
+            <a:endParaRPr lang="en-US" sz="1050" dirty="0"/>
+          </a:p>
+        </p:txBody>
+      </p:sp>
+      <p:sp>
+        <p:nvSpPr>
+          <p:cNvPr id="8" name="Text 6"/>
+          <p:cNvSpPr/>
+          <p:nvPr/>
+        </p:nvSpPr>
+        <p:spPr>
+          <a:xfrm>
+            <a:off x="2487168" y="5056632"/>
+            <a:ext cx="8954719" cy="658368"/>
           </a:xfrm>
           <a:prstGeom prst="rect">
             <a:avLst/>
@@ -3521,98 +3216,59 @@
           <a:lstStyle/>
           <a:p>
             <a:pPr indent="0" marL="0">
-              <a:buNone/>
-            </a:pPr>
-            <a:r>
-              <a:rPr lang="en-US" sz="1050" b="1" dirty="0">
-                <a:solidFill>
-                  <a:srgbClr val="2B6CB0"/>
+              <a:lnSpc>
+                <a:spcPct val="125000"/>
+              </a:lnSpc>
+              <a:buNone/>
+            </a:pPr>
+            <a:r>
+              <a:rPr lang="en-US" sz="1100" dirty="0">
+                <a:solidFill>
+                  <a:srgbClr val="10161F"/>
                 </a:solidFill>
                 <a:latin typeface="Pretendard" pitchFamily="34" charset="0"/>
                 <a:ea typeface="Pretendard" pitchFamily="34" charset="-122"/>
                 <a:cs typeface="Pretendard" pitchFamily="34" charset="-120"/>
               </a:rPr>
-              <a:t>주의</a:t>
-            </a:r>
-            <a:endParaRPr lang="en-US" sz="1050" dirty="0"/>
-          </a:p>
-        </p:txBody>
-      </p:sp>
-      <p:sp>
-        <p:nvSpPr>
-          <p:cNvPr id="11" name="Text 9"/>
-          <p:cNvSpPr/>
-          <p:nvPr/>
-        </p:nvSpPr>
-        <p:spPr>
-          <a:xfrm>
-            <a:off x="749808" y="2386584"/>
-            <a:ext cx="10728655" cy="877824"/>
-          </a:xfrm>
-          <a:prstGeom prst="rect">
-            <a:avLst/>
-          </a:prstGeom>
-          <a:noFill/>
-          <a:ln/>
-        </p:spPr>
-        <p:txBody>
-          <a:bodyPr wrap="square" lIns="0" tIns="0" rIns="0" bIns="0" rtlCol="0" anchor="t"/>
+              <a:t>관점에서 안정적 월 임대수익과 우량 메디컬 테넌트를 보유한 핵심 투자 자산입니다.</a:t>
+            </a:r>
+            <a:endParaRPr lang="en-US" sz="1100" dirty="0"/>
+          </a:p>
+        </p:txBody>
+      </p:sp>
+      <p:sp>
+        <p:nvSpPr>
+          <p:cNvPr id="9" name="Text 7"/>
+          <p:cNvSpPr/>
+          <p:nvPr/>
+        </p:nvSpPr>
+        <p:spPr>
+          <a:xfrm>
+            <a:off x="566928" y="6382512"/>
+            <a:ext cx="7315200" cy="219456"/>
+          </a:xfrm>
+          <a:prstGeom prst="rect">
+            <a:avLst/>
+          </a:prstGeom>
+          <a:noFill/>
+          <a:ln/>
+        </p:spPr>
+        <p:txBody>
+          <a:bodyPr wrap="square" lIns="0" tIns="0" rIns="0" bIns="0" rtlCol="0" anchor="ctr"/>
           <a:lstStyle/>
           <a:p>
             <a:pPr indent="0" marL="0">
-              <a:lnSpc>
-                <a:spcPct val="120000"/>
-              </a:lnSpc>
-              <a:buNone/>
-            </a:pPr>
-            <a:r>
-              <a:rPr lang="en-US" sz="930" dirty="0">
-                <a:solidFill>
-                  <a:srgbClr val="10161F"/>
+              <a:buNone/>
+            </a:pPr>
+            <a:r>
+              <a:rPr lang="en-US" sz="800" dirty="0">
+                <a:solidFill>
+                  <a:srgbClr val="718096"/>
                 </a:solidFill>
                 <a:latin typeface="Pretendard" pitchFamily="34" charset="0"/>
                 <a:ea typeface="Pretendard" pitchFamily="34" charset="-122"/>
                 <a:cs typeface="Pretendard" pitchFamily="34" charset="-120"/>
               </a:rPr>
-              <a:t>실제 민감도는 Pro IM 상세 정보 입력 후 산출됩니다.</a:t>
-            </a:r>
-            <a:endParaRPr lang="en-US" sz="930" dirty="0"/>
-          </a:p>
-        </p:txBody>
-      </p:sp>
-      <p:sp>
-        <p:nvSpPr>
-          <p:cNvPr id="12" name="Text 10"/>
-          <p:cNvSpPr/>
-          <p:nvPr/>
-        </p:nvSpPr>
-        <p:spPr>
-          <a:xfrm>
-            <a:off x="566928" y="6382512"/>
-            <a:ext cx="7315200" cy="219456"/>
-          </a:xfrm>
-          <a:prstGeom prst="rect">
-            <a:avLst/>
-          </a:prstGeom>
-          <a:noFill/>
-          <a:ln/>
-        </p:spPr>
-        <p:txBody>
-          <a:bodyPr wrap="square" lIns="0" tIns="0" rIns="0" bIns="0" rtlCol="0" anchor="ctr"/>
-          <a:lstStyle/>
-          <a:p>
-            <a:pPr indent="0" marL="0">
-              <a:buNone/>
-            </a:pPr>
-            <a:r>
-              <a:rPr lang="en-US" sz="800" dirty="0">
-                <a:solidFill>
-                  <a:srgbClr val="718096"/>
-                </a:solidFill>
-                <a:latin typeface="Pretendard" pitchFamily="34" charset="0"/>
-                <a:ea typeface="Pretendard" pitchFamily="34" charset="-122"/>
-                <a:cs typeface="Pretendard" pitchFamily="34" charset="-120"/>
-              </a:rPr>
               <a:t>크리딜   |   </a:t>
             </a:r>
             <a:endParaRPr lang="en-US" sz="800" dirty="0"/>
@@ -3621,7 +3277,7 @@
       </p:sp>
       <p:sp>
         <p:nvSpPr>
-          <p:cNvPr id="13" name="Text 11"/>
+          <p:cNvPr id="10" name="Text 8"/>
           <p:cNvSpPr/>
           <p:nvPr/>
         </p:nvSpPr>
@@ -3782,7 +3438,7 @@
                 <a:ea typeface="Arial" pitchFamily="34" charset="-122"/>
                 <a:cs typeface="Arial" pitchFamily="34" charset="-120"/>
               </a:rPr>
-              <a:t>Loan</a:t>
+              <a:t>Risk</a:t>
             </a:r>
             <a:endParaRPr lang="en-US" sz="950" dirty="0"/>
           </a:p>
@@ -3821,7 +3477,7 @@
                 <a:ea typeface="Pretendard" pitchFamily="34" charset="-122"/>
                 <a:cs typeface="Pretendard" pitchFamily="34" charset="-120"/>
               </a:rPr>
-              <a:t>대출 구조</a:t>
+              <a:t>리스크 점검</a:t>
             </a:r>
             <a:endParaRPr lang="en-US" sz="2300" dirty="0"/>
           </a:p>
@@ -3829,14 +3485,61 @@
       </p:sp>
       <p:sp>
         <p:nvSpPr>
-          <p:cNvPr id="6" name="Text 4"/>
-          <p:cNvSpPr/>
-          <p:nvPr/>
-        </p:nvSpPr>
-        <p:spPr>
-          <a:xfrm>
-            <a:off x="566928" y="1463040"/>
-            <a:ext cx="6675120" cy="237744"/>
+          <p:cNvPr id="6" name="Shape 4"/>
+          <p:cNvSpPr/>
+          <p:nvPr/>
+        </p:nvSpPr>
+        <p:spPr>
+          <a:xfrm>
+            <a:off x="566928" y="1417320"/>
+            <a:ext cx="5400904" cy="3657600"/>
+          </a:xfrm>
+          <a:prstGeom prst="roundRect">
+            <a:avLst>
+              <a:gd name="adj" fmla="val 1500"/>
+            </a:avLst>
+          </a:prstGeom>
+          <a:solidFill>
+            <a:srgbClr val="F7FAFC"/>
+          </a:solidFill>
+          <a:ln w="6350">
+            <a:solidFill>
+              <a:srgbClr val="CBD5E0"/>
+            </a:solidFill>
+            <a:prstDash val="solid"/>
+          </a:ln>
+        </p:spPr>
+      </p:sp>
+      <p:sp>
+        <p:nvSpPr>
+          <p:cNvPr id="7" name="Shape 5"/>
+          <p:cNvSpPr/>
+          <p:nvPr/>
+        </p:nvSpPr>
+        <p:spPr>
+          <a:xfrm>
+            <a:off x="566928" y="1417320"/>
+            <a:ext cx="5400904" cy="45720"/>
+          </a:xfrm>
+          <a:prstGeom prst="rect">
+            <a:avLst/>
+          </a:prstGeom>
+          <a:solidFill>
+            <a:srgbClr val="B98A2E"/>
+          </a:solidFill>
+          <a:ln/>
+        </p:spPr>
+      </p:sp>
+      <p:sp>
+        <p:nvSpPr>
+          <p:cNvPr id="8" name="Text 6"/>
+          <p:cNvSpPr/>
+          <p:nvPr/>
+        </p:nvSpPr>
+        <p:spPr>
+          <a:xfrm>
+            <a:off x="795528" y="1618488"/>
+            <a:ext cx="4943704" cy="292608"/>
           </a:xfrm>
           <a:prstGeom prst="rect">
             <a:avLst/>
@@ -3852,373 +3555,377 @@
               <a:buNone/>
             </a:pPr>
             <a:r>
-              <a:rPr lang="en-US" sz="1100" b="1" dirty="0">
-                <a:solidFill>
-                  <a:srgbClr val="10161F"/>
+              <a:rPr lang="en-US" sz="1350" b="1" dirty="0">
+                <a:solidFill>
+                  <a:srgbClr val="977024"/>
                 </a:solidFill>
                 <a:latin typeface="Pretendard" pitchFamily="34" charset="0"/>
                 <a:ea typeface="Pretendard" pitchFamily="34" charset="-122"/>
                 <a:cs typeface="Pretendard" pitchFamily="34" charset="-120"/>
               </a:rPr>
-              <a:t>대출 구조</a:t>
-            </a:r>
-            <a:endParaRPr lang="en-US" sz="1100" dirty="0"/>
-          </a:p>
-        </p:txBody>
-      </p:sp>
-      <p:graphicFrame>
-        <p:nvGraphicFramePr>
-          <p:cNvPr id="13" name="Table 0"/>
-          <p:cNvGraphicFramePr>
-            <a:graphicFrameLocks noGrp="1"/>
-          </p:cNvGraphicFramePr>
-          <p:nvPr>
-            <p:extLst>
-              <p:ext uri="{D42A27DB-BD31-4B8C-83A1-F6EECF244321}">
-                <p14:modId xmlns:p14="http://schemas.microsoft.com/office/powerpoint/2010/main" val="1579011935"/>
-              </p:ext>
-            </p:extLst>
-          </p:nvPr>
-        </p:nvGraphicFramePr>
-        <p:xfrm>
-          <a:off x="566928" y="1737360"/>
-          <a:ext cx="6675120" cy="914400"/>
-        </p:xfrm>
-        <a:graphic>
-          <a:graphicData uri="http://schemas.openxmlformats.org/drawingml/2006/table">
-            <a:tbl>
-              <a:tblPr/>
-              <a:tblGrid>
-                <a:gridCol w="3337560"/>
-                <a:gridCol w="3337560"/>
-              </a:tblGrid>
-              <a:tr h="420624">
-                <a:tc>
-                  <a:txBody>
-                    <a:bodyPr/>
-                    <a:lstStyle/>
-                    <a:p>
-                      <a:pPr indent="0" marL="0">
-                        <a:buNone/>
-                      </a:pPr>
-                      <a:r>
-                        <a:rPr lang="en-US" sz="1300" b="1" dirty="0">
-                          <a:solidFill>
-                            <a:srgbClr val="718096"/>
-                          </a:solidFill>
-                          <a:latin typeface="Pretendard" pitchFamily="34" charset="0"/>
-                          <a:ea typeface="Pretendard" pitchFamily="34" charset="-122"/>
-                          <a:cs typeface="Pretendard" pitchFamily="34" charset="-120"/>
-                        </a:rPr>
-                        <a:t>항목</a:t>
-                      </a:r>
-                      <a:endParaRPr lang="en-US" sz="1300" dirty="0">
-                        <a:latin typeface="Pretendard" charset="0"/>
-                        <a:ea typeface="Pretendard" charset="0"/>
-                        <a:cs typeface="Pretendard" charset="0"/>
-                      </a:endParaRPr>
-                    </a:p>
-                  </a:txBody>
-                  <a:tcPr marL="50800" marR="50800" marT="25400" marB="25400" anchor="ctr">
-                    <a:lnL w="3810" cap="flat" cmpd="sng" algn="ctr">
-                      <a:solidFill>
-                        <a:srgbClr val="CBD5E0"/>
-                      </a:solidFill>
-                      <a:prstDash val="solid"/>
-                      <a:round/>
-                      <a:headEnd type="none" w="med" len="med"/>
-                      <a:tailEnd type="none" w="med" len="med"/>
-                    </a:lnL>
-                    <a:lnR w="3810" cap="flat" cmpd="sng" algn="ctr">
-                      <a:solidFill>
-                        <a:srgbClr val="CBD5E0"/>
-                      </a:solidFill>
-                      <a:prstDash val="solid"/>
-                      <a:round/>
-                      <a:headEnd type="none" w="med" len="med"/>
-                      <a:tailEnd type="none" w="med" len="med"/>
-                    </a:lnR>
-                    <a:lnT w="3810" cap="flat" cmpd="sng" algn="ctr">
-                      <a:solidFill>
-                        <a:srgbClr val="CBD5E0"/>
-                      </a:solidFill>
-                      <a:prstDash val="solid"/>
-                      <a:round/>
-                      <a:headEnd type="none" w="med" len="med"/>
-                      <a:tailEnd type="none" w="med" len="med"/>
-                    </a:lnT>
-                    <a:lnB w="3810" cap="flat" cmpd="sng" algn="ctr">
-                      <a:solidFill>
-                        <a:srgbClr val="CBD5E0"/>
-                      </a:solidFill>
-                      <a:prstDash val="solid"/>
-                      <a:round/>
-                      <a:headEnd type="none" w="med" len="med"/>
-                      <a:tailEnd type="none" w="med" len="med"/>
-                    </a:lnB>
-                    <a:solidFill>
-                      <a:srgbClr val="F7FAFC"/>
-                    </a:solidFill>
-                  </a:tcPr>
-                </a:tc>
-                <a:tc>
-                  <a:txBody>
-                    <a:bodyPr/>
-                    <a:lstStyle/>
-                    <a:p>
-                      <a:pPr indent="0" marL="0">
-                        <a:buNone/>
-                      </a:pPr>
-                      <a:r>
-                        <a:rPr lang="en-US" sz="1300" b="1" dirty="0">
-                          <a:solidFill>
-                            <a:srgbClr val="718096"/>
-                          </a:solidFill>
-                          <a:latin typeface="Pretendard" pitchFamily="34" charset="0"/>
-                          <a:ea typeface="Pretendard" pitchFamily="34" charset="-122"/>
-                          <a:cs typeface="Pretendard" pitchFamily="34" charset="-120"/>
-                        </a:rPr>
-                        <a:t>값</a:t>
-                      </a:r>
-                      <a:endParaRPr lang="en-US" sz="1300" dirty="0">
-                        <a:latin typeface="Pretendard" charset="0"/>
-                        <a:ea typeface="Pretendard" charset="0"/>
-                        <a:cs typeface="Pretendard" charset="0"/>
-                      </a:endParaRPr>
-                    </a:p>
-                  </a:txBody>
-                  <a:tcPr marL="50800" marR="50800" marT="25400" marB="25400" anchor="ctr">
-                    <a:lnL w="3810" cap="flat" cmpd="sng" algn="ctr">
-                      <a:solidFill>
-                        <a:srgbClr val="CBD5E0"/>
-                      </a:solidFill>
-                      <a:prstDash val="solid"/>
-                      <a:round/>
-                      <a:headEnd type="none" w="med" len="med"/>
-                      <a:tailEnd type="none" w="med" len="med"/>
-                    </a:lnL>
-                    <a:lnR w="3810" cap="flat" cmpd="sng" algn="ctr">
-                      <a:solidFill>
-                        <a:srgbClr val="CBD5E0"/>
-                      </a:solidFill>
-                      <a:prstDash val="solid"/>
-                      <a:round/>
-                      <a:headEnd type="none" w="med" len="med"/>
-                      <a:tailEnd type="none" w="med" len="med"/>
-                    </a:lnR>
-                    <a:lnT w="3810" cap="flat" cmpd="sng" algn="ctr">
-                      <a:solidFill>
-                        <a:srgbClr val="CBD5E0"/>
-                      </a:solidFill>
-                      <a:prstDash val="solid"/>
-                      <a:round/>
-                      <a:headEnd type="none" w="med" len="med"/>
-                      <a:tailEnd type="none" w="med" len="med"/>
-                    </a:lnT>
-                    <a:lnB w="3810" cap="flat" cmpd="sng" algn="ctr">
-                      <a:solidFill>
-                        <a:srgbClr val="CBD5E0"/>
-                      </a:solidFill>
-                      <a:prstDash val="solid"/>
-                      <a:round/>
-                      <a:headEnd type="none" w="med" len="med"/>
-                      <a:tailEnd type="none" w="med" len="med"/>
-                    </a:lnB>
-                    <a:solidFill>
-                      <a:srgbClr val="F7FAFC"/>
-                    </a:solidFill>
-                  </a:tcPr>
-                </a:tc>
-              </a:tr>
-              <a:tr h="420624">
-                <a:tc>
-                  <a:txBody>
-                    <a:bodyPr/>
-                    <a:lstStyle/>
-                    <a:p>
-                      <a:pPr indent="0" marL="0">
-                        <a:buNone/>
-                      </a:pPr>
-                      <a:r>
-                        <a:rPr lang="en-US" sz="1300" b="1" dirty="0">
-                          <a:solidFill>
-                            <a:srgbClr val="10161F"/>
-                          </a:solidFill>
-                          <a:latin typeface="Pretendard" pitchFamily="34" charset="0"/>
-                          <a:ea typeface="Pretendard" pitchFamily="34" charset="-122"/>
-                          <a:cs typeface="Pretendard" pitchFamily="34" charset="-120"/>
-                        </a:rPr>
-                        <a:t>데이터 </a:t>
-                      </a:r>
-                      <a:pPr indent="0" marL="0">
-                        <a:buNone/>
-                      </a:pPr>
-                      <a:r>
-                        <a:rPr lang="en-US" sz="1300" b="1" dirty="0">
-                          <a:solidFill>
-                            <a:srgbClr val="10161F"/>
-                          </a:solidFill>
-                          <a:latin typeface="Pretendard" pitchFamily="34" charset="0"/>
-                          <a:ea typeface="Pretendard" pitchFamily="34" charset="-122"/>
-                          <a:cs typeface="Pretendard" pitchFamily="34" charset="-120"/>
-                        </a:rPr>
-                        <a:t>없음</a:t>
-                      </a:r>
-                      <a:endParaRPr lang="en-US" sz="1300" dirty="0">
-                        <a:latin typeface="Pretendard" charset="0"/>
-                        <a:ea typeface="Pretendard" charset="0"/>
-                        <a:cs typeface="Pretendard" charset="0"/>
-                      </a:endParaRPr>
-                    </a:p>
-                  </a:txBody>
-                  <a:tcPr marL="50800" marR="50800" marT="25400" marB="25400" anchor="ctr">
-                    <a:lnL w="3810" cap="flat" cmpd="sng" algn="ctr">
-                      <a:solidFill>
-                        <a:srgbClr val="CBD5E0"/>
-                      </a:solidFill>
-                      <a:prstDash val="solid"/>
-                      <a:round/>
-                      <a:headEnd type="none" w="med" len="med"/>
-                      <a:tailEnd type="none" w="med" len="med"/>
-                    </a:lnL>
-                    <a:lnR w="3810" cap="flat" cmpd="sng" algn="ctr">
-                      <a:solidFill>
-                        <a:srgbClr val="CBD5E0"/>
-                      </a:solidFill>
-                      <a:prstDash val="solid"/>
-                      <a:round/>
-                      <a:headEnd type="none" w="med" len="med"/>
-                      <a:tailEnd type="none" w="med" len="med"/>
-                    </a:lnR>
-                    <a:lnT w="3810" cap="flat" cmpd="sng" algn="ctr">
-                      <a:solidFill>
-                        <a:srgbClr val="CBD5E0"/>
-                      </a:solidFill>
-                      <a:prstDash val="solid"/>
-                      <a:round/>
-                      <a:headEnd type="none" w="med" len="med"/>
-                      <a:tailEnd type="none" w="med" len="med"/>
-                    </a:lnT>
-                    <a:lnB w="3810" cap="flat" cmpd="sng" algn="ctr">
-                      <a:solidFill>
-                        <a:srgbClr val="CBD5E0"/>
-                      </a:solidFill>
-                      <a:prstDash val="solid"/>
-                      <a:round/>
-                      <a:headEnd type="none" w="med" len="med"/>
-                      <a:tailEnd type="none" w="med" len="med"/>
-                    </a:lnB>
-                    <a:solidFill>
-                      <a:srgbClr val="FFFFFF"/>
-                    </a:solidFill>
-                  </a:tcPr>
-                </a:tc>
-                <a:tc>
-                  <a:txBody>
-                    <a:bodyPr/>
-                    <a:lstStyle/>
-                    <a:p>
-                      <a:pPr indent="0" marL="0">
-                        <a:buNone/>
-                      </a:pPr>
-                      <a:r>
-                        <a:rPr lang="en-US" sz="1300" dirty="0">
-                          <a:solidFill>
-                            <a:srgbClr val="10161F"/>
-                          </a:solidFill>
-                          <a:latin typeface="Pretendard" pitchFamily="34" charset="0"/>
-                          <a:ea typeface="Pretendard" pitchFamily="34" charset="-122"/>
-                          <a:cs typeface="Pretendard" pitchFamily="34" charset="-120"/>
-                        </a:rPr>
-                        <a:t>-</a:t>
-                      </a:r>
-                      <a:endParaRPr lang="en-US" sz="1300" dirty="0">
-                        <a:latin typeface="Pretendard" charset="0"/>
-                        <a:ea typeface="Pretendard" charset="0"/>
-                        <a:cs typeface="Pretendard" charset="0"/>
-                      </a:endParaRPr>
-                    </a:p>
-                  </a:txBody>
-                  <a:tcPr marL="50800" marR="50800" marT="25400" marB="25400" anchor="ctr">
-                    <a:lnL w="3810" cap="flat" cmpd="sng" algn="ctr">
-                      <a:solidFill>
-                        <a:srgbClr val="CBD5E0"/>
-                      </a:solidFill>
-                      <a:prstDash val="solid"/>
-                      <a:round/>
-                      <a:headEnd type="none" w="med" len="med"/>
-                      <a:tailEnd type="none" w="med" len="med"/>
-                    </a:lnL>
-                    <a:lnR w="3810" cap="flat" cmpd="sng" algn="ctr">
-                      <a:solidFill>
-                        <a:srgbClr val="CBD5E0"/>
-                      </a:solidFill>
-                      <a:prstDash val="solid"/>
-                      <a:round/>
-                      <a:headEnd type="none" w="med" len="med"/>
-                      <a:tailEnd type="none" w="med" len="med"/>
-                    </a:lnR>
-                    <a:lnT w="3810" cap="flat" cmpd="sng" algn="ctr">
-                      <a:solidFill>
-                        <a:srgbClr val="CBD5E0"/>
-                      </a:solidFill>
-                      <a:prstDash val="solid"/>
-                      <a:round/>
-                      <a:headEnd type="none" w="med" len="med"/>
-                      <a:tailEnd type="none" w="med" len="med"/>
-                    </a:lnT>
-                    <a:lnB w="3810" cap="flat" cmpd="sng" algn="ctr">
-                      <a:solidFill>
-                        <a:srgbClr val="CBD5E0"/>
-                      </a:solidFill>
-                      <a:prstDash val="solid"/>
-                      <a:round/>
-                      <a:headEnd type="none" w="med" len="med"/>
-                      <a:tailEnd type="none" w="med" len="med"/>
-                    </a:lnB>
-                    <a:solidFill>
-                      <a:srgbClr val="FFFFFF"/>
-                    </a:solidFill>
-                  </a:tcPr>
-                </a:tc>
-              </a:tr>
-            </a:tbl>
-          </a:graphicData>
-        </a:graphic>
-      </p:graphicFrame>
-      <p:sp>
-        <p:nvSpPr>
-          <p:cNvPr id="8" name="Text 5"/>
-          <p:cNvSpPr/>
-          <p:nvPr/>
-        </p:nvSpPr>
-        <p:spPr>
-          <a:xfrm>
-            <a:off x="566928" y="6382512"/>
-            <a:ext cx="7315200" cy="219456"/>
-          </a:xfrm>
-          <a:prstGeom prst="rect">
-            <a:avLst/>
-          </a:prstGeom>
-          <a:noFill/>
-          <a:ln/>
-        </p:spPr>
-        <p:txBody>
-          <a:bodyPr wrap="square" lIns="0" tIns="0" rIns="0" bIns="0" rtlCol="0" anchor="ctr"/>
+              <a:t>메디컬 단일업종 집중</a:t>
+            </a:r>
+            <a:endParaRPr lang="en-US" sz="1350" dirty="0"/>
+          </a:p>
+        </p:txBody>
+      </p:sp>
+      <p:sp>
+        <p:nvSpPr>
+          <p:cNvPr id="9" name="Text 7"/>
+          <p:cNvSpPr/>
+          <p:nvPr/>
+        </p:nvSpPr>
+        <p:spPr>
+          <a:xfrm>
+            <a:off x="795528" y="1947672"/>
+            <a:ext cx="4943704" cy="365760"/>
+          </a:xfrm>
+          <a:prstGeom prst="rect">
+            <a:avLst/>
+          </a:prstGeom>
+          <a:noFill/>
+          <a:ln/>
+        </p:spPr>
+        <p:txBody>
+          <a:bodyPr wrap="square" lIns="0" tIns="0" rIns="0" bIns="0" rtlCol="0" anchor="ctr">
+            <a:normAutofit/>
+          </a:bodyPr>
           <a:lstStyle/>
           <a:p>
             <a:pPr indent="0" marL="0">
               <a:buNone/>
             </a:pPr>
             <a:r>
-              <a:rPr lang="en-US" sz="800" dirty="0">
-                <a:solidFill>
-                  <a:srgbClr val="718096"/>
+              <a:rPr lang="en-US" sz="1250" b="1" dirty="0">
+                <a:solidFill>
+                  <a:srgbClr val="10161F"/>
                 </a:solidFill>
                 <a:latin typeface="Pretendard" pitchFamily="34" charset="0"/>
                 <a:ea typeface="Pretendard" pitchFamily="34" charset="-122"/>
                 <a:cs typeface="Pretendard" pitchFamily="34" charset="-120"/>
               </a:rPr>
+              <a:t>전층 의료</a:t>
+            </a:r>
+            <a:endParaRPr lang="en-US" sz="1250" dirty="0"/>
+          </a:p>
+        </p:txBody>
+      </p:sp>
+      <p:sp>
+        <p:nvSpPr>
+          <p:cNvPr id="10" name="Text 8"/>
+          <p:cNvSpPr/>
+          <p:nvPr/>
+        </p:nvSpPr>
+        <p:spPr>
+          <a:xfrm>
+            <a:off x="795528" y="2377440"/>
+            <a:ext cx="4943704" cy="2606040"/>
+          </a:xfrm>
+          <a:prstGeom prst="rect">
+            <a:avLst/>
+          </a:prstGeom>
+          <a:noFill/>
+          <a:ln/>
+        </p:spPr>
+        <p:txBody>
+          <a:bodyPr wrap="square" lIns="0" tIns="0" rIns="0" bIns="0" rtlCol="0" anchor="t">
+            <a:normAutofit/>
+          </a:bodyPr>
+          <a:lstStyle/>
+          <a:p>
+            <a:pPr marL="342900" indent="-342900">
+              <a:lnSpc>
+                <a:spcPct val="125000"/>
+              </a:lnSpc>
+              <a:buSzPct val="100000"/>
+              <a:buChar char="•"/>
+            </a:pPr>
+            <a:r>
+              <a:rPr lang="en-US" sz="1100" dirty="0">
+                <a:solidFill>
+                  <a:srgbClr val="10161F"/>
+                </a:solidFill>
+                <a:latin typeface="Pretendard" pitchFamily="34" charset="0"/>
+                <a:ea typeface="Pretendard" pitchFamily="34" charset="-122"/>
+                <a:cs typeface="Pretendard" pitchFamily="34" charset="-120"/>
+              </a:rPr>
+              <a:t>업종 다각화 검토</a:t>
+            </a:r>
+            <a:endParaRPr lang="en-US" sz="1100" dirty="0"/>
+          </a:p>
+        </p:txBody>
+      </p:sp>
+      <p:sp>
+        <p:nvSpPr>
+          <p:cNvPr id="11" name="Shape 9"/>
+          <p:cNvSpPr/>
+          <p:nvPr/>
+        </p:nvSpPr>
+        <p:spPr>
+          <a:xfrm>
+            <a:off x="6223864" y="1417320"/>
+            <a:ext cx="5400904" cy="3657600"/>
+          </a:xfrm>
+          <a:prstGeom prst="roundRect">
+            <a:avLst>
+              <a:gd name="adj" fmla="val 1500"/>
+            </a:avLst>
+          </a:prstGeom>
+          <a:solidFill>
+            <a:srgbClr val="F7FAFC"/>
+          </a:solidFill>
+          <a:ln w="6350">
+            <a:solidFill>
+              <a:srgbClr val="CBD5E0"/>
+            </a:solidFill>
+            <a:prstDash val="solid"/>
+          </a:ln>
+        </p:spPr>
+      </p:sp>
+      <p:sp>
+        <p:nvSpPr>
+          <p:cNvPr id="12" name="Shape 10"/>
+          <p:cNvSpPr/>
+          <p:nvPr/>
+        </p:nvSpPr>
+        <p:spPr>
+          <a:xfrm>
+            <a:off x="6223864" y="1417320"/>
+            <a:ext cx="5400904" cy="45720"/>
+          </a:xfrm>
+          <a:prstGeom prst="rect">
+            <a:avLst/>
+          </a:prstGeom>
+          <a:solidFill>
+            <a:srgbClr val="B98A2E"/>
+          </a:solidFill>
+          <a:ln/>
+        </p:spPr>
+      </p:sp>
+      <p:sp>
+        <p:nvSpPr>
+          <p:cNvPr id="13" name="Text 11"/>
+          <p:cNvSpPr/>
+          <p:nvPr/>
+        </p:nvSpPr>
+        <p:spPr>
+          <a:xfrm>
+            <a:off x="6452464" y="1618488"/>
+            <a:ext cx="4943704" cy="292608"/>
+          </a:xfrm>
+          <a:prstGeom prst="rect">
+            <a:avLst/>
+          </a:prstGeom>
+          <a:noFill/>
+          <a:ln/>
+        </p:spPr>
+        <p:txBody>
+          <a:bodyPr wrap="square" lIns="0" tIns="0" rIns="0" bIns="0" rtlCol="0" anchor="ctr"/>
+          <a:lstStyle/>
+          <a:p>
+            <a:pPr indent="0" marL="0">
+              <a:buNone/>
+            </a:pPr>
+            <a:r>
+              <a:rPr lang="en-US" sz="1350" b="1" dirty="0">
+                <a:solidFill>
+                  <a:srgbClr val="977024"/>
+                </a:solidFill>
+                <a:latin typeface="Pretendard" pitchFamily="34" charset="0"/>
+                <a:ea typeface="Pretendard" pitchFamily="34" charset="-122"/>
+                <a:cs typeface="Pretendard" pitchFamily="34" charset="-120"/>
+              </a:rPr>
+              <a:t>금리 변동</a:t>
+            </a:r>
+            <a:endParaRPr lang="en-US" sz="1350" dirty="0"/>
+          </a:p>
+        </p:txBody>
+      </p:sp>
+      <p:sp>
+        <p:nvSpPr>
+          <p:cNvPr id="14" name="Text 12"/>
+          <p:cNvSpPr/>
+          <p:nvPr/>
+        </p:nvSpPr>
+        <p:spPr>
+          <a:xfrm>
+            <a:off x="6452464" y="1947672"/>
+            <a:ext cx="4943704" cy="365760"/>
+          </a:xfrm>
+          <a:prstGeom prst="rect">
+            <a:avLst/>
+          </a:prstGeom>
+          <a:noFill/>
+          <a:ln/>
+        </p:spPr>
+        <p:txBody>
+          <a:bodyPr wrap="square" lIns="0" tIns="0" rIns="0" bIns="0" rtlCol="0" anchor="ctr">
+            <a:normAutofit/>
+          </a:bodyPr>
+          <a:lstStyle/>
+          <a:p>
+            <a:pPr indent="0" marL="0">
+              <a:buNone/>
+            </a:pPr>
+            <a:r>
+              <a:rPr lang="en-US" sz="1250" b="1" dirty="0">
+                <a:solidFill>
+                  <a:srgbClr val="10161F"/>
+                </a:solidFill>
+                <a:latin typeface="Pretendard" pitchFamily="34" charset="0"/>
+                <a:ea typeface="Pretendard" pitchFamily="34" charset="-122"/>
+                <a:cs typeface="Pretendard" pitchFamily="34" charset="-120"/>
+              </a:rPr>
+              <a:t>4.1% 고정</a:t>
+            </a:r>
+            <a:endParaRPr lang="en-US" sz="1250" dirty="0"/>
+          </a:p>
+        </p:txBody>
+      </p:sp>
+      <p:sp>
+        <p:nvSpPr>
+          <p:cNvPr id="15" name="Text 13"/>
+          <p:cNvSpPr/>
+          <p:nvPr/>
+        </p:nvSpPr>
+        <p:spPr>
+          <a:xfrm>
+            <a:off x="6452464" y="2377440"/>
+            <a:ext cx="4943704" cy="2606040"/>
+          </a:xfrm>
+          <a:prstGeom prst="rect">
+            <a:avLst/>
+          </a:prstGeom>
+          <a:noFill/>
+          <a:ln/>
+        </p:spPr>
+        <p:txBody>
+          <a:bodyPr wrap="square" lIns="0" tIns="0" rIns="0" bIns="0" rtlCol="0" anchor="t">
+            <a:normAutofit/>
+          </a:bodyPr>
+          <a:lstStyle/>
+          <a:p>
+            <a:pPr marL="342900" indent="-342900">
+              <a:lnSpc>
+                <a:spcPct val="125000"/>
+              </a:lnSpc>
+              <a:buSzPct val="100000"/>
+              <a:buChar char="•"/>
+            </a:pPr>
+            <a:r>
+              <a:rPr lang="en-US" sz="1100" dirty="0">
+                <a:solidFill>
+                  <a:srgbClr val="10161F"/>
+                </a:solidFill>
+                <a:latin typeface="Pretendard" pitchFamily="34" charset="0"/>
+                <a:ea typeface="Pretendard" pitchFamily="34" charset="-122"/>
+                <a:cs typeface="Pretendard" pitchFamily="34" charset="-120"/>
+              </a:rPr>
+              <a:t>승계 대출 활용</a:t>
+            </a:r>
+            <a:endParaRPr lang="en-US" sz="1100" dirty="0"/>
+          </a:p>
+        </p:txBody>
+      </p:sp>
+      <p:sp>
+        <p:nvSpPr>
+          <p:cNvPr id="16" name="Shape 14"/>
+          <p:cNvSpPr/>
+          <p:nvPr/>
+        </p:nvSpPr>
+        <p:spPr>
+          <a:xfrm>
+            <a:off x="566928" y="5193792"/>
+            <a:ext cx="11057839" cy="621792"/>
+          </a:xfrm>
+          <a:prstGeom prst="roundRect">
+            <a:avLst>
+              <a:gd name="adj" fmla="val 8824"/>
+            </a:avLst>
+          </a:prstGeom>
+          <a:solidFill>
+            <a:srgbClr val="F7FAFC"/>
+          </a:solidFill>
+          <a:ln w="6350">
+            <a:solidFill>
+              <a:srgbClr val="CBD5E0"/>
+            </a:solidFill>
+            <a:prstDash val="solid"/>
+          </a:ln>
+        </p:spPr>
+      </p:sp>
+      <p:sp>
+        <p:nvSpPr>
+          <p:cNvPr id="17" name="Text 15"/>
+          <p:cNvSpPr/>
+          <p:nvPr/>
+        </p:nvSpPr>
+        <p:spPr>
+          <a:xfrm>
+            <a:off x="795528" y="5193792"/>
+            <a:ext cx="10600639" cy="621792"/>
+          </a:xfrm>
+          <a:prstGeom prst="rect">
+            <a:avLst/>
+          </a:prstGeom>
+          <a:noFill/>
+          <a:ln/>
+        </p:spPr>
+        <p:txBody>
+          <a:bodyPr wrap="square" lIns="0" tIns="0" rIns="0" bIns="0" rtlCol="0" anchor="ctr"/>
+          <a:lstStyle/>
+          <a:p>
+            <a:pPr indent="0" marL="0">
+              <a:buNone/>
+            </a:pPr>
+            <a:r>
+              <a:rPr lang="en-US" sz="1100" dirty="0">
+                <a:solidFill>
+                  <a:srgbClr val="10161F"/>
+                </a:solidFill>
+                <a:latin typeface="Pretendard" pitchFamily="34" charset="0"/>
+                <a:ea typeface="Pretendard" pitchFamily="34" charset="-122"/>
+                <a:cs typeface="Pretendard" pitchFamily="34" charset="-120"/>
+              </a:rPr>
+              <a:t>※ 본 리스크 체크는 공부 및 브로커 확인 기반이며, 매수 전 전문 실사팀(변호사/건축사)을 통한 정밀 실사가 필요합니다.</a:t>
+            </a:r>
+            <a:endParaRPr lang="en-US" sz="1100" dirty="0"/>
+          </a:p>
+        </p:txBody>
+      </p:sp>
+      <p:sp>
+        <p:nvSpPr>
+          <p:cNvPr id="18" name="Text 16"/>
+          <p:cNvSpPr/>
+          <p:nvPr/>
+        </p:nvSpPr>
+        <p:spPr>
+          <a:xfrm>
+            <a:off x="566928" y="6382512"/>
+            <a:ext cx="7315200" cy="219456"/>
+          </a:xfrm>
+          <a:prstGeom prst="rect">
+            <a:avLst/>
+          </a:prstGeom>
+          <a:noFill/>
+          <a:ln/>
+        </p:spPr>
+        <p:txBody>
+          <a:bodyPr wrap="square" lIns="0" tIns="0" rIns="0" bIns="0" rtlCol="0" anchor="ctr"/>
+          <a:lstStyle/>
+          <a:p>
+            <a:pPr indent="0" marL="0">
+              <a:buNone/>
+            </a:pPr>
+            <a:r>
+              <a:rPr lang="en-US" sz="800" dirty="0">
+                <a:solidFill>
+                  <a:srgbClr val="718096"/>
+                </a:solidFill>
+                <a:latin typeface="Pretendard" pitchFamily="34" charset="0"/>
+                <a:ea typeface="Pretendard" pitchFamily="34" charset="-122"/>
+                <a:cs typeface="Pretendard" pitchFamily="34" charset="-120"/>
+              </a:rPr>
               <a:t>크리딜   |   </a:t>
             </a:r>
             <a:endParaRPr lang="en-US" sz="800" dirty="0"/>
@@ -4227,7 +3934,7 @@
       </p:sp>
       <p:sp>
         <p:nvSpPr>
-          <p:cNvPr id="9" name="Text 6"/>
+          <p:cNvPr id="19" name="Text 17"/>
           <p:cNvSpPr/>
           <p:nvPr/>
         </p:nvSpPr>
@@ -4388,7 +4095,7 @@
                 <a:ea typeface="Arial" pitchFamily="34" charset="-122"/>
                 <a:cs typeface="Arial" pitchFamily="34" charset="-120"/>
               </a:rPr>
-              <a:t>Tax</a:t>
+              <a:t>Process</a:t>
             </a:r>
             <a:endParaRPr lang="en-US" sz="950" dirty="0"/>
           </a:p>
@@ -4427,7 +4134,7 @@
                 <a:ea typeface="Pretendard" pitchFamily="34" charset="-122"/>
                 <a:cs typeface="Pretendard" pitchFamily="34" charset="-120"/>
               </a:rPr>
-              <a:t>세금 추정</a:t>
+              <a:t>다음 단계</a:t>
             </a:r>
             <a:endParaRPr lang="en-US" sz="2300" dirty="0"/>
           </a:p>
@@ -4435,37 +4142,218 @@
       </p:sp>
       <p:sp>
         <p:nvSpPr>
-          <p:cNvPr id="6" name="Text 4"/>
-          <p:cNvSpPr/>
-          <p:nvPr/>
-        </p:nvSpPr>
-        <p:spPr>
-          <a:xfrm>
-            <a:off x="566928" y="6382512"/>
-            <a:ext cx="7315200" cy="219456"/>
-          </a:xfrm>
-          <a:prstGeom prst="rect">
-            <a:avLst/>
-          </a:prstGeom>
-          <a:noFill/>
-          <a:ln/>
-        </p:spPr>
-        <p:txBody>
-          <a:bodyPr wrap="square" lIns="0" tIns="0" rIns="0" bIns="0" rtlCol="0" anchor="ctr"/>
+          <p:cNvPr id="6" name="Shape 4"/>
+          <p:cNvSpPr/>
+          <p:nvPr/>
+        </p:nvSpPr>
+        <p:spPr>
+          <a:xfrm>
+            <a:off x="566928" y="1572768"/>
+            <a:ext cx="11057839" cy="3200400"/>
+          </a:xfrm>
+          <a:prstGeom prst="roundRect">
+            <a:avLst>
+              <a:gd name="adj" fmla="val 1714"/>
+            </a:avLst>
+          </a:prstGeom>
+          <a:solidFill>
+            <a:srgbClr val="F7FAFC"/>
+          </a:solidFill>
+          <a:ln w="6350">
+            <a:solidFill>
+              <a:srgbClr val="CBD5E0"/>
+            </a:solidFill>
+            <a:prstDash val="solid"/>
+          </a:ln>
+        </p:spPr>
+      </p:sp>
+      <p:sp>
+        <p:nvSpPr>
+          <p:cNvPr id="7" name="Shape 5"/>
+          <p:cNvSpPr/>
+          <p:nvPr/>
+        </p:nvSpPr>
+        <p:spPr>
+          <a:xfrm>
+            <a:off x="786384" y="1792224"/>
+            <a:ext cx="438912" cy="438912"/>
+          </a:xfrm>
+          <a:prstGeom prst="ellipse">
+            <a:avLst/>
+          </a:prstGeom>
+          <a:solidFill>
+            <a:srgbClr val="B98A2E"/>
+          </a:solidFill>
+          <a:ln/>
+        </p:spPr>
+      </p:sp>
+      <p:sp>
+        <p:nvSpPr>
+          <p:cNvPr id="8" name="Text 6"/>
+          <p:cNvSpPr/>
+          <p:nvPr/>
+        </p:nvSpPr>
+        <p:spPr>
+          <a:xfrm>
+            <a:off x="786384" y="1792224"/>
+            <a:ext cx="438912" cy="438912"/>
+          </a:xfrm>
+          <a:prstGeom prst="rect">
+            <a:avLst/>
+          </a:prstGeom>
+          <a:noFill/>
+          <a:ln/>
+        </p:spPr>
+        <p:txBody>
+          <a:bodyPr wrap="square" lIns="0" tIns="0" rIns="0" bIns="0" rtlCol="0" anchor="ctr"/>
+          <a:lstStyle/>
+          <a:p>
+            <a:pPr algn="ctr" indent="0" marL="0">
+              <a:buNone/>
+            </a:pPr>
+            <a:r>
+              <a:rPr lang="en-US" sz="1400" b="1" dirty="0">
+                <a:solidFill>
+                  <a:srgbClr val="FFFFFF"/>
+                </a:solidFill>
+                <a:latin typeface="Arial" pitchFamily="34" charset="0"/>
+                <a:ea typeface="Arial" pitchFamily="34" charset="-122"/>
+                <a:cs typeface="Arial" pitchFamily="34" charset="-120"/>
+              </a:rPr>
+              <a:t>01</a:t>
+            </a:r>
+            <a:endParaRPr lang="en-US" sz="1400" dirty="0"/>
+          </a:p>
+        </p:txBody>
+      </p:sp>
+      <p:sp>
+        <p:nvSpPr>
+          <p:cNvPr id="9" name="Text 7"/>
+          <p:cNvSpPr/>
+          <p:nvPr/>
+        </p:nvSpPr>
+        <p:spPr>
+          <a:xfrm>
+            <a:off x="786384" y="2304288"/>
+            <a:ext cx="10618927" cy="365760"/>
+          </a:xfrm>
+          <a:prstGeom prst="rect">
+            <a:avLst/>
+          </a:prstGeom>
+          <a:noFill/>
+          <a:ln/>
+        </p:spPr>
+        <p:txBody>
+          <a:bodyPr wrap="square" rtlCol="0" anchor="ctr"/>
           <a:lstStyle/>
           <a:p>
             <a:pPr indent="0" marL="0">
               <a:buNone/>
             </a:pPr>
             <a:r>
-              <a:rPr lang="en-US" sz="800" dirty="0">
-                <a:solidFill>
-                  <a:srgbClr val="718096"/>
+              <a:rPr lang="en-US" sz="1600" b="1" dirty="0">
+                <a:solidFill>
+                  <a:srgbClr val="10161F"/>
                 </a:solidFill>
                 <a:latin typeface="Pretendard" pitchFamily="34" charset="0"/>
                 <a:ea typeface="Pretendard" pitchFamily="34" charset="-122"/>
                 <a:cs typeface="Pretendard" pitchFamily="34" charset="-120"/>
               </a:rPr>
+              <a:t>1단계</a:t>
+            </a:r>
+            <a:endParaRPr lang="en-US" sz="1600" dirty="0"/>
+          </a:p>
+        </p:txBody>
+      </p:sp>
+      <p:sp>
+        <p:nvSpPr>
+          <p:cNvPr id="10" name="Text 8"/>
+          <p:cNvSpPr/>
+          <p:nvPr/>
+        </p:nvSpPr>
+        <p:spPr>
+          <a:xfrm>
+            <a:off x="786384" y="2761488"/>
+            <a:ext cx="10618927" cy="1828800"/>
+          </a:xfrm>
+          <a:prstGeom prst="rect">
+            <a:avLst/>
+          </a:prstGeom>
+          <a:noFill/>
+          <a:ln/>
+        </p:spPr>
+        <p:txBody>
+          <a:bodyPr wrap="square" rtlCol="0" anchor="t"/>
+          <a:lstStyle/>
+          <a:p>
+            <a:pPr indent="0" marL="0">
+              <a:buNone/>
+            </a:pPr>
+            <a:r>
+              <a:rPr lang="en-US" sz="1100" dirty="0">
+                <a:solidFill>
+                  <a:srgbClr val="10161F"/>
+                </a:solidFill>
+                <a:latin typeface="Pretendard" pitchFamily="34" charset="0"/>
+                <a:ea typeface="Pretendard" pitchFamily="34" charset="-122"/>
+                <a:cs typeface="Pretendard" pitchFamily="34" charset="-120"/>
+              </a:rPr>
+              <a:t>현장 실사 및 임대차계약서 원본 확인을 권장합니다.</a:t>
+            </a:r>
+            <a:endParaRPr lang="en-US" sz="1100" dirty="0"/>
+          </a:p>
+          <a:p>
+            <a:pPr indent="0" marL="0">
+              <a:buNone/>
+            </a:pPr>
+            <a:r>
+              <a:rPr lang="en-US" sz="1100" dirty="0">
+                <a:solidFill>
+                  <a:srgbClr val="10161F"/>
+                </a:solidFill>
+                <a:latin typeface="Pretendard" pitchFamily="34" charset="0"/>
+                <a:ea typeface="Pretendard" pitchFamily="34" charset="-122"/>
+                <a:cs typeface="Pretendard" pitchFamily="34" charset="-120"/>
+              </a:rPr>
+              <a:t>현장 실사 및 임대차계약서 원본 확인을 권장합니다.</a:t>
+            </a:r>
+            <a:endParaRPr lang="en-US" sz="1100" dirty="0"/>
+          </a:p>
+        </p:txBody>
+      </p:sp>
+      <p:sp>
+        <p:nvSpPr>
+          <p:cNvPr id="11" name="Text 9"/>
+          <p:cNvSpPr/>
+          <p:nvPr/>
+        </p:nvSpPr>
+        <p:spPr>
+          <a:xfrm>
+            <a:off x="566928" y="6382512"/>
+            <a:ext cx="7315200" cy="219456"/>
+          </a:xfrm>
+          <a:prstGeom prst="rect">
+            <a:avLst/>
+          </a:prstGeom>
+          <a:noFill/>
+          <a:ln/>
+        </p:spPr>
+        <p:txBody>
+          <a:bodyPr wrap="square" lIns="0" tIns="0" rIns="0" bIns="0" rtlCol="0" anchor="ctr"/>
+          <a:lstStyle/>
+          <a:p>
+            <a:pPr indent="0" marL="0">
+              <a:buNone/>
+            </a:pPr>
+            <a:r>
+              <a:rPr lang="en-US" sz="800" dirty="0">
+                <a:solidFill>
+                  <a:srgbClr val="718096"/>
+                </a:solidFill>
+                <a:latin typeface="Pretendard" pitchFamily="34" charset="0"/>
+                <a:ea typeface="Pretendard" pitchFamily="34" charset="-122"/>
+                <a:cs typeface="Pretendard" pitchFamily="34" charset="-120"/>
+              </a:rPr>
               <a:t>크리딜   |   </a:t>
             </a:r>
             <a:endParaRPr lang="en-US" sz="800" dirty="0"/>
@@ -4474,7 +4362,7 @@
       </p:sp>
       <p:sp>
         <p:nvSpPr>
-          <p:cNvPr id="7" name="Text 5"/>
+          <p:cNvPr id="12" name="Text 10"/>
           <p:cNvSpPr/>
           <p:nvPr/>
         </p:nvSpPr>
@@ -4522,1446 +4410,6 @@
 <file path=ppt/slides/slide14.xml><?xml version="1.0" encoding="utf-8"?>
 <p:sld xmlns:a="http://schemas.openxmlformats.org/drawingml/2006/main" xmlns:r="http://schemas.openxmlformats.org/officeDocument/2006/relationships" xmlns:p="http://schemas.openxmlformats.org/presentationml/2006/main">
   <p:cSld name="Slide 14">
-    <p:bg>
-      <p:bgPr>
-        <a:solidFill>
-          <a:srgbClr val="FFFFFF"/>
-        </a:solidFill>
-      </p:bgPr>
-    </p:bg>
-    <p:spTree>
-      <p:nvGrpSpPr>
-        <p:cNvPr id="1" name=""/>
-        <p:cNvGrpSpPr/>
-        <p:nvPr/>
-      </p:nvGrpSpPr>
-      <p:grpSpPr>
-        <a:xfrm>
-          <a:off x="0" y="0"/>
-          <a:ext cx="0" cy="0"/>
-          <a:chOff x="0" y="0"/>
-          <a:chExt cx="0" cy="0"/>
-        </a:xfrm>
-      </p:grpSpPr>
-      <p:sp>
-        <p:nvSpPr>
-          <p:cNvPr id="2" name="Shape 0"/>
-          <p:cNvSpPr/>
-          <p:nvPr/>
-        </p:nvSpPr>
-        <p:spPr>
-          <a:xfrm>
-            <a:off x="566928" y="457200"/>
-            <a:ext cx="384048" cy="384048"/>
-          </a:xfrm>
-          <a:prstGeom prst="ellipse">
-            <a:avLst/>
-          </a:prstGeom>
-          <a:solidFill>
-            <a:srgbClr val="B98A2E"/>
-          </a:solidFill>
-          <a:ln/>
-        </p:spPr>
-      </p:sp>
-      <p:sp>
-        <p:nvSpPr>
-          <p:cNvPr id="3" name="Text 1"/>
-          <p:cNvSpPr/>
-          <p:nvPr/>
-        </p:nvSpPr>
-        <p:spPr>
-          <a:xfrm>
-            <a:off x="566928" y="457200"/>
-            <a:ext cx="384048" cy="384048"/>
-          </a:xfrm>
-          <a:prstGeom prst="rect">
-            <a:avLst/>
-          </a:prstGeom>
-          <a:noFill/>
-          <a:ln/>
-        </p:spPr>
-        <p:txBody>
-          <a:bodyPr wrap="square" lIns="0" tIns="0" rIns="0" bIns="0" rtlCol="0" anchor="ctr"/>
-          <a:lstStyle/>
-          <a:p>
-            <a:pPr algn="ctr" indent="0" marL="0">
-              <a:buNone/>
-            </a:pPr>
-            <a:r>
-              <a:rPr lang="en-US" sz="1300" b="1" dirty="0">
-                <a:solidFill>
-                  <a:srgbClr val="FFFFFF"/>
-                </a:solidFill>
-                <a:latin typeface="Arial" pitchFamily="34" charset="0"/>
-                <a:ea typeface="Arial" pitchFamily="34" charset="-122"/>
-                <a:cs typeface="Arial" pitchFamily="34" charset="-120"/>
-              </a:rPr>
-              <a:t>14</a:t>
-            </a:r>
-            <a:endParaRPr lang="en-US" sz="1300" dirty="0"/>
-          </a:p>
-        </p:txBody>
-      </p:sp>
-      <p:sp>
-        <p:nvSpPr>
-          <p:cNvPr id="4" name="Text 2"/>
-          <p:cNvSpPr/>
-          <p:nvPr/>
-        </p:nvSpPr>
-        <p:spPr>
-          <a:xfrm>
-            <a:off x="1133856" y="457200"/>
-            <a:ext cx="10490911" cy="182880"/>
-          </a:xfrm>
-          <a:prstGeom prst="rect">
-            <a:avLst/>
-          </a:prstGeom>
-          <a:noFill/>
-          <a:ln/>
-        </p:spPr>
-        <p:txBody>
-          <a:bodyPr wrap="square" lIns="0" tIns="0" rIns="0" bIns="0" rtlCol="0" anchor="ctr"/>
-          <a:lstStyle/>
-          <a:p>
-            <a:pPr indent="0" marL="0">
-              <a:buNone/>
-            </a:pPr>
-            <a:r>
-              <a:rPr lang="en-US" sz="950" b="1" spc="200" kern="0" dirty="0">
-                <a:solidFill>
-                  <a:srgbClr val="B98A2E"/>
-                </a:solidFill>
-                <a:latin typeface="Arial" pitchFamily="34" charset="0"/>
-                <a:ea typeface="Arial" pitchFamily="34" charset="-122"/>
-                <a:cs typeface="Arial" pitchFamily="34" charset="-120"/>
-              </a:rPr>
-              <a:t>Thesis</a:t>
-            </a:r>
-            <a:endParaRPr lang="en-US" sz="950" dirty="0"/>
-          </a:p>
-        </p:txBody>
-      </p:sp>
-      <p:sp>
-        <p:nvSpPr>
-          <p:cNvPr id="5" name="Text 3"/>
-          <p:cNvSpPr/>
-          <p:nvPr/>
-        </p:nvSpPr>
-        <p:spPr>
-          <a:xfrm>
-            <a:off x="1133856" y="640080"/>
-            <a:ext cx="10490911" cy="365760"/>
-          </a:xfrm>
-          <a:prstGeom prst="rect">
-            <a:avLst/>
-          </a:prstGeom>
-          <a:noFill/>
-          <a:ln/>
-        </p:spPr>
-        <p:txBody>
-          <a:bodyPr wrap="square" lIns="0" tIns="0" rIns="0" bIns="0" rtlCol="0" anchor="ctr"/>
-          <a:lstStyle/>
-          <a:p>
-            <a:pPr indent="0" marL="0">
-              <a:buNone/>
-            </a:pPr>
-            <a:r>
-              <a:rPr lang="en-US" sz="2300" b="1" dirty="0">
-                <a:solidFill>
-                  <a:srgbClr val="10161F"/>
-                </a:solidFill>
-                <a:latin typeface="Pretendard" pitchFamily="34" charset="0"/>
-                <a:ea typeface="Pretendard" pitchFamily="34" charset="-122"/>
-                <a:cs typeface="Pretendard" pitchFamily="34" charset="-120"/>
-              </a:rPr>
-              <a:t>투자 포인트</a:t>
-            </a:r>
-            <a:endParaRPr lang="en-US" sz="2300" dirty="0"/>
-          </a:p>
-        </p:txBody>
-      </p:sp>
-      <p:sp>
-        <p:nvSpPr>
-          <p:cNvPr id="6" name="Shape 4"/>
-          <p:cNvSpPr/>
-          <p:nvPr/>
-        </p:nvSpPr>
-        <p:spPr>
-          <a:xfrm>
-            <a:off x="566928" y="4983480"/>
-            <a:ext cx="11057839" cy="804672"/>
-          </a:xfrm>
-          <a:prstGeom prst="roundRect">
-            <a:avLst>
-              <a:gd name="adj" fmla="val 6818"/>
-            </a:avLst>
-          </a:prstGeom>
-          <a:solidFill>
-            <a:srgbClr val="F3EBDA"/>
-          </a:solidFill>
-          <a:ln w="10160">
-            <a:solidFill>
-              <a:srgbClr val="D9B668"/>
-            </a:solidFill>
-            <a:prstDash val="solid"/>
-          </a:ln>
-        </p:spPr>
-      </p:sp>
-      <p:sp>
-        <p:nvSpPr>
-          <p:cNvPr id="7" name="Text 5"/>
-          <p:cNvSpPr/>
-          <p:nvPr/>
-        </p:nvSpPr>
-        <p:spPr>
-          <a:xfrm>
-            <a:off x="749808" y="5093208"/>
-            <a:ext cx="1691640" cy="256032"/>
-          </a:xfrm>
-          <a:prstGeom prst="rect">
-            <a:avLst/>
-          </a:prstGeom>
-          <a:noFill/>
-          <a:ln/>
-        </p:spPr>
-        <p:txBody>
-          <a:bodyPr wrap="square" lIns="0" tIns="0" rIns="0" bIns="0" rtlCol="0" anchor="ctr"/>
-          <a:lstStyle/>
-          <a:p>
-            <a:pPr indent="0" marL="0">
-              <a:buNone/>
-            </a:pPr>
-            <a:r>
-              <a:rPr lang="en-US" sz="1050" b="1" dirty="0">
-                <a:solidFill>
-                  <a:srgbClr val="977024"/>
-                </a:solidFill>
-                <a:latin typeface="Pretendard" pitchFamily="34" charset="0"/>
-                <a:ea typeface="Pretendard" pitchFamily="34" charset="-122"/>
-                <a:cs typeface="Pretendard" pitchFamily="34" charset="-120"/>
-              </a:rPr>
-              <a:t>종합 가치 제안</a:t>
-            </a:r>
-            <a:endParaRPr lang="en-US" sz="1050" dirty="0"/>
-          </a:p>
-        </p:txBody>
-      </p:sp>
-      <p:sp>
-        <p:nvSpPr>
-          <p:cNvPr id="8" name="Text 6"/>
-          <p:cNvSpPr/>
-          <p:nvPr/>
-        </p:nvSpPr>
-        <p:spPr>
-          <a:xfrm>
-            <a:off x="2487168" y="5056632"/>
-            <a:ext cx="8954719" cy="658368"/>
-          </a:xfrm>
-          <a:prstGeom prst="rect">
-            <a:avLst/>
-          </a:prstGeom>
-          <a:noFill/>
-          <a:ln/>
-        </p:spPr>
-        <p:txBody>
-          <a:bodyPr wrap="square" lIns="0" tIns="0" rIns="0" bIns="0" rtlCol="0" anchor="ctr"/>
-          <a:lstStyle/>
-          <a:p>
-            <a:pPr indent="0" marL="0">
-              <a:lnSpc>
-                <a:spcPct val="125000"/>
-              </a:lnSpc>
-              <a:buNone/>
-            </a:pPr>
-            <a:r>
-              <a:rPr lang="en-US" sz="1100" dirty="0">
-                <a:solidFill>
-                  <a:srgbClr val="10161F"/>
-                </a:solidFill>
-                <a:latin typeface="Pretendard" pitchFamily="34" charset="0"/>
-                <a:ea typeface="Pretendard" pitchFamily="34" charset="-122"/>
-                <a:cs typeface="Pretendard" pitchFamily="34" charset="-120"/>
-              </a:rPr>
-              <a:t>관점에서 안정적 월 임대수익과 우량 메디컬 테넌트를 보유한 핵심 투자 자산입니다.</a:t>
-            </a:r>
-            <a:endParaRPr lang="en-US" sz="1100" dirty="0"/>
-          </a:p>
-        </p:txBody>
-      </p:sp>
-      <p:sp>
-        <p:nvSpPr>
-          <p:cNvPr id="9" name="Text 7"/>
-          <p:cNvSpPr/>
-          <p:nvPr/>
-        </p:nvSpPr>
-        <p:spPr>
-          <a:xfrm>
-            <a:off x="566928" y="6382512"/>
-            <a:ext cx="7315200" cy="219456"/>
-          </a:xfrm>
-          <a:prstGeom prst="rect">
-            <a:avLst/>
-          </a:prstGeom>
-          <a:noFill/>
-          <a:ln/>
-        </p:spPr>
-        <p:txBody>
-          <a:bodyPr wrap="square" lIns="0" tIns="0" rIns="0" bIns="0" rtlCol="0" anchor="ctr"/>
-          <a:lstStyle/>
-          <a:p>
-            <a:pPr indent="0" marL="0">
-              <a:buNone/>
-            </a:pPr>
-            <a:r>
-              <a:rPr lang="en-US" sz="800" dirty="0">
-                <a:solidFill>
-                  <a:srgbClr val="718096"/>
-                </a:solidFill>
-                <a:latin typeface="Pretendard" pitchFamily="34" charset="0"/>
-                <a:ea typeface="Pretendard" pitchFamily="34" charset="-122"/>
-                <a:cs typeface="Pretendard" pitchFamily="34" charset="-120"/>
-              </a:rPr>
-              <a:t>크리딜   |   </a:t>
-            </a:r>
-            <a:endParaRPr lang="en-US" sz="800" dirty="0"/>
-          </a:p>
-        </p:txBody>
-      </p:sp>
-      <p:sp>
-        <p:nvSpPr>
-          <p:cNvPr id="10" name="Text 8"/>
-          <p:cNvSpPr/>
-          <p:nvPr/>
-        </p:nvSpPr>
-        <p:spPr>
-          <a:xfrm>
-            <a:off x="10710367" y="6382512"/>
-            <a:ext cx="914400" cy="219456"/>
-          </a:xfrm>
-          <a:prstGeom prst="rect">
-            <a:avLst/>
-          </a:prstGeom>
-          <a:noFill/>
-          <a:ln/>
-        </p:spPr>
-        <p:txBody>
-          <a:bodyPr wrap="square" lIns="0" tIns="0" rIns="0" bIns="0" rtlCol="0" anchor="ctr"/>
-          <a:lstStyle/>
-          <a:p>
-            <a:pPr algn="r" indent="0" marL="0">
-              <a:buNone/>
-            </a:pPr>
-            <a:r>
-              <a:rPr lang="en-US" sz="900" b="1" dirty="0">
-                <a:solidFill>
-                  <a:srgbClr val="B98A2E"/>
-                </a:solidFill>
-                <a:latin typeface="Arial" pitchFamily="34" charset="0"/>
-                <a:ea typeface="Arial" pitchFamily="34" charset="-122"/>
-                <a:cs typeface="Arial" pitchFamily="34" charset="-120"/>
-              </a:rPr>
-              <a:t>14</a:t>
-            </a:r>
-            <a:endParaRPr lang="en-US" sz="900" dirty="0"/>
-          </a:p>
-        </p:txBody>
-      </p:sp>
-    </p:spTree>
-  </p:cSld>
-  <p:clrMapOvr>
-    <a:masterClrMapping/>
-  </p:clrMapOvr>
-</p:sld>
-</file>
-
-<file path=ppt/slides/slide15.xml><?xml version="1.0" encoding="utf-8"?>
-<p:sld xmlns:a="http://schemas.openxmlformats.org/drawingml/2006/main" xmlns:r="http://schemas.openxmlformats.org/officeDocument/2006/relationships" xmlns:p="http://schemas.openxmlformats.org/presentationml/2006/main">
-  <p:cSld name="Slide 15">
-    <p:bg>
-      <p:bgPr>
-        <a:solidFill>
-          <a:srgbClr val="FFFFFF"/>
-        </a:solidFill>
-      </p:bgPr>
-    </p:bg>
-    <p:spTree>
-      <p:nvGrpSpPr>
-        <p:cNvPr id="1" name=""/>
-        <p:cNvGrpSpPr/>
-        <p:nvPr/>
-      </p:nvGrpSpPr>
-      <p:grpSpPr>
-        <a:xfrm>
-          <a:off x="0" y="0"/>
-          <a:ext cx="0" cy="0"/>
-          <a:chOff x="0" y="0"/>
-          <a:chExt cx="0" cy="0"/>
-        </a:xfrm>
-      </p:grpSpPr>
-      <p:sp>
-        <p:nvSpPr>
-          <p:cNvPr id="2" name="Shape 0"/>
-          <p:cNvSpPr/>
-          <p:nvPr/>
-        </p:nvSpPr>
-        <p:spPr>
-          <a:xfrm>
-            <a:off x="566928" y="457200"/>
-            <a:ext cx="384048" cy="384048"/>
-          </a:xfrm>
-          <a:prstGeom prst="ellipse">
-            <a:avLst/>
-          </a:prstGeom>
-          <a:solidFill>
-            <a:srgbClr val="B98A2E"/>
-          </a:solidFill>
-          <a:ln/>
-        </p:spPr>
-      </p:sp>
-      <p:sp>
-        <p:nvSpPr>
-          <p:cNvPr id="3" name="Text 1"/>
-          <p:cNvSpPr/>
-          <p:nvPr/>
-        </p:nvSpPr>
-        <p:spPr>
-          <a:xfrm>
-            <a:off x="566928" y="457200"/>
-            <a:ext cx="384048" cy="384048"/>
-          </a:xfrm>
-          <a:prstGeom prst="rect">
-            <a:avLst/>
-          </a:prstGeom>
-          <a:noFill/>
-          <a:ln/>
-        </p:spPr>
-        <p:txBody>
-          <a:bodyPr wrap="square" lIns="0" tIns="0" rIns="0" bIns="0" rtlCol="0" anchor="ctr"/>
-          <a:lstStyle/>
-          <a:p>
-            <a:pPr algn="ctr" indent="0" marL="0">
-              <a:buNone/>
-            </a:pPr>
-            <a:r>
-              <a:rPr lang="en-US" sz="1300" b="1" dirty="0">
-                <a:solidFill>
-                  <a:srgbClr val="FFFFFF"/>
-                </a:solidFill>
-                <a:latin typeface="Arial" pitchFamily="34" charset="0"/>
-                <a:ea typeface="Arial" pitchFamily="34" charset="-122"/>
-                <a:cs typeface="Arial" pitchFamily="34" charset="-120"/>
-              </a:rPr>
-              <a:t>15</a:t>
-            </a:r>
-            <a:endParaRPr lang="en-US" sz="1300" dirty="0"/>
-          </a:p>
-        </p:txBody>
-      </p:sp>
-      <p:sp>
-        <p:nvSpPr>
-          <p:cNvPr id="4" name="Text 2"/>
-          <p:cNvSpPr/>
-          <p:nvPr/>
-        </p:nvSpPr>
-        <p:spPr>
-          <a:xfrm>
-            <a:off x="1133856" y="457200"/>
-            <a:ext cx="10490911" cy="182880"/>
-          </a:xfrm>
-          <a:prstGeom prst="rect">
-            <a:avLst/>
-          </a:prstGeom>
-          <a:noFill/>
-          <a:ln/>
-        </p:spPr>
-        <p:txBody>
-          <a:bodyPr wrap="square" lIns="0" tIns="0" rIns="0" bIns="0" rtlCol="0" anchor="ctr"/>
-          <a:lstStyle/>
-          <a:p>
-            <a:pPr indent="0" marL="0">
-              <a:buNone/>
-            </a:pPr>
-            <a:r>
-              <a:rPr lang="en-US" sz="950" b="1" spc="200" kern="0" dirty="0">
-                <a:solidFill>
-                  <a:srgbClr val="B98A2E"/>
-                </a:solidFill>
-                <a:latin typeface="Arial" pitchFamily="34" charset="0"/>
-                <a:ea typeface="Arial" pitchFamily="34" charset="-122"/>
-                <a:cs typeface="Arial" pitchFamily="34" charset="-120"/>
-              </a:rPr>
-              <a:t>Risk</a:t>
-            </a:r>
-            <a:endParaRPr lang="en-US" sz="950" dirty="0"/>
-          </a:p>
-        </p:txBody>
-      </p:sp>
-      <p:sp>
-        <p:nvSpPr>
-          <p:cNvPr id="5" name="Text 3"/>
-          <p:cNvSpPr/>
-          <p:nvPr/>
-        </p:nvSpPr>
-        <p:spPr>
-          <a:xfrm>
-            <a:off x="1133856" y="640080"/>
-            <a:ext cx="10490911" cy="365760"/>
-          </a:xfrm>
-          <a:prstGeom prst="rect">
-            <a:avLst/>
-          </a:prstGeom>
-          <a:noFill/>
-          <a:ln/>
-        </p:spPr>
-        <p:txBody>
-          <a:bodyPr wrap="square" lIns="0" tIns="0" rIns="0" bIns="0" rtlCol="0" anchor="ctr"/>
-          <a:lstStyle/>
-          <a:p>
-            <a:pPr indent="0" marL="0">
-              <a:buNone/>
-            </a:pPr>
-            <a:r>
-              <a:rPr lang="en-US" sz="2300" b="1" dirty="0">
-                <a:solidFill>
-                  <a:srgbClr val="10161F"/>
-                </a:solidFill>
-                <a:latin typeface="Pretendard" pitchFamily="34" charset="0"/>
-                <a:ea typeface="Pretendard" pitchFamily="34" charset="-122"/>
-                <a:cs typeface="Pretendard" pitchFamily="34" charset="-120"/>
-              </a:rPr>
-              <a:t>리스크 점검</a:t>
-            </a:r>
-            <a:endParaRPr lang="en-US" sz="2300" dirty="0"/>
-          </a:p>
-        </p:txBody>
-      </p:sp>
-      <p:sp>
-        <p:nvSpPr>
-          <p:cNvPr id="6" name="Shape 4"/>
-          <p:cNvSpPr/>
-          <p:nvPr/>
-        </p:nvSpPr>
-        <p:spPr>
-          <a:xfrm>
-            <a:off x="566928" y="1417320"/>
-            <a:ext cx="5400904" cy="3657600"/>
-          </a:xfrm>
-          <a:prstGeom prst="roundRect">
-            <a:avLst>
-              <a:gd name="adj" fmla="val 1500"/>
-            </a:avLst>
-          </a:prstGeom>
-          <a:solidFill>
-            <a:srgbClr val="F7FAFC"/>
-          </a:solidFill>
-          <a:ln w="6350">
-            <a:solidFill>
-              <a:srgbClr val="CBD5E0"/>
-            </a:solidFill>
-            <a:prstDash val="solid"/>
-          </a:ln>
-        </p:spPr>
-      </p:sp>
-      <p:sp>
-        <p:nvSpPr>
-          <p:cNvPr id="7" name="Shape 5"/>
-          <p:cNvSpPr/>
-          <p:nvPr/>
-        </p:nvSpPr>
-        <p:spPr>
-          <a:xfrm>
-            <a:off x="566928" y="1417320"/>
-            <a:ext cx="5400904" cy="45720"/>
-          </a:xfrm>
-          <a:prstGeom prst="rect">
-            <a:avLst/>
-          </a:prstGeom>
-          <a:solidFill>
-            <a:srgbClr val="B98A2E"/>
-          </a:solidFill>
-          <a:ln/>
-        </p:spPr>
-      </p:sp>
-      <p:sp>
-        <p:nvSpPr>
-          <p:cNvPr id="8" name="Text 6"/>
-          <p:cNvSpPr/>
-          <p:nvPr/>
-        </p:nvSpPr>
-        <p:spPr>
-          <a:xfrm>
-            <a:off x="795528" y="1618488"/>
-            <a:ext cx="4943704" cy="292608"/>
-          </a:xfrm>
-          <a:prstGeom prst="rect">
-            <a:avLst/>
-          </a:prstGeom>
-          <a:noFill/>
-          <a:ln/>
-        </p:spPr>
-        <p:txBody>
-          <a:bodyPr wrap="square" lIns="0" tIns="0" rIns="0" bIns="0" rtlCol="0" anchor="ctr"/>
-          <a:lstStyle/>
-          <a:p>
-            <a:pPr indent="0" marL="0">
-              <a:buNone/>
-            </a:pPr>
-            <a:r>
-              <a:rPr lang="en-US" sz="1350" b="1" dirty="0">
-                <a:solidFill>
-                  <a:srgbClr val="977024"/>
-                </a:solidFill>
-                <a:latin typeface="Pretendard" pitchFamily="34" charset="0"/>
-                <a:ea typeface="Pretendard" pitchFamily="34" charset="-122"/>
-                <a:cs typeface="Pretendard" pitchFamily="34" charset="-120"/>
-              </a:rPr>
-              <a:t>메디컬 단일업종 집중</a:t>
-            </a:r>
-            <a:endParaRPr lang="en-US" sz="1350" dirty="0"/>
-          </a:p>
-        </p:txBody>
-      </p:sp>
-      <p:sp>
-        <p:nvSpPr>
-          <p:cNvPr id="9" name="Text 7"/>
-          <p:cNvSpPr/>
-          <p:nvPr/>
-        </p:nvSpPr>
-        <p:spPr>
-          <a:xfrm>
-            <a:off x="795528" y="1947672"/>
-            <a:ext cx="4943704" cy="365760"/>
-          </a:xfrm>
-          <a:prstGeom prst="rect">
-            <a:avLst/>
-          </a:prstGeom>
-          <a:noFill/>
-          <a:ln/>
-        </p:spPr>
-        <p:txBody>
-          <a:bodyPr wrap="square" lIns="0" tIns="0" rIns="0" bIns="0" rtlCol="0" anchor="ctr">
-            <a:normAutofit/>
-          </a:bodyPr>
-          <a:lstStyle/>
-          <a:p>
-            <a:pPr indent="0" marL="0">
-              <a:buNone/>
-            </a:pPr>
-            <a:r>
-              <a:rPr lang="en-US" sz="1250" b="1" dirty="0">
-                <a:solidFill>
-                  <a:srgbClr val="10161F"/>
-                </a:solidFill>
-                <a:latin typeface="Pretendard" pitchFamily="34" charset="0"/>
-                <a:ea typeface="Pretendard" pitchFamily="34" charset="-122"/>
-                <a:cs typeface="Pretendard" pitchFamily="34" charset="-120"/>
-              </a:rPr>
-              <a:t>전층 의료</a:t>
-            </a:r>
-            <a:endParaRPr lang="en-US" sz="1250" dirty="0"/>
-          </a:p>
-        </p:txBody>
-      </p:sp>
-      <p:sp>
-        <p:nvSpPr>
-          <p:cNvPr id="10" name="Text 8"/>
-          <p:cNvSpPr/>
-          <p:nvPr/>
-        </p:nvSpPr>
-        <p:spPr>
-          <a:xfrm>
-            <a:off x="795528" y="2377440"/>
-            <a:ext cx="4943704" cy="2606040"/>
-          </a:xfrm>
-          <a:prstGeom prst="rect">
-            <a:avLst/>
-          </a:prstGeom>
-          <a:noFill/>
-          <a:ln/>
-        </p:spPr>
-        <p:txBody>
-          <a:bodyPr wrap="square" lIns="0" tIns="0" rIns="0" bIns="0" rtlCol="0" anchor="t">
-            <a:normAutofit/>
-          </a:bodyPr>
-          <a:lstStyle/>
-          <a:p>
-            <a:pPr marL="342900" indent="-342900">
-              <a:lnSpc>
-                <a:spcPct val="125000"/>
-              </a:lnSpc>
-              <a:buSzPct val="100000"/>
-              <a:buChar char="•"/>
-            </a:pPr>
-            <a:r>
-              <a:rPr lang="en-US" sz="1100" dirty="0">
-                <a:solidFill>
-                  <a:srgbClr val="10161F"/>
-                </a:solidFill>
-                <a:latin typeface="Pretendard" pitchFamily="34" charset="0"/>
-                <a:ea typeface="Pretendard" pitchFamily="34" charset="-122"/>
-                <a:cs typeface="Pretendard" pitchFamily="34" charset="-120"/>
-              </a:rPr>
-              <a:t>업종 다각화 검토</a:t>
-            </a:r>
-            <a:endParaRPr lang="en-US" sz="1100" dirty="0"/>
-          </a:p>
-        </p:txBody>
-      </p:sp>
-      <p:sp>
-        <p:nvSpPr>
-          <p:cNvPr id="11" name="Shape 9"/>
-          <p:cNvSpPr/>
-          <p:nvPr/>
-        </p:nvSpPr>
-        <p:spPr>
-          <a:xfrm>
-            <a:off x="6223864" y="1417320"/>
-            <a:ext cx="5400904" cy="3657600"/>
-          </a:xfrm>
-          <a:prstGeom prst="roundRect">
-            <a:avLst>
-              <a:gd name="adj" fmla="val 1500"/>
-            </a:avLst>
-          </a:prstGeom>
-          <a:solidFill>
-            <a:srgbClr val="F7FAFC"/>
-          </a:solidFill>
-          <a:ln w="6350">
-            <a:solidFill>
-              <a:srgbClr val="CBD5E0"/>
-            </a:solidFill>
-            <a:prstDash val="solid"/>
-          </a:ln>
-        </p:spPr>
-      </p:sp>
-      <p:sp>
-        <p:nvSpPr>
-          <p:cNvPr id="12" name="Shape 10"/>
-          <p:cNvSpPr/>
-          <p:nvPr/>
-        </p:nvSpPr>
-        <p:spPr>
-          <a:xfrm>
-            <a:off x="6223864" y="1417320"/>
-            <a:ext cx="5400904" cy="45720"/>
-          </a:xfrm>
-          <a:prstGeom prst="rect">
-            <a:avLst/>
-          </a:prstGeom>
-          <a:solidFill>
-            <a:srgbClr val="B98A2E"/>
-          </a:solidFill>
-          <a:ln/>
-        </p:spPr>
-      </p:sp>
-      <p:sp>
-        <p:nvSpPr>
-          <p:cNvPr id="13" name="Text 11"/>
-          <p:cNvSpPr/>
-          <p:nvPr/>
-        </p:nvSpPr>
-        <p:spPr>
-          <a:xfrm>
-            <a:off x="6452464" y="1618488"/>
-            <a:ext cx="4943704" cy="292608"/>
-          </a:xfrm>
-          <a:prstGeom prst="rect">
-            <a:avLst/>
-          </a:prstGeom>
-          <a:noFill/>
-          <a:ln/>
-        </p:spPr>
-        <p:txBody>
-          <a:bodyPr wrap="square" lIns="0" tIns="0" rIns="0" bIns="0" rtlCol="0" anchor="ctr"/>
-          <a:lstStyle/>
-          <a:p>
-            <a:pPr indent="0" marL="0">
-              <a:buNone/>
-            </a:pPr>
-            <a:r>
-              <a:rPr lang="en-US" sz="1350" b="1" dirty="0">
-                <a:solidFill>
-                  <a:srgbClr val="977024"/>
-                </a:solidFill>
-                <a:latin typeface="Pretendard" pitchFamily="34" charset="0"/>
-                <a:ea typeface="Pretendard" pitchFamily="34" charset="-122"/>
-                <a:cs typeface="Pretendard" pitchFamily="34" charset="-120"/>
-              </a:rPr>
-              <a:t>금리 변동</a:t>
-            </a:r>
-            <a:endParaRPr lang="en-US" sz="1350" dirty="0"/>
-          </a:p>
-        </p:txBody>
-      </p:sp>
-      <p:sp>
-        <p:nvSpPr>
-          <p:cNvPr id="14" name="Text 12"/>
-          <p:cNvSpPr/>
-          <p:nvPr/>
-        </p:nvSpPr>
-        <p:spPr>
-          <a:xfrm>
-            <a:off x="6452464" y="1947672"/>
-            <a:ext cx="4943704" cy="365760"/>
-          </a:xfrm>
-          <a:prstGeom prst="rect">
-            <a:avLst/>
-          </a:prstGeom>
-          <a:noFill/>
-          <a:ln/>
-        </p:spPr>
-        <p:txBody>
-          <a:bodyPr wrap="square" lIns="0" tIns="0" rIns="0" bIns="0" rtlCol="0" anchor="ctr">
-            <a:normAutofit/>
-          </a:bodyPr>
-          <a:lstStyle/>
-          <a:p>
-            <a:pPr indent="0" marL="0">
-              <a:buNone/>
-            </a:pPr>
-            <a:r>
-              <a:rPr lang="en-US" sz="1250" b="1" dirty="0">
-                <a:solidFill>
-                  <a:srgbClr val="10161F"/>
-                </a:solidFill>
-                <a:latin typeface="Pretendard" pitchFamily="34" charset="0"/>
-                <a:ea typeface="Pretendard" pitchFamily="34" charset="-122"/>
-                <a:cs typeface="Pretendard" pitchFamily="34" charset="-120"/>
-              </a:rPr>
-              <a:t>4.1% 고정</a:t>
-            </a:r>
-            <a:endParaRPr lang="en-US" sz="1250" dirty="0"/>
-          </a:p>
-        </p:txBody>
-      </p:sp>
-      <p:sp>
-        <p:nvSpPr>
-          <p:cNvPr id="15" name="Text 13"/>
-          <p:cNvSpPr/>
-          <p:nvPr/>
-        </p:nvSpPr>
-        <p:spPr>
-          <a:xfrm>
-            <a:off x="6452464" y="2377440"/>
-            <a:ext cx="4943704" cy="2606040"/>
-          </a:xfrm>
-          <a:prstGeom prst="rect">
-            <a:avLst/>
-          </a:prstGeom>
-          <a:noFill/>
-          <a:ln/>
-        </p:spPr>
-        <p:txBody>
-          <a:bodyPr wrap="square" lIns="0" tIns="0" rIns="0" bIns="0" rtlCol="0" anchor="t">
-            <a:normAutofit/>
-          </a:bodyPr>
-          <a:lstStyle/>
-          <a:p>
-            <a:pPr marL="342900" indent="-342900">
-              <a:lnSpc>
-                <a:spcPct val="125000"/>
-              </a:lnSpc>
-              <a:buSzPct val="100000"/>
-              <a:buChar char="•"/>
-            </a:pPr>
-            <a:r>
-              <a:rPr lang="en-US" sz="1100" dirty="0">
-                <a:solidFill>
-                  <a:srgbClr val="10161F"/>
-                </a:solidFill>
-                <a:latin typeface="Pretendard" pitchFamily="34" charset="0"/>
-                <a:ea typeface="Pretendard" pitchFamily="34" charset="-122"/>
-                <a:cs typeface="Pretendard" pitchFamily="34" charset="-120"/>
-              </a:rPr>
-              <a:t>승계 대출 활용</a:t>
-            </a:r>
-            <a:endParaRPr lang="en-US" sz="1100" dirty="0"/>
-          </a:p>
-        </p:txBody>
-      </p:sp>
-      <p:sp>
-        <p:nvSpPr>
-          <p:cNvPr id="16" name="Shape 14"/>
-          <p:cNvSpPr/>
-          <p:nvPr/>
-        </p:nvSpPr>
-        <p:spPr>
-          <a:xfrm>
-            <a:off x="566928" y="5193792"/>
-            <a:ext cx="11057839" cy="621792"/>
-          </a:xfrm>
-          <a:prstGeom prst="roundRect">
-            <a:avLst>
-              <a:gd name="adj" fmla="val 8824"/>
-            </a:avLst>
-          </a:prstGeom>
-          <a:solidFill>
-            <a:srgbClr val="F7FAFC"/>
-          </a:solidFill>
-          <a:ln w="6350">
-            <a:solidFill>
-              <a:srgbClr val="CBD5E0"/>
-            </a:solidFill>
-            <a:prstDash val="solid"/>
-          </a:ln>
-        </p:spPr>
-      </p:sp>
-      <p:sp>
-        <p:nvSpPr>
-          <p:cNvPr id="17" name="Text 15"/>
-          <p:cNvSpPr/>
-          <p:nvPr/>
-        </p:nvSpPr>
-        <p:spPr>
-          <a:xfrm>
-            <a:off x="795528" y="5193792"/>
-            <a:ext cx="10600639" cy="621792"/>
-          </a:xfrm>
-          <a:prstGeom prst="rect">
-            <a:avLst/>
-          </a:prstGeom>
-          <a:noFill/>
-          <a:ln/>
-        </p:spPr>
-        <p:txBody>
-          <a:bodyPr wrap="square" lIns="0" tIns="0" rIns="0" bIns="0" rtlCol="0" anchor="ctr"/>
-          <a:lstStyle/>
-          <a:p>
-            <a:pPr indent="0" marL="0">
-              <a:buNone/>
-            </a:pPr>
-            <a:r>
-              <a:rPr lang="en-US" sz="1100" dirty="0">
-                <a:solidFill>
-                  <a:srgbClr val="10161F"/>
-                </a:solidFill>
-                <a:latin typeface="Pretendard" pitchFamily="34" charset="0"/>
-                <a:ea typeface="Pretendard" pitchFamily="34" charset="-122"/>
-                <a:cs typeface="Pretendard" pitchFamily="34" charset="-120"/>
-              </a:rPr>
-              <a:t>※ 본 리스크 체크는 공부 및 브로커 확인 기반이며, 매수 전 전문 실사팀(변호사/건축사)을 통한 정밀 실사가 필요합니다.</a:t>
-            </a:r>
-            <a:endParaRPr lang="en-US" sz="1100" dirty="0"/>
-          </a:p>
-        </p:txBody>
-      </p:sp>
-      <p:sp>
-        <p:nvSpPr>
-          <p:cNvPr id="18" name="Text 16"/>
-          <p:cNvSpPr/>
-          <p:nvPr/>
-        </p:nvSpPr>
-        <p:spPr>
-          <a:xfrm>
-            <a:off x="566928" y="6382512"/>
-            <a:ext cx="7315200" cy="219456"/>
-          </a:xfrm>
-          <a:prstGeom prst="rect">
-            <a:avLst/>
-          </a:prstGeom>
-          <a:noFill/>
-          <a:ln/>
-        </p:spPr>
-        <p:txBody>
-          <a:bodyPr wrap="square" lIns="0" tIns="0" rIns="0" bIns="0" rtlCol="0" anchor="ctr"/>
-          <a:lstStyle/>
-          <a:p>
-            <a:pPr indent="0" marL="0">
-              <a:buNone/>
-            </a:pPr>
-            <a:r>
-              <a:rPr lang="en-US" sz="800" dirty="0">
-                <a:solidFill>
-                  <a:srgbClr val="718096"/>
-                </a:solidFill>
-                <a:latin typeface="Pretendard" pitchFamily="34" charset="0"/>
-                <a:ea typeface="Pretendard" pitchFamily="34" charset="-122"/>
-                <a:cs typeface="Pretendard" pitchFamily="34" charset="-120"/>
-              </a:rPr>
-              <a:t>크리딜   |   </a:t>
-            </a:r>
-            <a:endParaRPr lang="en-US" sz="800" dirty="0"/>
-          </a:p>
-        </p:txBody>
-      </p:sp>
-      <p:sp>
-        <p:nvSpPr>
-          <p:cNvPr id="19" name="Text 17"/>
-          <p:cNvSpPr/>
-          <p:nvPr/>
-        </p:nvSpPr>
-        <p:spPr>
-          <a:xfrm>
-            <a:off x="10710367" y="6382512"/>
-            <a:ext cx="914400" cy="219456"/>
-          </a:xfrm>
-          <a:prstGeom prst="rect">
-            <a:avLst/>
-          </a:prstGeom>
-          <a:noFill/>
-          <a:ln/>
-        </p:spPr>
-        <p:txBody>
-          <a:bodyPr wrap="square" lIns="0" tIns="0" rIns="0" bIns="0" rtlCol="0" anchor="ctr"/>
-          <a:lstStyle/>
-          <a:p>
-            <a:pPr algn="r" indent="0" marL="0">
-              <a:buNone/>
-            </a:pPr>
-            <a:r>
-              <a:rPr lang="en-US" sz="900" b="1" dirty="0">
-                <a:solidFill>
-                  <a:srgbClr val="B98A2E"/>
-                </a:solidFill>
-                <a:latin typeface="Arial" pitchFamily="34" charset="0"/>
-                <a:ea typeface="Arial" pitchFamily="34" charset="-122"/>
-                <a:cs typeface="Arial" pitchFamily="34" charset="-120"/>
-              </a:rPr>
-              <a:t>15</a:t>
-            </a:r>
-            <a:endParaRPr lang="en-US" sz="900" dirty="0"/>
-          </a:p>
-        </p:txBody>
-      </p:sp>
-    </p:spTree>
-  </p:cSld>
-  <p:clrMapOvr>
-    <a:masterClrMapping/>
-  </p:clrMapOvr>
-</p:sld>
-</file>
-
-<file path=ppt/slides/slide16.xml><?xml version="1.0" encoding="utf-8"?>
-<p:sld xmlns:a="http://schemas.openxmlformats.org/drawingml/2006/main" xmlns:r="http://schemas.openxmlformats.org/officeDocument/2006/relationships" xmlns:p="http://schemas.openxmlformats.org/presentationml/2006/main">
-  <p:cSld name="Slide 16">
-    <p:bg>
-      <p:bgPr>
-        <a:solidFill>
-          <a:srgbClr val="FFFFFF"/>
-        </a:solidFill>
-      </p:bgPr>
-    </p:bg>
-    <p:spTree>
-      <p:nvGrpSpPr>
-        <p:cNvPr id="1" name=""/>
-        <p:cNvGrpSpPr/>
-        <p:nvPr/>
-      </p:nvGrpSpPr>
-      <p:grpSpPr>
-        <a:xfrm>
-          <a:off x="0" y="0"/>
-          <a:ext cx="0" cy="0"/>
-          <a:chOff x="0" y="0"/>
-          <a:chExt cx="0" cy="0"/>
-        </a:xfrm>
-      </p:grpSpPr>
-      <p:sp>
-        <p:nvSpPr>
-          <p:cNvPr id="2" name="Shape 0"/>
-          <p:cNvSpPr/>
-          <p:nvPr/>
-        </p:nvSpPr>
-        <p:spPr>
-          <a:xfrm>
-            <a:off x="566928" y="457200"/>
-            <a:ext cx="384048" cy="384048"/>
-          </a:xfrm>
-          <a:prstGeom prst="ellipse">
-            <a:avLst/>
-          </a:prstGeom>
-          <a:solidFill>
-            <a:srgbClr val="B98A2E"/>
-          </a:solidFill>
-          <a:ln/>
-        </p:spPr>
-      </p:sp>
-      <p:sp>
-        <p:nvSpPr>
-          <p:cNvPr id="3" name="Text 1"/>
-          <p:cNvSpPr/>
-          <p:nvPr/>
-        </p:nvSpPr>
-        <p:spPr>
-          <a:xfrm>
-            <a:off x="566928" y="457200"/>
-            <a:ext cx="384048" cy="384048"/>
-          </a:xfrm>
-          <a:prstGeom prst="rect">
-            <a:avLst/>
-          </a:prstGeom>
-          <a:noFill/>
-          <a:ln/>
-        </p:spPr>
-        <p:txBody>
-          <a:bodyPr wrap="square" lIns="0" tIns="0" rIns="0" bIns="0" rtlCol="0" anchor="ctr"/>
-          <a:lstStyle/>
-          <a:p>
-            <a:pPr algn="ctr" indent="0" marL="0">
-              <a:buNone/>
-            </a:pPr>
-            <a:r>
-              <a:rPr lang="en-US" sz="1300" b="1" dirty="0">
-                <a:solidFill>
-                  <a:srgbClr val="FFFFFF"/>
-                </a:solidFill>
-                <a:latin typeface="Arial" pitchFamily="34" charset="0"/>
-                <a:ea typeface="Arial" pitchFamily="34" charset="-122"/>
-                <a:cs typeface="Arial" pitchFamily="34" charset="-120"/>
-              </a:rPr>
-              <a:t>16</a:t>
-            </a:r>
-            <a:endParaRPr lang="en-US" sz="1300" dirty="0"/>
-          </a:p>
-        </p:txBody>
-      </p:sp>
-      <p:sp>
-        <p:nvSpPr>
-          <p:cNvPr id="4" name="Text 2"/>
-          <p:cNvSpPr/>
-          <p:nvPr/>
-        </p:nvSpPr>
-        <p:spPr>
-          <a:xfrm>
-            <a:off x="1133856" y="457200"/>
-            <a:ext cx="10490911" cy="182880"/>
-          </a:xfrm>
-          <a:prstGeom prst="rect">
-            <a:avLst/>
-          </a:prstGeom>
-          <a:noFill/>
-          <a:ln/>
-        </p:spPr>
-        <p:txBody>
-          <a:bodyPr wrap="square" lIns="0" tIns="0" rIns="0" bIns="0" rtlCol="0" anchor="ctr"/>
-          <a:lstStyle/>
-          <a:p>
-            <a:pPr indent="0" marL="0">
-              <a:buNone/>
-            </a:pPr>
-            <a:r>
-              <a:rPr lang="en-US" sz="950" b="1" spc="200" kern="0" dirty="0">
-                <a:solidFill>
-                  <a:srgbClr val="B98A2E"/>
-                </a:solidFill>
-                <a:latin typeface="Arial" pitchFamily="34" charset="0"/>
-                <a:ea typeface="Arial" pitchFamily="34" charset="-122"/>
-                <a:cs typeface="Arial" pitchFamily="34" charset="-120"/>
-              </a:rPr>
-              <a:t>Process</a:t>
-            </a:r>
-            <a:endParaRPr lang="en-US" sz="950" dirty="0"/>
-          </a:p>
-        </p:txBody>
-      </p:sp>
-      <p:sp>
-        <p:nvSpPr>
-          <p:cNvPr id="5" name="Text 3"/>
-          <p:cNvSpPr/>
-          <p:nvPr/>
-        </p:nvSpPr>
-        <p:spPr>
-          <a:xfrm>
-            <a:off x="1133856" y="640080"/>
-            <a:ext cx="10490911" cy="365760"/>
-          </a:xfrm>
-          <a:prstGeom prst="rect">
-            <a:avLst/>
-          </a:prstGeom>
-          <a:noFill/>
-          <a:ln/>
-        </p:spPr>
-        <p:txBody>
-          <a:bodyPr wrap="square" lIns="0" tIns="0" rIns="0" bIns="0" rtlCol="0" anchor="ctr"/>
-          <a:lstStyle/>
-          <a:p>
-            <a:pPr indent="0" marL="0">
-              <a:buNone/>
-            </a:pPr>
-            <a:r>
-              <a:rPr lang="en-US" sz="2300" b="1" dirty="0">
-                <a:solidFill>
-                  <a:srgbClr val="10161F"/>
-                </a:solidFill>
-                <a:latin typeface="Pretendard" pitchFamily="34" charset="0"/>
-                <a:ea typeface="Pretendard" pitchFamily="34" charset="-122"/>
-                <a:cs typeface="Pretendard" pitchFamily="34" charset="-120"/>
-              </a:rPr>
-              <a:t>다음 단계</a:t>
-            </a:r>
-            <a:endParaRPr lang="en-US" sz="2300" dirty="0"/>
-          </a:p>
-        </p:txBody>
-      </p:sp>
-      <p:sp>
-        <p:nvSpPr>
-          <p:cNvPr id="6" name="Shape 4"/>
-          <p:cNvSpPr/>
-          <p:nvPr/>
-        </p:nvSpPr>
-        <p:spPr>
-          <a:xfrm>
-            <a:off x="566928" y="1572768"/>
-            <a:ext cx="11057839" cy="3200400"/>
-          </a:xfrm>
-          <a:prstGeom prst="roundRect">
-            <a:avLst>
-              <a:gd name="adj" fmla="val 1714"/>
-            </a:avLst>
-          </a:prstGeom>
-          <a:solidFill>
-            <a:srgbClr val="F7FAFC"/>
-          </a:solidFill>
-          <a:ln w="6350">
-            <a:solidFill>
-              <a:srgbClr val="CBD5E0"/>
-            </a:solidFill>
-            <a:prstDash val="solid"/>
-          </a:ln>
-        </p:spPr>
-      </p:sp>
-      <p:sp>
-        <p:nvSpPr>
-          <p:cNvPr id="7" name="Shape 5"/>
-          <p:cNvSpPr/>
-          <p:nvPr/>
-        </p:nvSpPr>
-        <p:spPr>
-          <a:xfrm>
-            <a:off x="786384" y="1792224"/>
-            <a:ext cx="438912" cy="438912"/>
-          </a:xfrm>
-          <a:prstGeom prst="ellipse">
-            <a:avLst/>
-          </a:prstGeom>
-          <a:solidFill>
-            <a:srgbClr val="B98A2E"/>
-          </a:solidFill>
-          <a:ln/>
-        </p:spPr>
-      </p:sp>
-      <p:sp>
-        <p:nvSpPr>
-          <p:cNvPr id="8" name="Text 6"/>
-          <p:cNvSpPr/>
-          <p:nvPr/>
-        </p:nvSpPr>
-        <p:spPr>
-          <a:xfrm>
-            <a:off x="786384" y="1792224"/>
-            <a:ext cx="438912" cy="438912"/>
-          </a:xfrm>
-          <a:prstGeom prst="rect">
-            <a:avLst/>
-          </a:prstGeom>
-          <a:noFill/>
-          <a:ln/>
-        </p:spPr>
-        <p:txBody>
-          <a:bodyPr wrap="square" lIns="0" tIns="0" rIns="0" bIns="0" rtlCol="0" anchor="ctr"/>
-          <a:lstStyle/>
-          <a:p>
-            <a:pPr algn="ctr" indent="0" marL="0">
-              <a:buNone/>
-            </a:pPr>
-            <a:r>
-              <a:rPr lang="en-US" sz="1400" b="1" dirty="0">
-                <a:solidFill>
-                  <a:srgbClr val="FFFFFF"/>
-                </a:solidFill>
-                <a:latin typeface="Arial" pitchFamily="34" charset="0"/>
-                <a:ea typeface="Arial" pitchFamily="34" charset="-122"/>
-                <a:cs typeface="Arial" pitchFamily="34" charset="-120"/>
-              </a:rPr>
-              <a:t>01</a:t>
-            </a:r>
-            <a:endParaRPr lang="en-US" sz="1400" dirty="0"/>
-          </a:p>
-        </p:txBody>
-      </p:sp>
-      <p:sp>
-        <p:nvSpPr>
-          <p:cNvPr id="9" name="Text 7"/>
-          <p:cNvSpPr/>
-          <p:nvPr/>
-        </p:nvSpPr>
-        <p:spPr>
-          <a:xfrm>
-            <a:off x="786384" y="2304288"/>
-            <a:ext cx="10618927" cy="365760"/>
-          </a:xfrm>
-          <a:prstGeom prst="rect">
-            <a:avLst/>
-          </a:prstGeom>
-          <a:noFill/>
-          <a:ln/>
-        </p:spPr>
-        <p:txBody>
-          <a:bodyPr wrap="square" rtlCol="0" anchor="ctr"/>
-          <a:lstStyle/>
-          <a:p>
-            <a:pPr indent="0" marL="0">
-              <a:buNone/>
-            </a:pPr>
-            <a:r>
-              <a:rPr lang="en-US" sz="1600" b="1" dirty="0">
-                <a:solidFill>
-                  <a:srgbClr val="10161F"/>
-                </a:solidFill>
-                <a:latin typeface="Pretendard" pitchFamily="34" charset="0"/>
-                <a:ea typeface="Pretendard" pitchFamily="34" charset="-122"/>
-                <a:cs typeface="Pretendard" pitchFamily="34" charset="-120"/>
-              </a:rPr>
-              <a:t>1단계</a:t>
-            </a:r>
-            <a:endParaRPr lang="en-US" sz="1600" dirty="0"/>
-          </a:p>
-        </p:txBody>
-      </p:sp>
-      <p:sp>
-        <p:nvSpPr>
-          <p:cNvPr id="10" name="Text 8"/>
-          <p:cNvSpPr/>
-          <p:nvPr/>
-        </p:nvSpPr>
-        <p:spPr>
-          <a:xfrm>
-            <a:off x="786384" y="2761488"/>
-            <a:ext cx="10618927" cy="1828800"/>
-          </a:xfrm>
-          <a:prstGeom prst="rect">
-            <a:avLst/>
-          </a:prstGeom>
-          <a:noFill/>
-          <a:ln/>
-        </p:spPr>
-        <p:txBody>
-          <a:bodyPr wrap="square" rtlCol="0" anchor="t"/>
-          <a:lstStyle/>
-          <a:p>
-            <a:pPr indent="0" marL="0">
-              <a:buNone/>
-            </a:pPr>
-            <a:r>
-              <a:rPr lang="en-US" sz="1100" dirty="0">
-                <a:solidFill>
-                  <a:srgbClr val="10161F"/>
-                </a:solidFill>
-                <a:latin typeface="Pretendard" pitchFamily="34" charset="0"/>
-                <a:ea typeface="Pretendard" pitchFamily="34" charset="-122"/>
-                <a:cs typeface="Pretendard" pitchFamily="34" charset="-120"/>
-              </a:rPr>
-              <a:t>현장 실사 및 임대차계약서 원본 확인을 권장합니다.</a:t>
-            </a:r>
-            <a:endParaRPr lang="en-US" sz="1100" dirty="0"/>
-          </a:p>
-          <a:p>
-            <a:pPr indent="0" marL="0">
-              <a:buNone/>
-            </a:pPr>
-            <a:r>
-              <a:rPr lang="en-US" sz="1100" dirty="0">
-                <a:solidFill>
-                  <a:srgbClr val="10161F"/>
-                </a:solidFill>
-                <a:latin typeface="Pretendard" pitchFamily="34" charset="0"/>
-                <a:ea typeface="Pretendard" pitchFamily="34" charset="-122"/>
-                <a:cs typeface="Pretendard" pitchFamily="34" charset="-120"/>
-              </a:rPr>
-              <a:t>현장 실사 및 임대차계약서 원본 확인을 권장합니다.</a:t>
-            </a:r>
-            <a:endParaRPr lang="en-US" sz="1100" dirty="0"/>
-          </a:p>
-        </p:txBody>
-      </p:sp>
-      <p:sp>
-        <p:nvSpPr>
-          <p:cNvPr id="11" name="Text 9"/>
-          <p:cNvSpPr/>
-          <p:nvPr/>
-        </p:nvSpPr>
-        <p:spPr>
-          <a:xfrm>
-            <a:off x="566928" y="6382512"/>
-            <a:ext cx="7315200" cy="219456"/>
-          </a:xfrm>
-          <a:prstGeom prst="rect">
-            <a:avLst/>
-          </a:prstGeom>
-          <a:noFill/>
-          <a:ln/>
-        </p:spPr>
-        <p:txBody>
-          <a:bodyPr wrap="square" lIns="0" tIns="0" rIns="0" bIns="0" rtlCol="0" anchor="ctr"/>
-          <a:lstStyle/>
-          <a:p>
-            <a:pPr indent="0" marL="0">
-              <a:buNone/>
-            </a:pPr>
-            <a:r>
-              <a:rPr lang="en-US" sz="800" dirty="0">
-                <a:solidFill>
-                  <a:srgbClr val="718096"/>
-                </a:solidFill>
-                <a:latin typeface="Pretendard" pitchFamily="34" charset="0"/>
-                <a:ea typeface="Pretendard" pitchFamily="34" charset="-122"/>
-                <a:cs typeface="Pretendard" pitchFamily="34" charset="-120"/>
-              </a:rPr>
-              <a:t>크리딜   |   </a:t>
-            </a:r>
-            <a:endParaRPr lang="en-US" sz="800" dirty="0"/>
-          </a:p>
-        </p:txBody>
-      </p:sp>
-      <p:sp>
-        <p:nvSpPr>
-          <p:cNvPr id="12" name="Text 10"/>
-          <p:cNvSpPr/>
-          <p:nvPr/>
-        </p:nvSpPr>
-        <p:spPr>
-          <a:xfrm>
-            <a:off x="10710367" y="6382512"/>
-            <a:ext cx="914400" cy="219456"/>
-          </a:xfrm>
-          <a:prstGeom prst="rect">
-            <a:avLst/>
-          </a:prstGeom>
-          <a:noFill/>
-          <a:ln/>
-        </p:spPr>
-        <p:txBody>
-          <a:bodyPr wrap="square" lIns="0" tIns="0" rIns="0" bIns="0" rtlCol="0" anchor="ctr"/>
-          <a:lstStyle/>
-          <a:p>
-            <a:pPr algn="r" indent="0" marL="0">
-              <a:buNone/>
-            </a:pPr>
-            <a:r>
-              <a:rPr lang="en-US" sz="900" b="1" dirty="0">
-                <a:solidFill>
-                  <a:srgbClr val="B98A2E"/>
-                </a:solidFill>
-                <a:latin typeface="Arial" pitchFamily="34" charset="0"/>
-                <a:ea typeface="Arial" pitchFamily="34" charset="-122"/>
-                <a:cs typeface="Arial" pitchFamily="34" charset="-120"/>
-              </a:rPr>
-              <a:t>16</a:t>
-            </a:r>
-            <a:endParaRPr lang="en-US" sz="900" dirty="0"/>
-          </a:p>
-        </p:txBody>
-      </p:sp>
-    </p:spTree>
-  </p:cSld>
-  <p:clrMapOvr>
-    <a:masterClrMapping/>
-  </p:clrMapOvr>
-</p:sld>
-</file>
-
-<file path=ppt/slides/slide17.xml><?xml version="1.0" encoding="utf-8"?>
-<p:sld xmlns:a="http://schemas.openxmlformats.org/drawingml/2006/main" xmlns:r="http://schemas.openxmlformats.org/officeDocument/2006/relationships" xmlns:p="http://schemas.openxmlformats.org/presentationml/2006/main">
-  <p:cSld name="Slide 17">
     <p:bg>
       <p:bgPr>
         <a:solidFill>
@@ -6036,7 +4484,7 @@
                 <a:ea typeface="Arial" pitchFamily="34" charset="-122"/>
                 <a:cs typeface="Arial" pitchFamily="34" charset="-120"/>
               </a:rPr>
-              <a:t>17</a:t>
+              <a:t>14</a:t>
             </a:r>
             <a:endParaRPr lang="en-US" sz="1300" dirty="0"/>
           </a:p>
@@ -7448,7 +5896,7 @@
                 <a:ea typeface="Arial" pitchFamily="34" charset="-122"/>
                 <a:cs typeface="Arial" pitchFamily="34" charset="-120"/>
               </a:rPr>
-              <a:t>17</a:t>
+              <a:t>14</a:t>
             </a:r>
             <a:endParaRPr lang="en-US" sz="900" dirty="0"/>
           </a:p>

--- a/docs/test/stress/e2e-outputs/income_pro_pr02.pptx
+++ b/docs/test/stress/e2e-outputs/income_pro_pr02.pptx
@@ -19,9 +19,11 @@
     <p:sldId id="267" r:id="rId13"/>
     <p:sldId id="268" r:id="rId14"/>
     <p:sldId id="269" r:id="rId15"/>
+    <p:sldId id="270" r:id="rId16"/>
+    <p:sldId id="271" r:id="rId17"/>
   </p:sldIdLst>
   <p:notesMasterIdLst>
-    <p:notesMasterId r:id="rId16"/>
+    <p:notesMasterId r:id="rId18"/>
   </p:notesMasterIdLst>
   <p:sldSz cx="12192000" cy="6858000"/>
   <p:notesSz cx="6858000" cy="12192000"/>
@@ -979,6 +981,182 @@
             <a:fld id="{F7021451-1387-4CA6-816F-3879F97B5CBC}" type="slidenum">
               <a:rPr lang="en-US"/>
               <a:t>14</a:t>
+            </a:fld>
+            <a:endParaRPr lang="en-US"/>
+          </a:p>
+        </p:txBody>
+      </p:sp>
+    </p:spTree>
+    <p:extLst>
+      <p:ext uri="{BB962C8B-B14F-4D97-AF65-F5344CB8AC3E}">
+        <p14:creationId xmlns:p14="http://schemas.microsoft.com/office/powerpoint/2010/main" val="1024086991"/>
+      </p:ext>
+    </p:extLst>
+  </p:cSld>
+  <p:clrMapOvr>
+    <a:masterClrMapping/>
+  </p:clrMapOvr>
+</p:notes>
+</file>
+
+<file path=ppt/notesSlides/notesSlide15.xml><?xml version="1.0" encoding="utf-8"?>
+<p:notes xmlns:a="http://schemas.openxmlformats.org/drawingml/2006/main" xmlns:r="http://schemas.openxmlformats.org/officeDocument/2006/relationships" xmlns:p="http://schemas.openxmlformats.org/presentationml/2006/main">
+  <p:cSld>
+    <p:spTree>
+      <p:nvGrpSpPr>
+        <p:cNvPr id="1" name=""/>
+        <p:cNvGrpSpPr/>
+        <p:nvPr/>
+      </p:nvGrpSpPr>
+      <p:grpSpPr>
+        <a:xfrm>
+          <a:off x="0" y="0"/>
+          <a:ext cx="0" cy="0"/>
+          <a:chOff x="0" y="0"/>
+          <a:chExt cx="0" cy="0"/>
+        </a:xfrm>
+      </p:grpSpPr>
+      <p:sp>
+        <p:nvSpPr>
+          <p:cNvPr id="2" name="Slide Image Placeholder 1"/>
+          <p:cNvSpPr>
+            <a:spLocks noGrp="1" noRot="1" noChangeAspect="1"/>
+          </p:cNvSpPr>
+          <p:nvPr>
+            <p:ph type="sldImg"/>
+          </p:nvPr>
+        </p:nvSpPr>
+        <p:spPr/>
+      </p:sp>
+      <p:sp>
+        <p:nvSpPr>
+          <p:cNvPr id="3" name="Notes Placeholder 2"/>
+          <p:cNvSpPr>
+            <a:spLocks noGrp="1"/>
+          </p:cNvSpPr>
+          <p:nvPr>
+            <p:ph type="body" idx="1"/>
+          </p:nvPr>
+        </p:nvSpPr>
+        <p:spPr/>
+        <p:txBody>
+          <a:bodyPr/>
+          <a:lstStyle/>
+          <a:p>
+            <a:r>
+              <a:rPr lang="en-US" dirty="0"/>
+              <a:t/>
+            </a:r>
+            <a:endParaRPr lang="en-US" dirty="0"/>
+          </a:p>
+        </p:txBody>
+      </p:sp>
+      <p:sp>
+        <p:nvSpPr>
+          <p:cNvPr id="4" name="Slide Number Placeholder 3"/>
+          <p:cNvSpPr>
+            <a:spLocks noGrp="1"/>
+          </p:cNvSpPr>
+          <p:nvPr>
+            <p:ph type="sldNum" sz="quarter" idx="10"/>
+          </p:nvPr>
+        </p:nvSpPr>
+        <p:spPr/>
+        <p:txBody>
+          <a:bodyPr/>
+          <a:lstStyle/>
+          <a:p>
+            <a:fld id="{F7021451-1387-4CA6-816F-3879F97B5CBC}" type="slidenum">
+              <a:rPr lang="en-US"/>
+              <a:t>15</a:t>
+            </a:fld>
+            <a:endParaRPr lang="en-US"/>
+          </a:p>
+        </p:txBody>
+      </p:sp>
+    </p:spTree>
+    <p:extLst>
+      <p:ext uri="{BB962C8B-B14F-4D97-AF65-F5344CB8AC3E}">
+        <p14:creationId xmlns:p14="http://schemas.microsoft.com/office/powerpoint/2010/main" val="1024086991"/>
+      </p:ext>
+    </p:extLst>
+  </p:cSld>
+  <p:clrMapOvr>
+    <a:masterClrMapping/>
+  </p:clrMapOvr>
+</p:notes>
+</file>
+
+<file path=ppt/notesSlides/notesSlide16.xml><?xml version="1.0" encoding="utf-8"?>
+<p:notes xmlns:a="http://schemas.openxmlformats.org/drawingml/2006/main" xmlns:r="http://schemas.openxmlformats.org/officeDocument/2006/relationships" xmlns:p="http://schemas.openxmlformats.org/presentationml/2006/main">
+  <p:cSld>
+    <p:spTree>
+      <p:nvGrpSpPr>
+        <p:cNvPr id="1" name=""/>
+        <p:cNvGrpSpPr/>
+        <p:nvPr/>
+      </p:nvGrpSpPr>
+      <p:grpSpPr>
+        <a:xfrm>
+          <a:off x="0" y="0"/>
+          <a:ext cx="0" cy="0"/>
+          <a:chOff x="0" y="0"/>
+          <a:chExt cx="0" cy="0"/>
+        </a:xfrm>
+      </p:grpSpPr>
+      <p:sp>
+        <p:nvSpPr>
+          <p:cNvPr id="2" name="Slide Image Placeholder 1"/>
+          <p:cNvSpPr>
+            <a:spLocks noGrp="1" noRot="1" noChangeAspect="1"/>
+          </p:cNvSpPr>
+          <p:nvPr>
+            <p:ph type="sldImg"/>
+          </p:nvPr>
+        </p:nvSpPr>
+        <p:spPr/>
+      </p:sp>
+      <p:sp>
+        <p:nvSpPr>
+          <p:cNvPr id="3" name="Notes Placeholder 2"/>
+          <p:cNvSpPr>
+            <a:spLocks noGrp="1"/>
+          </p:cNvSpPr>
+          <p:nvPr>
+            <p:ph type="body" idx="1"/>
+          </p:nvPr>
+        </p:nvSpPr>
+        <p:spPr/>
+        <p:txBody>
+          <a:bodyPr/>
+          <a:lstStyle/>
+          <a:p>
+            <a:r>
+              <a:rPr lang="en-US" dirty="0"/>
+              <a:t/>
+            </a:r>
+            <a:endParaRPr lang="en-US" dirty="0"/>
+          </a:p>
+        </p:txBody>
+      </p:sp>
+      <p:sp>
+        <p:nvSpPr>
+          <p:cNvPr id="4" name="Slide Number Placeholder 3"/>
+          <p:cNvSpPr>
+            <a:spLocks noGrp="1"/>
+          </p:cNvSpPr>
+          <p:nvPr>
+            <p:ph type="sldNum" sz="quarter" idx="10"/>
+          </p:nvPr>
+        </p:nvSpPr>
+        <p:spPr/>
+        <p:txBody>
+          <a:bodyPr/>
+          <a:lstStyle/>
+          <a:p>
+            <a:fld id="{F7021451-1387-4CA6-816F-3879F97B5CBC}" type="slidenum">
+              <a:rPr lang="en-US"/>
+              <a:t>16</a:t>
             </a:fld>
             <a:endParaRPr lang="en-US"/>
           </a:p>
@@ -2597,7 +2775,7 @@
               <a:buNone/>
             </a:pPr>
             <a:r>
-              <a:rPr lang="en-US" sz="850" dirty="0">
+              <a:rPr lang="en-US" sz="900" dirty="0">
                 <a:solidFill>
                   <a:srgbClr val="718096"/>
                 </a:solidFill>
@@ -2607,7 +2785,7 @@
               </a:rPr>
               <a:t>박민호  |  리얼티코리아</a:t>
             </a:r>
-            <a:endParaRPr lang="en-US" sz="850" dirty="0"/>
+            <a:endParaRPr lang="en-US" sz="900" dirty="0"/>
           </a:p>
         </p:txBody>
       </p:sp>
@@ -2774,7 +2952,7 @@
                 <a:ea typeface="Arial" pitchFamily="34" charset="-122"/>
                 <a:cs typeface="Arial" pitchFamily="34" charset="-120"/>
               </a:rPr>
-              <a:t>10</a:t>
+              <a:t>09</a:t>
             </a:r>
             <a:endParaRPr lang="en-US" sz="1300" dirty="0"/>
           </a:p>
@@ -2813,7 +2991,7 @@
                 <a:ea typeface="Arial" pitchFamily="34" charset="-122"/>
                 <a:cs typeface="Arial" pitchFamily="34" charset="-120"/>
               </a:rPr>
-              <a:t>DCF</a:t>
+              <a:t>Capital</a:t>
             </a:r>
             <a:endParaRPr lang="en-US" sz="950" dirty="0"/>
           </a:p>
@@ -2852,7 +3030,7 @@
                 <a:ea typeface="Pretendard" pitchFamily="34" charset="-122"/>
                 <a:cs typeface="Pretendard" pitchFamily="34" charset="-120"/>
               </a:rPr>
-              <a:t>DCF 분석</a:t>
+              <a:t>투자 및 자본 조달 구조 분석</a:t>
             </a:r>
             <a:endParaRPr lang="en-US" sz="2300" dirty="0"/>
           </a:p>
@@ -2866,16 +3044,20 @@
         </p:nvSpPr>
         <p:spPr>
           <a:xfrm>
-            <a:off x="566928" y="1325880"/>
-            <a:ext cx="11057839" cy="0"/>
-          </a:xfrm>
-          <a:prstGeom prst="line">
-            <a:avLst/>
-          </a:prstGeom>
-          <a:noFill/>
-          <a:ln w="19050">
+            <a:off x="566928" y="1417320"/>
+            <a:ext cx="5391760" cy="4389120"/>
+          </a:xfrm>
+          <a:prstGeom prst="roundRect">
+            <a:avLst>
+              <a:gd name="adj" fmla="val 1250"/>
+            </a:avLst>
+          </a:prstGeom>
+          <a:solidFill>
+            <a:srgbClr val="F7FAFC"/>
+          </a:solidFill>
+          <a:ln w="6350">
             <a:solidFill>
-              <a:srgbClr val="B98A2E"/>
+              <a:srgbClr val="CBD5E0"/>
             </a:solidFill>
             <a:prstDash val="solid"/>
           </a:ln>
@@ -2889,8 +3071,8 @@
         </p:nvSpPr>
         <p:spPr>
           <a:xfrm>
-            <a:off x="566928" y="6382512"/>
-            <a:ext cx="7315200" cy="219456"/>
+            <a:off x="795528" y="1618488"/>
+            <a:ext cx="4934560" cy="320040"/>
           </a:xfrm>
           <a:prstGeom prst="rect">
             <a:avLst/>
@@ -2906,14 +3088,2482 @@
               <a:buNone/>
             </a:pPr>
             <a:r>
-              <a:rPr lang="en-US" sz="800" dirty="0">
-                <a:solidFill>
-                  <a:srgbClr val="718096"/>
+              <a:rPr lang="en-US" sz="1350" b="1" dirty="0">
+                <a:solidFill>
+                  <a:srgbClr val="977024"/>
                 </a:solidFill>
                 <a:latin typeface="Pretendard" pitchFamily="34" charset="0"/>
                 <a:ea typeface="Pretendard" pitchFamily="34" charset="-122"/>
                 <a:cs typeface="Pretendard" pitchFamily="34" charset="-120"/>
               </a:rPr>
+              <a:t>1. 총취득원가 및 자기자본 소요</a:t>
+            </a:r>
+            <a:endParaRPr lang="en-US" sz="1350" dirty="0"/>
+          </a:p>
+        </p:txBody>
+      </p:sp>
+      <p:sp>
+        <p:nvSpPr>
+          <p:cNvPr id="8" name="Text 6"/>
+          <p:cNvSpPr/>
+          <p:nvPr/>
+        </p:nvSpPr>
+        <p:spPr>
+          <a:xfrm>
+            <a:off x="795528" y="2011680"/>
+            <a:ext cx="1875133" cy="475488"/>
+          </a:xfrm>
+          <a:prstGeom prst="rect">
+            <a:avLst/>
+          </a:prstGeom>
+          <a:noFill/>
+          <a:ln/>
+        </p:spPr>
+        <p:txBody>
+          <a:bodyPr wrap="square" lIns="0" tIns="0" rIns="0" bIns="0" rtlCol="0" anchor="ctr"/>
+          <a:lstStyle/>
+          <a:p>
+            <a:pPr indent="0" marL="0">
+              <a:lnSpc>
+                <a:spcPct val="120000"/>
+              </a:lnSpc>
+              <a:buNone/>
+            </a:pPr>
+            <a:r>
+              <a:rPr lang="en-US" sz="1150" dirty="0">
+                <a:solidFill>
+                  <a:srgbClr val="718096"/>
+                </a:solidFill>
+                <a:latin typeface="Pretendard" pitchFamily="34" charset="0"/>
+                <a:ea typeface="Pretendard" pitchFamily="34" charset="-122"/>
+                <a:cs typeface="Pretendard" pitchFamily="34" charset="-120"/>
+              </a:rPr>
+              <a:t>매매 희망가 (A)</a:t>
+            </a:r>
+            <a:endParaRPr lang="en-US" sz="1150" dirty="0"/>
+          </a:p>
+        </p:txBody>
+      </p:sp>
+      <p:sp>
+        <p:nvSpPr>
+          <p:cNvPr id="9" name="Text 7"/>
+          <p:cNvSpPr/>
+          <p:nvPr/>
+        </p:nvSpPr>
+        <p:spPr>
+          <a:xfrm>
+            <a:off x="2670661" y="2011680"/>
+            <a:ext cx="3059427" cy="475488"/>
+          </a:xfrm>
+          <a:prstGeom prst="rect">
+            <a:avLst/>
+          </a:prstGeom>
+          <a:noFill/>
+          <a:ln/>
+        </p:spPr>
+        <p:txBody>
+          <a:bodyPr wrap="square" lIns="0" tIns="0" rIns="0" bIns="0" rtlCol="0" anchor="ctr"/>
+          <a:lstStyle/>
+          <a:p>
+            <a:pPr indent="0" marL="0">
+              <a:lnSpc>
+                <a:spcPct val="120000"/>
+              </a:lnSpc>
+              <a:buNone/>
+            </a:pPr>
+            <a:r>
+              <a:rPr lang="en-US" sz="1150" b="1" dirty="0">
+                <a:solidFill>
+                  <a:srgbClr val="10161F"/>
+                </a:solidFill>
+                <a:latin typeface="Pretendard" pitchFamily="34" charset="0"/>
+                <a:ea typeface="Pretendard" pitchFamily="34" charset="-122"/>
+                <a:cs typeface="Pretendard" pitchFamily="34" charset="-120"/>
+              </a:rPr>
+              <a:t>165.0억 원</a:t>
+            </a:r>
+            <a:endParaRPr lang="en-US" sz="1150" dirty="0"/>
+          </a:p>
+        </p:txBody>
+      </p:sp>
+      <p:sp>
+        <p:nvSpPr>
+          <p:cNvPr id="10" name="Shape 8"/>
+          <p:cNvSpPr/>
+          <p:nvPr/>
+        </p:nvSpPr>
+        <p:spPr>
+          <a:xfrm>
+            <a:off x="795528" y="2487168"/>
+            <a:ext cx="4934560" cy="0"/>
+          </a:xfrm>
+          <a:prstGeom prst="line">
+            <a:avLst/>
+          </a:prstGeom>
+          <a:noFill/>
+          <a:ln w="3810">
+            <a:solidFill>
+              <a:srgbClr val="CBD5E0"/>
+            </a:solidFill>
+            <a:prstDash val="solid"/>
+          </a:ln>
+        </p:spPr>
+      </p:sp>
+      <p:sp>
+        <p:nvSpPr>
+          <p:cNvPr id="11" name="Text 9"/>
+          <p:cNvSpPr/>
+          <p:nvPr/>
+        </p:nvSpPr>
+        <p:spPr>
+          <a:xfrm>
+            <a:off x="795528" y="2487168"/>
+            <a:ext cx="1875133" cy="475488"/>
+          </a:xfrm>
+          <a:prstGeom prst="rect">
+            <a:avLst/>
+          </a:prstGeom>
+          <a:noFill/>
+          <a:ln/>
+        </p:spPr>
+        <p:txBody>
+          <a:bodyPr wrap="square" lIns="0" tIns="0" rIns="0" bIns="0" rtlCol="0" anchor="ctr"/>
+          <a:lstStyle/>
+          <a:p>
+            <a:pPr indent="0" marL="0">
+              <a:lnSpc>
+                <a:spcPct val="120000"/>
+              </a:lnSpc>
+              <a:buNone/>
+            </a:pPr>
+            <a:r>
+              <a:rPr lang="en-US" sz="1150" dirty="0">
+                <a:solidFill>
+                  <a:srgbClr val="718096"/>
+                </a:solidFill>
+                <a:latin typeface="Pretendard" pitchFamily="34" charset="0"/>
+                <a:ea typeface="Pretendard" pitchFamily="34" charset="-122"/>
+                <a:cs typeface="Pretendard" pitchFamily="34" charset="-120"/>
+              </a:rPr>
+              <a:t>취득세 (4.6% 법정)</a:t>
+            </a:r>
+            <a:endParaRPr lang="en-US" sz="1150" dirty="0"/>
+          </a:p>
+        </p:txBody>
+      </p:sp>
+      <p:sp>
+        <p:nvSpPr>
+          <p:cNvPr id="12" name="Text 10"/>
+          <p:cNvSpPr/>
+          <p:nvPr/>
+        </p:nvSpPr>
+        <p:spPr>
+          <a:xfrm>
+            <a:off x="2670661" y="2487168"/>
+            <a:ext cx="3059427" cy="475488"/>
+          </a:xfrm>
+          <a:prstGeom prst="rect">
+            <a:avLst/>
+          </a:prstGeom>
+          <a:noFill/>
+          <a:ln/>
+        </p:spPr>
+        <p:txBody>
+          <a:bodyPr wrap="square" lIns="0" tIns="0" rIns="0" bIns="0" rtlCol="0" anchor="ctr"/>
+          <a:lstStyle/>
+          <a:p>
+            <a:pPr indent="0" marL="0">
+              <a:lnSpc>
+                <a:spcPct val="120000"/>
+              </a:lnSpc>
+              <a:buNone/>
+            </a:pPr>
+            <a:r>
+              <a:rPr lang="en-US" sz="1150" b="1" dirty="0">
+                <a:solidFill>
+                  <a:srgbClr val="10161F"/>
+                </a:solidFill>
+                <a:latin typeface="Pretendard" pitchFamily="34" charset="0"/>
+                <a:ea typeface="Pretendard" pitchFamily="34" charset="-122"/>
+                <a:cs typeface="Pretendard" pitchFamily="34" charset="-120"/>
+              </a:rPr>
+              <a:t>7.59억 원</a:t>
+            </a:r>
+            <a:endParaRPr lang="en-US" sz="1150" dirty="0"/>
+          </a:p>
+        </p:txBody>
+      </p:sp>
+      <p:sp>
+        <p:nvSpPr>
+          <p:cNvPr id="13" name="Shape 11"/>
+          <p:cNvSpPr/>
+          <p:nvPr/>
+        </p:nvSpPr>
+        <p:spPr>
+          <a:xfrm>
+            <a:off x="795528" y="2962656"/>
+            <a:ext cx="4934560" cy="0"/>
+          </a:xfrm>
+          <a:prstGeom prst="line">
+            <a:avLst/>
+          </a:prstGeom>
+          <a:noFill/>
+          <a:ln w="3810">
+            <a:solidFill>
+              <a:srgbClr val="CBD5E0"/>
+            </a:solidFill>
+            <a:prstDash val="solid"/>
+          </a:ln>
+        </p:spPr>
+      </p:sp>
+      <p:sp>
+        <p:nvSpPr>
+          <p:cNvPr id="14" name="Text 12"/>
+          <p:cNvSpPr/>
+          <p:nvPr/>
+        </p:nvSpPr>
+        <p:spPr>
+          <a:xfrm>
+            <a:off x="795528" y="2962656"/>
+            <a:ext cx="1875133" cy="475488"/>
+          </a:xfrm>
+          <a:prstGeom prst="rect">
+            <a:avLst/>
+          </a:prstGeom>
+          <a:noFill/>
+          <a:ln/>
+        </p:spPr>
+        <p:txBody>
+          <a:bodyPr wrap="square" lIns="0" tIns="0" rIns="0" bIns="0" rtlCol="0" anchor="ctr"/>
+          <a:lstStyle/>
+          <a:p>
+            <a:pPr indent="0" marL="0">
+              <a:lnSpc>
+                <a:spcPct val="120000"/>
+              </a:lnSpc>
+              <a:buNone/>
+            </a:pPr>
+            <a:r>
+              <a:rPr lang="en-US" sz="1150" dirty="0">
+                <a:solidFill>
+                  <a:srgbClr val="718096"/>
+                </a:solidFill>
+                <a:latin typeface="Pretendard" pitchFamily="34" charset="0"/>
+                <a:ea typeface="Pretendard" pitchFamily="34" charset="-122"/>
+                <a:cs typeface="Pretendard" pitchFamily="34" charset="-120"/>
+              </a:rPr>
+              <a:t>중개보수 (0.9% 한도)</a:t>
+            </a:r>
+            <a:endParaRPr lang="en-US" sz="1150" dirty="0"/>
+          </a:p>
+        </p:txBody>
+      </p:sp>
+      <p:sp>
+        <p:nvSpPr>
+          <p:cNvPr id="15" name="Text 13"/>
+          <p:cNvSpPr/>
+          <p:nvPr/>
+        </p:nvSpPr>
+        <p:spPr>
+          <a:xfrm>
+            <a:off x="2670661" y="2962656"/>
+            <a:ext cx="3059427" cy="475488"/>
+          </a:xfrm>
+          <a:prstGeom prst="rect">
+            <a:avLst/>
+          </a:prstGeom>
+          <a:noFill/>
+          <a:ln/>
+        </p:spPr>
+        <p:txBody>
+          <a:bodyPr wrap="square" lIns="0" tIns="0" rIns="0" bIns="0" rtlCol="0" anchor="ctr"/>
+          <a:lstStyle/>
+          <a:p>
+            <a:pPr indent="0" marL="0">
+              <a:lnSpc>
+                <a:spcPct val="120000"/>
+              </a:lnSpc>
+              <a:buNone/>
+            </a:pPr>
+            <a:r>
+              <a:rPr lang="en-US" sz="1150" b="1" dirty="0">
+                <a:solidFill>
+                  <a:srgbClr val="10161F"/>
+                </a:solidFill>
+                <a:latin typeface="Pretendard" pitchFamily="34" charset="0"/>
+                <a:ea typeface="Pretendard" pitchFamily="34" charset="-122"/>
+                <a:cs typeface="Pretendard" pitchFamily="34" charset="-120"/>
+              </a:rPr>
+              <a:t>1.49억 원</a:t>
+            </a:r>
+            <a:endParaRPr lang="en-US" sz="1150" dirty="0"/>
+          </a:p>
+        </p:txBody>
+      </p:sp>
+      <p:sp>
+        <p:nvSpPr>
+          <p:cNvPr id="16" name="Shape 14"/>
+          <p:cNvSpPr/>
+          <p:nvPr/>
+        </p:nvSpPr>
+        <p:spPr>
+          <a:xfrm>
+            <a:off x="795528" y="3438144"/>
+            <a:ext cx="4934560" cy="0"/>
+          </a:xfrm>
+          <a:prstGeom prst="line">
+            <a:avLst/>
+          </a:prstGeom>
+          <a:noFill/>
+          <a:ln w="3810">
+            <a:solidFill>
+              <a:srgbClr val="CBD5E0"/>
+            </a:solidFill>
+            <a:prstDash val="solid"/>
+          </a:ln>
+        </p:spPr>
+      </p:sp>
+      <p:sp>
+        <p:nvSpPr>
+          <p:cNvPr id="17" name="Text 15"/>
+          <p:cNvSpPr/>
+          <p:nvPr/>
+        </p:nvSpPr>
+        <p:spPr>
+          <a:xfrm>
+            <a:off x="795528" y="3438144"/>
+            <a:ext cx="1875133" cy="475488"/>
+          </a:xfrm>
+          <a:prstGeom prst="rect">
+            <a:avLst/>
+          </a:prstGeom>
+          <a:noFill/>
+          <a:ln/>
+        </p:spPr>
+        <p:txBody>
+          <a:bodyPr wrap="square" lIns="0" tIns="0" rIns="0" bIns="0" rtlCol="0" anchor="ctr"/>
+          <a:lstStyle/>
+          <a:p>
+            <a:pPr indent="0" marL="0">
+              <a:lnSpc>
+                <a:spcPct val="120000"/>
+              </a:lnSpc>
+              <a:buNone/>
+            </a:pPr>
+            <a:r>
+              <a:rPr lang="en-US" sz="1150" dirty="0">
+                <a:solidFill>
+                  <a:srgbClr val="718096"/>
+                </a:solidFill>
+                <a:latin typeface="Pretendard" pitchFamily="34" charset="0"/>
+                <a:ea typeface="Pretendard" pitchFamily="34" charset="-122"/>
+                <a:cs typeface="Pretendard" pitchFamily="34" charset="-120"/>
+              </a:rPr>
+              <a:t>총취득원가 (A + 세/비용)</a:t>
+            </a:r>
+            <a:endParaRPr lang="en-US" sz="1150" dirty="0"/>
+          </a:p>
+        </p:txBody>
+      </p:sp>
+      <p:sp>
+        <p:nvSpPr>
+          <p:cNvPr id="18" name="Text 16"/>
+          <p:cNvSpPr/>
+          <p:nvPr/>
+        </p:nvSpPr>
+        <p:spPr>
+          <a:xfrm>
+            <a:off x="2670661" y="3438144"/>
+            <a:ext cx="3059427" cy="475488"/>
+          </a:xfrm>
+          <a:prstGeom prst="rect">
+            <a:avLst/>
+          </a:prstGeom>
+          <a:noFill/>
+          <a:ln/>
+        </p:spPr>
+        <p:txBody>
+          <a:bodyPr wrap="square" lIns="0" tIns="0" rIns="0" bIns="0" rtlCol="0" anchor="ctr"/>
+          <a:lstStyle/>
+          <a:p>
+            <a:pPr indent="0" marL="0">
+              <a:lnSpc>
+                <a:spcPct val="120000"/>
+              </a:lnSpc>
+              <a:buNone/>
+            </a:pPr>
+            <a:r>
+              <a:rPr lang="en-US" sz="1150" b="1" dirty="0">
+                <a:solidFill>
+                  <a:srgbClr val="10161F"/>
+                </a:solidFill>
+                <a:latin typeface="Pretendard" pitchFamily="34" charset="0"/>
+                <a:ea typeface="Pretendard" pitchFamily="34" charset="-122"/>
+                <a:cs typeface="Pretendard" pitchFamily="34" charset="-120"/>
+              </a:rPr>
+              <a:t>174.1억 원</a:t>
+            </a:r>
+            <a:endParaRPr lang="en-US" sz="1150" dirty="0"/>
+          </a:p>
+        </p:txBody>
+      </p:sp>
+      <p:sp>
+        <p:nvSpPr>
+          <p:cNvPr id="19" name="Shape 17"/>
+          <p:cNvSpPr/>
+          <p:nvPr/>
+        </p:nvSpPr>
+        <p:spPr>
+          <a:xfrm>
+            <a:off x="795528" y="3913632"/>
+            <a:ext cx="4934560" cy="0"/>
+          </a:xfrm>
+          <a:prstGeom prst="line">
+            <a:avLst/>
+          </a:prstGeom>
+          <a:noFill/>
+          <a:ln w="3810">
+            <a:solidFill>
+              <a:srgbClr val="CBD5E0"/>
+            </a:solidFill>
+            <a:prstDash val="solid"/>
+          </a:ln>
+        </p:spPr>
+      </p:sp>
+      <p:sp>
+        <p:nvSpPr>
+          <p:cNvPr id="20" name="Text 18"/>
+          <p:cNvSpPr/>
+          <p:nvPr/>
+        </p:nvSpPr>
+        <p:spPr>
+          <a:xfrm>
+            <a:off x="795528" y="3913632"/>
+            <a:ext cx="1875133" cy="475488"/>
+          </a:xfrm>
+          <a:prstGeom prst="rect">
+            <a:avLst/>
+          </a:prstGeom>
+          <a:noFill/>
+          <a:ln/>
+        </p:spPr>
+        <p:txBody>
+          <a:bodyPr wrap="square" lIns="0" tIns="0" rIns="0" bIns="0" rtlCol="0" anchor="ctr"/>
+          <a:lstStyle/>
+          <a:p>
+            <a:pPr indent="0" marL="0">
+              <a:lnSpc>
+                <a:spcPct val="120000"/>
+              </a:lnSpc>
+              <a:buNone/>
+            </a:pPr>
+            <a:r>
+              <a:rPr lang="en-US" sz="1150" dirty="0">
+                <a:solidFill>
+                  <a:srgbClr val="718096"/>
+                </a:solidFill>
+                <a:latin typeface="Pretendard" pitchFamily="34" charset="0"/>
+                <a:ea typeface="Pretendard" pitchFamily="34" charset="-122"/>
+                <a:cs typeface="Pretendard" pitchFamily="34" charset="-120"/>
+              </a:rPr>
+              <a:t>(-) 임대보증금 승계</a:t>
+            </a:r>
+            <a:endParaRPr lang="en-US" sz="1150" dirty="0"/>
+          </a:p>
+        </p:txBody>
+      </p:sp>
+      <p:sp>
+        <p:nvSpPr>
+          <p:cNvPr id="21" name="Text 19"/>
+          <p:cNvSpPr/>
+          <p:nvPr/>
+        </p:nvSpPr>
+        <p:spPr>
+          <a:xfrm>
+            <a:off x="2670661" y="3913632"/>
+            <a:ext cx="3059427" cy="475488"/>
+          </a:xfrm>
+          <a:prstGeom prst="rect">
+            <a:avLst/>
+          </a:prstGeom>
+          <a:noFill/>
+          <a:ln/>
+        </p:spPr>
+        <p:txBody>
+          <a:bodyPr wrap="square" lIns="0" tIns="0" rIns="0" bIns="0" rtlCol="0" anchor="ctr"/>
+          <a:lstStyle/>
+          <a:p>
+            <a:pPr indent="0" marL="0">
+              <a:lnSpc>
+                <a:spcPct val="120000"/>
+              </a:lnSpc>
+              <a:buNone/>
+            </a:pPr>
+            <a:r>
+              <a:rPr lang="en-US" sz="1150" b="1" dirty="0">
+                <a:solidFill>
+                  <a:srgbClr val="10161F"/>
+                </a:solidFill>
+                <a:latin typeface="Pretendard" pitchFamily="34" charset="0"/>
+                <a:ea typeface="Pretendard" pitchFamily="34" charset="-122"/>
+                <a:cs typeface="Pretendard" pitchFamily="34" charset="-120"/>
+              </a:rPr>
+              <a:t>8.3억 원</a:t>
+            </a:r>
+            <a:endParaRPr lang="en-US" sz="1150" dirty="0"/>
+          </a:p>
+        </p:txBody>
+      </p:sp>
+      <p:sp>
+        <p:nvSpPr>
+          <p:cNvPr id="22" name="Shape 20"/>
+          <p:cNvSpPr/>
+          <p:nvPr/>
+        </p:nvSpPr>
+        <p:spPr>
+          <a:xfrm>
+            <a:off x="795528" y="4389120"/>
+            <a:ext cx="4934560" cy="0"/>
+          </a:xfrm>
+          <a:prstGeom prst="line">
+            <a:avLst/>
+          </a:prstGeom>
+          <a:noFill/>
+          <a:ln w="3810">
+            <a:solidFill>
+              <a:srgbClr val="CBD5E0"/>
+            </a:solidFill>
+            <a:prstDash val="solid"/>
+          </a:ln>
+        </p:spPr>
+      </p:sp>
+      <p:sp>
+        <p:nvSpPr>
+          <p:cNvPr id="23" name="Text 21"/>
+          <p:cNvSpPr/>
+          <p:nvPr/>
+        </p:nvSpPr>
+        <p:spPr>
+          <a:xfrm>
+            <a:off x="795528" y="4389120"/>
+            <a:ext cx="1875133" cy="475488"/>
+          </a:xfrm>
+          <a:prstGeom prst="rect">
+            <a:avLst/>
+          </a:prstGeom>
+          <a:noFill/>
+          <a:ln/>
+        </p:spPr>
+        <p:txBody>
+          <a:bodyPr wrap="square" lIns="0" tIns="0" rIns="0" bIns="0" rtlCol="0" anchor="ctr"/>
+          <a:lstStyle/>
+          <a:p>
+            <a:pPr indent="0" marL="0">
+              <a:lnSpc>
+                <a:spcPct val="120000"/>
+              </a:lnSpc>
+              <a:buNone/>
+            </a:pPr>
+            <a:r>
+              <a:rPr lang="en-US" sz="1150" dirty="0">
+                <a:solidFill>
+                  <a:srgbClr val="718096"/>
+                </a:solidFill>
+                <a:latin typeface="Pretendard" pitchFamily="34" charset="0"/>
+                <a:ea typeface="Pretendard" pitchFamily="34" charset="-122"/>
+                <a:cs typeface="Pretendard" pitchFamily="34" charset="-120"/>
+              </a:rPr>
+              <a:t>(-) 담보대출 조달</a:t>
+            </a:r>
+            <a:endParaRPr lang="en-US" sz="1150" dirty="0"/>
+          </a:p>
+        </p:txBody>
+      </p:sp>
+      <p:sp>
+        <p:nvSpPr>
+          <p:cNvPr id="24" name="Text 22"/>
+          <p:cNvSpPr/>
+          <p:nvPr/>
+        </p:nvSpPr>
+        <p:spPr>
+          <a:xfrm>
+            <a:off x="2670661" y="4389120"/>
+            <a:ext cx="3059427" cy="475488"/>
+          </a:xfrm>
+          <a:prstGeom prst="rect">
+            <a:avLst/>
+          </a:prstGeom>
+          <a:noFill/>
+          <a:ln/>
+        </p:spPr>
+        <p:txBody>
+          <a:bodyPr wrap="square" lIns="0" tIns="0" rIns="0" bIns="0" rtlCol="0" anchor="ctr"/>
+          <a:lstStyle/>
+          <a:p>
+            <a:pPr indent="0" marL="0">
+              <a:lnSpc>
+                <a:spcPct val="120000"/>
+              </a:lnSpc>
+              <a:buNone/>
+            </a:pPr>
+            <a:r>
+              <a:rPr lang="en-US" sz="1150" b="1" dirty="0">
+                <a:solidFill>
+                  <a:srgbClr val="10161F"/>
+                </a:solidFill>
+                <a:latin typeface="Pretendard" pitchFamily="34" charset="0"/>
+                <a:ea typeface="Pretendard" pitchFamily="34" charset="-122"/>
+                <a:cs typeface="Pretendard" pitchFamily="34" charset="-120"/>
+              </a:rPr>
+              <a:t>82.5억 원</a:t>
+            </a:r>
+            <a:endParaRPr lang="en-US" sz="1150" dirty="0"/>
+          </a:p>
+        </p:txBody>
+      </p:sp>
+      <p:sp>
+        <p:nvSpPr>
+          <p:cNvPr id="25" name="Shape 23"/>
+          <p:cNvSpPr/>
+          <p:nvPr/>
+        </p:nvSpPr>
+        <p:spPr>
+          <a:xfrm>
+            <a:off x="795528" y="4864608"/>
+            <a:ext cx="4934560" cy="0"/>
+          </a:xfrm>
+          <a:prstGeom prst="line">
+            <a:avLst/>
+          </a:prstGeom>
+          <a:noFill/>
+          <a:ln w="3810">
+            <a:solidFill>
+              <a:srgbClr val="CBD5E0"/>
+            </a:solidFill>
+            <a:prstDash val="solid"/>
+          </a:ln>
+        </p:spPr>
+      </p:sp>
+      <p:sp>
+        <p:nvSpPr>
+          <p:cNvPr id="26" name="Text 24"/>
+          <p:cNvSpPr/>
+          <p:nvPr/>
+        </p:nvSpPr>
+        <p:spPr>
+          <a:xfrm>
+            <a:off x="795528" y="4864608"/>
+            <a:ext cx="1875133" cy="475488"/>
+          </a:xfrm>
+          <a:prstGeom prst="rect">
+            <a:avLst/>
+          </a:prstGeom>
+          <a:noFill/>
+          <a:ln/>
+        </p:spPr>
+        <p:txBody>
+          <a:bodyPr wrap="square" lIns="0" tIns="0" rIns="0" bIns="0" rtlCol="0" anchor="ctr"/>
+          <a:lstStyle/>
+          <a:p>
+            <a:pPr indent="0" marL="0">
+              <a:lnSpc>
+                <a:spcPct val="120000"/>
+              </a:lnSpc>
+              <a:buNone/>
+            </a:pPr>
+            <a:r>
+              <a:rPr lang="en-US" sz="1150" dirty="0">
+                <a:solidFill>
+                  <a:srgbClr val="718096"/>
+                </a:solidFill>
+                <a:latin typeface="Pretendard" pitchFamily="34" charset="0"/>
+                <a:ea typeface="Pretendard" pitchFamily="34" charset="-122"/>
+                <a:cs typeface="Pretendard" pitchFamily="34" charset="-120"/>
+              </a:rPr>
+              <a:t>실투자금 (Net Equity)</a:t>
+            </a:r>
+            <a:endParaRPr lang="en-US" sz="1150" dirty="0"/>
+          </a:p>
+        </p:txBody>
+      </p:sp>
+      <p:sp>
+        <p:nvSpPr>
+          <p:cNvPr id="27" name="Text 25"/>
+          <p:cNvSpPr/>
+          <p:nvPr/>
+        </p:nvSpPr>
+        <p:spPr>
+          <a:xfrm>
+            <a:off x="2670661" y="4864608"/>
+            <a:ext cx="3059427" cy="475488"/>
+          </a:xfrm>
+          <a:prstGeom prst="rect">
+            <a:avLst/>
+          </a:prstGeom>
+          <a:noFill/>
+          <a:ln/>
+        </p:spPr>
+        <p:txBody>
+          <a:bodyPr wrap="square" lIns="0" tIns="0" rIns="0" bIns="0" rtlCol="0" anchor="ctr"/>
+          <a:lstStyle/>
+          <a:p>
+            <a:pPr indent="0" marL="0">
+              <a:lnSpc>
+                <a:spcPct val="120000"/>
+              </a:lnSpc>
+              <a:buNone/>
+            </a:pPr>
+            <a:r>
+              <a:rPr lang="en-US" sz="1150" b="1" dirty="0">
+                <a:solidFill>
+                  <a:srgbClr val="10161F"/>
+                </a:solidFill>
+                <a:latin typeface="Pretendard" pitchFamily="34" charset="0"/>
+                <a:ea typeface="Pretendard" pitchFamily="34" charset="-122"/>
+                <a:cs typeface="Pretendard" pitchFamily="34" charset="-120"/>
+              </a:rPr>
+              <a:t>83.3억 원</a:t>
+            </a:r>
+            <a:endParaRPr lang="en-US" sz="1150" dirty="0"/>
+          </a:p>
+        </p:txBody>
+      </p:sp>
+      <p:sp>
+        <p:nvSpPr>
+          <p:cNvPr id="28" name="Shape 26"/>
+          <p:cNvSpPr/>
+          <p:nvPr/>
+        </p:nvSpPr>
+        <p:spPr>
+          <a:xfrm>
+            <a:off x="6233008" y="1417320"/>
+            <a:ext cx="5391760" cy="4389120"/>
+          </a:xfrm>
+          <a:prstGeom prst="roundRect">
+            <a:avLst>
+              <a:gd name="adj" fmla="val 1250"/>
+            </a:avLst>
+          </a:prstGeom>
+          <a:solidFill>
+            <a:srgbClr val="F7FAFC"/>
+          </a:solidFill>
+          <a:ln w="6350">
+            <a:solidFill>
+              <a:srgbClr val="CBD5E0"/>
+            </a:solidFill>
+            <a:prstDash val="solid"/>
+          </a:ln>
+        </p:spPr>
+      </p:sp>
+      <p:sp>
+        <p:nvSpPr>
+          <p:cNvPr id="29" name="Text 27"/>
+          <p:cNvSpPr/>
+          <p:nvPr/>
+        </p:nvSpPr>
+        <p:spPr>
+          <a:xfrm>
+            <a:off x="6461608" y="1618488"/>
+            <a:ext cx="4934560" cy="320040"/>
+          </a:xfrm>
+          <a:prstGeom prst="rect">
+            <a:avLst/>
+          </a:prstGeom>
+          <a:noFill/>
+          <a:ln/>
+        </p:spPr>
+        <p:txBody>
+          <a:bodyPr wrap="square" lIns="0" tIns="0" rIns="0" bIns="0" rtlCol="0" anchor="ctr"/>
+          <a:lstStyle/>
+          <a:p>
+            <a:pPr indent="0" marL="0">
+              <a:buNone/>
+            </a:pPr>
+            <a:r>
+              <a:rPr lang="en-US" sz="1350" b="1" dirty="0">
+                <a:solidFill>
+                  <a:srgbClr val="977024"/>
+                </a:solidFill>
+                <a:latin typeface="Pretendard" pitchFamily="34" charset="0"/>
+                <a:ea typeface="Pretendard" pitchFamily="34" charset="-122"/>
+                <a:cs typeface="Pretendard" pitchFamily="34" charset="-120"/>
+              </a:rPr>
+              <a:t>2. LTV 시나리오별 레버리지 효과</a:t>
+            </a:r>
+            <a:endParaRPr lang="en-US" sz="1350" dirty="0"/>
+          </a:p>
+        </p:txBody>
+      </p:sp>
+      <p:graphicFrame>
+        <p:nvGraphicFramePr>
+          <p:cNvPr id="11" name="Table 0"/>
+          <p:cNvGraphicFramePr>
+            <a:graphicFrameLocks noGrp="1"/>
+          </p:cNvGraphicFramePr>
+          <p:nvPr>
+            <p:extLst>
+              <p:ext uri="{D42A27DB-BD31-4B8C-83A1-F6EECF244321}">
+                <p14:modId xmlns:p14="http://schemas.microsoft.com/office/powerpoint/2010/main" val="1579011935"/>
+              </p:ext>
+            </p:extLst>
+          </p:nvPr>
+        </p:nvGraphicFramePr>
+        <p:xfrm>
+          <a:off x="6461608" y="2057400"/>
+          <a:ext cx="4934560" cy="914400"/>
+        </p:xfrm>
+        <a:graphic>
+          <a:graphicData uri="http://schemas.openxmlformats.org/drawingml/2006/table">
+            <a:tbl>
+              <a:tblPr/>
+              <a:tblGrid>
+                <a:gridCol w="1463040"/>
+                <a:gridCol w="1005840"/>
+                <a:gridCol w="1280160"/>
+                <a:gridCol w="1280160"/>
+              </a:tblGrid>
+              <a:tr h="457200">
+                <a:tc>
+                  <a:txBody>
+                    <a:bodyPr/>
+                    <a:lstStyle/>
+                    <a:p>
+                      <a:pPr indent="0" marL="0">
+                        <a:buNone/>
+                      </a:pPr>
+                      <a:r>
+                        <a:rPr lang="en-US" sz="1100" b="1" dirty="0">
+                          <a:solidFill>
+                            <a:srgbClr val="718096"/>
+                          </a:solidFill>
+                          <a:latin typeface="Pretendard" pitchFamily="34" charset="0"/>
+                          <a:ea typeface="Pretendard" pitchFamily="34" charset="-122"/>
+                          <a:cs typeface="Pretendard" pitchFamily="34" charset="-120"/>
+                        </a:rPr>
+                        <a:t>구분</a:t>
+                      </a:r>
+                      <a:endParaRPr lang="en-US" sz="1100" dirty="0">
+                        <a:latin typeface="Pretendard" charset="0"/>
+                        <a:ea typeface="Pretendard" charset="0"/>
+                        <a:cs typeface="Pretendard" charset="0"/>
+                      </a:endParaRPr>
+                    </a:p>
+                  </a:txBody>
+                  <a:tcPr marL="50800" marR="50800" marT="25400" marB="25400" anchor="ctr">
+                    <a:lnL w="3810" cap="flat" cmpd="sng" algn="ctr">
+                      <a:solidFill>
+                        <a:srgbClr val="CBD5E0"/>
+                      </a:solidFill>
+                      <a:prstDash val="solid"/>
+                      <a:round/>
+                      <a:headEnd type="none" w="med" len="med"/>
+                      <a:tailEnd type="none" w="med" len="med"/>
+                    </a:lnL>
+                    <a:lnR w="3810" cap="flat" cmpd="sng" algn="ctr">
+                      <a:solidFill>
+                        <a:srgbClr val="CBD5E0"/>
+                      </a:solidFill>
+                      <a:prstDash val="solid"/>
+                      <a:round/>
+                      <a:headEnd type="none" w="med" len="med"/>
+                      <a:tailEnd type="none" w="med" len="med"/>
+                    </a:lnR>
+                    <a:lnT w="3810" cap="flat" cmpd="sng" algn="ctr">
+                      <a:solidFill>
+                        <a:srgbClr val="CBD5E0"/>
+                      </a:solidFill>
+                      <a:prstDash val="solid"/>
+                      <a:round/>
+                      <a:headEnd type="none" w="med" len="med"/>
+                      <a:tailEnd type="none" w="med" len="med"/>
+                    </a:lnT>
+                    <a:lnB w="3810" cap="flat" cmpd="sng" algn="ctr">
+                      <a:solidFill>
+                        <a:srgbClr val="CBD5E0"/>
+                      </a:solidFill>
+                      <a:prstDash val="solid"/>
+                      <a:round/>
+                      <a:headEnd type="none" w="med" len="med"/>
+                      <a:tailEnd type="none" w="med" len="med"/>
+                    </a:lnB>
+                    <a:solidFill>
+                      <a:srgbClr val="F7FAFC"/>
+                    </a:solidFill>
+                  </a:tcPr>
+                </a:tc>
+                <a:tc>
+                  <a:txBody>
+                    <a:bodyPr/>
+                    <a:lstStyle/>
+                    <a:p>
+                      <a:pPr indent="0" marL="0">
+                        <a:buNone/>
+                      </a:pPr>
+                      <a:r>
+                        <a:rPr lang="en-US" sz="1100" b="1" dirty="0">
+                          <a:solidFill>
+                            <a:srgbClr val="718096"/>
+                          </a:solidFill>
+                          <a:latin typeface="Pretendard" pitchFamily="34" charset="0"/>
+                          <a:ea typeface="Pretendard" pitchFamily="34" charset="-122"/>
+                          <a:cs typeface="Pretendard" pitchFamily="34" charset="-120"/>
+                        </a:rPr>
+                        <a:t>대출비율</a:t>
+                      </a:r>
+                      <a:endParaRPr lang="en-US" sz="1100" dirty="0">
+                        <a:latin typeface="Pretendard" charset="0"/>
+                        <a:ea typeface="Pretendard" charset="0"/>
+                        <a:cs typeface="Pretendard" charset="0"/>
+                      </a:endParaRPr>
+                    </a:p>
+                  </a:txBody>
+                  <a:tcPr marL="50800" marR="50800" marT="25400" marB="25400" anchor="ctr">
+                    <a:lnL w="3810" cap="flat" cmpd="sng" algn="ctr">
+                      <a:solidFill>
+                        <a:srgbClr val="CBD5E0"/>
+                      </a:solidFill>
+                      <a:prstDash val="solid"/>
+                      <a:round/>
+                      <a:headEnd type="none" w="med" len="med"/>
+                      <a:tailEnd type="none" w="med" len="med"/>
+                    </a:lnL>
+                    <a:lnR w="3810" cap="flat" cmpd="sng" algn="ctr">
+                      <a:solidFill>
+                        <a:srgbClr val="CBD5E0"/>
+                      </a:solidFill>
+                      <a:prstDash val="solid"/>
+                      <a:round/>
+                      <a:headEnd type="none" w="med" len="med"/>
+                      <a:tailEnd type="none" w="med" len="med"/>
+                    </a:lnR>
+                    <a:lnT w="3810" cap="flat" cmpd="sng" algn="ctr">
+                      <a:solidFill>
+                        <a:srgbClr val="CBD5E0"/>
+                      </a:solidFill>
+                      <a:prstDash val="solid"/>
+                      <a:round/>
+                      <a:headEnd type="none" w="med" len="med"/>
+                      <a:tailEnd type="none" w="med" len="med"/>
+                    </a:lnT>
+                    <a:lnB w="3810" cap="flat" cmpd="sng" algn="ctr">
+                      <a:solidFill>
+                        <a:srgbClr val="CBD5E0"/>
+                      </a:solidFill>
+                      <a:prstDash val="solid"/>
+                      <a:round/>
+                      <a:headEnd type="none" w="med" len="med"/>
+                      <a:tailEnd type="none" w="med" len="med"/>
+                    </a:lnB>
+                    <a:solidFill>
+                      <a:srgbClr val="F7FAFC"/>
+                    </a:solidFill>
+                  </a:tcPr>
+                </a:tc>
+                <a:tc>
+                  <a:txBody>
+                    <a:bodyPr/>
+                    <a:lstStyle/>
+                    <a:p>
+                      <a:pPr indent="0" marL="0">
+                        <a:buNone/>
+                      </a:pPr>
+                      <a:r>
+                        <a:rPr lang="en-US" sz="1100" b="1" dirty="0">
+                          <a:solidFill>
+                            <a:srgbClr val="718096"/>
+                          </a:solidFill>
+                          <a:latin typeface="Pretendard" pitchFamily="34" charset="0"/>
+                          <a:ea typeface="Pretendard" pitchFamily="34" charset="-122"/>
+                          <a:cs typeface="Pretendard" pitchFamily="34" charset="-120"/>
+                        </a:rPr>
+                        <a:t>실투자금</a:t>
+                      </a:r>
+                      <a:endParaRPr lang="en-US" sz="1100" dirty="0">
+                        <a:latin typeface="Pretendard" charset="0"/>
+                        <a:ea typeface="Pretendard" charset="0"/>
+                        <a:cs typeface="Pretendard" charset="0"/>
+                      </a:endParaRPr>
+                    </a:p>
+                  </a:txBody>
+                  <a:tcPr marL="50800" marR="50800" marT="25400" marB="25400" anchor="ctr">
+                    <a:lnL w="3810" cap="flat" cmpd="sng" algn="ctr">
+                      <a:solidFill>
+                        <a:srgbClr val="CBD5E0"/>
+                      </a:solidFill>
+                      <a:prstDash val="solid"/>
+                      <a:round/>
+                      <a:headEnd type="none" w="med" len="med"/>
+                      <a:tailEnd type="none" w="med" len="med"/>
+                    </a:lnL>
+                    <a:lnR w="3810" cap="flat" cmpd="sng" algn="ctr">
+                      <a:solidFill>
+                        <a:srgbClr val="CBD5E0"/>
+                      </a:solidFill>
+                      <a:prstDash val="solid"/>
+                      <a:round/>
+                      <a:headEnd type="none" w="med" len="med"/>
+                      <a:tailEnd type="none" w="med" len="med"/>
+                    </a:lnR>
+                    <a:lnT w="3810" cap="flat" cmpd="sng" algn="ctr">
+                      <a:solidFill>
+                        <a:srgbClr val="CBD5E0"/>
+                      </a:solidFill>
+                      <a:prstDash val="solid"/>
+                      <a:round/>
+                      <a:headEnd type="none" w="med" len="med"/>
+                      <a:tailEnd type="none" w="med" len="med"/>
+                    </a:lnT>
+                    <a:lnB w="3810" cap="flat" cmpd="sng" algn="ctr">
+                      <a:solidFill>
+                        <a:srgbClr val="CBD5E0"/>
+                      </a:solidFill>
+                      <a:prstDash val="solid"/>
+                      <a:round/>
+                      <a:headEnd type="none" w="med" len="med"/>
+                      <a:tailEnd type="none" w="med" len="med"/>
+                    </a:lnB>
+                    <a:solidFill>
+                      <a:srgbClr val="F7FAFC"/>
+                    </a:solidFill>
+                  </a:tcPr>
+                </a:tc>
+                <a:tc>
+                  <a:txBody>
+                    <a:bodyPr/>
+                    <a:lstStyle/>
+                    <a:p>
+                      <a:pPr indent="0" marL="0">
+                        <a:buNone/>
+                      </a:pPr>
+                      <a:r>
+                        <a:rPr lang="en-US" sz="1100" b="1" dirty="0">
+                          <a:solidFill>
+                            <a:srgbClr val="718096"/>
+                          </a:solidFill>
+                          <a:latin typeface="Pretendard" pitchFamily="34" charset="0"/>
+                          <a:ea typeface="Pretendard" pitchFamily="34" charset="-122"/>
+                          <a:cs typeface="Pretendard" pitchFamily="34" charset="-120"/>
+                        </a:rPr>
+                        <a:t>예상수익률</a:t>
+                      </a:r>
+                      <a:endParaRPr lang="en-US" sz="1100" dirty="0">
+                        <a:latin typeface="Pretendard" charset="0"/>
+                        <a:ea typeface="Pretendard" charset="0"/>
+                        <a:cs typeface="Pretendard" charset="0"/>
+                      </a:endParaRPr>
+                    </a:p>
+                  </a:txBody>
+                  <a:tcPr marL="50800" marR="50800" marT="25400" marB="25400" anchor="ctr">
+                    <a:lnL w="3810" cap="flat" cmpd="sng" algn="ctr">
+                      <a:solidFill>
+                        <a:srgbClr val="CBD5E0"/>
+                      </a:solidFill>
+                      <a:prstDash val="solid"/>
+                      <a:round/>
+                      <a:headEnd type="none" w="med" len="med"/>
+                      <a:tailEnd type="none" w="med" len="med"/>
+                    </a:lnL>
+                    <a:lnR w="3810" cap="flat" cmpd="sng" algn="ctr">
+                      <a:solidFill>
+                        <a:srgbClr val="CBD5E0"/>
+                      </a:solidFill>
+                      <a:prstDash val="solid"/>
+                      <a:round/>
+                      <a:headEnd type="none" w="med" len="med"/>
+                      <a:tailEnd type="none" w="med" len="med"/>
+                    </a:lnR>
+                    <a:lnT w="3810" cap="flat" cmpd="sng" algn="ctr">
+                      <a:solidFill>
+                        <a:srgbClr val="CBD5E0"/>
+                      </a:solidFill>
+                      <a:prstDash val="solid"/>
+                      <a:round/>
+                      <a:headEnd type="none" w="med" len="med"/>
+                      <a:tailEnd type="none" w="med" len="med"/>
+                    </a:lnT>
+                    <a:lnB w="3810" cap="flat" cmpd="sng" algn="ctr">
+                      <a:solidFill>
+                        <a:srgbClr val="CBD5E0"/>
+                      </a:solidFill>
+                      <a:prstDash val="solid"/>
+                      <a:round/>
+                      <a:headEnd type="none" w="med" len="med"/>
+                      <a:tailEnd type="none" w="med" len="med"/>
+                    </a:lnB>
+                    <a:solidFill>
+                      <a:srgbClr val="F7FAFC"/>
+                    </a:solidFill>
+                  </a:tcPr>
+                </a:tc>
+              </a:tr>
+              <a:tr h="457200">
+                <a:tc>
+                  <a:txBody>
+                    <a:bodyPr/>
+                    <a:lstStyle/>
+                    <a:p>
+                      <a:pPr indent="0" marL="0">
+                        <a:buNone/>
+                      </a:pPr>
+                      <a:r>
+                        <a:rPr lang="en-US" sz="1100" b="1" dirty="0">
+                          <a:solidFill>
+                            <a:srgbClr val="10161F"/>
+                          </a:solidFill>
+                          <a:latin typeface="Pretendard" pitchFamily="34" charset="0"/>
+                          <a:ea typeface="Pretendard" pitchFamily="34" charset="-122"/>
+                          <a:cs typeface="Pretendard" pitchFamily="34" charset="-120"/>
+                        </a:rPr>
+                        <a:t>전액 </a:t>
+                      </a:r>
+                      <a:pPr indent="0" marL="0">
+                        <a:buNone/>
+                      </a:pPr>
+                      <a:r>
+                        <a:rPr lang="en-US" sz="1100" b="1" dirty="0">
+                          <a:solidFill>
+                            <a:srgbClr val="10161F"/>
+                          </a:solidFill>
+                          <a:latin typeface="Pretendard" pitchFamily="34" charset="0"/>
+                          <a:ea typeface="Pretendard" pitchFamily="34" charset="-122"/>
+                          <a:cs typeface="Pretendard" pitchFamily="34" charset="-120"/>
+                        </a:rPr>
+                        <a:t>자기자본 </a:t>
+                      </a:r>
+                      <a:pPr indent="0" marL="0">
+                        <a:buNone/>
+                      </a:pPr>
+                      <a:r>
+                        <a:rPr lang="en-US" sz="1100" b="1" dirty="0">
+                          <a:solidFill>
+                            <a:srgbClr val="10161F"/>
+                          </a:solidFill>
+                          <a:latin typeface="Pretendard" pitchFamily="34" charset="0"/>
+                          <a:ea typeface="Pretendard" pitchFamily="34" charset="-122"/>
+                          <a:cs typeface="Pretendard" pitchFamily="34" charset="-120"/>
+                        </a:rPr>
+                        <a:t>(무차입)</a:t>
+                      </a:r>
+                      <a:endParaRPr lang="en-US" sz="1100" dirty="0">
+                        <a:latin typeface="Pretendard" charset="0"/>
+                        <a:ea typeface="Pretendard" charset="0"/>
+                        <a:cs typeface="Pretendard" charset="0"/>
+                      </a:endParaRPr>
+                    </a:p>
+                  </a:txBody>
+                  <a:tcPr marL="50800" marR="50800" marT="25400" marB="25400" anchor="ctr">
+                    <a:lnL w="3810" cap="flat" cmpd="sng" algn="ctr">
+                      <a:solidFill>
+                        <a:srgbClr val="CBD5E0"/>
+                      </a:solidFill>
+                      <a:prstDash val="solid"/>
+                      <a:round/>
+                      <a:headEnd type="none" w="med" len="med"/>
+                      <a:tailEnd type="none" w="med" len="med"/>
+                    </a:lnL>
+                    <a:lnR w="3810" cap="flat" cmpd="sng" algn="ctr">
+                      <a:solidFill>
+                        <a:srgbClr val="CBD5E0"/>
+                      </a:solidFill>
+                      <a:prstDash val="solid"/>
+                      <a:round/>
+                      <a:headEnd type="none" w="med" len="med"/>
+                      <a:tailEnd type="none" w="med" len="med"/>
+                    </a:lnR>
+                    <a:lnT w="3810" cap="flat" cmpd="sng" algn="ctr">
+                      <a:solidFill>
+                        <a:srgbClr val="CBD5E0"/>
+                      </a:solidFill>
+                      <a:prstDash val="solid"/>
+                      <a:round/>
+                      <a:headEnd type="none" w="med" len="med"/>
+                      <a:tailEnd type="none" w="med" len="med"/>
+                    </a:lnT>
+                    <a:lnB w="3810" cap="flat" cmpd="sng" algn="ctr">
+                      <a:solidFill>
+                        <a:srgbClr val="CBD5E0"/>
+                      </a:solidFill>
+                      <a:prstDash val="solid"/>
+                      <a:round/>
+                      <a:headEnd type="none" w="med" len="med"/>
+                      <a:tailEnd type="none" w="med" len="med"/>
+                    </a:lnB>
+                    <a:solidFill>
+                      <a:srgbClr val="FFFFFF"/>
+                    </a:solidFill>
+                  </a:tcPr>
+                </a:tc>
+                <a:tc>
+                  <a:txBody>
+                    <a:bodyPr/>
+                    <a:lstStyle/>
+                    <a:p>
+                      <a:pPr indent="0" marL="0">
+                        <a:buNone/>
+                      </a:pPr>
+                      <a:r>
+                        <a:rPr lang="en-US" sz="1100" dirty="0">
+                          <a:solidFill>
+                            <a:srgbClr val="10161F"/>
+                          </a:solidFill>
+                          <a:latin typeface="Pretendard" pitchFamily="34" charset="0"/>
+                          <a:ea typeface="Pretendard" pitchFamily="34" charset="-122"/>
+                          <a:cs typeface="Pretendard" pitchFamily="34" charset="-120"/>
+                        </a:rPr>
+                        <a:t>0%</a:t>
+                      </a:r>
+                      <a:endParaRPr lang="en-US" sz="1100" dirty="0">
+                        <a:latin typeface="Pretendard" charset="0"/>
+                        <a:ea typeface="Pretendard" charset="0"/>
+                        <a:cs typeface="Pretendard" charset="0"/>
+                      </a:endParaRPr>
+                    </a:p>
+                  </a:txBody>
+                  <a:tcPr marL="50800" marR="50800" marT="25400" marB="25400" anchor="ctr">
+                    <a:lnL w="3810" cap="flat" cmpd="sng" algn="ctr">
+                      <a:solidFill>
+                        <a:srgbClr val="CBD5E0"/>
+                      </a:solidFill>
+                      <a:prstDash val="solid"/>
+                      <a:round/>
+                      <a:headEnd type="none" w="med" len="med"/>
+                      <a:tailEnd type="none" w="med" len="med"/>
+                    </a:lnL>
+                    <a:lnR w="3810" cap="flat" cmpd="sng" algn="ctr">
+                      <a:solidFill>
+                        <a:srgbClr val="CBD5E0"/>
+                      </a:solidFill>
+                      <a:prstDash val="solid"/>
+                      <a:round/>
+                      <a:headEnd type="none" w="med" len="med"/>
+                      <a:tailEnd type="none" w="med" len="med"/>
+                    </a:lnR>
+                    <a:lnT w="3810" cap="flat" cmpd="sng" algn="ctr">
+                      <a:solidFill>
+                        <a:srgbClr val="CBD5E0"/>
+                      </a:solidFill>
+                      <a:prstDash val="solid"/>
+                      <a:round/>
+                      <a:headEnd type="none" w="med" len="med"/>
+                      <a:tailEnd type="none" w="med" len="med"/>
+                    </a:lnT>
+                    <a:lnB w="3810" cap="flat" cmpd="sng" algn="ctr">
+                      <a:solidFill>
+                        <a:srgbClr val="CBD5E0"/>
+                      </a:solidFill>
+                      <a:prstDash val="solid"/>
+                      <a:round/>
+                      <a:headEnd type="none" w="med" len="med"/>
+                      <a:tailEnd type="none" w="med" len="med"/>
+                    </a:lnB>
+                    <a:solidFill>
+                      <a:srgbClr val="FFFFFF"/>
+                    </a:solidFill>
+                  </a:tcPr>
+                </a:tc>
+                <a:tc>
+                  <a:txBody>
+                    <a:bodyPr/>
+                    <a:lstStyle/>
+                    <a:p>
+                      <a:pPr indent="0" marL="0">
+                        <a:buNone/>
+                      </a:pPr>
+                      <a:r>
+                        <a:rPr lang="en-US" sz="1100" dirty="0">
+                          <a:solidFill>
+                            <a:srgbClr val="10161F"/>
+                          </a:solidFill>
+                          <a:latin typeface="Pretendard" pitchFamily="34" charset="0"/>
+                          <a:ea typeface="Pretendard" pitchFamily="34" charset="-122"/>
+                          <a:cs typeface="Pretendard" pitchFamily="34" charset="-120"/>
+                        </a:rPr>
+                        <a:t>165.8억</a:t>
+                      </a:r>
+                      <a:endParaRPr lang="en-US" sz="1100" dirty="0">
+                        <a:latin typeface="Pretendard" charset="0"/>
+                        <a:ea typeface="Pretendard" charset="0"/>
+                        <a:cs typeface="Pretendard" charset="0"/>
+                      </a:endParaRPr>
+                    </a:p>
+                  </a:txBody>
+                  <a:tcPr marL="50800" marR="50800" marT="25400" marB="25400" anchor="ctr">
+                    <a:lnL w="3810" cap="flat" cmpd="sng" algn="ctr">
+                      <a:solidFill>
+                        <a:srgbClr val="CBD5E0"/>
+                      </a:solidFill>
+                      <a:prstDash val="solid"/>
+                      <a:round/>
+                      <a:headEnd type="none" w="med" len="med"/>
+                      <a:tailEnd type="none" w="med" len="med"/>
+                    </a:lnL>
+                    <a:lnR w="3810" cap="flat" cmpd="sng" algn="ctr">
+                      <a:solidFill>
+                        <a:srgbClr val="CBD5E0"/>
+                      </a:solidFill>
+                      <a:prstDash val="solid"/>
+                      <a:round/>
+                      <a:headEnd type="none" w="med" len="med"/>
+                      <a:tailEnd type="none" w="med" len="med"/>
+                    </a:lnR>
+                    <a:lnT w="3810" cap="flat" cmpd="sng" algn="ctr">
+                      <a:solidFill>
+                        <a:srgbClr val="CBD5E0"/>
+                      </a:solidFill>
+                      <a:prstDash val="solid"/>
+                      <a:round/>
+                      <a:headEnd type="none" w="med" len="med"/>
+                      <a:tailEnd type="none" w="med" len="med"/>
+                    </a:lnT>
+                    <a:lnB w="3810" cap="flat" cmpd="sng" algn="ctr">
+                      <a:solidFill>
+                        <a:srgbClr val="CBD5E0"/>
+                      </a:solidFill>
+                      <a:prstDash val="solid"/>
+                      <a:round/>
+                      <a:headEnd type="none" w="med" len="med"/>
+                      <a:tailEnd type="none" w="med" len="med"/>
+                    </a:lnB>
+                    <a:solidFill>
+                      <a:srgbClr val="FFFFFF"/>
+                    </a:solidFill>
+                  </a:tcPr>
+                </a:tc>
+                <a:tc>
+                  <a:txBody>
+                    <a:bodyPr/>
+                    <a:lstStyle/>
+                    <a:p>
+                      <a:pPr indent="0" marL="0">
+                        <a:buNone/>
+                      </a:pPr>
+                      <a:r>
+                        <a:rPr lang="en-US" sz="1100" dirty="0">
+                          <a:solidFill>
+                            <a:srgbClr val="10161F"/>
+                          </a:solidFill>
+                          <a:latin typeface="Pretendard" pitchFamily="34" charset="0"/>
+                          <a:ea typeface="Pretendard" pitchFamily="34" charset="-122"/>
+                          <a:cs typeface="Pretendard" pitchFamily="34" charset="-120"/>
+                        </a:rPr>
+                        <a:t>3.78%</a:t>
+                      </a:r>
+                      <a:endParaRPr lang="en-US" sz="1100" dirty="0">
+                        <a:latin typeface="Pretendard" charset="0"/>
+                        <a:ea typeface="Pretendard" charset="0"/>
+                        <a:cs typeface="Pretendard" charset="0"/>
+                      </a:endParaRPr>
+                    </a:p>
+                  </a:txBody>
+                  <a:tcPr marL="50800" marR="50800" marT="25400" marB="25400" anchor="ctr">
+                    <a:lnL w="3810" cap="flat" cmpd="sng" algn="ctr">
+                      <a:solidFill>
+                        <a:srgbClr val="CBD5E0"/>
+                      </a:solidFill>
+                      <a:prstDash val="solid"/>
+                      <a:round/>
+                      <a:headEnd type="none" w="med" len="med"/>
+                      <a:tailEnd type="none" w="med" len="med"/>
+                    </a:lnL>
+                    <a:lnR w="3810" cap="flat" cmpd="sng" algn="ctr">
+                      <a:solidFill>
+                        <a:srgbClr val="CBD5E0"/>
+                      </a:solidFill>
+                      <a:prstDash val="solid"/>
+                      <a:round/>
+                      <a:headEnd type="none" w="med" len="med"/>
+                      <a:tailEnd type="none" w="med" len="med"/>
+                    </a:lnR>
+                    <a:lnT w="3810" cap="flat" cmpd="sng" algn="ctr">
+                      <a:solidFill>
+                        <a:srgbClr val="CBD5E0"/>
+                      </a:solidFill>
+                      <a:prstDash val="solid"/>
+                      <a:round/>
+                      <a:headEnd type="none" w="med" len="med"/>
+                      <a:tailEnd type="none" w="med" len="med"/>
+                    </a:lnT>
+                    <a:lnB w="3810" cap="flat" cmpd="sng" algn="ctr">
+                      <a:solidFill>
+                        <a:srgbClr val="CBD5E0"/>
+                      </a:solidFill>
+                      <a:prstDash val="solid"/>
+                      <a:round/>
+                      <a:headEnd type="none" w="med" len="med"/>
+                      <a:tailEnd type="none" w="med" len="med"/>
+                    </a:lnB>
+                    <a:solidFill>
+                      <a:srgbClr val="FFFFFF"/>
+                    </a:solidFill>
+                  </a:tcPr>
+                </a:tc>
+              </a:tr>
+              <a:tr h="457200">
+                <a:tc>
+                  <a:txBody>
+                    <a:bodyPr/>
+                    <a:lstStyle/>
+                    <a:p>
+                      <a:pPr indent="0" marL="0">
+                        <a:buNone/>
+                      </a:pPr>
+                      <a:r>
+                        <a:rPr lang="en-US" sz="1100" b="1" dirty="0">
+                          <a:solidFill>
+                            <a:srgbClr val="10161F"/>
+                          </a:solidFill>
+                          <a:latin typeface="Pretendard" pitchFamily="34" charset="0"/>
+                          <a:ea typeface="Pretendard" pitchFamily="34" charset="-122"/>
+                          <a:cs typeface="Pretendard" pitchFamily="34" charset="-120"/>
+                        </a:rPr>
+                        <a:t>보수적 </a:t>
+                      </a:r>
+                      <a:pPr indent="0" marL="0">
+                        <a:buNone/>
+                      </a:pPr>
+                      <a:r>
+                        <a:rPr lang="en-US" sz="1100" b="1" dirty="0">
+                          <a:solidFill>
+                            <a:srgbClr val="10161F"/>
+                          </a:solidFill>
+                          <a:latin typeface="Pretendard" pitchFamily="34" charset="0"/>
+                          <a:ea typeface="Pretendard" pitchFamily="34" charset="-122"/>
+                          <a:cs typeface="Pretendard" pitchFamily="34" charset="-120"/>
+                        </a:rPr>
+                        <a:t>차입 </a:t>
+                      </a:r>
+                      <a:pPr indent="0" marL="0">
+                        <a:buNone/>
+                      </a:pPr>
+                      <a:r>
+                        <a:rPr lang="en-US" sz="1100" b="1" dirty="0">
+                          <a:solidFill>
+                            <a:srgbClr val="10161F"/>
+                          </a:solidFill>
+                          <a:latin typeface="Pretendard" pitchFamily="34" charset="0"/>
+                          <a:ea typeface="Pretendard" pitchFamily="34" charset="-122"/>
+                          <a:cs typeface="Pretendard" pitchFamily="34" charset="-120"/>
+                        </a:rPr>
+                        <a:t>(안정형)</a:t>
+                      </a:r>
+                      <a:endParaRPr lang="en-US" sz="1100" dirty="0">
+                        <a:latin typeface="Pretendard" charset="0"/>
+                        <a:ea typeface="Pretendard" charset="0"/>
+                        <a:cs typeface="Pretendard" charset="0"/>
+                      </a:endParaRPr>
+                    </a:p>
+                  </a:txBody>
+                  <a:tcPr marL="50800" marR="50800" marT="25400" marB="25400" anchor="ctr">
+                    <a:lnL w="3810" cap="flat" cmpd="sng" algn="ctr">
+                      <a:solidFill>
+                        <a:srgbClr val="CBD5E0"/>
+                      </a:solidFill>
+                      <a:prstDash val="solid"/>
+                      <a:round/>
+                      <a:headEnd type="none" w="med" len="med"/>
+                      <a:tailEnd type="none" w="med" len="med"/>
+                    </a:lnL>
+                    <a:lnR w="3810" cap="flat" cmpd="sng" algn="ctr">
+                      <a:solidFill>
+                        <a:srgbClr val="CBD5E0"/>
+                      </a:solidFill>
+                      <a:prstDash val="solid"/>
+                      <a:round/>
+                      <a:headEnd type="none" w="med" len="med"/>
+                      <a:tailEnd type="none" w="med" len="med"/>
+                    </a:lnR>
+                    <a:lnT w="3810" cap="flat" cmpd="sng" algn="ctr">
+                      <a:solidFill>
+                        <a:srgbClr val="CBD5E0"/>
+                      </a:solidFill>
+                      <a:prstDash val="solid"/>
+                      <a:round/>
+                      <a:headEnd type="none" w="med" len="med"/>
+                      <a:tailEnd type="none" w="med" len="med"/>
+                    </a:lnT>
+                    <a:lnB w="3810" cap="flat" cmpd="sng" algn="ctr">
+                      <a:solidFill>
+                        <a:srgbClr val="CBD5E0"/>
+                      </a:solidFill>
+                      <a:prstDash val="solid"/>
+                      <a:round/>
+                      <a:headEnd type="none" w="med" len="med"/>
+                      <a:tailEnd type="none" w="med" len="med"/>
+                    </a:lnB>
+                    <a:solidFill>
+                      <a:srgbClr val="F7FAFC"/>
+                    </a:solidFill>
+                  </a:tcPr>
+                </a:tc>
+                <a:tc>
+                  <a:txBody>
+                    <a:bodyPr/>
+                    <a:lstStyle/>
+                    <a:p>
+                      <a:pPr indent="0" marL="0">
+                        <a:buNone/>
+                      </a:pPr>
+                      <a:r>
+                        <a:rPr lang="en-US" sz="1100" dirty="0">
+                          <a:solidFill>
+                            <a:srgbClr val="10161F"/>
+                          </a:solidFill>
+                          <a:latin typeface="Pretendard" pitchFamily="34" charset="0"/>
+                          <a:ea typeface="Pretendard" pitchFamily="34" charset="-122"/>
+                          <a:cs typeface="Pretendard" pitchFamily="34" charset="-120"/>
+                        </a:rPr>
+                        <a:t>40%</a:t>
+                      </a:r>
+                      <a:endParaRPr lang="en-US" sz="1100" dirty="0">
+                        <a:latin typeface="Pretendard" charset="0"/>
+                        <a:ea typeface="Pretendard" charset="0"/>
+                        <a:cs typeface="Pretendard" charset="0"/>
+                      </a:endParaRPr>
+                    </a:p>
+                  </a:txBody>
+                  <a:tcPr marL="50800" marR="50800" marT="25400" marB="25400" anchor="ctr">
+                    <a:lnL w="3810" cap="flat" cmpd="sng" algn="ctr">
+                      <a:solidFill>
+                        <a:srgbClr val="CBD5E0"/>
+                      </a:solidFill>
+                      <a:prstDash val="solid"/>
+                      <a:round/>
+                      <a:headEnd type="none" w="med" len="med"/>
+                      <a:tailEnd type="none" w="med" len="med"/>
+                    </a:lnL>
+                    <a:lnR w="3810" cap="flat" cmpd="sng" algn="ctr">
+                      <a:solidFill>
+                        <a:srgbClr val="CBD5E0"/>
+                      </a:solidFill>
+                      <a:prstDash val="solid"/>
+                      <a:round/>
+                      <a:headEnd type="none" w="med" len="med"/>
+                      <a:tailEnd type="none" w="med" len="med"/>
+                    </a:lnR>
+                    <a:lnT w="3810" cap="flat" cmpd="sng" algn="ctr">
+                      <a:solidFill>
+                        <a:srgbClr val="CBD5E0"/>
+                      </a:solidFill>
+                      <a:prstDash val="solid"/>
+                      <a:round/>
+                      <a:headEnd type="none" w="med" len="med"/>
+                      <a:tailEnd type="none" w="med" len="med"/>
+                    </a:lnT>
+                    <a:lnB w="3810" cap="flat" cmpd="sng" algn="ctr">
+                      <a:solidFill>
+                        <a:srgbClr val="CBD5E0"/>
+                      </a:solidFill>
+                      <a:prstDash val="solid"/>
+                      <a:round/>
+                      <a:headEnd type="none" w="med" len="med"/>
+                      <a:tailEnd type="none" w="med" len="med"/>
+                    </a:lnB>
+                    <a:solidFill>
+                      <a:srgbClr val="F7FAFC"/>
+                    </a:solidFill>
+                  </a:tcPr>
+                </a:tc>
+                <a:tc>
+                  <a:txBody>
+                    <a:bodyPr/>
+                    <a:lstStyle/>
+                    <a:p>
+                      <a:pPr indent="0" marL="0">
+                        <a:buNone/>
+                      </a:pPr>
+                      <a:r>
+                        <a:rPr lang="en-US" sz="1100" dirty="0">
+                          <a:solidFill>
+                            <a:srgbClr val="10161F"/>
+                          </a:solidFill>
+                          <a:latin typeface="Pretendard" pitchFamily="34" charset="0"/>
+                          <a:ea typeface="Pretendard" pitchFamily="34" charset="-122"/>
+                          <a:cs typeface="Pretendard" pitchFamily="34" charset="-120"/>
+                        </a:rPr>
+                        <a:t>99.8억</a:t>
+                      </a:r>
+                      <a:endParaRPr lang="en-US" sz="1100" dirty="0">
+                        <a:latin typeface="Pretendard" charset="0"/>
+                        <a:ea typeface="Pretendard" charset="0"/>
+                        <a:cs typeface="Pretendard" charset="0"/>
+                      </a:endParaRPr>
+                    </a:p>
+                  </a:txBody>
+                  <a:tcPr marL="50800" marR="50800" marT="25400" marB="25400" anchor="ctr">
+                    <a:lnL w="3810" cap="flat" cmpd="sng" algn="ctr">
+                      <a:solidFill>
+                        <a:srgbClr val="CBD5E0"/>
+                      </a:solidFill>
+                      <a:prstDash val="solid"/>
+                      <a:round/>
+                      <a:headEnd type="none" w="med" len="med"/>
+                      <a:tailEnd type="none" w="med" len="med"/>
+                    </a:lnL>
+                    <a:lnR w="3810" cap="flat" cmpd="sng" algn="ctr">
+                      <a:solidFill>
+                        <a:srgbClr val="CBD5E0"/>
+                      </a:solidFill>
+                      <a:prstDash val="solid"/>
+                      <a:round/>
+                      <a:headEnd type="none" w="med" len="med"/>
+                      <a:tailEnd type="none" w="med" len="med"/>
+                    </a:lnR>
+                    <a:lnT w="3810" cap="flat" cmpd="sng" algn="ctr">
+                      <a:solidFill>
+                        <a:srgbClr val="CBD5E0"/>
+                      </a:solidFill>
+                      <a:prstDash val="solid"/>
+                      <a:round/>
+                      <a:headEnd type="none" w="med" len="med"/>
+                      <a:tailEnd type="none" w="med" len="med"/>
+                    </a:lnT>
+                    <a:lnB w="3810" cap="flat" cmpd="sng" algn="ctr">
+                      <a:solidFill>
+                        <a:srgbClr val="CBD5E0"/>
+                      </a:solidFill>
+                      <a:prstDash val="solid"/>
+                      <a:round/>
+                      <a:headEnd type="none" w="med" len="med"/>
+                      <a:tailEnd type="none" w="med" len="med"/>
+                    </a:lnB>
+                    <a:solidFill>
+                      <a:srgbClr val="F7FAFC"/>
+                    </a:solidFill>
+                  </a:tcPr>
+                </a:tc>
+                <a:tc>
+                  <a:txBody>
+                    <a:bodyPr/>
+                    <a:lstStyle/>
+                    <a:p>
+                      <a:pPr indent="0" marL="0">
+                        <a:buNone/>
+                      </a:pPr>
+                      <a:r>
+                        <a:rPr lang="en-US" sz="1100" dirty="0">
+                          <a:solidFill>
+                            <a:srgbClr val="10161F"/>
+                          </a:solidFill>
+                          <a:latin typeface="Pretendard" pitchFamily="34" charset="0"/>
+                          <a:ea typeface="Pretendard" pitchFamily="34" charset="-122"/>
+                          <a:cs typeface="Pretendard" pitchFamily="34" charset="-120"/>
+                        </a:rPr>
+                        <a:t>3.11%</a:t>
+                      </a:r>
+                      <a:endParaRPr lang="en-US" sz="1100" dirty="0">
+                        <a:latin typeface="Pretendard" charset="0"/>
+                        <a:ea typeface="Pretendard" charset="0"/>
+                        <a:cs typeface="Pretendard" charset="0"/>
+                      </a:endParaRPr>
+                    </a:p>
+                  </a:txBody>
+                  <a:tcPr marL="50800" marR="50800" marT="25400" marB="25400" anchor="ctr">
+                    <a:lnL w="3810" cap="flat" cmpd="sng" algn="ctr">
+                      <a:solidFill>
+                        <a:srgbClr val="CBD5E0"/>
+                      </a:solidFill>
+                      <a:prstDash val="solid"/>
+                      <a:round/>
+                      <a:headEnd type="none" w="med" len="med"/>
+                      <a:tailEnd type="none" w="med" len="med"/>
+                    </a:lnL>
+                    <a:lnR w="3810" cap="flat" cmpd="sng" algn="ctr">
+                      <a:solidFill>
+                        <a:srgbClr val="CBD5E0"/>
+                      </a:solidFill>
+                      <a:prstDash val="solid"/>
+                      <a:round/>
+                      <a:headEnd type="none" w="med" len="med"/>
+                      <a:tailEnd type="none" w="med" len="med"/>
+                    </a:lnR>
+                    <a:lnT w="3810" cap="flat" cmpd="sng" algn="ctr">
+                      <a:solidFill>
+                        <a:srgbClr val="CBD5E0"/>
+                      </a:solidFill>
+                      <a:prstDash val="solid"/>
+                      <a:round/>
+                      <a:headEnd type="none" w="med" len="med"/>
+                      <a:tailEnd type="none" w="med" len="med"/>
+                    </a:lnT>
+                    <a:lnB w="3810" cap="flat" cmpd="sng" algn="ctr">
+                      <a:solidFill>
+                        <a:srgbClr val="CBD5E0"/>
+                      </a:solidFill>
+                      <a:prstDash val="solid"/>
+                      <a:round/>
+                      <a:headEnd type="none" w="med" len="med"/>
+                      <a:tailEnd type="none" w="med" len="med"/>
+                    </a:lnB>
+                    <a:solidFill>
+                      <a:srgbClr val="F7FAFC"/>
+                    </a:solidFill>
+                  </a:tcPr>
+                </a:tc>
+              </a:tr>
+              <a:tr h="457200">
+                <a:tc>
+                  <a:txBody>
+                    <a:bodyPr/>
+                    <a:lstStyle/>
+                    <a:p>
+                      <a:pPr indent="0" marL="0">
+                        <a:buNone/>
+                      </a:pPr>
+                      <a:r>
+                        <a:rPr lang="en-US" sz="1100" b="1" dirty="0">
+                          <a:solidFill>
+                            <a:srgbClr val="10161F"/>
+                          </a:solidFill>
+                          <a:latin typeface="Pretendard" pitchFamily="34" charset="0"/>
+                          <a:ea typeface="Pretendard" pitchFamily="34" charset="-122"/>
+                          <a:cs typeface="Pretendard" pitchFamily="34" charset="-120"/>
+                        </a:rPr>
+                        <a:t>표준 </a:t>
+                      </a:r>
+                      <a:pPr indent="0" marL="0">
+                        <a:buNone/>
+                      </a:pPr>
+                      <a:r>
+                        <a:rPr lang="en-US" sz="1100" b="1" dirty="0">
+                          <a:solidFill>
+                            <a:srgbClr val="10161F"/>
+                          </a:solidFill>
+                          <a:latin typeface="Pretendard" pitchFamily="34" charset="0"/>
+                          <a:ea typeface="Pretendard" pitchFamily="34" charset="-122"/>
+                          <a:cs typeface="Pretendard" pitchFamily="34" charset="-120"/>
+                        </a:rPr>
+                        <a:t>차입 </a:t>
+                      </a:r>
+                      <a:pPr indent="0" marL="0">
+                        <a:buNone/>
+                      </a:pPr>
+                      <a:r>
+                        <a:rPr lang="en-US" sz="1100" b="1" dirty="0">
+                          <a:solidFill>
+                            <a:srgbClr val="10161F"/>
+                          </a:solidFill>
+                          <a:latin typeface="Pretendard" pitchFamily="34" charset="0"/>
+                          <a:ea typeface="Pretendard" pitchFamily="34" charset="-122"/>
+                          <a:cs typeface="Pretendard" pitchFamily="34" charset="-120"/>
+                        </a:rPr>
+                        <a:t>(기본형)</a:t>
+                      </a:r>
+                      <a:endParaRPr lang="en-US" sz="1100" dirty="0">
+                        <a:latin typeface="Pretendard" charset="0"/>
+                        <a:ea typeface="Pretendard" charset="0"/>
+                        <a:cs typeface="Pretendard" charset="0"/>
+                      </a:endParaRPr>
+                    </a:p>
+                  </a:txBody>
+                  <a:tcPr marL="50800" marR="50800" marT="25400" marB="25400" anchor="ctr">
+                    <a:lnL w="3810" cap="flat" cmpd="sng" algn="ctr">
+                      <a:solidFill>
+                        <a:srgbClr val="CBD5E0"/>
+                      </a:solidFill>
+                      <a:prstDash val="solid"/>
+                      <a:round/>
+                      <a:headEnd type="none" w="med" len="med"/>
+                      <a:tailEnd type="none" w="med" len="med"/>
+                    </a:lnL>
+                    <a:lnR w="3810" cap="flat" cmpd="sng" algn="ctr">
+                      <a:solidFill>
+                        <a:srgbClr val="CBD5E0"/>
+                      </a:solidFill>
+                      <a:prstDash val="solid"/>
+                      <a:round/>
+                      <a:headEnd type="none" w="med" len="med"/>
+                      <a:tailEnd type="none" w="med" len="med"/>
+                    </a:lnR>
+                    <a:lnT w="3810" cap="flat" cmpd="sng" algn="ctr">
+                      <a:solidFill>
+                        <a:srgbClr val="CBD5E0"/>
+                      </a:solidFill>
+                      <a:prstDash val="solid"/>
+                      <a:round/>
+                      <a:headEnd type="none" w="med" len="med"/>
+                      <a:tailEnd type="none" w="med" len="med"/>
+                    </a:lnT>
+                    <a:lnB w="3810" cap="flat" cmpd="sng" algn="ctr">
+                      <a:solidFill>
+                        <a:srgbClr val="CBD5E0"/>
+                      </a:solidFill>
+                      <a:prstDash val="solid"/>
+                      <a:round/>
+                      <a:headEnd type="none" w="med" len="med"/>
+                      <a:tailEnd type="none" w="med" len="med"/>
+                    </a:lnB>
+                    <a:solidFill>
+                      <a:srgbClr val="FFFFFF"/>
+                    </a:solidFill>
+                  </a:tcPr>
+                </a:tc>
+                <a:tc>
+                  <a:txBody>
+                    <a:bodyPr/>
+                    <a:lstStyle/>
+                    <a:p>
+                      <a:pPr indent="0" marL="0">
+                        <a:buNone/>
+                      </a:pPr>
+                      <a:r>
+                        <a:rPr lang="en-US" sz="1100" dirty="0">
+                          <a:solidFill>
+                            <a:srgbClr val="10161F"/>
+                          </a:solidFill>
+                          <a:latin typeface="Pretendard" pitchFamily="34" charset="0"/>
+                          <a:ea typeface="Pretendard" pitchFamily="34" charset="-122"/>
+                          <a:cs typeface="Pretendard" pitchFamily="34" charset="-120"/>
+                        </a:rPr>
+                        <a:t>50%</a:t>
+                      </a:r>
+                      <a:endParaRPr lang="en-US" sz="1100" dirty="0">
+                        <a:latin typeface="Pretendard" charset="0"/>
+                        <a:ea typeface="Pretendard" charset="0"/>
+                        <a:cs typeface="Pretendard" charset="0"/>
+                      </a:endParaRPr>
+                    </a:p>
+                  </a:txBody>
+                  <a:tcPr marL="50800" marR="50800" marT="25400" marB="25400" anchor="ctr">
+                    <a:lnL w="3810" cap="flat" cmpd="sng" algn="ctr">
+                      <a:solidFill>
+                        <a:srgbClr val="CBD5E0"/>
+                      </a:solidFill>
+                      <a:prstDash val="solid"/>
+                      <a:round/>
+                      <a:headEnd type="none" w="med" len="med"/>
+                      <a:tailEnd type="none" w="med" len="med"/>
+                    </a:lnL>
+                    <a:lnR w="3810" cap="flat" cmpd="sng" algn="ctr">
+                      <a:solidFill>
+                        <a:srgbClr val="CBD5E0"/>
+                      </a:solidFill>
+                      <a:prstDash val="solid"/>
+                      <a:round/>
+                      <a:headEnd type="none" w="med" len="med"/>
+                      <a:tailEnd type="none" w="med" len="med"/>
+                    </a:lnR>
+                    <a:lnT w="3810" cap="flat" cmpd="sng" algn="ctr">
+                      <a:solidFill>
+                        <a:srgbClr val="CBD5E0"/>
+                      </a:solidFill>
+                      <a:prstDash val="solid"/>
+                      <a:round/>
+                      <a:headEnd type="none" w="med" len="med"/>
+                      <a:tailEnd type="none" w="med" len="med"/>
+                    </a:lnT>
+                    <a:lnB w="3810" cap="flat" cmpd="sng" algn="ctr">
+                      <a:solidFill>
+                        <a:srgbClr val="CBD5E0"/>
+                      </a:solidFill>
+                      <a:prstDash val="solid"/>
+                      <a:round/>
+                      <a:headEnd type="none" w="med" len="med"/>
+                      <a:tailEnd type="none" w="med" len="med"/>
+                    </a:lnB>
+                    <a:solidFill>
+                      <a:srgbClr val="FFFFFF"/>
+                    </a:solidFill>
+                  </a:tcPr>
+                </a:tc>
+                <a:tc>
+                  <a:txBody>
+                    <a:bodyPr/>
+                    <a:lstStyle/>
+                    <a:p>
+                      <a:pPr indent="0" marL="0">
+                        <a:buNone/>
+                      </a:pPr>
+                      <a:r>
+                        <a:rPr lang="en-US" sz="1100" dirty="0">
+                          <a:solidFill>
+                            <a:srgbClr val="10161F"/>
+                          </a:solidFill>
+                          <a:latin typeface="Pretendard" pitchFamily="34" charset="0"/>
+                          <a:ea typeface="Pretendard" pitchFamily="34" charset="-122"/>
+                          <a:cs typeface="Pretendard" pitchFamily="34" charset="-120"/>
+                        </a:rPr>
+                        <a:t>83.3억</a:t>
+                      </a:r>
+                      <a:endParaRPr lang="en-US" sz="1100" dirty="0">
+                        <a:latin typeface="Pretendard" charset="0"/>
+                        <a:ea typeface="Pretendard" charset="0"/>
+                        <a:cs typeface="Pretendard" charset="0"/>
+                      </a:endParaRPr>
+                    </a:p>
+                  </a:txBody>
+                  <a:tcPr marL="50800" marR="50800" marT="25400" marB="25400" anchor="ctr">
+                    <a:lnL w="3810" cap="flat" cmpd="sng" algn="ctr">
+                      <a:solidFill>
+                        <a:srgbClr val="CBD5E0"/>
+                      </a:solidFill>
+                      <a:prstDash val="solid"/>
+                      <a:round/>
+                      <a:headEnd type="none" w="med" len="med"/>
+                      <a:tailEnd type="none" w="med" len="med"/>
+                    </a:lnL>
+                    <a:lnR w="3810" cap="flat" cmpd="sng" algn="ctr">
+                      <a:solidFill>
+                        <a:srgbClr val="CBD5E0"/>
+                      </a:solidFill>
+                      <a:prstDash val="solid"/>
+                      <a:round/>
+                      <a:headEnd type="none" w="med" len="med"/>
+                      <a:tailEnd type="none" w="med" len="med"/>
+                    </a:lnR>
+                    <a:lnT w="3810" cap="flat" cmpd="sng" algn="ctr">
+                      <a:solidFill>
+                        <a:srgbClr val="CBD5E0"/>
+                      </a:solidFill>
+                      <a:prstDash val="solid"/>
+                      <a:round/>
+                      <a:headEnd type="none" w="med" len="med"/>
+                      <a:tailEnd type="none" w="med" len="med"/>
+                    </a:lnT>
+                    <a:lnB w="3810" cap="flat" cmpd="sng" algn="ctr">
+                      <a:solidFill>
+                        <a:srgbClr val="CBD5E0"/>
+                      </a:solidFill>
+                      <a:prstDash val="solid"/>
+                      <a:round/>
+                      <a:headEnd type="none" w="med" len="med"/>
+                      <a:tailEnd type="none" w="med" len="med"/>
+                    </a:lnB>
+                    <a:solidFill>
+                      <a:srgbClr val="FFFFFF"/>
+                    </a:solidFill>
+                  </a:tcPr>
+                </a:tc>
+                <a:tc>
+                  <a:txBody>
+                    <a:bodyPr/>
+                    <a:lstStyle/>
+                    <a:p>
+                      <a:pPr indent="0" marL="0">
+                        <a:buNone/>
+                      </a:pPr>
+                      <a:r>
+                        <a:rPr lang="en-US" sz="1100" dirty="0">
+                          <a:solidFill>
+                            <a:srgbClr val="10161F"/>
+                          </a:solidFill>
+                          <a:latin typeface="Pretendard" pitchFamily="34" charset="0"/>
+                          <a:ea typeface="Pretendard" pitchFamily="34" charset="-122"/>
+                          <a:cs typeface="Pretendard" pitchFamily="34" charset="-120"/>
+                        </a:rPr>
+                        <a:t>2.77%</a:t>
+                      </a:r>
+                      <a:endParaRPr lang="en-US" sz="1100" dirty="0">
+                        <a:latin typeface="Pretendard" charset="0"/>
+                        <a:ea typeface="Pretendard" charset="0"/>
+                        <a:cs typeface="Pretendard" charset="0"/>
+                      </a:endParaRPr>
+                    </a:p>
+                  </a:txBody>
+                  <a:tcPr marL="50800" marR="50800" marT="25400" marB="25400" anchor="ctr">
+                    <a:lnL w="3810" cap="flat" cmpd="sng" algn="ctr">
+                      <a:solidFill>
+                        <a:srgbClr val="CBD5E0"/>
+                      </a:solidFill>
+                      <a:prstDash val="solid"/>
+                      <a:round/>
+                      <a:headEnd type="none" w="med" len="med"/>
+                      <a:tailEnd type="none" w="med" len="med"/>
+                    </a:lnL>
+                    <a:lnR w="3810" cap="flat" cmpd="sng" algn="ctr">
+                      <a:solidFill>
+                        <a:srgbClr val="CBD5E0"/>
+                      </a:solidFill>
+                      <a:prstDash val="solid"/>
+                      <a:round/>
+                      <a:headEnd type="none" w="med" len="med"/>
+                      <a:tailEnd type="none" w="med" len="med"/>
+                    </a:lnR>
+                    <a:lnT w="3810" cap="flat" cmpd="sng" algn="ctr">
+                      <a:solidFill>
+                        <a:srgbClr val="CBD5E0"/>
+                      </a:solidFill>
+                      <a:prstDash val="solid"/>
+                      <a:round/>
+                      <a:headEnd type="none" w="med" len="med"/>
+                      <a:tailEnd type="none" w="med" len="med"/>
+                    </a:lnT>
+                    <a:lnB w="3810" cap="flat" cmpd="sng" algn="ctr">
+                      <a:solidFill>
+                        <a:srgbClr val="CBD5E0"/>
+                      </a:solidFill>
+                      <a:prstDash val="solid"/>
+                      <a:round/>
+                      <a:headEnd type="none" w="med" len="med"/>
+                      <a:tailEnd type="none" w="med" len="med"/>
+                    </a:lnB>
+                    <a:solidFill>
+                      <a:srgbClr val="FFFFFF"/>
+                    </a:solidFill>
+                  </a:tcPr>
+                </a:tc>
+              </a:tr>
+              <a:tr h="457200">
+                <a:tc>
+                  <a:txBody>
+                    <a:bodyPr/>
+                    <a:lstStyle/>
+                    <a:p>
+                      <a:pPr indent="0" marL="0">
+                        <a:buNone/>
+                      </a:pPr>
+                      <a:r>
+                        <a:rPr lang="en-US" sz="1100" b="1" dirty="0">
+                          <a:solidFill>
+                            <a:srgbClr val="10161F"/>
+                          </a:solidFill>
+                          <a:latin typeface="Pretendard" pitchFamily="34" charset="0"/>
+                          <a:ea typeface="Pretendard" pitchFamily="34" charset="-122"/>
+                          <a:cs typeface="Pretendard" pitchFamily="34" charset="-120"/>
+                        </a:rPr>
+                        <a:t>적극적 </a:t>
+                      </a:r>
+                      <a:pPr indent="0" marL="0">
+                        <a:buNone/>
+                      </a:pPr>
+                      <a:r>
+                        <a:rPr lang="en-US" sz="1100" b="1" dirty="0">
+                          <a:solidFill>
+                            <a:srgbClr val="10161F"/>
+                          </a:solidFill>
+                          <a:latin typeface="Pretendard" pitchFamily="34" charset="0"/>
+                          <a:ea typeface="Pretendard" pitchFamily="34" charset="-122"/>
+                          <a:cs typeface="Pretendard" pitchFamily="34" charset="-120"/>
+                        </a:rPr>
+                        <a:t>차입 </a:t>
+                      </a:r>
+                      <a:pPr indent="0" marL="0">
+                        <a:buNone/>
+                      </a:pPr>
+                      <a:r>
+                        <a:rPr lang="en-US" sz="1100" b="1" dirty="0">
+                          <a:solidFill>
+                            <a:srgbClr val="10161F"/>
+                          </a:solidFill>
+                          <a:latin typeface="Pretendard" pitchFamily="34" charset="0"/>
+                          <a:ea typeface="Pretendard" pitchFamily="34" charset="-122"/>
+                          <a:cs typeface="Pretendard" pitchFamily="34" charset="-120"/>
+                        </a:rPr>
+                        <a:t>(레버리지)</a:t>
+                      </a:r>
+                      <a:endParaRPr lang="en-US" sz="1100" dirty="0">
+                        <a:latin typeface="Pretendard" charset="0"/>
+                        <a:ea typeface="Pretendard" charset="0"/>
+                        <a:cs typeface="Pretendard" charset="0"/>
+                      </a:endParaRPr>
+                    </a:p>
+                  </a:txBody>
+                  <a:tcPr marL="50800" marR="50800" marT="25400" marB="25400" anchor="ctr">
+                    <a:lnL w="3810" cap="flat" cmpd="sng" algn="ctr">
+                      <a:solidFill>
+                        <a:srgbClr val="CBD5E0"/>
+                      </a:solidFill>
+                      <a:prstDash val="solid"/>
+                      <a:round/>
+                      <a:headEnd type="none" w="med" len="med"/>
+                      <a:tailEnd type="none" w="med" len="med"/>
+                    </a:lnL>
+                    <a:lnR w="3810" cap="flat" cmpd="sng" algn="ctr">
+                      <a:solidFill>
+                        <a:srgbClr val="CBD5E0"/>
+                      </a:solidFill>
+                      <a:prstDash val="solid"/>
+                      <a:round/>
+                      <a:headEnd type="none" w="med" len="med"/>
+                      <a:tailEnd type="none" w="med" len="med"/>
+                    </a:lnR>
+                    <a:lnT w="3810" cap="flat" cmpd="sng" algn="ctr">
+                      <a:solidFill>
+                        <a:srgbClr val="CBD5E0"/>
+                      </a:solidFill>
+                      <a:prstDash val="solid"/>
+                      <a:round/>
+                      <a:headEnd type="none" w="med" len="med"/>
+                      <a:tailEnd type="none" w="med" len="med"/>
+                    </a:lnT>
+                    <a:lnB w="3810" cap="flat" cmpd="sng" algn="ctr">
+                      <a:solidFill>
+                        <a:srgbClr val="CBD5E0"/>
+                      </a:solidFill>
+                      <a:prstDash val="solid"/>
+                      <a:round/>
+                      <a:headEnd type="none" w="med" len="med"/>
+                      <a:tailEnd type="none" w="med" len="med"/>
+                    </a:lnB>
+                    <a:solidFill>
+                      <a:srgbClr val="F7FAFC"/>
+                    </a:solidFill>
+                  </a:tcPr>
+                </a:tc>
+                <a:tc>
+                  <a:txBody>
+                    <a:bodyPr/>
+                    <a:lstStyle/>
+                    <a:p>
+                      <a:pPr indent="0" marL="0">
+                        <a:buNone/>
+                      </a:pPr>
+                      <a:r>
+                        <a:rPr lang="en-US" sz="1100" dirty="0">
+                          <a:solidFill>
+                            <a:srgbClr val="10161F"/>
+                          </a:solidFill>
+                          <a:latin typeface="Pretendard" pitchFamily="34" charset="0"/>
+                          <a:ea typeface="Pretendard" pitchFamily="34" charset="-122"/>
+                          <a:cs typeface="Pretendard" pitchFamily="34" charset="-120"/>
+                        </a:rPr>
+                        <a:t>60%</a:t>
+                      </a:r>
+                      <a:endParaRPr lang="en-US" sz="1100" dirty="0">
+                        <a:latin typeface="Pretendard" charset="0"/>
+                        <a:ea typeface="Pretendard" charset="0"/>
+                        <a:cs typeface="Pretendard" charset="0"/>
+                      </a:endParaRPr>
+                    </a:p>
+                  </a:txBody>
+                  <a:tcPr marL="50800" marR="50800" marT="25400" marB="25400" anchor="ctr">
+                    <a:lnL w="3810" cap="flat" cmpd="sng" algn="ctr">
+                      <a:solidFill>
+                        <a:srgbClr val="CBD5E0"/>
+                      </a:solidFill>
+                      <a:prstDash val="solid"/>
+                      <a:round/>
+                      <a:headEnd type="none" w="med" len="med"/>
+                      <a:tailEnd type="none" w="med" len="med"/>
+                    </a:lnL>
+                    <a:lnR w="3810" cap="flat" cmpd="sng" algn="ctr">
+                      <a:solidFill>
+                        <a:srgbClr val="CBD5E0"/>
+                      </a:solidFill>
+                      <a:prstDash val="solid"/>
+                      <a:round/>
+                      <a:headEnd type="none" w="med" len="med"/>
+                      <a:tailEnd type="none" w="med" len="med"/>
+                    </a:lnR>
+                    <a:lnT w="3810" cap="flat" cmpd="sng" algn="ctr">
+                      <a:solidFill>
+                        <a:srgbClr val="CBD5E0"/>
+                      </a:solidFill>
+                      <a:prstDash val="solid"/>
+                      <a:round/>
+                      <a:headEnd type="none" w="med" len="med"/>
+                      <a:tailEnd type="none" w="med" len="med"/>
+                    </a:lnT>
+                    <a:lnB w="3810" cap="flat" cmpd="sng" algn="ctr">
+                      <a:solidFill>
+                        <a:srgbClr val="CBD5E0"/>
+                      </a:solidFill>
+                      <a:prstDash val="solid"/>
+                      <a:round/>
+                      <a:headEnd type="none" w="med" len="med"/>
+                      <a:tailEnd type="none" w="med" len="med"/>
+                    </a:lnB>
+                    <a:solidFill>
+                      <a:srgbClr val="F7FAFC"/>
+                    </a:solidFill>
+                  </a:tcPr>
+                </a:tc>
+                <a:tc>
+                  <a:txBody>
+                    <a:bodyPr/>
+                    <a:lstStyle/>
+                    <a:p>
+                      <a:pPr indent="0" marL="0">
+                        <a:buNone/>
+                      </a:pPr>
+                      <a:r>
+                        <a:rPr lang="en-US" sz="1100" dirty="0">
+                          <a:solidFill>
+                            <a:srgbClr val="10161F"/>
+                          </a:solidFill>
+                          <a:latin typeface="Pretendard" pitchFamily="34" charset="0"/>
+                          <a:ea typeface="Pretendard" pitchFamily="34" charset="-122"/>
+                          <a:cs typeface="Pretendard" pitchFamily="34" charset="-120"/>
+                        </a:rPr>
+                        <a:t>66.8억</a:t>
+                      </a:r>
+                      <a:endParaRPr lang="en-US" sz="1100" dirty="0">
+                        <a:latin typeface="Pretendard" charset="0"/>
+                        <a:ea typeface="Pretendard" charset="0"/>
+                        <a:cs typeface="Pretendard" charset="0"/>
+                      </a:endParaRPr>
+                    </a:p>
+                  </a:txBody>
+                  <a:tcPr marL="50800" marR="50800" marT="25400" marB="25400" anchor="ctr">
+                    <a:lnL w="3810" cap="flat" cmpd="sng" algn="ctr">
+                      <a:solidFill>
+                        <a:srgbClr val="CBD5E0"/>
+                      </a:solidFill>
+                      <a:prstDash val="solid"/>
+                      <a:round/>
+                      <a:headEnd type="none" w="med" len="med"/>
+                      <a:tailEnd type="none" w="med" len="med"/>
+                    </a:lnL>
+                    <a:lnR w="3810" cap="flat" cmpd="sng" algn="ctr">
+                      <a:solidFill>
+                        <a:srgbClr val="CBD5E0"/>
+                      </a:solidFill>
+                      <a:prstDash val="solid"/>
+                      <a:round/>
+                      <a:headEnd type="none" w="med" len="med"/>
+                      <a:tailEnd type="none" w="med" len="med"/>
+                    </a:lnR>
+                    <a:lnT w="3810" cap="flat" cmpd="sng" algn="ctr">
+                      <a:solidFill>
+                        <a:srgbClr val="CBD5E0"/>
+                      </a:solidFill>
+                      <a:prstDash val="solid"/>
+                      <a:round/>
+                      <a:headEnd type="none" w="med" len="med"/>
+                      <a:tailEnd type="none" w="med" len="med"/>
+                    </a:lnT>
+                    <a:lnB w="3810" cap="flat" cmpd="sng" algn="ctr">
+                      <a:solidFill>
+                        <a:srgbClr val="CBD5E0"/>
+                      </a:solidFill>
+                      <a:prstDash val="solid"/>
+                      <a:round/>
+                      <a:headEnd type="none" w="med" len="med"/>
+                      <a:tailEnd type="none" w="med" len="med"/>
+                    </a:lnB>
+                    <a:solidFill>
+                      <a:srgbClr val="F7FAFC"/>
+                    </a:solidFill>
+                  </a:tcPr>
+                </a:tc>
+                <a:tc>
+                  <a:txBody>
+                    <a:bodyPr/>
+                    <a:lstStyle/>
+                    <a:p>
+                      <a:pPr indent="0" marL="0">
+                        <a:buNone/>
+                      </a:pPr>
+                      <a:r>
+                        <a:rPr lang="en-US" sz="1100" dirty="0">
+                          <a:solidFill>
+                            <a:srgbClr val="10161F"/>
+                          </a:solidFill>
+                          <a:latin typeface="Pretendard" pitchFamily="34" charset="0"/>
+                          <a:ea typeface="Pretendard" pitchFamily="34" charset="-122"/>
+                          <a:cs typeface="Pretendard" pitchFamily="34" charset="-120"/>
+                        </a:rPr>
+                        <a:t>2.27%</a:t>
+                      </a:r>
+                      <a:endParaRPr lang="en-US" sz="1100" dirty="0">
+                        <a:latin typeface="Pretendard" charset="0"/>
+                        <a:ea typeface="Pretendard" charset="0"/>
+                        <a:cs typeface="Pretendard" charset="0"/>
+                      </a:endParaRPr>
+                    </a:p>
+                  </a:txBody>
+                  <a:tcPr marL="50800" marR="50800" marT="25400" marB="25400" anchor="ctr">
+                    <a:lnL w="3810" cap="flat" cmpd="sng" algn="ctr">
+                      <a:solidFill>
+                        <a:srgbClr val="CBD5E0"/>
+                      </a:solidFill>
+                      <a:prstDash val="solid"/>
+                      <a:round/>
+                      <a:headEnd type="none" w="med" len="med"/>
+                      <a:tailEnd type="none" w="med" len="med"/>
+                    </a:lnL>
+                    <a:lnR w="3810" cap="flat" cmpd="sng" algn="ctr">
+                      <a:solidFill>
+                        <a:srgbClr val="CBD5E0"/>
+                      </a:solidFill>
+                      <a:prstDash val="solid"/>
+                      <a:round/>
+                      <a:headEnd type="none" w="med" len="med"/>
+                      <a:tailEnd type="none" w="med" len="med"/>
+                    </a:lnR>
+                    <a:lnT w="3810" cap="flat" cmpd="sng" algn="ctr">
+                      <a:solidFill>
+                        <a:srgbClr val="CBD5E0"/>
+                      </a:solidFill>
+                      <a:prstDash val="solid"/>
+                      <a:round/>
+                      <a:headEnd type="none" w="med" len="med"/>
+                      <a:tailEnd type="none" w="med" len="med"/>
+                    </a:lnT>
+                    <a:lnB w="3810" cap="flat" cmpd="sng" algn="ctr">
+                      <a:solidFill>
+                        <a:srgbClr val="CBD5E0"/>
+                      </a:solidFill>
+                      <a:prstDash val="solid"/>
+                      <a:round/>
+                      <a:headEnd type="none" w="med" len="med"/>
+                      <a:tailEnd type="none" w="med" len="med"/>
+                    </a:lnB>
+                    <a:solidFill>
+                      <a:srgbClr val="F7FAFC"/>
+                    </a:solidFill>
+                  </a:tcPr>
+                </a:tc>
+              </a:tr>
+            </a:tbl>
+          </a:graphicData>
+        </a:graphic>
+      </p:graphicFrame>
+      <p:sp>
+        <p:nvSpPr>
+          <p:cNvPr id="31" name="Shape 28"/>
+          <p:cNvSpPr/>
+          <p:nvPr/>
+        </p:nvSpPr>
+        <p:spPr>
+          <a:xfrm>
+            <a:off x="6461608" y="4069080"/>
+            <a:ext cx="4934560" cy="1463040"/>
+          </a:xfrm>
+          <a:prstGeom prst="roundRect">
+            <a:avLst>
+              <a:gd name="adj" fmla="val 3750"/>
+            </a:avLst>
+          </a:prstGeom>
+          <a:solidFill>
+            <a:srgbClr val="FEEBC8"/>
+          </a:solidFill>
+          <a:ln/>
+        </p:spPr>
+      </p:sp>
+      <p:sp>
+        <p:nvSpPr>
+          <p:cNvPr id="32" name="Shape 29"/>
+          <p:cNvSpPr/>
+          <p:nvPr/>
+        </p:nvSpPr>
+        <p:spPr>
+          <a:xfrm>
+            <a:off x="6461608" y="4123944"/>
+            <a:ext cx="36576" cy="1353312"/>
+          </a:xfrm>
+          <a:prstGeom prst="rect">
+            <a:avLst/>
+          </a:prstGeom>
+          <a:solidFill>
+            <a:srgbClr val="9C4221"/>
+          </a:solidFill>
+          <a:ln/>
+        </p:spPr>
+      </p:sp>
+      <p:sp>
+        <p:nvSpPr>
+          <p:cNvPr id="33" name="Text 30"/>
+          <p:cNvSpPr/>
+          <p:nvPr/>
+        </p:nvSpPr>
+        <p:spPr>
+          <a:xfrm>
+            <a:off x="6644488" y="4178808"/>
+            <a:ext cx="4605376" cy="201168"/>
+          </a:xfrm>
+          <a:prstGeom prst="rect">
+            <a:avLst/>
+          </a:prstGeom>
+          <a:noFill/>
+          <a:ln/>
+        </p:spPr>
+        <p:txBody>
+          <a:bodyPr wrap="square" lIns="0" tIns="0" rIns="0" bIns="0" rtlCol="0" anchor="ctr"/>
+          <a:lstStyle/>
+          <a:p>
+            <a:pPr indent="0" marL="0">
+              <a:buNone/>
+            </a:pPr>
+            <a:r>
+              <a:rPr lang="en-US" sz="1050" b="1" dirty="0">
+                <a:solidFill>
+                  <a:srgbClr val="9C4221"/>
+                </a:solidFill>
+                <a:latin typeface="Pretendard" pitchFamily="34" charset="0"/>
+                <a:ea typeface="Pretendard" pitchFamily="34" charset="-122"/>
+                <a:cs typeface="Pretendard" pitchFamily="34" charset="-120"/>
+              </a:rPr>
+              <a:t>역레버리지 유의 구간</a:t>
+            </a:r>
+            <a:endParaRPr lang="en-US" sz="1050" dirty="0"/>
+          </a:p>
+        </p:txBody>
+      </p:sp>
+      <p:sp>
+        <p:nvSpPr>
+          <p:cNvPr id="34" name="Text 31"/>
+          <p:cNvSpPr/>
+          <p:nvPr/>
+        </p:nvSpPr>
+        <p:spPr>
+          <a:xfrm>
+            <a:off x="6644488" y="4398264"/>
+            <a:ext cx="4605376" cy="1060704"/>
+          </a:xfrm>
+          <a:prstGeom prst="rect">
+            <a:avLst/>
+          </a:prstGeom>
+          <a:noFill/>
+          <a:ln/>
+        </p:spPr>
+        <p:txBody>
+          <a:bodyPr wrap="square" lIns="0" tIns="0" rIns="0" bIns="0" rtlCol="0" anchor="t"/>
+          <a:lstStyle/>
+          <a:p>
+            <a:pPr indent="0" marL="0">
+              <a:lnSpc>
+                <a:spcPct val="120000"/>
+              </a:lnSpc>
+              <a:buNone/>
+            </a:pPr>
+            <a:r>
+              <a:rPr lang="en-US" sz="930" dirty="0">
+                <a:solidFill>
+                  <a:srgbClr val="10161F"/>
+                </a:solidFill>
+                <a:latin typeface="Pretendard" pitchFamily="34" charset="0"/>
+                <a:ea typeface="Pretendard" pitchFamily="34" charset="-122"/>
+                <a:cs typeface="Pretendard" pitchFamily="34" charset="-120"/>
+              </a:rPr>
+              <a:t>차입 금리가 자산 총수익률을 상회하여 대출 실행 시 자기자본수익률이 하락할 수 있습니다. 에쿼티 비중 확대를 권장합니다.</a:t>
+            </a:r>
+            <a:endParaRPr lang="en-US" sz="930" dirty="0"/>
+          </a:p>
+        </p:txBody>
+      </p:sp>
+      <p:sp>
+        <p:nvSpPr>
+          <p:cNvPr id="35" name="Text 32"/>
+          <p:cNvSpPr/>
+          <p:nvPr/>
+        </p:nvSpPr>
+        <p:spPr>
+          <a:xfrm>
+            <a:off x="566928" y="6382512"/>
+            <a:ext cx="7315200" cy="219456"/>
+          </a:xfrm>
+          <a:prstGeom prst="rect">
+            <a:avLst/>
+          </a:prstGeom>
+          <a:noFill/>
+          <a:ln/>
+        </p:spPr>
+        <p:txBody>
+          <a:bodyPr wrap="square" lIns="0" tIns="0" rIns="0" bIns="0" rtlCol="0" anchor="ctr"/>
+          <a:lstStyle/>
+          <a:p>
+            <a:pPr indent="0" marL="0">
+              <a:buNone/>
+            </a:pPr>
+            <a:r>
+              <a:rPr lang="en-US" sz="800" dirty="0">
+                <a:solidFill>
+                  <a:srgbClr val="718096"/>
+                </a:solidFill>
+                <a:latin typeface="Pretendard" pitchFamily="34" charset="0"/>
+                <a:ea typeface="Pretendard" pitchFamily="34" charset="-122"/>
+                <a:cs typeface="Pretendard" pitchFamily="34" charset="-120"/>
+              </a:rPr>
               <a:t>크리딜   |   </a:t>
             </a:r>
             <a:endParaRPr lang="en-US" sz="800" dirty="0"/>
@@ -2922,7 +5572,7 @@
       </p:sp>
       <p:sp>
         <p:nvSpPr>
-          <p:cNvPr id="8" name="Text 6"/>
+          <p:cNvPr id="36" name="Text 33"/>
           <p:cNvSpPr/>
           <p:nvPr/>
         </p:nvSpPr>
@@ -2953,7 +5603,7 @@
                 <a:ea typeface="Arial" pitchFamily="34" charset="-122"/>
                 <a:cs typeface="Arial" pitchFamily="34" charset="-120"/>
               </a:rPr>
-              <a:t>10</a:t>
+              <a:t>9</a:t>
             </a:r>
             <a:endParaRPr lang="en-US" sz="900" dirty="0"/>
           </a:p>
@@ -3044,7 +5694,7 @@
                 <a:ea typeface="Arial" pitchFamily="34" charset="-122"/>
                 <a:cs typeface="Arial" pitchFamily="34" charset="-120"/>
               </a:rPr>
-              <a:t>11</a:t>
+              <a:t>10</a:t>
             </a:r>
             <a:endParaRPr lang="en-US" sz="1300" dirty="0"/>
           </a:p>
@@ -3083,7 +5733,7 @@
                 <a:ea typeface="Arial" pitchFamily="34" charset="-122"/>
                 <a:cs typeface="Arial" pitchFamily="34" charset="-120"/>
               </a:rPr>
-              <a:t>Thesis</a:t>
+              <a:t>DCF</a:t>
             </a:r>
             <a:endParaRPr lang="en-US" sz="950" dirty="0"/>
           </a:p>
@@ -3122,7 +5772,7 @@
                 <a:ea typeface="Pretendard" pitchFamily="34" charset="-122"/>
                 <a:cs typeface="Pretendard" pitchFamily="34" charset="-120"/>
               </a:rPr>
-              <a:t>투자 포인트</a:t>
+              <a:t>DCF 분석</a:t>
             </a:r>
             <a:endParaRPr lang="en-US" sz="2300" dirty="0"/>
           </a:p>
@@ -3136,20 +5786,16 @@
         </p:nvSpPr>
         <p:spPr>
           <a:xfrm>
-            <a:off x="566928" y="4983480"/>
-            <a:ext cx="11057839" cy="804672"/>
-          </a:xfrm>
-          <a:prstGeom prst="roundRect">
-            <a:avLst>
-              <a:gd name="adj" fmla="val 6818"/>
-            </a:avLst>
-          </a:prstGeom>
-          <a:solidFill>
-            <a:srgbClr val="F3EBDA"/>
-          </a:solidFill>
-          <a:ln w="10160">
+            <a:off x="566928" y="1325880"/>
+            <a:ext cx="11057839" cy="0"/>
+          </a:xfrm>
+          <a:prstGeom prst="line">
+            <a:avLst/>
+          </a:prstGeom>
+          <a:noFill/>
+          <a:ln w="19050">
             <a:solidFill>
-              <a:srgbClr val="D9B668"/>
+              <a:srgbClr val="B98A2E"/>
             </a:solidFill>
             <a:prstDash val="solid"/>
           </a:ln>
@@ -3163,8 +5809,8 @@
         </p:nvSpPr>
         <p:spPr>
           <a:xfrm>
-            <a:off x="749808" y="5093208"/>
-            <a:ext cx="1691640" cy="256032"/>
+            <a:off x="566928" y="6382512"/>
+            <a:ext cx="7315200" cy="219456"/>
           </a:xfrm>
           <a:prstGeom prst="rect">
             <a:avLst/>
@@ -3180,104 +5826,23 @@
               <a:buNone/>
             </a:pPr>
             <a:r>
-              <a:rPr lang="en-US" sz="1050" b="1" dirty="0">
-                <a:solidFill>
-                  <a:srgbClr val="977024"/>
+              <a:rPr lang="en-US" sz="800" dirty="0">
+                <a:solidFill>
+                  <a:srgbClr val="718096"/>
                 </a:solidFill>
                 <a:latin typeface="Pretendard" pitchFamily="34" charset="0"/>
                 <a:ea typeface="Pretendard" pitchFamily="34" charset="-122"/>
                 <a:cs typeface="Pretendard" pitchFamily="34" charset="-120"/>
               </a:rPr>
-              <a:t>종합 가치 제안</a:t>
-            </a:r>
-            <a:endParaRPr lang="en-US" sz="1050" dirty="0"/>
+              <a:t>크리딜   |   </a:t>
+            </a:r>
+            <a:endParaRPr lang="en-US" sz="800" dirty="0"/>
           </a:p>
         </p:txBody>
       </p:sp>
       <p:sp>
         <p:nvSpPr>
           <p:cNvPr id="8" name="Text 6"/>
-          <p:cNvSpPr/>
-          <p:nvPr/>
-        </p:nvSpPr>
-        <p:spPr>
-          <a:xfrm>
-            <a:off x="2487168" y="5056632"/>
-            <a:ext cx="8954719" cy="658368"/>
-          </a:xfrm>
-          <a:prstGeom prst="rect">
-            <a:avLst/>
-          </a:prstGeom>
-          <a:noFill/>
-          <a:ln/>
-        </p:spPr>
-        <p:txBody>
-          <a:bodyPr wrap="square" lIns="0" tIns="0" rIns="0" bIns="0" rtlCol="0" anchor="ctr"/>
-          <a:lstStyle/>
-          <a:p>
-            <a:pPr indent="0" marL="0">
-              <a:lnSpc>
-                <a:spcPct val="125000"/>
-              </a:lnSpc>
-              <a:buNone/>
-            </a:pPr>
-            <a:r>
-              <a:rPr lang="en-US" sz="1100" dirty="0">
-                <a:solidFill>
-                  <a:srgbClr val="10161F"/>
-                </a:solidFill>
-                <a:latin typeface="Pretendard" pitchFamily="34" charset="0"/>
-                <a:ea typeface="Pretendard" pitchFamily="34" charset="-122"/>
-                <a:cs typeface="Pretendard" pitchFamily="34" charset="-120"/>
-              </a:rPr>
-              <a:t>관점에서 안정적 월 임대수익과 우량 메디컬 테넌트를 보유한 핵심 투자 자산입니다.</a:t>
-            </a:r>
-            <a:endParaRPr lang="en-US" sz="1100" dirty="0"/>
-          </a:p>
-        </p:txBody>
-      </p:sp>
-      <p:sp>
-        <p:nvSpPr>
-          <p:cNvPr id="9" name="Text 7"/>
-          <p:cNvSpPr/>
-          <p:nvPr/>
-        </p:nvSpPr>
-        <p:spPr>
-          <a:xfrm>
-            <a:off x="566928" y="6382512"/>
-            <a:ext cx="7315200" cy="219456"/>
-          </a:xfrm>
-          <a:prstGeom prst="rect">
-            <a:avLst/>
-          </a:prstGeom>
-          <a:noFill/>
-          <a:ln/>
-        </p:spPr>
-        <p:txBody>
-          <a:bodyPr wrap="square" lIns="0" tIns="0" rIns="0" bIns="0" rtlCol="0" anchor="ctr"/>
-          <a:lstStyle/>
-          <a:p>
-            <a:pPr indent="0" marL="0">
-              <a:buNone/>
-            </a:pPr>
-            <a:r>
-              <a:rPr lang="en-US" sz="800" dirty="0">
-                <a:solidFill>
-                  <a:srgbClr val="718096"/>
-                </a:solidFill>
-                <a:latin typeface="Pretendard" pitchFamily="34" charset="0"/>
-                <a:ea typeface="Pretendard" pitchFamily="34" charset="-122"/>
-                <a:cs typeface="Pretendard" pitchFamily="34" charset="-120"/>
-              </a:rPr>
-              <a:t>크리딜   |   </a:t>
-            </a:r>
-            <a:endParaRPr lang="en-US" sz="800" dirty="0"/>
-          </a:p>
-        </p:txBody>
-      </p:sp>
-      <p:sp>
-        <p:nvSpPr>
-          <p:cNvPr id="10" name="Text 8"/>
           <p:cNvSpPr/>
           <p:nvPr/>
         </p:nvSpPr>
@@ -3308,7 +5873,7 @@
                 <a:ea typeface="Arial" pitchFamily="34" charset="-122"/>
                 <a:cs typeface="Arial" pitchFamily="34" charset="-120"/>
               </a:rPr>
-              <a:t>11</a:t>
+              <a:t>10</a:t>
             </a:r>
             <a:endParaRPr lang="en-US" sz="900" dirty="0"/>
           </a:p>
@@ -3399,7 +5964,7 @@
                 <a:ea typeface="Arial" pitchFamily="34" charset="-122"/>
                 <a:cs typeface="Arial" pitchFamily="34" charset="-120"/>
               </a:rPr>
-              <a:t>12</a:t>
+              <a:t>11</a:t>
             </a:r>
             <a:endParaRPr lang="en-US" sz="1300" dirty="0"/>
           </a:p>
@@ -3438,7 +6003,7 @@
                 <a:ea typeface="Arial" pitchFamily="34" charset="-122"/>
                 <a:cs typeface="Arial" pitchFamily="34" charset="-120"/>
               </a:rPr>
-              <a:t>Risk</a:t>
+              <a:t>Thesis</a:t>
             </a:r>
             <a:endParaRPr lang="en-US" sz="950" dirty="0"/>
           </a:p>
@@ -3477,7 +6042,7 @@
                 <a:ea typeface="Pretendard" pitchFamily="34" charset="-122"/>
                 <a:cs typeface="Pretendard" pitchFamily="34" charset="-120"/>
               </a:rPr>
-              <a:t>리스크 점검</a:t>
+              <a:t>투자 포인트</a:t>
             </a:r>
             <a:endParaRPr lang="en-US" sz="2300" dirty="0"/>
           </a:p>
@@ -3491,20 +6056,20 @@
         </p:nvSpPr>
         <p:spPr>
           <a:xfrm>
-            <a:off x="566928" y="1417320"/>
-            <a:ext cx="5400904" cy="3657600"/>
+            <a:off x="566928" y="4983480"/>
+            <a:ext cx="11057839" cy="804672"/>
           </a:xfrm>
           <a:prstGeom prst="roundRect">
             <a:avLst>
-              <a:gd name="adj" fmla="val 1500"/>
+              <a:gd name="adj" fmla="val 6818"/>
             </a:avLst>
           </a:prstGeom>
           <a:solidFill>
-            <a:srgbClr val="F7FAFC"/>
+            <a:srgbClr val="F3EBDA"/>
           </a:solidFill>
-          <a:ln w="6350">
+          <a:ln w="10160">
             <a:solidFill>
-              <a:srgbClr val="CBD5E0"/>
+              <a:srgbClr val="D9B668"/>
             </a:solidFill>
             <a:prstDash val="solid"/>
           </a:ln>
@@ -3512,34 +6077,14 @@
       </p:sp>
       <p:sp>
         <p:nvSpPr>
-          <p:cNvPr id="7" name="Shape 5"/>
-          <p:cNvSpPr/>
-          <p:nvPr/>
-        </p:nvSpPr>
-        <p:spPr>
-          <a:xfrm>
-            <a:off x="566928" y="1417320"/>
-            <a:ext cx="5400904" cy="45720"/>
-          </a:xfrm>
-          <a:prstGeom prst="rect">
-            <a:avLst/>
-          </a:prstGeom>
-          <a:solidFill>
-            <a:srgbClr val="B98A2E"/>
-          </a:solidFill>
-          <a:ln/>
-        </p:spPr>
-      </p:sp>
-      <p:sp>
-        <p:nvSpPr>
-          <p:cNvPr id="8" name="Text 6"/>
-          <p:cNvSpPr/>
-          <p:nvPr/>
-        </p:nvSpPr>
-        <p:spPr>
-          <a:xfrm>
-            <a:off x="795528" y="1618488"/>
-            <a:ext cx="4943704" cy="292608"/>
+          <p:cNvPr id="7" name="Text 5"/>
+          <p:cNvSpPr/>
+          <p:nvPr/>
+        </p:nvSpPr>
+        <p:spPr>
+          <a:xfrm>
+            <a:off x="749808" y="5093208"/>
+            <a:ext cx="1691640" cy="256032"/>
           </a:xfrm>
           <a:prstGeom prst="rect">
             <a:avLst/>
@@ -3555,7 +6100,7 @@
               <a:buNone/>
             </a:pPr>
             <a:r>
-              <a:rPr lang="en-US" sz="1350" b="1" dirty="0">
+              <a:rPr lang="en-US" sz="1050" b="1" dirty="0">
                 <a:solidFill>
                   <a:srgbClr val="977024"/>
                 </a:solidFill>
@@ -3563,40 +6108,41 @@
                 <a:ea typeface="Pretendard" pitchFamily="34" charset="-122"/>
                 <a:cs typeface="Pretendard" pitchFamily="34" charset="-120"/>
               </a:rPr>
-              <a:t>메디컬 단일업종 집중</a:t>
-            </a:r>
-            <a:endParaRPr lang="en-US" sz="1350" dirty="0"/>
-          </a:p>
-        </p:txBody>
-      </p:sp>
-      <p:sp>
-        <p:nvSpPr>
-          <p:cNvPr id="9" name="Text 7"/>
-          <p:cNvSpPr/>
-          <p:nvPr/>
-        </p:nvSpPr>
-        <p:spPr>
-          <a:xfrm>
-            <a:off x="795528" y="1947672"/>
-            <a:ext cx="4943704" cy="365760"/>
-          </a:xfrm>
-          <a:prstGeom prst="rect">
-            <a:avLst/>
-          </a:prstGeom>
-          <a:noFill/>
-          <a:ln/>
-        </p:spPr>
-        <p:txBody>
-          <a:bodyPr wrap="square" lIns="0" tIns="0" rIns="0" bIns="0" rtlCol="0" anchor="ctr">
-            <a:normAutofit/>
-          </a:bodyPr>
+              <a:t>종합 가치 제안</a:t>
+            </a:r>
+            <a:endParaRPr lang="en-US" sz="1050" dirty="0"/>
+          </a:p>
+        </p:txBody>
+      </p:sp>
+      <p:sp>
+        <p:nvSpPr>
+          <p:cNvPr id="8" name="Text 6"/>
+          <p:cNvSpPr/>
+          <p:nvPr/>
+        </p:nvSpPr>
+        <p:spPr>
+          <a:xfrm>
+            <a:off x="2487168" y="5056632"/>
+            <a:ext cx="8954719" cy="658368"/>
+          </a:xfrm>
+          <a:prstGeom prst="rect">
+            <a:avLst/>
+          </a:prstGeom>
+          <a:noFill/>
+          <a:ln/>
+        </p:spPr>
+        <p:txBody>
+          <a:bodyPr wrap="square" lIns="0" tIns="0" rIns="0" bIns="0" rtlCol="0" anchor="ctr"/>
           <a:lstStyle/>
           <a:p>
             <a:pPr indent="0" marL="0">
-              <a:buNone/>
-            </a:pPr>
-            <a:r>
-              <a:rPr lang="en-US" sz="1250" b="1" dirty="0">
+              <a:lnSpc>
+                <a:spcPct val="125000"/>
+              </a:lnSpc>
+              <a:buNone/>
+            </a:pPr>
+            <a:r>
+              <a:rPr lang="en-US" sz="1100" dirty="0">
                 <a:solidFill>
                   <a:srgbClr val="10161F"/>
                 </a:solidFill>
@@ -3604,328 +6150,45 @@
                 <a:ea typeface="Pretendard" pitchFamily="34" charset="-122"/>
                 <a:cs typeface="Pretendard" pitchFamily="34" charset="-120"/>
               </a:rPr>
-              <a:t>전층 의료</a:t>
-            </a:r>
-            <a:endParaRPr lang="en-US" sz="1250" dirty="0"/>
-          </a:p>
-        </p:txBody>
-      </p:sp>
-      <p:sp>
-        <p:nvSpPr>
-          <p:cNvPr id="10" name="Text 8"/>
-          <p:cNvSpPr/>
-          <p:nvPr/>
-        </p:nvSpPr>
-        <p:spPr>
-          <a:xfrm>
-            <a:off x="795528" y="2377440"/>
-            <a:ext cx="4943704" cy="2606040"/>
-          </a:xfrm>
-          <a:prstGeom prst="rect">
-            <a:avLst/>
-          </a:prstGeom>
-          <a:noFill/>
-          <a:ln/>
-        </p:spPr>
-        <p:txBody>
-          <a:bodyPr wrap="square" lIns="0" tIns="0" rIns="0" bIns="0" rtlCol="0" anchor="t">
-            <a:normAutofit/>
-          </a:bodyPr>
-          <a:lstStyle/>
-          <a:p>
-            <a:pPr marL="342900" indent="-342900">
-              <a:lnSpc>
-                <a:spcPct val="125000"/>
-              </a:lnSpc>
-              <a:buSzPct val="100000"/>
-              <a:buChar char="•"/>
-            </a:pPr>
-            <a:r>
-              <a:rPr lang="en-US" sz="1100" dirty="0">
-                <a:solidFill>
-                  <a:srgbClr val="10161F"/>
+              <a:t>관점에서 안정적 월 임대수익과 우량 메디컬 테넌트를 보유한 핵심 투자 자산입니다.</a:t>
+            </a:r>
+            <a:endParaRPr lang="en-US" sz="1100" dirty="0"/>
+          </a:p>
+        </p:txBody>
+      </p:sp>
+      <p:sp>
+        <p:nvSpPr>
+          <p:cNvPr id="9" name="Text 7"/>
+          <p:cNvSpPr/>
+          <p:nvPr/>
+        </p:nvSpPr>
+        <p:spPr>
+          <a:xfrm>
+            <a:off x="566928" y="6382512"/>
+            <a:ext cx="7315200" cy="219456"/>
+          </a:xfrm>
+          <a:prstGeom prst="rect">
+            <a:avLst/>
+          </a:prstGeom>
+          <a:noFill/>
+          <a:ln/>
+        </p:spPr>
+        <p:txBody>
+          <a:bodyPr wrap="square" lIns="0" tIns="0" rIns="0" bIns="0" rtlCol="0" anchor="ctr"/>
+          <a:lstStyle/>
+          <a:p>
+            <a:pPr indent="0" marL="0">
+              <a:buNone/>
+            </a:pPr>
+            <a:r>
+              <a:rPr lang="en-US" sz="800" dirty="0">
+                <a:solidFill>
+                  <a:srgbClr val="718096"/>
                 </a:solidFill>
                 <a:latin typeface="Pretendard" pitchFamily="34" charset="0"/>
                 <a:ea typeface="Pretendard" pitchFamily="34" charset="-122"/>
                 <a:cs typeface="Pretendard" pitchFamily="34" charset="-120"/>
               </a:rPr>
-              <a:t>업종 다각화 검토</a:t>
-            </a:r>
-            <a:endParaRPr lang="en-US" sz="1100" dirty="0"/>
-          </a:p>
-        </p:txBody>
-      </p:sp>
-      <p:sp>
-        <p:nvSpPr>
-          <p:cNvPr id="11" name="Shape 9"/>
-          <p:cNvSpPr/>
-          <p:nvPr/>
-        </p:nvSpPr>
-        <p:spPr>
-          <a:xfrm>
-            <a:off x="6223864" y="1417320"/>
-            <a:ext cx="5400904" cy="3657600"/>
-          </a:xfrm>
-          <a:prstGeom prst="roundRect">
-            <a:avLst>
-              <a:gd name="adj" fmla="val 1500"/>
-            </a:avLst>
-          </a:prstGeom>
-          <a:solidFill>
-            <a:srgbClr val="F7FAFC"/>
-          </a:solidFill>
-          <a:ln w="6350">
-            <a:solidFill>
-              <a:srgbClr val="CBD5E0"/>
-            </a:solidFill>
-            <a:prstDash val="solid"/>
-          </a:ln>
-        </p:spPr>
-      </p:sp>
-      <p:sp>
-        <p:nvSpPr>
-          <p:cNvPr id="12" name="Shape 10"/>
-          <p:cNvSpPr/>
-          <p:nvPr/>
-        </p:nvSpPr>
-        <p:spPr>
-          <a:xfrm>
-            <a:off x="6223864" y="1417320"/>
-            <a:ext cx="5400904" cy="45720"/>
-          </a:xfrm>
-          <a:prstGeom prst="rect">
-            <a:avLst/>
-          </a:prstGeom>
-          <a:solidFill>
-            <a:srgbClr val="B98A2E"/>
-          </a:solidFill>
-          <a:ln/>
-        </p:spPr>
-      </p:sp>
-      <p:sp>
-        <p:nvSpPr>
-          <p:cNvPr id="13" name="Text 11"/>
-          <p:cNvSpPr/>
-          <p:nvPr/>
-        </p:nvSpPr>
-        <p:spPr>
-          <a:xfrm>
-            <a:off x="6452464" y="1618488"/>
-            <a:ext cx="4943704" cy="292608"/>
-          </a:xfrm>
-          <a:prstGeom prst="rect">
-            <a:avLst/>
-          </a:prstGeom>
-          <a:noFill/>
-          <a:ln/>
-        </p:spPr>
-        <p:txBody>
-          <a:bodyPr wrap="square" lIns="0" tIns="0" rIns="0" bIns="0" rtlCol="0" anchor="ctr"/>
-          <a:lstStyle/>
-          <a:p>
-            <a:pPr indent="0" marL="0">
-              <a:buNone/>
-            </a:pPr>
-            <a:r>
-              <a:rPr lang="en-US" sz="1350" b="1" dirty="0">
-                <a:solidFill>
-                  <a:srgbClr val="977024"/>
-                </a:solidFill>
-                <a:latin typeface="Pretendard" pitchFamily="34" charset="0"/>
-                <a:ea typeface="Pretendard" pitchFamily="34" charset="-122"/>
-                <a:cs typeface="Pretendard" pitchFamily="34" charset="-120"/>
-              </a:rPr>
-              <a:t>금리 변동</a:t>
-            </a:r>
-            <a:endParaRPr lang="en-US" sz="1350" dirty="0"/>
-          </a:p>
-        </p:txBody>
-      </p:sp>
-      <p:sp>
-        <p:nvSpPr>
-          <p:cNvPr id="14" name="Text 12"/>
-          <p:cNvSpPr/>
-          <p:nvPr/>
-        </p:nvSpPr>
-        <p:spPr>
-          <a:xfrm>
-            <a:off x="6452464" y="1947672"/>
-            <a:ext cx="4943704" cy="365760"/>
-          </a:xfrm>
-          <a:prstGeom prst="rect">
-            <a:avLst/>
-          </a:prstGeom>
-          <a:noFill/>
-          <a:ln/>
-        </p:spPr>
-        <p:txBody>
-          <a:bodyPr wrap="square" lIns="0" tIns="0" rIns="0" bIns="0" rtlCol="0" anchor="ctr">
-            <a:normAutofit/>
-          </a:bodyPr>
-          <a:lstStyle/>
-          <a:p>
-            <a:pPr indent="0" marL="0">
-              <a:buNone/>
-            </a:pPr>
-            <a:r>
-              <a:rPr lang="en-US" sz="1250" b="1" dirty="0">
-                <a:solidFill>
-                  <a:srgbClr val="10161F"/>
-                </a:solidFill>
-                <a:latin typeface="Pretendard" pitchFamily="34" charset="0"/>
-                <a:ea typeface="Pretendard" pitchFamily="34" charset="-122"/>
-                <a:cs typeface="Pretendard" pitchFamily="34" charset="-120"/>
-              </a:rPr>
-              <a:t>4.1% 고정</a:t>
-            </a:r>
-            <a:endParaRPr lang="en-US" sz="1250" dirty="0"/>
-          </a:p>
-        </p:txBody>
-      </p:sp>
-      <p:sp>
-        <p:nvSpPr>
-          <p:cNvPr id="15" name="Text 13"/>
-          <p:cNvSpPr/>
-          <p:nvPr/>
-        </p:nvSpPr>
-        <p:spPr>
-          <a:xfrm>
-            <a:off x="6452464" y="2377440"/>
-            <a:ext cx="4943704" cy="2606040"/>
-          </a:xfrm>
-          <a:prstGeom prst="rect">
-            <a:avLst/>
-          </a:prstGeom>
-          <a:noFill/>
-          <a:ln/>
-        </p:spPr>
-        <p:txBody>
-          <a:bodyPr wrap="square" lIns="0" tIns="0" rIns="0" bIns="0" rtlCol="0" anchor="t">
-            <a:normAutofit/>
-          </a:bodyPr>
-          <a:lstStyle/>
-          <a:p>
-            <a:pPr marL="342900" indent="-342900">
-              <a:lnSpc>
-                <a:spcPct val="125000"/>
-              </a:lnSpc>
-              <a:buSzPct val="100000"/>
-              <a:buChar char="•"/>
-            </a:pPr>
-            <a:r>
-              <a:rPr lang="en-US" sz="1100" dirty="0">
-                <a:solidFill>
-                  <a:srgbClr val="10161F"/>
-                </a:solidFill>
-                <a:latin typeface="Pretendard" pitchFamily="34" charset="0"/>
-                <a:ea typeface="Pretendard" pitchFamily="34" charset="-122"/>
-                <a:cs typeface="Pretendard" pitchFamily="34" charset="-120"/>
-              </a:rPr>
-              <a:t>승계 대출 활용</a:t>
-            </a:r>
-            <a:endParaRPr lang="en-US" sz="1100" dirty="0"/>
-          </a:p>
-        </p:txBody>
-      </p:sp>
-      <p:sp>
-        <p:nvSpPr>
-          <p:cNvPr id="16" name="Shape 14"/>
-          <p:cNvSpPr/>
-          <p:nvPr/>
-        </p:nvSpPr>
-        <p:spPr>
-          <a:xfrm>
-            <a:off x="566928" y="5193792"/>
-            <a:ext cx="11057839" cy="621792"/>
-          </a:xfrm>
-          <a:prstGeom prst="roundRect">
-            <a:avLst>
-              <a:gd name="adj" fmla="val 8824"/>
-            </a:avLst>
-          </a:prstGeom>
-          <a:solidFill>
-            <a:srgbClr val="F7FAFC"/>
-          </a:solidFill>
-          <a:ln w="6350">
-            <a:solidFill>
-              <a:srgbClr val="CBD5E0"/>
-            </a:solidFill>
-            <a:prstDash val="solid"/>
-          </a:ln>
-        </p:spPr>
-      </p:sp>
-      <p:sp>
-        <p:nvSpPr>
-          <p:cNvPr id="17" name="Text 15"/>
-          <p:cNvSpPr/>
-          <p:nvPr/>
-        </p:nvSpPr>
-        <p:spPr>
-          <a:xfrm>
-            <a:off x="795528" y="5193792"/>
-            <a:ext cx="10600639" cy="621792"/>
-          </a:xfrm>
-          <a:prstGeom prst="rect">
-            <a:avLst/>
-          </a:prstGeom>
-          <a:noFill/>
-          <a:ln/>
-        </p:spPr>
-        <p:txBody>
-          <a:bodyPr wrap="square" lIns="0" tIns="0" rIns="0" bIns="0" rtlCol="0" anchor="ctr"/>
-          <a:lstStyle/>
-          <a:p>
-            <a:pPr indent="0" marL="0">
-              <a:buNone/>
-            </a:pPr>
-            <a:r>
-              <a:rPr lang="en-US" sz="1100" dirty="0">
-                <a:solidFill>
-                  <a:srgbClr val="10161F"/>
-                </a:solidFill>
-                <a:latin typeface="Pretendard" pitchFamily="34" charset="0"/>
-                <a:ea typeface="Pretendard" pitchFamily="34" charset="-122"/>
-                <a:cs typeface="Pretendard" pitchFamily="34" charset="-120"/>
-              </a:rPr>
-              <a:t>※ 본 리스크 체크는 공부 및 브로커 확인 기반이며, 매수 전 전문 실사팀(변호사/건축사)을 통한 정밀 실사가 필요합니다.</a:t>
-            </a:r>
-            <a:endParaRPr lang="en-US" sz="1100" dirty="0"/>
-          </a:p>
-        </p:txBody>
-      </p:sp>
-      <p:sp>
-        <p:nvSpPr>
-          <p:cNvPr id="18" name="Text 16"/>
-          <p:cNvSpPr/>
-          <p:nvPr/>
-        </p:nvSpPr>
-        <p:spPr>
-          <a:xfrm>
-            <a:off x="566928" y="6382512"/>
-            <a:ext cx="7315200" cy="219456"/>
-          </a:xfrm>
-          <a:prstGeom prst="rect">
-            <a:avLst/>
-          </a:prstGeom>
-          <a:noFill/>
-          <a:ln/>
-        </p:spPr>
-        <p:txBody>
-          <a:bodyPr wrap="square" lIns="0" tIns="0" rIns="0" bIns="0" rtlCol="0" anchor="ctr"/>
-          <a:lstStyle/>
-          <a:p>
-            <a:pPr indent="0" marL="0">
-              <a:buNone/>
-            </a:pPr>
-            <a:r>
-              <a:rPr lang="en-US" sz="800" dirty="0">
-                <a:solidFill>
-                  <a:srgbClr val="718096"/>
-                </a:solidFill>
-                <a:latin typeface="Pretendard" pitchFamily="34" charset="0"/>
-                <a:ea typeface="Pretendard" pitchFamily="34" charset="-122"/>
-                <a:cs typeface="Pretendard" pitchFamily="34" charset="-120"/>
-              </a:rPr>
               <a:t>크리딜   |   </a:t>
             </a:r>
             <a:endParaRPr lang="en-US" sz="800" dirty="0"/>
@@ -3934,7 +6197,7 @@
       </p:sp>
       <p:sp>
         <p:nvSpPr>
-          <p:cNvPr id="19" name="Text 17"/>
+          <p:cNvPr id="10" name="Text 8"/>
           <p:cNvSpPr/>
           <p:nvPr/>
         </p:nvSpPr>
@@ -3965,7 +6228,7 @@
                 <a:ea typeface="Arial" pitchFamily="34" charset="-122"/>
                 <a:cs typeface="Arial" pitchFamily="34" charset="-120"/>
               </a:rPr>
-              <a:t>12</a:t>
+              <a:t>11</a:t>
             </a:r>
             <a:endParaRPr lang="en-US" sz="900" dirty="0"/>
           </a:p>
@@ -4056,7 +6319,7 @@
                 <a:ea typeface="Arial" pitchFamily="34" charset="-122"/>
                 <a:cs typeface="Arial" pitchFamily="34" charset="-120"/>
               </a:rPr>
-              <a:t>13</a:t>
+              <a:t>12</a:t>
             </a:r>
             <a:endParaRPr lang="en-US" sz="1300" dirty="0"/>
           </a:p>
@@ -4095,7 +6358,7 @@
                 <a:ea typeface="Arial" pitchFamily="34" charset="-122"/>
                 <a:cs typeface="Arial" pitchFamily="34" charset="-120"/>
               </a:rPr>
-              <a:t>Process</a:t>
+              <a:t>Risk</a:t>
             </a:r>
             <a:endParaRPr lang="en-US" sz="950" dirty="0"/>
           </a:p>
@@ -4134,7 +6397,7 @@
                 <a:ea typeface="Pretendard" pitchFamily="34" charset="-122"/>
                 <a:cs typeface="Pretendard" pitchFamily="34" charset="-120"/>
               </a:rPr>
-              <a:t>다음 단계</a:t>
+              <a:t>리스크 점검</a:t>
             </a:r>
             <a:endParaRPr lang="en-US" sz="2300" dirty="0"/>
           </a:p>
@@ -4148,12 +6411,12 @@
         </p:nvSpPr>
         <p:spPr>
           <a:xfrm>
-            <a:off x="566928" y="1572768"/>
-            <a:ext cx="11057839" cy="3200400"/>
+            <a:off x="566928" y="1417320"/>
+            <a:ext cx="5400904" cy="3657600"/>
           </a:xfrm>
           <a:prstGeom prst="roundRect">
             <a:avLst>
-              <a:gd name="adj" fmla="val 1714"/>
+              <a:gd name="adj" fmla="val 1500"/>
             </a:avLst>
           </a:prstGeom>
           <a:solidFill>
@@ -4175,10 +6438,10 @@
         </p:nvSpPr>
         <p:spPr>
           <a:xfrm>
-            <a:off x="786384" y="1792224"/>
-            <a:ext cx="438912" cy="438912"/>
-          </a:xfrm>
-          <a:prstGeom prst="ellipse">
+            <a:off x="566928" y="1417320"/>
+            <a:ext cx="5400904" cy="45720"/>
+          </a:xfrm>
+          <a:prstGeom prst="rect">
             <a:avLst/>
           </a:prstGeom>
           <a:solidFill>
@@ -4195,205 +6458,434 @@
         </p:nvSpPr>
         <p:spPr>
           <a:xfrm>
-            <a:off x="786384" y="1792224"/>
-            <a:ext cx="438912" cy="438912"/>
-          </a:xfrm>
-          <a:prstGeom prst="rect">
-            <a:avLst/>
-          </a:prstGeom>
-          <a:noFill/>
-          <a:ln/>
-        </p:spPr>
-        <p:txBody>
-          <a:bodyPr wrap="square" lIns="0" tIns="0" rIns="0" bIns="0" rtlCol="0" anchor="ctr"/>
-          <a:lstStyle/>
-          <a:p>
-            <a:pPr algn="ctr" indent="0" marL="0">
-              <a:buNone/>
-            </a:pPr>
-            <a:r>
-              <a:rPr lang="en-US" sz="1400" b="1" dirty="0">
-                <a:solidFill>
-                  <a:srgbClr val="FFFFFF"/>
+            <a:off x="795528" y="1618488"/>
+            <a:ext cx="4943704" cy="292608"/>
+          </a:xfrm>
+          <a:prstGeom prst="rect">
+            <a:avLst/>
+          </a:prstGeom>
+          <a:noFill/>
+          <a:ln/>
+        </p:spPr>
+        <p:txBody>
+          <a:bodyPr wrap="square" lIns="0" tIns="0" rIns="0" bIns="0" rtlCol="0" anchor="ctr"/>
+          <a:lstStyle/>
+          <a:p>
+            <a:pPr indent="0" marL="0">
+              <a:buNone/>
+            </a:pPr>
+            <a:r>
+              <a:rPr lang="en-US" sz="1350" b="1" dirty="0">
+                <a:solidFill>
+                  <a:srgbClr val="977024"/>
+                </a:solidFill>
+                <a:latin typeface="Pretendard" pitchFamily="34" charset="0"/>
+                <a:ea typeface="Pretendard" pitchFamily="34" charset="-122"/>
+                <a:cs typeface="Pretendard" pitchFamily="34" charset="-120"/>
+              </a:rPr>
+              <a:t>메디컬 단일업종 집중</a:t>
+            </a:r>
+            <a:endParaRPr lang="en-US" sz="1350" dirty="0"/>
+          </a:p>
+        </p:txBody>
+      </p:sp>
+      <p:sp>
+        <p:nvSpPr>
+          <p:cNvPr id="9" name="Text 7"/>
+          <p:cNvSpPr/>
+          <p:nvPr/>
+        </p:nvSpPr>
+        <p:spPr>
+          <a:xfrm>
+            <a:off x="795528" y="1947672"/>
+            <a:ext cx="4943704" cy="365760"/>
+          </a:xfrm>
+          <a:prstGeom prst="rect">
+            <a:avLst/>
+          </a:prstGeom>
+          <a:noFill/>
+          <a:ln/>
+        </p:spPr>
+        <p:txBody>
+          <a:bodyPr wrap="square" lIns="0" tIns="0" rIns="0" bIns="0" rtlCol="0" anchor="ctr">
+            <a:normAutofit/>
+          </a:bodyPr>
+          <a:lstStyle/>
+          <a:p>
+            <a:pPr indent="0" marL="0">
+              <a:buNone/>
+            </a:pPr>
+            <a:r>
+              <a:rPr lang="en-US" sz="1250" b="1" dirty="0">
+                <a:solidFill>
+                  <a:srgbClr val="10161F"/>
+                </a:solidFill>
+                <a:latin typeface="Pretendard" pitchFamily="34" charset="0"/>
+                <a:ea typeface="Pretendard" pitchFamily="34" charset="-122"/>
+                <a:cs typeface="Pretendard" pitchFamily="34" charset="-120"/>
+              </a:rPr>
+              <a:t>전층 의료</a:t>
+            </a:r>
+            <a:endParaRPr lang="en-US" sz="1250" dirty="0"/>
+          </a:p>
+        </p:txBody>
+      </p:sp>
+      <p:sp>
+        <p:nvSpPr>
+          <p:cNvPr id="10" name="Text 8"/>
+          <p:cNvSpPr/>
+          <p:nvPr/>
+        </p:nvSpPr>
+        <p:spPr>
+          <a:xfrm>
+            <a:off x="795528" y="2377440"/>
+            <a:ext cx="4943704" cy="2606040"/>
+          </a:xfrm>
+          <a:prstGeom prst="rect">
+            <a:avLst/>
+          </a:prstGeom>
+          <a:noFill/>
+          <a:ln/>
+        </p:spPr>
+        <p:txBody>
+          <a:bodyPr wrap="square" lIns="0" tIns="0" rIns="0" bIns="0" rtlCol="0" anchor="t">
+            <a:normAutofit/>
+          </a:bodyPr>
+          <a:lstStyle/>
+          <a:p>
+            <a:pPr marL="342900" indent="-342900">
+              <a:lnSpc>
+                <a:spcPct val="125000"/>
+              </a:lnSpc>
+              <a:buSzPct val="100000"/>
+              <a:buChar char="•"/>
+            </a:pPr>
+            <a:r>
+              <a:rPr lang="en-US" sz="1100" dirty="0">
+                <a:solidFill>
+                  <a:srgbClr val="10161F"/>
+                </a:solidFill>
+                <a:latin typeface="Pretendard" pitchFamily="34" charset="0"/>
+                <a:ea typeface="Pretendard" pitchFamily="34" charset="-122"/>
+                <a:cs typeface="Pretendard" pitchFamily="34" charset="-120"/>
+              </a:rPr>
+              <a:t>업종 다각화 검토</a:t>
+            </a:r>
+            <a:endParaRPr lang="en-US" sz="1100" dirty="0"/>
+          </a:p>
+        </p:txBody>
+      </p:sp>
+      <p:sp>
+        <p:nvSpPr>
+          <p:cNvPr id="11" name="Shape 9"/>
+          <p:cNvSpPr/>
+          <p:nvPr/>
+        </p:nvSpPr>
+        <p:spPr>
+          <a:xfrm>
+            <a:off x="6223864" y="1417320"/>
+            <a:ext cx="5400904" cy="3657600"/>
+          </a:xfrm>
+          <a:prstGeom prst="roundRect">
+            <a:avLst>
+              <a:gd name="adj" fmla="val 1500"/>
+            </a:avLst>
+          </a:prstGeom>
+          <a:solidFill>
+            <a:srgbClr val="F7FAFC"/>
+          </a:solidFill>
+          <a:ln w="6350">
+            <a:solidFill>
+              <a:srgbClr val="CBD5E0"/>
+            </a:solidFill>
+            <a:prstDash val="solid"/>
+          </a:ln>
+        </p:spPr>
+      </p:sp>
+      <p:sp>
+        <p:nvSpPr>
+          <p:cNvPr id="12" name="Shape 10"/>
+          <p:cNvSpPr/>
+          <p:nvPr/>
+        </p:nvSpPr>
+        <p:spPr>
+          <a:xfrm>
+            <a:off x="6223864" y="1417320"/>
+            <a:ext cx="5400904" cy="45720"/>
+          </a:xfrm>
+          <a:prstGeom prst="rect">
+            <a:avLst/>
+          </a:prstGeom>
+          <a:solidFill>
+            <a:srgbClr val="B98A2E"/>
+          </a:solidFill>
+          <a:ln/>
+        </p:spPr>
+      </p:sp>
+      <p:sp>
+        <p:nvSpPr>
+          <p:cNvPr id="13" name="Text 11"/>
+          <p:cNvSpPr/>
+          <p:nvPr/>
+        </p:nvSpPr>
+        <p:spPr>
+          <a:xfrm>
+            <a:off x="6452464" y="1618488"/>
+            <a:ext cx="4943704" cy="292608"/>
+          </a:xfrm>
+          <a:prstGeom prst="rect">
+            <a:avLst/>
+          </a:prstGeom>
+          <a:noFill/>
+          <a:ln/>
+        </p:spPr>
+        <p:txBody>
+          <a:bodyPr wrap="square" lIns="0" tIns="0" rIns="0" bIns="0" rtlCol="0" anchor="ctr"/>
+          <a:lstStyle/>
+          <a:p>
+            <a:pPr indent="0" marL="0">
+              <a:buNone/>
+            </a:pPr>
+            <a:r>
+              <a:rPr lang="en-US" sz="1350" b="1" dirty="0">
+                <a:solidFill>
+                  <a:srgbClr val="977024"/>
+                </a:solidFill>
+                <a:latin typeface="Pretendard" pitchFamily="34" charset="0"/>
+                <a:ea typeface="Pretendard" pitchFamily="34" charset="-122"/>
+                <a:cs typeface="Pretendard" pitchFamily="34" charset="-120"/>
+              </a:rPr>
+              <a:t>금리 변동</a:t>
+            </a:r>
+            <a:endParaRPr lang="en-US" sz="1350" dirty="0"/>
+          </a:p>
+        </p:txBody>
+      </p:sp>
+      <p:sp>
+        <p:nvSpPr>
+          <p:cNvPr id="14" name="Text 12"/>
+          <p:cNvSpPr/>
+          <p:nvPr/>
+        </p:nvSpPr>
+        <p:spPr>
+          <a:xfrm>
+            <a:off x="6452464" y="1947672"/>
+            <a:ext cx="4943704" cy="365760"/>
+          </a:xfrm>
+          <a:prstGeom prst="rect">
+            <a:avLst/>
+          </a:prstGeom>
+          <a:noFill/>
+          <a:ln/>
+        </p:spPr>
+        <p:txBody>
+          <a:bodyPr wrap="square" lIns="0" tIns="0" rIns="0" bIns="0" rtlCol="0" anchor="ctr">
+            <a:normAutofit/>
+          </a:bodyPr>
+          <a:lstStyle/>
+          <a:p>
+            <a:pPr indent="0" marL="0">
+              <a:buNone/>
+            </a:pPr>
+            <a:r>
+              <a:rPr lang="en-US" sz="1250" b="1" dirty="0">
+                <a:solidFill>
+                  <a:srgbClr val="10161F"/>
+                </a:solidFill>
+                <a:latin typeface="Pretendard" pitchFamily="34" charset="0"/>
+                <a:ea typeface="Pretendard" pitchFamily="34" charset="-122"/>
+                <a:cs typeface="Pretendard" pitchFamily="34" charset="-120"/>
+              </a:rPr>
+              <a:t>4.1% 고정</a:t>
+            </a:r>
+            <a:endParaRPr lang="en-US" sz="1250" dirty="0"/>
+          </a:p>
+        </p:txBody>
+      </p:sp>
+      <p:sp>
+        <p:nvSpPr>
+          <p:cNvPr id="15" name="Text 13"/>
+          <p:cNvSpPr/>
+          <p:nvPr/>
+        </p:nvSpPr>
+        <p:spPr>
+          <a:xfrm>
+            <a:off x="6452464" y="2377440"/>
+            <a:ext cx="4943704" cy="2606040"/>
+          </a:xfrm>
+          <a:prstGeom prst="rect">
+            <a:avLst/>
+          </a:prstGeom>
+          <a:noFill/>
+          <a:ln/>
+        </p:spPr>
+        <p:txBody>
+          <a:bodyPr wrap="square" lIns="0" tIns="0" rIns="0" bIns="0" rtlCol="0" anchor="t">
+            <a:normAutofit/>
+          </a:bodyPr>
+          <a:lstStyle/>
+          <a:p>
+            <a:pPr marL="342900" indent="-342900">
+              <a:lnSpc>
+                <a:spcPct val="125000"/>
+              </a:lnSpc>
+              <a:buSzPct val="100000"/>
+              <a:buChar char="•"/>
+            </a:pPr>
+            <a:r>
+              <a:rPr lang="en-US" sz="1100" dirty="0">
+                <a:solidFill>
+                  <a:srgbClr val="10161F"/>
+                </a:solidFill>
+                <a:latin typeface="Pretendard" pitchFamily="34" charset="0"/>
+                <a:ea typeface="Pretendard" pitchFamily="34" charset="-122"/>
+                <a:cs typeface="Pretendard" pitchFamily="34" charset="-120"/>
+              </a:rPr>
+              <a:t>승계 대출 활용</a:t>
+            </a:r>
+            <a:endParaRPr lang="en-US" sz="1100" dirty="0"/>
+          </a:p>
+        </p:txBody>
+      </p:sp>
+      <p:sp>
+        <p:nvSpPr>
+          <p:cNvPr id="16" name="Shape 14"/>
+          <p:cNvSpPr/>
+          <p:nvPr/>
+        </p:nvSpPr>
+        <p:spPr>
+          <a:xfrm>
+            <a:off x="566928" y="5193792"/>
+            <a:ext cx="11057839" cy="621792"/>
+          </a:xfrm>
+          <a:prstGeom prst="roundRect">
+            <a:avLst>
+              <a:gd name="adj" fmla="val 8824"/>
+            </a:avLst>
+          </a:prstGeom>
+          <a:solidFill>
+            <a:srgbClr val="F7FAFC"/>
+          </a:solidFill>
+          <a:ln w="6350">
+            <a:solidFill>
+              <a:srgbClr val="CBD5E0"/>
+            </a:solidFill>
+            <a:prstDash val="solid"/>
+          </a:ln>
+        </p:spPr>
+      </p:sp>
+      <p:sp>
+        <p:nvSpPr>
+          <p:cNvPr id="17" name="Text 15"/>
+          <p:cNvSpPr/>
+          <p:nvPr/>
+        </p:nvSpPr>
+        <p:spPr>
+          <a:xfrm>
+            <a:off x="795528" y="5193792"/>
+            <a:ext cx="10600639" cy="621792"/>
+          </a:xfrm>
+          <a:prstGeom prst="rect">
+            <a:avLst/>
+          </a:prstGeom>
+          <a:noFill/>
+          <a:ln/>
+        </p:spPr>
+        <p:txBody>
+          <a:bodyPr wrap="square" lIns="0" tIns="0" rIns="0" bIns="0" rtlCol="0" anchor="ctr"/>
+          <a:lstStyle/>
+          <a:p>
+            <a:pPr indent="0" marL="0">
+              <a:buNone/>
+            </a:pPr>
+            <a:r>
+              <a:rPr lang="en-US" sz="1100" dirty="0">
+                <a:solidFill>
+                  <a:srgbClr val="10161F"/>
+                </a:solidFill>
+                <a:latin typeface="Pretendard" pitchFamily="34" charset="0"/>
+                <a:ea typeface="Pretendard" pitchFamily="34" charset="-122"/>
+                <a:cs typeface="Pretendard" pitchFamily="34" charset="-120"/>
+              </a:rPr>
+              <a:t>※ 본 리스크 체크는 공부 및 브로커 확인 기반이며, 매수 전 전문 실사팀(변호사/건축사)을 통한 정밀 실사가 필요합니다.</a:t>
+            </a:r>
+            <a:endParaRPr lang="en-US" sz="1100" dirty="0"/>
+          </a:p>
+        </p:txBody>
+      </p:sp>
+      <p:sp>
+        <p:nvSpPr>
+          <p:cNvPr id="18" name="Text 16"/>
+          <p:cNvSpPr/>
+          <p:nvPr/>
+        </p:nvSpPr>
+        <p:spPr>
+          <a:xfrm>
+            <a:off x="566928" y="6382512"/>
+            <a:ext cx="7315200" cy="219456"/>
+          </a:xfrm>
+          <a:prstGeom prst="rect">
+            <a:avLst/>
+          </a:prstGeom>
+          <a:noFill/>
+          <a:ln/>
+        </p:spPr>
+        <p:txBody>
+          <a:bodyPr wrap="square" lIns="0" tIns="0" rIns="0" bIns="0" rtlCol="0" anchor="ctr"/>
+          <a:lstStyle/>
+          <a:p>
+            <a:pPr indent="0" marL="0">
+              <a:buNone/>
+            </a:pPr>
+            <a:r>
+              <a:rPr lang="en-US" sz="800" dirty="0">
+                <a:solidFill>
+                  <a:srgbClr val="718096"/>
+                </a:solidFill>
+                <a:latin typeface="Pretendard" pitchFamily="34" charset="0"/>
+                <a:ea typeface="Pretendard" pitchFamily="34" charset="-122"/>
+                <a:cs typeface="Pretendard" pitchFamily="34" charset="-120"/>
+              </a:rPr>
+              <a:t>크리딜   |   </a:t>
+            </a:r>
+            <a:endParaRPr lang="en-US" sz="800" dirty="0"/>
+          </a:p>
+        </p:txBody>
+      </p:sp>
+      <p:sp>
+        <p:nvSpPr>
+          <p:cNvPr id="19" name="Text 17"/>
+          <p:cNvSpPr/>
+          <p:nvPr/>
+        </p:nvSpPr>
+        <p:spPr>
+          <a:xfrm>
+            <a:off x="10710367" y="6382512"/>
+            <a:ext cx="914400" cy="219456"/>
+          </a:xfrm>
+          <a:prstGeom prst="rect">
+            <a:avLst/>
+          </a:prstGeom>
+          <a:noFill/>
+          <a:ln/>
+        </p:spPr>
+        <p:txBody>
+          <a:bodyPr wrap="square" lIns="0" tIns="0" rIns="0" bIns="0" rtlCol="0" anchor="ctr"/>
+          <a:lstStyle/>
+          <a:p>
+            <a:pPr algn="r" indent="0" marL="0">
+              <a:buNone/>
+            </a:pPr>
+            <a:r>
+              <a:rPr lang="en-US" sz="900" b="1" dirty="0">
+                <a:solidFill>
+                  <a:srgbClr val="B98A2E"/>
                 </a:solidFill>
                 <a:latin typeface="Arial" pitchFamily="34" charset="0"/>
                 <a:ea typeface="Arial" pitchFamily="34" charset="-122"/>
                 <a:cs typeface="Arial" pitchFamily="34" charset="-120"/>
               </a:rPr>
-              <a:t>01</a:t>
-            </a:r>
-            <a:endParaRPr lang="en-US" sz="1400" dirty="0"/>
-          </a:p>
-        </p:txBody>
-      </p:sp>
-      <p:sp>
-        <p:nvSpPr>
-          <p:cNvPr id="9" name="Text 7"/>
-          <p:cNvSpPr/>
-          <p:nvPr/>
-        </p:nvSpPr>
-        <p:spPr>
-          <a:xfrm>
-            <a:off x="786384" y="2304288"/>
-            <a:ext cx="10618927" cy="365760"/>
-          </a:xfrm>
-          <a:prstGeom prst="rect">
-            <a:avLst/>
-          </a:prstGeom>
-          <a:noFill/>
-          <a:ln/>
-        </p:spPr>
-        <p:txBody>
-          <a:bodyPr wrap="square" rtlCol="0" anchor="ctr"/>
-          <a:lstStyle/>
-          <a:p>
-            <a:pPr indent="0" marL="0">
-              <a:buNone/>
-            </a:pPr>
-            <a:r>
-              <a:rPr lang="en-US" sz="1600" b="1" dirty="0">
-                <a:solidFill>
-                  <a:srgbClr val="10161F"/>
-                </a:solidFill>
-                <a:latin typeface="Pretendard" pitchFamily="34" charset="0"/>
-                <a:ea typeface="Pretendard" pitchFamily="34" charset="-122"/>
-                <a:cs typeface="Pretendard" pitchFamily="34" charset="-120"/>
-              </a:rPr>
-              <a:t>1단계</a:t>
-            </a:r>
-            <a:endParaRPr lang="en-US" sz="1600" dirty="0"/>
-          </a:p>
-        </p:txBody>
-      </p:sp>
-      <p:sp>
-        <p:nvSpPr>
-          <p:cNvPr id="10" name="Text 8"/>
-          <p:cNvSpPr/>
-          <p:nvPr/>
-        </p:nvSpPr>
-        <p:spPr>
-          <a:xfrm>
-            <a:off x="786384" y="2761488"/>
-            <a:ext cx="10618927" cy="1828800"/>
-          </a:xfrm>
-          <a:prstGeom prst="rect">
-            <a:avLst/>
-          </a:prstGeom>
-          <a:noFill/>
-          <a:ln/>
-        </p:spPr>
-        <p:txBody>
-          <a:bodyPr wrap="square" rtlCol="0" anchor="t"/>
-          <a:lstStyle/>
-          <a:p>
-            <a:pPr indent="0" marL="0">
-              <a:buNone/>
-            </a:pPr>
-            <a:r>
-              <a:rPr lang="en-US" sz="1100" dirty="0">
-                <a:solidFill>
-                  <a:srgbClr val="10161F"/>
-                </a:solidFill>
-                <a:latin typeface="Pretendard" pitchFamily="34" charset="0"/>
-                <a:ea typeface="Pretendard" pitchFamily="34" charset="-122"/>
-                <a:cs typeface="Pretendard" pitchFamily="34" charset="-120"/>
-              </a:rPr>
-              <a:t>현장 실사 및 임대차계약서 원본 확인을 권장합니다.</a:t>
-            </a:r>
-            <a:endParaRPr lang="en-US" sz="1100" dirty="0"/>
-          </a:p>
-          <a:p>
-            <a:pPr indent="0" marL="0">
-              <a:buNone/>
-            </a:pPr>
-            <a:r>
-              <a:rPr lang="en-US" sz="1100" dirty="0">
-                <a:solidFill>
-                  <a:srgbClr val="10161F"/>
-                </a:solidFill>
-                <a:latin typeface="Pretendard" pitchFamily="34" charset="0"/>
-                <a:ea typeface="Pretendard" pitchFamily="34" charset="-122"/>
-                <a:cs typeface="Pretendard" pitchFamily="34" charset="-120"/>
-              </a:rPr>
-              <a:t>현장 실사 및 임대차계약서 원본 확인을 권장합니다.</a:t>
-            </a:r>
-            <a:endParaRPr lang="en-US" sz="1100" dirty="0"/>
-          </a:p>
-        </p:txBody>
-      </p:sp>
-      <p:sp>
-        <p:nvSpPr>
-          <p:cNvPr id="11" name="Text 9"/>
-          <p:cNvSpPr/>
-          <p:nvPr/>
-        </p:nvSpPr>
-        <p:spPr>
-          <a:xfrm>
-            <a:off x="566928" y="6382512"/>
-            <a:ext cx="7315200" cy="219456"/>
-          </a:xfrm>
-          <a:prstGeom prst="rect">
-            <a:avLst/>
-          </a:prstGeom>
-          <a:noFill/>
-          <a:ln/>
-        </p:spPr>
-        <p:txBody>
-          <a:bodyPr wrap="square" lIns="0" tIns="0" rIns="0" bIns="0" rtlCol="0" anchor="ctr"/>
-          <a:lstStyle/>
-          <a:p>
-            <a:pPr indent="0" marL="0">
-              <a:buNone/>
-            </a:pPr>
-            <a:r>
-              <a:rPr lang="en-US" sz="800" dirty="0">
-                <a:solidFill>
-                  <a:srgbClr val="718096"/>
-                </a:solidFill>
-                <a:latin typeface="Pretendard" pitchFamily="34" charset="0"/>
-                <a:ea typeface="Pretendard" pitchFamily="34" charset="-122"/>
-                <a:cs typeface="Pretendard" pitchFamily="34" charset="-120"/>
-              </a:rPr>
-              <a:t>크리딜   |   </a:t>
-            </a:r>
-            <a:endParaRPr lang="en-US" sz="800" dirty="0"/>
-          </a:p>
-        </p:txBody>
-      </p:sp>
-      <p:sp>
-        <p:nvSpPr>
-          <p:cNvPr id="12" name="Text 10"/>
-          <p:cNvSpPr/>
-          <p:nvPr/>
-        </p:nvSpPr>
-        <p:spPr>
-          <a:xfrm>
-            <a:off x="10710367" y="6382512"/>
-            <a:ext cx="914400" cy="219456"/>
-          </a:xfrm>
-          <a:prstGeom prst="rect">
-            <a:avLst/>
-          </a:prstGeom>
-          <a:noFill/>
-          <a:ln/>
-        </p:spPr>
-        <p:txBody>
-          <a:bodyPr wrap="square" lIns="0" tIns="0" rIns="0" bIns="0" rtlCol="0" anchor="ctr"/>
-          <a:lstStyle/>
-          <a:p>
-            <a:pPr algn="r" indent="0" marL="0">
-              <a:buNone/>
-            </a:pPr>
-            <a:r>
-              <a:rPr lang="en-US" sz="900" b="1" dirty="0">
-                <a:solidFill>
-                  <a:srgbClr val="B98A2E"/>
-                </a:solidFill>
-                <a:latin typeface="Arial" pitchFamily="34" charset="0"/>
-                <a:ea typeface="Arial" pitchFamily="34" charset="-122"/>
-                <a:cs typeface="Arial" pitchFamily="34" charset="-120"/>
-              </a:rPr>
-              <a:t>13</a:t>
+              <a:t>12</a:t>
             </a:r>
             <a:endParaRPr lang="en-US" sz="900" dirty="0"/>
           </a:p>
@@ -4410,6 +6902,1535 @@
 <file path=ppt/slides/slide14.xml><?xml version="1.0" encoding="utf-8"?>
 <p:sld xmlns:a="http://schemas.openxmlformats.org/drawingml/2006/main" xmlns:r="http://schemas.openxmlformats.org/officeDocument/2006/relationships" xmlns:p="http://schemas.openxmlformats.org/presentationml/2006/main">
   <p:cSld name="Slide 14">
+    <p:bg>
+      <p:bgPr>
+        <a:solidFill>
+          <a:srgbClr val="FFFFFF"/>
+        </a:solidFill>
+      </p:bgPr>
+    </p:bg>
+    <p:spTree>
+      <p:nvGrpSpPr>
+        <p:cNvPr id="1" name=""/>
+        <p:cNvGrpSpPr/>
+        <p:nvPr/>
+      </p:nvGrpSpPr>
+      <p:grpSpPr>
+        <a:xfrm>
+          <a:off x="0" y="0"/>
+          <a:ext cx="0" cy="0"/>
+          <a:chOff x="0" y="0"/>
+          <a:chExt cx="0" cy="0"/>
+        </a:xfrm>
+      </p:grpSpPr>
+      <p:sp>
+        <p:nvSpPr>
+          <p:cNvPr id="2" name="Shape 0"/>
+          <p:cNvSpPr/>
+          <p:nvPr/>
+        </p:nvSpPr>
+        <p:spPr>
+          <a:xfrm>
+            <a:off x="566928" y="457200"/>
+            <a:ext cx="384048" cy="384048"/>
+          </a:xfrm>
+          <a:prstGeom prst="ellipse">
+            <a:avLst/>
+          </a:prstGeom>
+          <a:solidFill>
+            <a:srgbClr val="B98A2E"/>
+          </a:solidFill>
+          <a:ln/>
+        </p:spPr>
+      </p:sp>
+      <p:sp>
+        <p:nvSpPr>
+          <p:cNvPr id="3" name="Text 1"/>
+          <p:cNvSpPr/>
+          <p:nvPr/>
+        </p:nvSpPr>
+        <p:spPr>
+          <a:xfrm>
+            <a:off x="566928" y="457200"/>
+            <a:ext cx="384048" cy="384048"/>
+          </a:xfrm>
+          <a:prstGeom prst="rect">
+            <a:avLst/>
+          </a:prstGeom>
+          <a:noFill/>
+          <a:ln/>
+        </p:spPr>
+        <p:txBody>
+          <a:bodyPr wrap="square" lIns="0" tIns="0" rIns="0" bIns="0" rtlCol="0" anchor="ctr"/>
+          <a:lstStyle/>
+          <a:p>
+            <a:pPr algn="ctr" indent="0" marL="0">
+              <a:buNone/>
+            </a:pPr>
+            <a:r>
+              <a:rPr lang="en-US" sz="1300" b="1" dirty="0">
+                <a:solidFill>
+                  <a:srgbClr val="FFFFFF"/>
+                </a:solidFill>
+                <a:latin typeface="Arial" pitchFamily="34" charset="0"/>
+                <a:ea typeface="Arial" pitchFamily="34" charset="-122"/>
+                <a:cs typeface="Arial" pitchFamily="34" charset="-120"/>
+              </a:rPr>
+              <a:t>13</a:t>
+            </a:r>
+            <a:endParaRPr lang="en-US" sz="1300" dirty="0"/>
+          </a:p>
+        </p:txBody>
+      </p:sp>
+      <p:sp>
+        <p:nvSpPr>
+          <p:cNvPr id="4" name="Text 2"/>
+          <p:cNvSpPr/>
+          <p:nvPr/>
+        </p:nvSpPr>
+        <p:spPr>
+          <a:xfrm>
+            <a:off x="1133856" y="457200"/>
+            <a:ext cx="10490911" cy="182880"/>
+          </a:xfrm>
+          <a:prstGeom prst="rect">
+            <a:avLst/>
+          </a:prstGeom>
+          <a:noFill/>
+          <a:ln/>
+        </p:spPr>
+        <p:txBody>
+          <a:bodyPr wrap="square" lIns="0" tIns="0" rIns="0" bIns="0" rtlCol="0" anchor="ctr"/>
+          <a:lstStyle/>
+          <a:p>
+            <a:pPr indent="0" marL="0">
+              <a:buNone/>
+            </a:pPr>
+            <a:r>
+              <a:rPr lang="en-US" sz="950" b="1" spc="200" kern="0" dirty="0">
+                <a:solidFill>
+                  <a:srgbClr val="B98A2E"/>
+                </a:solidFill>
+                <a:latin typeface="Arial" pitchFamily="34" charset="0"/>
+                <a:ea typeface="Arial" pitchFamily="34" charset="-122"/>
+                <a:cs typeface="Arial" pitchFamily="34" charset="-120"/>
+              </a:rPr>
+              <a:t>Checklist</a:t>
+            </a:r>
+            <a:endParaRPr lang="en-US" sz="950" dirty="0"/>
+          </a:p>
+        </p:txBody>
+      </p:sp>
+      <p:sp>
+        <p:nvSpPr>
+          <p:cNvPr id="5" name="Text 3"/>
+          <p:cNvSpPr/>
+          <p:nvPr/>
+        </p:nvSpPr>
+        <p:spPr>
+          <a:xfrm>
+            <a:off x="1133856" y="640080"/>
+            <a:ext cx="10490911" cy="365760"/>
+          </a:xfrm>
+          <a:prstGeom prst="rect">
+            <a:avLst/>
+          </a:prstGeom>
+          <a:noFill/>
+          <a:ln/>
+        </p:spPr>
+        <p:txBody>
+          <a:bodyPr wrap="square" lIns="0" tIns="0" rIns="0" bIns="0" rtlCol="0" anchor="ctr"/>
+          <a:lstStyle/>
+          <a:p>
+            <a:pPr indent="0" marL="0">
+              <a:buNone/>
+            </a:pPr>
+            <a:r>
+              <a:rPr lang="en-US" sz="2300" b="1" dirty="0">
+                <a:solidFill>
+                  <a:srgbClr val="10161F"/>
+                </a:solidFill>
+                <a:latin typeface="Pretendard" pitchFamily="34" charset="0"/>
+                <a:ea typeface="Pretendard" pitchFamily="34" charset="-122"/>
+                <a:cs typeface="Pretendard" pitchFamily="34" charset="-120"/>
+              </a:rPr>
+              <a:t>실사 및 확인 필요사항</a:t>
+            </a:r>
+            <a:endParaRPr lang="en-US" sz="2300" dirty="0"/>
+          </a:p>
+        </p:txBody>
+      </p:sp>
+      <p:sp>
+        <p:nvSpPr>
+          <p:cNvPr id="6" name="Text 4"/>
+          <p:cNvSpPr/>
+          <p:nvPr/>
+        </p:nvSpPr>
+        <p:spPr>
+          <a:xfrm>
+            <a:off x="566928" y="1371600"/>
+            <a:ext cx="11057839" cy="237744"/>
+          </a:xfrm>
+          <a:prstGeom prst="rect">
+            <a:avLst/>
+          </a:prstGeom>
+          <a:noFill/>
+          <a:ln/>
+        </p:spPr>
+        <p:txBody>
+          <a:bodyPr wrap="square" lIns="0" tIns="0" rIns="0" bIns="0" rtlCol="0" anchor="ctr"/>
+          <a:lstStyle/>
+          <a:p>
+            <a:pPr indent="0" marL="0">
+              <a:buNone/>
+            </a:pPr>
+            <a:r>
+              <a:rPr lang="en-US" sz="1100" b="1" dirty="0">
+                <a:solidFill>
+                  <a:srgbClr val="10161F"/>
+                </a:solidFill>
+                <a:latin typeface="Pretendard" pitchFamily="34" charset="0"/>
+                <a:ea typeface="Pretendard" pitchFamily="34" charset="-122"/>
+                <a:cs typeface="Pretendard" pitchFamily="34" charset="-120"/>
+              </a:rPr>
+              <a:t>거래 안정성 확보를 위한 필수 법률·물리·임대차 실사 점검 항목 (총 6건)</a:t>
+            </a:r>
+            <a:endParaRPr lang="en-US" sz="1100" dirty="0"/>
+          </a:p>
+        </p:txBody>
+      </p:sp>
+      <p:sp>
+        <p:nvSpPr>
+          <p:cNvPr id="7" name="Shape 5"/>
+          <p:cNvSpPr/>
+          <p:nvPr/>
+        </p:nvSpPr>
+        <p:spPr>
+          <a:xfrm>
+            <a:off x="566928" y="1719072"/>
+            <a:ext cx="5368900" cy="868680"/>
+          </a:xfrm>
+          <a:prstGeom prst="rect">
+            <a:avLst/>
+          </a:prstGeom>
+          <a:solidFill>
+            <a:srgbClr val="F7FAFC"/>
+          </a:solidFill>
+          <a:ln w="6350">
+            <a:solidFill>
+              <a:srgbClr val="D9B668"/>
+            </a:solidFill>
+            <a:prstDash val="solid"/>
+          </a:ln>
+        </p:spPr>
+      </p:sp>
+      <p:sp>
+        <p:nvSpPr>
+          <p:cNvPr id="8" name="Shape 6"/>
+          <p:cNvSpPr/>
+          <p:nvPr/>
+        </p:nvSpPr>
+        <p:spPr>
+          <a:xfrm>
+            <a:off x="704088" y="1883664"/>
+            <a:ext cx="320040" cy="320040"/>
+          </a:xfrm>
+          <a:prstGeom prst="rect">
+            <a:avLst/>
+          </a:prstGeom>
+          <a:solidFill>
+            <a:srgbClr val="977024"/>
+          </a:solidFill>
+          <a:ln/>
+        </p:spPr>
+      </p:sp>
+      <p:sp>
+        <p:nvSpPr>
+          <p:cNvPr id="9" name="Text 7"/>
+          <p:cNvSpPr/>
+          <p:nvPr/>
+        </p:nvSpPr>
+        <p:spPr>
+          <a:xfrm>
+            <a:off x="704088" y="1883664"/>
+            <a:ext cx="320040" cy="320040"/>
+          </a:xfrm>
+          <a:prstGeom prst="rect">
+            <a:avLst/>
+          </a:prstGeom>
+          <a:noFill/>
+          <a:ln/>
+        </p:spPr>
+        <p:txBody>
+          <a:bodyPr wrap="square" rtlCol="0" anchor="ctr"/>
+          <a:lstStyle/>
+          <a:p>
+            <a:pPr algn="ctr" indent="0" marL="0">
+              <a:buNone/>
+            </a:pPr>
+            <a:r>
+              <a:rPr lang="en-US" sz="1100" b="1" dirty="0">
+                <a:solidFill>
+                  <a:srgbClr val="000000"/>
+                </a:solidFill>
+                <a:latin typeface="Pretendard" pitchFamily="34" charset="0"/>
+                <a:ea typeface="Pretendard" pitchFamily="34" charset="-122"/>
+                <a:cs typeface="Pretendard" pitchFamily="34" charset="-120"/>
+              </a:rPr>
+              <a:t>✓</a:t>
+            </a:r>
+            <a:endParaRPr lang="en-US" sz="1100" dirty="0"/>
+          </a:p>
+        </p:txBody>
+      </p:sp>
+      <p:sp>
+        <p:nvSpPr>
+          <p:cNvPr id="10" name="Text 8"/>
+          <p:cNvSpPr/>
+          <p:nvPr/>
+        </p:nvSpPr>
+        <p:spPr>
+          <a:xfrm>
+            <a:off x="1115568" y="1828800"/>
+            <a:ext cx="4683100" cy="685800"/>
+          </a:xfrm>
+          <a:prstGeom prst="rect">
+            <a:avLst/>
+          </a:prstGeom>
+          <a:noFill/>
+          <a:ln/>
+        </p:spPr>
+        <p:txBody>
+          <a:bodyPr wrap="square" rtlCol="0" anchor="ctr"/>
+          <a:lstStyle/>
+          <a:p>
+            <a:pPr indent="0" marL="0">
+              <a:lnSpc>
+                <a:spcPct val="115000"/>
+              </a:lnSpc>
+              <a:buNone/>
+            </a:pPr>
+            <a:r>
+              <a:rPr lang="en-US" sz="1050" dirty="0">
+                <a:solidFill>
+                  <a:srgbClr val="10161F"/>
+                </a:solidFill>
+                <a:latin typeface="Pretendard" pitchFamily="34" charset="0"/>
+                <a:ea typeface="Pretendard" pitchFamily="34" charset="-122"/>
+                <a:cs typeface="Pretendard" pitchFamily="34" charset="-120"/>
+              </a:rPr>
+              <a:t>등기부등본 갑구/을구 권리관계 및 근저당 채권최고액 전액 말소 조건 원본 대조</a:t>
+            </a:r>
+            <a:endParaRPr lang="en-US" sz="1050" dirty="0"/>
+          </a:p>
+        </p:txBody>
+      </p:sp>
+      <p:sp>
+        <p:nvSpPr>
+          <p:cNvPr id="11" name="Shape 9"/>
+          <p:cNvSpPr/>
+          <p:nvPr/>
+        </p:nvSpPr>
+        <p:spPr>
+          <a:xfrm>
+            <a:off x="566928" y="2715768"/>
+            <a:ext cx="5368900" cy="868680"/>
+          </a:xfrm>
+          <a:prstGeom prst="rect">
+            <a:avLst/>
+          </a:prstGeom>
+          <a:solidFill>
+            <a:srgbClr val="F7FAFC"/>
+          </a:solidFill>
+          <a:ln w="6350">
+            <a:solidFill>
+              <a:srgbClr val="D9B668"/>
+            </a:solidFill>
+            <a:prstDash val="solid"/>
+          </a:ln>
+        </p:spPr>
+      </p:sp>
+      <p:sp>
+        <p:nvSpPr>
+          <p:cNvPr id="12" name="Shape 10"/>
+          <p:cNvSpPr/>
+          <p:nvPr/>
+        </p:nvSpPr>
+        <p:spPr>
+          <a:xfrm>
+            <a:off x="704088" y="2880360"/>
+            <a:ext cx="320040" cy="320040"/>
+          </a:xfrm>
+          <a:prstGeom prst="rect">
+            <a:avLst/>
+          </a:prstGeom>
+          <a:solidFill>
+            <a:srgbClr val="977024"/>
+          </a:solidFill>
+          <a:ln/>
+        </p:spPr>
+      </p:sp>
+      <p:sp>
+        <p:nvSpPr>
+          <p:cNvPr id="13" name="Text 11"/>
+          <p:cNvSpPr/>
+          <p:nvPr/>
+        </p:nvSpPr>
+        <p:spPr>
+          <a:xfrm>
+            <a:off x="704088" y="2880360"/>
+            <a:ext cx="320040" cy="320040"/>
+          </a:xfrm>
+          <a:prstGeom prst="rect">
+            <a:avLst/>
+          </a:prstGeom>
+          <a:noFill/>
+          <a:ln/>
+        </p:spPr>
+        <p:txBody>
+          <a:bodyPr wrap="square" rtlCol="0" anchor="ctr"/>
+          <a:lstStyle/>
+          <a:p>
+            <a:pPr algn="ctr" indent="0" marL="0">
+              <a:buNone/>
+            </a:pPr>
+            <a:r>
+              <a:rPr lang="en-US" sz="1100" b="1" dirty="0">
+                <a:solidFill>
+                  <a:srgbClr val="000000"/>
+                </a:solidFill>
+                <a:latin typeface="Pretendard" pitchFamily="34" charset="0"/>
+                <a:ea typeface="Pretendard" pitchFamily="34" charset="-122"/>
+                <a:cs typeface="Pretendard" pitchFamily="34" charset="-120"/>
+              </a:rPr>
+              <a:t>✓</a:t>
+            </a:r>
+            <a:endParaRPr lang="en-US" sz="1100" dirty="0"/>
+          </a:p>
+        </p:txBody>
+      </p:sp>
+      <p:sp>
+        <p:nvSpPr>
+          <p:cNvPr id="14" name="Text 12"/>
+          <p:cNvSpPr/>
+          <p:nvPr/>
+        </p:nvSpPr>
+        <p:spPr>
+          <a:xfrm>
+            <a:off x="1115568" y="2825496"/>
+            <a:ext cx="4683100" cy="685800"/>
+          </a:xfrm>
+          <a:prstGeom prst="rect">
+            <a:avLst/>
+          </a:prstGeom>
+          <a:noFill/>
+          <a:ln/>
+        </p:spPr>
+        <p:txBody>
+          <a:bodyPr wrap="square" rtlCol="0" anchor="ctr"/>
+          <a:lstStyle/>
+          <a:p>
+            <a:pPr indent="0" marL="0">
+              <a:lnSpc>
+                <a:spcPct val="115000"/>
+              </a:lnSpc>
+              <a:buNone/>
+            </a:pPr>
+            <a:r>
+              <a:rPr lang="en-US" sz="1050" dirty="0">
+                <a:solidFill>
+                  <a:srgbClr val="10161F"/>
+                </a:solidFill>
+                <a:latin typeface="Pretendard" pitchFamily="34" charset="0"/>
+                <a:ea typeface="Pretendard" pitchFamily="34" charset="-122"/>
+                <a:cs typeface="Pretendard" pitchFamily="34" charset="-120"/>
+              </a:rPr>
+              <a:t>임대차 원본 계약서 대조 (보증금, 월임대료, 관리비 실입금 내역 및 제소전화해조서)</a:t>
+            </a:r>
+            <a:endParaRPr lang="en-US" sz="1050" dirty="0"/>
+          </a:p>
+        </p:txBody>
+      </p:sp>
+      <p:sp>
+        <p:nvSpPr>
+          <p:cNvPr id="15" name="Shape 13"/>
+          <p:cNvSpPr/>
+          <p:nvPr/>
+        </p:nvSpPr>
+        <p:spPr>
+          <a:xfrm>
+            <a:off x="566928" y="3712464"/>
+            <a:ext cx="5368900" cy="868680"/>
+          </a:xfrm>
+          <a:prstGeom prst="rect">
+            <a:avLst/>
+          </a:prstGeom>
+          <a:solidFill>
+            <a:srgbClr val="F7FAFC"/>
+          </a:solidFill>
+          <a:ln w="6350">
+            <a:solidFill>
+              <a:srgbClr val="D9B668"/>
+            </a:solidFill>
+            <a:prstDash val="solid"/>
+          </a:ln>
+        </p:spPr>
+      </p:sp>
+      <p:sp>
+        <p:nvSpPr>
+          <p:cNvPr id="16" name="Shape 14"/>
+          <p:cNvSpPr/>
+          <p:nvPr/>
+        </p:nvSpPr>
+        <p:spPr>
+          <a:xfrm>
+            <a:off x="704088" y="3877056"/>
+            <a:ext cx="320040" cy="320040"/>
+          </a:xfrm>
+          <a:prstGeom prst="rect">
+            <a:avLst/>
+          </a:prstGeom>
+          <a:solidFill>
+            <a:srgbClr val="977024"/>
+          </a:solidFill>
+          <a:ln/>
+        </p:spPr>
+      </p:sp>
+      <p:sp>
+        <p:nvSpPr>
+          <p:cNvPr id="17" name="Text 15"/>
+          <p:cNvSpPr/>
+          <p:nvPr/>
+        </p:nvSpPr>
+        <p:spPr>
+          <a:xfrm>
+            <a:off x="704088" y="3877056"/>
+            <a:ext cx="320040" cy="320040"/>
+          </a:xfrm>
+          <a:prstGeom prst="rect">
+            <a:avLst/>
+          </a:prstGeom>
+          <a:noFill/>
+          <a:ln/>
+        </p:spPr>
+        <p:txBody>
+          <a:bodyPr wrap="square" rtlCol="0" anchor="ctr"/>
+          <a:lstStyle/>
+          <a:p>
+            <a:pPr algn="ctr" indent="0" marL="0">
+              <a:buNone/>
+            </a:pPr>
+            <a:r>
+              <a:rPr lang="en-US" sz="1100" b="1" dirty="0">
+                <a:solidFill>
+                  <a:srgbClr val="000000"/>
+                </a:solidFill>
+                <a:latin typeface="Pretendard" pitchFamily="34" charset="0"/>
+                <a:ea typeface="Pretendard" pitchFamily="34" charset="-122"/>
+                <a:cs typeface="Pretendard" pitchFamily="34" charset="-120"/>
+              </a:rPr>
+              <a:t>✓</a:t>
+            </a:r>
+            <a:endParaRPr lang="en-US" sz="1100" dirty="0"/>
+          </a:p>
+        </p:txBody>
+      </p:sp>
+      <p:sp>
+        <p:nvSpPr>
+          <p:cNvPr id="18" name="Text 16"/>
+          <p:cNvSpPr/>
+          <p:nvPr/>
+        </p:nvSpPr>
+        <p:spPr>
+          <a:xfrm>
+            <a:off x="1115568" y="3822192"/>
+            <a:ext cx="4683100" cy="685800"/>
+          </a:xfrm>
+          <a:prstGeom prst="rect">
+            <a:avLst/>
+          </a:prstGeom>
+          <a:noFill/>
+          <a:ln/>
+        </p:spPr>
+        <p:txBody>
+          <a:bodyPr wrap="square" rtlCol="0" anchor="ctr"/>
+          <a:lstStyle/>
+          <a:p>
+            <a:pPr indent="0" marL="0">
+              <a:lnSpc>
+                <a:spcPct val="115000"/>
+              </a:lnSpc>
+              <a:buNone/>
+            </a:pPr>
+            <a:r>
+              <a:rPr lang="en-US" sz="1050" dirty="0">
+                <a:solidFill>
+                  <a:srgbClr val="10161F"/>
+                </a:solidFill>
+                <a:latin typeface="Pretendard" pitchFamily="34" charset="0"/>
+                <a:ea typeface="Pretendard" pitchFamily="34" charset="-122"/>
+                <a:cs typeface="Pretendard" pitchFamily="34" charset="-120"/>
+              </a:rPr>
+              <a:t>건축물대장상 위반건축물 등재 여부 및 불법 증축·용도변경 이행강제금 납부 이력 점검</a:t>
+            </a:r>
+            <a:endParaRPr lang="en-US" sz="1050" dirty="0"/>
+          </a:p>
+        </p:txBody>
+      </p:sp>
+      <p:sp>
+        <p:nvSpPr>
+          <p:cNvPr id="19" name="Shape 17"/>
+          <p:cNvSpPr/>
+          <p:nvPr/>
+        </p:nvSpPr>
+        <p:spPr>
+          <a:xfrm>
+            <a:off x="6255868" y="1719072"/>
+            <a:ext cx="5368900" cy="868680"/>
+          </a:xfrm>
+          <a:prstGeom prst="rect">
+            <a:avLst/>
+          </a:prstGeom>
+          <a:solidFill>
+            <a:srgbClr val="F7FAFC"/>
+          </a:solidFill>
+          <a:ln w="6350">
+            <a:solidFill>
+              <a:srgbClr val="D9B668"/>
+            </a:solidFill>
+            <a:prstDash val="solid"/>
+          </a:ln>
+        </p:spPr>
+      </p:sp>
+      <p:sp>
+        <p:nvSpPr>
+          <p:cNvPr id="20" name="Shape 18"/>
+          <p:cNvSpPr/>
+          <p:nvPr/>
+        </p:nvSpPr>
+        <p:spPr>
+          <a:xfrm>
+            <a:off x="6393028" y="1883664"/>
+            <a:ext cx="320040" cy="320040"/>
+          </a:xfrm>
+          <a:prstGeom prst="rect">
+            <a:avLst/>
+          </a:prstGeom>
+          <a:solidFill>
+            <a:srgbClr val="977024"/>
+          </a:solidFill>
+          <a:ln/>
+        </p:spPr>
+      </p:sp>
+      <p:sp>
+        <p:nvSpPr>
+          <p:cNvPr id="21" name="Text 19"/>
+          <p:cNvSpPr/>
+          <p:nvPr/>
+        </p:nvSpPr>
+        <p:spPr>
+          <a:xfrm>
+            <a:off x="6393028" y="1883664"/>
+            <a:ext cx="320040" cy="320040"/>
+          </a:xfrm>
+          <a:prstGeom prst="rect">
+            <a:avLst/>
+          </a:prstGeom>
+          <a:noFill/>
+          <a:ln/>
+        </p:spPr>
+        <p:txBody>
+          <a:bodyPr wrap="square" rtlCol="0" anchor="ctr"/>
+          <a:lstStyle/>
+          <a:p>
+            <a:pPr algn="ctr" indent="0" marL="0">
+              <a:buNone/>
+            </a:pPr>
+            <a:r>
+              <a:rPr lang="en-US" sz="1100" b="1" dirty="0">
+                <a:solidFill>
+                  <a:srgbClr val="000000"/>
+                </a:solidFill>
+                <a:latin typeface="Pretendard" pitchFamily="34" charset="0"/>
+                <a:ea typeface="Pretendard" pitchFamily="34" charset="-122"/>
+                <a:cs typeface="Pretendard" pitchFamily="34" charset="-120"/>
+              </a:rPr>
+              <a:t>✓</a:t>
+            </a:r>
+            <a:endParaRPr lang="en-US" sz="1100" dirty="0"/>
+          </a:p>
+        </p:txBody>
+      </p:sp>
+      <p:sp>
+        <p:nvSpPr>
+          <p:cNvPr id="22" name="Text 20"/>
+          <p:cNvSpPr/>
+          <p:nvPr/>
+        </p:nvSpPr>
+        <p:spPr>
+          <a:xfrm>
+            <a:off x="6804508" y="1828800"/>
+            <a:ext cx="4683100" cy="685800"/>
+          </a:xfrm>
+          <a:prstGeom prst="rect">
+            <a:avLst/>
+          </a:prstGeom>
+          <a:noFill/>
+          <a:ln/>
+        </p:spPr>
+        <p:txBody>
+          <a:bodyPr wrap="square" rtlCol="0" anchor="ctr"/>
+          <a:lstStyle/>
+          <a:p>
+            <a:pPr indent="0" marL="0">
+              <a:lnSpc>
+                <a:spcPct val="115000"/>
+              </a:lnSpc>
+              <a:buNone/>
+            </a:pPr>
+            <a:r>
+              <a:rPr lang="en-US" sz="1050" dirty="0">
+                <a:solidFill>
+                  <a:srgbClr val="10161F"/>
+                </a:solidFill>
+                <a:latin typeface="Pretendard" pitchFamily="34" charset="0"/>
+                <a:ea typeface="Pretendard" pitchFamily="34" charset="-122"/>
+                <a:cs typeface="Pretendard" pitchFamily="34" charset="-120"/>
+              </a:rPr>
+              <a:t>토지이용계획확인원상 도시계획시설 저촉, 건축선 후퇴, 지구단위계획 특별계획구역 확인</a:t>
+            </a:r>
+            <a:endParaRPr lang="en-US" sz="1050" dirty="0"/>
+          </a:p>
+        </p:txBody>
+      </p:sp>
+      <p:sp>
+        <p:nvSpPr>
+          <p:cNvPr id="23" name="Shape 21"/>
+          <p:cNvSpPr/>
+          <p:nvPr/>
+        </p:nvSpPr>
+        <p:spPr>
+          <a:xfrm>
+            <a:off x="6255868" y="2715768"/>
+            <a:ext cx="5368900" cy="868680"/>
+          </a:xfrm>
+          <a:prstGeom prst="rect">
+            <a:avLst/>
+          </a:prstGeom>
+          <a:solidFill>
+            <a:srgbClr val="F7FAFC"/>
+          </a:solidFill>
+          <a:ln w="6350">
+            <a:solidFill>
+              <a:srgbClr val="D9B668"/>
+            </a:solidFill>
+            <a:prstDash val="solid"/>
+          </a:ln>
+        </p:spPr>
+      </p:sp>
+      <p:sp>
+        <p:nvSpPr>
+          <p:cNvPr id="24" name="Shape 22"/>
+          <p:cNvSpPr/>
+          <p:nvPr/>
+        </p:nvSpPr>
+        <p:spPr>
+          <a:xfrm>
+            <a:off x="6393028" y="2880360"/>
+            <a:ext cx="320040" cy="320040"/>
+          </a:xfrm>
+          <a:prstGeom prst="rect">
+            <a:avLst/>
+          </a:prstGeom>
+          <a:solidFill>
+            <a:srgbClr val="977024"/>
+          </a:solidFill>
+          <a:ln/>
+        </p:spPr>
+      </p:sp>
+      <p:sp>
+        <p:nvSpPr>
+          <p:cNvPr id="25" name="Text 23"/>
+          <p:cNvSpPr/>
+          <p:nvPr/>
+        </p:nvSpPr>
+        <p:spPr>
+          <a:xfrm>
+            <a:off x="6393028" y="2880360"/>
+            <a:ext cx="320040" cy="320040"/>
+          </a:xfrm>
+          <a:prstGeom prst="rect">
+            <a:avLst/>
+          </a:prstGeom>
+          <a:noFill/>
+          <a:ln/>
+        </p:spPr>
+        <p:txBody>
+          <a:bodyPr wrap="square" rtlCol="0" anchor="ctr"/>
+          <a:lstStyle/>
+          <a:p>
+            <a:pPr algn="ctr" indent="0" marL="0">
+              <a:buNone/>
+            </a:pPr>
+            <a:r>
+              <a:rPr lang="en-US" sz="1100" b="1" dirty="0">
+                <a:solidFill>
+                  <a:srgbClr val="000000"/>
+                </a:solidFill>
+                <a:latin typeface="Pretendard" pitchFamily="34" charset="0"/>
+                <a:ea typeface="Pretendard" pitchFamily="34" charset="-122"/>
+                <a:cs typeface="Pretendard" pitchFamily="34" charset="-120"/>
+              </a:rPr>
+              <a:t>✓</a:t>
+            </a:r>
+            <a:endParaRPr lang="en-US" sz="1100" dirty="0"/>
+          </a:p>
+        </p:txBody>
+      </p:sp>
+      <p:sp>
+        <p:nvSpPr>
+          <p:cNvPr id="26" name="Text 24"/>
+          <p:cNvSpPr/>
+          <p:nvPr/>
+        </p:nvSpPr>
+        <p:spPr>
+          <a:xfrm>
+            <a:off x="6804508" y="2825496"/>
+            <a:ext cx="4683100" cy="685800"/>
+          </a:xfrm>
+          <a:prstGeom prst="rect">
+            <a:avLst/>
+          </a:prstGeom>
+          <a:noFill/>
+          <a:ln/>
+        </p:spPr>
+        <p:txBody>
+          <a:bodyPr wrap="square" rtlCol="0" anchor="ctr"/>
+          <a:lstStyle/>
+          <a:p>
+            <a:pPr indent="0" marL="0">
+              <a:lnSpc>
+                <a:spcPct val="115000"/>
+              </a:lnSpc>
+              <a:buNone/>
+            </a:pPr>
+            <a:r>
+              <a:rPr lang="en-US" sz="1050" dirty="0">
+                <a:solidFill>
+                  <a:srgbClr val="10161F"/>
+                </a:solidFill>
+                <a:latin typeface="Pretendard" pitchFamily="34" charset="0"/>
+                <a:ea typeface="Pretendard" pitchFamily="34" charset="-122"/>
+                <a:cs typeface="Pretendard" pitchFamily="34" charset="-120"/>
+              </a:rPr>
+              <a:t>기계식 주차기 정기 안전점검 합격증, 승강기 검사필증, 소방 완비증명서 실물 실사</a:t>
+            </a:r>
+            <a:endParaRPr lang="en-US" sz="1050" dirty="0"/>
+          </a:p>
+        </p:txBody>
+      </p:sp>
+      <p:sp>
+        <p:nvSpPr>
+          <p:cNvPr id="27" name="Shape 25"/>
+          <p:cNvSpPr/>
+          <p:nvPr/>
+        </p:nvSpPr>
+        <p:spPr>
+          <a:xfrm>
+            <a:off x="6255868" y="3712464"/>
+            <a:ext cx="5368900" cy="868680"/>
+          </a:xfrm>
+          <a:prstGeom prst="rect">
+            <a:avLst/>
+          </a:prstGeom>
+          <a:solidFill>
+            <a:srgbClr val="F7FAFC"/>
+          </a:solidFill>
+          <a:ln w="6350">
+            <a:solidFill>
+              <a:srgbClr val="D9B668"/>
+            </a:solidFill>
+            <a:prstDash val="solid"/>
+          </a:ln>
+        </p:spPr>
+      </p:sp>
+      <p:sp>
+        <p:nvSpPr>
+          <p:cNvPr id="28" name="Shape 26"/>
+          <p:cNvSpPr/>
+          <p:nvPr/>
+        </p:nvSpPr>
+        <p:spPr>
+          <a:xfrm>
+            <a:off x="6393028" y="3877056"/>
+            <a:ext cx="320040" cy="320040"/>
+          </a:xfrm>
+          <a:prstGeom prst="rect">
+            <a:avLst/>
+          </a:prstGeom>
+          <a:solidFill>
+            <a:srgbClr val="977024"/>
+          </a:solidFill>
+          <a:ln/>
+        </p:spPr>
+      </p:sp>
+      <p:sp>
+        <p:nvSpPr>
+          <p:cNvPr id="29" name="Text 27"/>
+          <p:cNvSpPr/>
+          <p:nvPr/>
+        </p:nvSpPr>
+        <p:spPr>
+          <a:xfrm>
+            <a:off x="6393028" y="3877056"/>
+            <a:ext cx="320040" cy="320040"/>
+          </a:xfrm>
+          <a:prstGeom prst="rect">
+            <a:avLst/>
+          </a:prstGeom>
+          <a:noFill/>
+          <a:ln/>
+        </p:spPr>
+        <p:txBody>
+          <a:bodyPr wrap="square" rtlCol="0" anchor="ctr"/>
+          <a:lstStyle/>
+          <a:p>
+            <a:pPr algn="ctr" indent="0" marL="0">
+              <a:buNone/>
+            </a:pPr>
+            <a:r>
+              <a:rPr lang="en-US" sz="1100" b="1" dirty="0">
+                <a:solidFill>
+                  <a:srgbClr val="000000"/>
+                </a:solidFill>
+                <a:latin typeface="Pretendard" pitchFamily="34" charset="0"/>
+                <a:ea typeface="Pretendard" pitchFamily="34" charset="-122"/>
+                <a:cs typeface="Pretendard" pitchFamily="34" charset="-120"/>
+              </a:rPr>
+              <a:t>✓</a:t>
+            </a:r>
+            <a:endParaRPr lang="en-US" sz="1100" dirty="0"/>
+          </a:p>
+        </p:txBody>
+      </p:sp>
+      <p:sp>
+        <p:nvSpPr>
+          <p:cNvPr id="30" name="Text 28"/>
+          <p:cNvSpPr/>
+          <p:nvPr/>
+        </p:nvSpPr>
+        <p:spPr>
+          <a:xfrm>
+            <a:off x="6804508" y="3822192"/>
+            <a:ext cx="4683100" cy="685800"/>
+          </a:xfrm>
+          <a:prstGeom prst="rect">
+            <a:avLst/>
+          </a:prstGeom>
+          <a:noFill/>
+          <a:ln/>
+        </p:spPr>
+        <p:txBody>
+          <a:bodyPr wrap="square" rtlCol="0" anchor="ctr"/>
+          <a:lstStyle/>
+          <a:p>
+            <a:pPr indent="0" marL="0">
+              <a:lnSpc>
+                <a:spcPct val="115000"/>
+              </a:lnSpc>
+              <a:buNone/>
+            </a:pPr>
+            <a:r>
+              <a:rPr lang="en-US" sz="1050" dirty="0">
+                <a:solidFill>
+                  <a:srgbClr val="10161F"/>
+                </a:solidFill>
+                <a:latin typeface="Pretendard" pitchFamily="34" charset="0"/>
+                <a:ea typeface="Pretendard" pitchFamily="34" charset="-122"/>
+                <a:cs typeface="Pretendard" pitchFamily="34" charset="-120"/>
+              </a:rPr>
+              <a:t>정화조 용량 대비 현 업종 적합성 및 하수도 원인자부담금 추가 부과 대상 여부 확인</a:t>
+            </a:r>
+            <a:endParaRPr lang="en-US" sz="1050" dirty="0"/>
+          </a:p>
+        </p:txBody>
+      </p:sp>
+      <p:sp>
+        <p:nvSpPr>
+          <p:cNvPr id="31" name="Shape 29"/>
+          <p:cNvSpPr/>
+          <p:nvPr/>
+        </p:nvSpPr>
+        <p:spPr>
+          <a:xfrm>
+            <a:off x="566928" y="5760720"/>
+            <a:ext cx="11057839" cy="594360"/>
+          </a:xfrm>
+          <a:prstGeom prst="rect">
+            <a:avLst/>
+          </a:prstGeom>
+          <a:solidFill>
+            <a:srgbClr val="D9B668"/>
+          </a:solidFill>
+          <a:ln/>
+        </p:spPr>
+      </p:sp>
+      <p:sp>
+        <p:nvSpPr>
+          <p:cNvPr id="32" name="Text 30"/>
+          <p:cNvSpPr/>
+          <p:nvPr/>
+        </p:nvSpPr>
+        <p:spPr>
+          <a:xfrm>
+            <a:off x="749808" y="5833872"/>
+            <a:ext cx="10692079" cy="448056"/>
+          </a:xfrm>
+          <a:prstGeom prst="rect">
+            <a:avLst/>
+          </a:prstGeom>
+          <a:noFill/>
+          <a:ln/>
+        </p:spPr>
+        <p:txBody>
+          <a:bodyPr wrap="square" rtlCol="0" anchor="ctr"/>
+          <a:lstStyle/>
+          <a:p>
+            <a:pPr indent="0" marL="0">
+              <a:buNone/>
+            </a:pPr>
+            <a:r>
+              <a:rPr lang="en-US" sz="950" b="1" dirty="0">
+                <a:solidFill>
+                  <a:srgbClr val="977024"/>
+                </a:solidFill>
+                <a:latin typeface="Pretendard" pitchFamily="34" charset="0"/>
+                <a:ea typeface="Pretendard" pitchFamily="34" charset="-122"/>
+                <a:cs typeface="Pretendard" pitchFamily="34" charset="-120"/>
+              </a:rPr>
+              <a:t>※ 본 체크리스트는 계약 전 매수인의 안전한 자산 인수를 위한 필수 확인 사항이며, 실사(Due Diligence) 결과에 따라 매매 조건 및 잔금 일정이 조정될 수 있습니다.</a:t>
+            </a:r>
+            <a:endParaRPr lang="en-US" sz="950" dirty="0"/>
+          </a:p>
+        </p:txBody>
+      </p:sp>
+      <p:sp>
+        <p:nvSpPr>
+          <p:cNvPr id="33" name="Text 31"/>
+          <p:cNvSpPr/>
+          <p:nvPr/>
+        </p:nvSpPr>
+        <p:spPr>
+          <a:xfrm>
+            <a:off x="566928" y="6382512"/>
+            <a:ext cx="7315200" cy="219456"/>
+          </a:xfrm>
+          <a:prstGeom prst="rect">
+            <a:avLst/>
+          </a:prstGeom>
+          <a:noFill/>
+          <a:ln/>
+        </p:spPr>
+        <p:txBody>
+          <a:bodyPr wrap="square" lIns="0" tIns="0" rIns="0" bIns="0" rtlCol="0" anchor="ctr"/>
+          <a:lstStyle/>
+          <a:p>
+            <a:pPr indent="0" marL="0">
+              <a:buNone/>
+            </a:pPr>
+            <a:r>
+              <a:rPr lang="en-US" sz="800" dirty="0">
+                <a:solidFill>
+                  <a:srgbClr val="718096"/>
+                </a:solidFill>
+                <a:latin typeface="Pretendard" pitchFamily="34" charset="0"/>
+                <a:ea typeface="Pretendard" pitchFamily="34" charset="-122"/>
+                <a:cs typeface="Pretendard" pitchFamily="34" charset="-120"/>
+              </a:rPr>
+              <a:t>크리딜   |   </a:t>
+            </a:r>
+            <a:endParaRPr lang="en-US" sz="800" dirty="0"/>
+          </a:p>
+        </p:txBody>
+      </p:sp>
+      <p:sp>
+        <p:nvSpPr>
+          <p:cNvPr id="34" name="Text 32"/>
+          <p:cNvSpPr/>
+          <p:nvPr/>
+        </p:nvSpPr>
+        <p:spPr>
+          <a:xfrm>
+            <a:off x="10710367" y="6382512"/>
+            <a:ext cx="914400" cy="219456"/>
+          </a:xfrm>
+          <a:prstGeom prst="rect">
+            <a:avLst/>
+          </a:prstGeom>
+          <a:noFill/>
+          <a:ln/>
+        </p:spPr>
+        <p:txBody>
+          <a:bodyPr wrap="square" lIns="0" tIns="0" rIns="0" bIns="0" rtlCol="0" anchor="ctr"/>
+          <a:lstStyle/>
+          <a:p>
+            <a:pPr algn="r" indent="0" marL="0">
+              <a:buNone/>
+            </a:pPr>
+            <a:r>
+              <a:rPr lang="en-US" sz="900" b="1" dirty="0">
+                <a:solidFill>
+                  <a:srgbClr val="B98A2E"/>
+                </a:solidFill>
+                <a:latin typeface="Arial" pitchFamily="34" charset="0"/>
+                <a:ea typeface="Arial" pitchFamily="34" charset="-122"/>
+                <a:cs typeface="Arial" pitchFamily="34" charset="-120"/>
+              </a:rPr>
+              <a:t>13</a:t>
+            </a:r>
+            <a:endParaRPr lang="en-US" sz="900" dirty="0"/>
+          </a:p>
+        </p:txBody>
+      </p:sp>
+    </p:spTree>
+  </p:cSld>
+  <p:clrMapOvr>
+    <a:masterClrMapping/>
+  </p:clrMapOvr>
+</p:sld>
+</file>
+
+<file path=ppt/slides/slide15.xml><?xml version="1.0" encoding="utf-8"?>
+<p:sld xmlns:a="http://schemas.openxmlformats.org/drawingml/2006/main" xmlns:r="http://schemas.openxmlformats.org/officeDocument/2006/relationships" xmlns:p="http://schemas.openxmlformats.org/presentationml/2006/main">
+  <p:cSld name="Slide 15">
+    <p:bg>
+      <p:bgPr>
+        <a:solidFill>
+          <a:srgbClr val="FFFFFF"/>
+        </a:solidFill>
+      </p:bgPr>
+    </p:bg>
+    <p:spTree>
+      <p:nvGrpSpPr>
+        <p:cNvPr id="1" name=""/>
+        <p:cNvGrpSpPr/>
+        <p:nvPr/>
+      </p:nvGrpSpPr>
+      <p:grpSpPr>
+        <a:xfrm>
+          <a:off x="0" y="0"/>
+          <a:ext cx="0" cy="0"/>
+          <a:chOff x="0" y="0"/>
+          <a:chExt cx="0" cy="0"/>
+        </a:xfrm>
+      </p:grpSpPr>
+      <p:sp>
+        <p:nvSpPr>
+          <p:cNvPr id="2" name="Shape 0"/>
+          <p:cNvSpPr/>
+          <p:nvPr/>
+        </p:nvSpPr>
+        <p:spPr>
+          <a:xfrm>
+            <a:off x="566928" y="457200"/>
+            <a:ext cx="384048" cy="384048"/>
+          </a:xfrm>
+          <a:prstGeom prst="ellipse">
+            <a:avLst/>
+          </a:prstGeom>
+          <a:solidFill>
+            <a:srgbClr val="B98A2E"/>
+          </a:solidFill>
+          <a:ln/>
+        </p:spPr>
+      </p:sp>
+      <p:sp>
+        <p:nvSpPr>
+          <p:cNvPr id="3" name="Text 1"/>
+          <p:cNvSpPr/>
+          <p:nvPr/>
+        </p:nvSpPr>
+        <p:spPr>
+          <a:xfrm>
+            <a:off x="566928" y="457200"/>
+            <a:ext cx="384048" cy="384048"/>
+          </a:xfrm>
+          <a:prstGeom prst="rect">
+            <a:avLst/>
+          </a:prstGeom>
+          <a:noFill/>
+          <a:ln/>
+        </p:spPr>
+        <p:txBody>
+          <a:bodyPr wrap="square" lIns="0" tIns="0" rIns="0" bIns="0" rtlCol="0" anchor="ctr"/>
+          <a:lstStyle/>
+          <a:p>
+            <a:pPr algn="ctr" indent="0" marL="0">
+              <a:buNone/>
+            </a:pPr>
+            <a:r>
+              <a:rPr lang="en-US" sz="1300" b="1" dirty="0">
+                <a:solidFill>
+                  <a:srgbClr val="FFFFFF"/>
+                </a:solidFill>
+                <a:latin typeface="Arial" pitchFamily="34" charset="0"/>
+                <a:ea typeface="Arial" pitchFamily="34" charset="-122"/>
+                <a:cs typeface="Arial" pitchFamily="34" charset="-120"/>
+              </a:rPr>
+              <a:t>14</a:t>
+            </a:r>
+            <a:endParaRPr lang="en-US" sz="1300" dirty="0"/>
+          </a:p>
+        </p:txBody>
+      </p:sp>
+      <p:sp>
+        <p:nvSpPr>
+          <p:cNvPr id="4" name="Text 2"/>
+          <p:cNvSpPr/>
+          <p:nvPr/>
+        </p:nvSpPr>
+        <p:spPr>
+          <a:xfrm>
+            <a:off x="1133856" y="457200"/>
+            <a:ext cx="10490911" cy="182880"/>
+          </a:xfrm>
+          <a:prstGeom prst="rect">
+            <a:avLst/>
+          </a:prstGeom>
+          <a:noFill/>
+          <a:ln/>
+        </p:spPr>
+        <p:txBody>
+          <a:bodyPr wrap="square" lIns="0" tIns="0" rIns="0" bIns="0" rtlCol="0" anchor="ctr"/>
+          <a:lstStyle/>
+          <a:p>
+            <a:pPr indent="0" marL="0">
+              <a:buNone/>
+            </a:pPr>
+            <a:r>
+              <a:rPr lang="en-US" sz="950" b="1" spc="200" kern="0" dirty="0">
+                <a:solidFill>
+                  <a:srgbClr val="B98A2E"/>
+                </a:solidFill>
+                <a:latin typeface="Arial" pitchFamily="34" charset="0"/>
+                <a:ea typeface="Arial" pitchFamily="34" charset="-122"/>
+                <a:cs typeface="Arial" pitchFamily="34" charset="-120"/>
+              </a:rPr>
+              <a:t>Process</a:t>
+            </a:r>
+            <a:endParaRPr lang="en-US" sz="950" dirty="0"/>
+          </a:p>
+        </p:txBody>
+      </p:sp>
+      <p:sp>
+        <p:nvSpPr>
+          <p:cNvPr id="5" name="Text 3"/>
+          <p:cNvSpPr/>
+          <p:nvPr/>
+        </p:nvSpPr>
+        <p:spPr>
+          <a:xfrm>
+            <a:off x="1133856" y="640080"/>
+            <a:ext cx="10490911" cy="365760"/>
+          </a:xfrm>
+          <a:prstGeom prst="rect">
+            <a:avLst/>
+          </a:prstGeom>
+          <a:noFill/>
+          <a:ln/>
+        </p:spPr>
+        <p:txBody>
+          <a:bodyPr wrap="square" lIns="0" tIns="0" rIns="0" bIns="0" rtlCol="0" anchor="ctr"/>
+          <a:lstStyle/>
+          <a:p>
+            <a:pPr indent="0" marL="0">
+              <a:buNone/>
+            </a:pPr>
+            <a:r>
+              <a:rPr lang="en-US" sz="2300" b="1" dirty="0">
+                <a:solidFill>
+                  <a:srgbClr val="10161F"/>
+                </a:solidFill>
+                <a:latin typeface="Pretendard" pitchFamily="34" charset="0"/>
+                <a:ea typeface="Pretendard" pitchFamily="34" charset="-122"/>
+                <a:cs typeface="Pretendard" pitchFamily="34" charset="-120"/>
+              </a:rPr>
+              <a:t>다음 단계</a:t>
+            </a:r>
+            <a:endParaRPr lang="en-US" sz="2300" dirty="0"/>
+          </a:p>
+        </p:txBody>
+      </p:sp>
+      <p:sp>
+        <p:nvSpPr>
+          <p:cNvPr id="6" name="Shape 4"/>
+          <p:cNvSpPr/>
+          <p:nvPr/>
+        </p:nvSpPr>
+        <p:spPr>
+          <a:xfrm>
+            <a:off x="566928" y="1572768"/>
+            <a:ext cx="11057839" cy="3200400"/>
+          </a:xfrm>
+          <a:prstGeom prst="roundRect">
+            <a:avLst>
+              <a:gd name="adj" fmla="val 1714"/>
+            </a:avLst>
+          </a:prstGeom>
+          <a:solidFill>
+            <a:srgbClr val="F7FAFC"/>
+          </a:solidFill>
+          <a:ln w="6350">
+            <a:solidFill>
+              <a:srgbClr val="CBD5E0"/>
+            </a:solidFill>
+            <a:prstDash val="solid"/>
+          </a:ln>
+        </p:spPr>
+      </p:sp>
+      <p:sp>
+        <p:nvSpPr>
+          <p:cNvPr id="7" name="Shape 5"/>
+          <p:cNvSpPr/>
+          <p:nvPr/>
+        </p:nvSpPr>
+        <p:spPr>
+          <a:xfrm>
+            <a:off x="786384" y="1792224"/>
+            <a:ext cx="438912" cy="438912"/>
+          </a:xfrm>
+          <a:prstGeom prst="ellipse">
+            <a:avLst/>
+          </a:prstGeom>
+          <a:solidFill>
+            <a:srgbClr val="B98A2E"/>
+          </a:solidFill>
+          <a:ln/>
+        </p:spPr>
+      </p:sp>
+      <p:sp>
+        <p:nvSpPr>
+          <p:cNvPr id="8" name="Text 6"/>
+          <p:cNvSpPr/>
+          <p:nvPr/>
+        </p:nvSpPr>
+        <p:spPr>
+          <a:xfrm>
+            <a:off x="786384" y="1792224"/>
+            <a:ext cx="438912" cy="438912"/>
+          </a:xfrm>
+          <a:prstGeom prst="rect">
+            <a:avLst/>
+          </a:prstGeom>
+          <a:noFill/>
+          <a:ln/>
+        </p:spPr>
+        <p:txBody>
+          <a:bodyPr wrap="square" lIns="0" tIns="0" rIns="0" bIns="0" rtlCol="0" anchor="ctr"/>
+          <a:lstStyle/>
+          <a:p>
+            <a:pPr algn="ctr" indent="0" marL="0">
+              <a:buNone/>
+            </a:pPr>
+            <a:r>
+              <a:rPr lang="en-US" sz="1400" b="1" dirty="0">
+                <a:solidFill>
+                  <a:srgbClr val="FFFFFF"/>
+                </a:solidFill>
+                <a:latin typeface="Arial" pitchFamily="34" charset="0"/>
+                <a:ea typeface="Arial" pitchFamily="34" charset="-122"/>
+                <a:cs typeface="Arial" pitchFamily="34" charset="-120"/>
+              </a:rPr>
+              <a:t>01</a:t>
+            </a:r>
+            <a:endParaRPr lang="en-US" sz="1400" dirty="0"/>
+          </a:p>
+        </p:txBody>
+      </p:sp>
+      <p:sp>
+        <p:nvSpPr>
+          <p:cNvPr id="9" name="Text 7"/>
+          <p:cNvSpPr/>
+          <p:nvPr/>
+        </p:nvSpPr>
+        <p:spPr>
+          <a:xfrm>
+            <a:off x="786384" y="2304288"/>
+            <a:ext cx="10618927" cy="365760"/>
+          </a:xfrm>
+          <a:prstGeom prst="rect">
+            <a:avLst/>
+          </a:prstGeom>
+          <a:noFill/>
+          <a:ln/>
+        </p:spPr>
+        <p:txBody>
+          <a:bodyPr wrap="square" rtlCol="0" anchor="ctr"/>
+          <a:lstStyle/>
+          <a:p>
+            <a:pPr indent="0" marL="0">
+              <a:buNone/>
+            </a:pPr>
+            <a:r>
+              <a:rPr lang="en-US" sz="1600" b="1" dirty="0">
+                <a:solidFill>
+                  <a:srgbClr val="10161F"/>
+                </a:solidFill>
+                <a:latin typeface="Pretendard" pitchFamily="34" charset="0"/>
+                <a:ea typeface="Pretendard" pitchFamily="34" charset="-122"/>
+                <a:cs typeface="Pretendard" pitchFamily="34" charset="-120"/>
+              </a:rPr>
+              <a:t>1단계</a:t>
+            </a:r>
+            <a:endParaRPr lang="en-US" sz="1600" dirty="0"/>
+          </a:p>
+        </p:txBody>
+      </p:sp>
+      <p:sp>
+        <p:nvSpPr>
+          <p:cNvPr id="10" name="Text 8"/>
+          <p:cNvSpPr/>
+          <p:nvPr/>
+        </p:nvSpPr>
+        <p:spPr>
+          <a:xfrm>
+            <a:off x="786384" y="2761488"/>
+            <a:ext cx="10618927" cy="1828800"/>
+          </a:xfrm>
+          <a:prstGeom prst="rect">
+            <a:avLst/>
+          </a:prstGeom>
+          <a:noFill/>
+          <a:ln/>
+        </p:spPr>
+        <p:txBody>
+          <a:bodyPr wrap="square" rtlCol="0" anchor="t"/>
+          <a:lstStyle/>
+          <a:p>
+            <a:pPr indent="0" marL="0">
+              <a:buNone/>
+            </a:pPr>
+            <a:r>
+              <a:rPr lang="en-US" sz="1100" dirty="0">
+                <a:solidFill>
+                  <a:srgbClr val="10161F"/>
+                </a:solidFill>
+                <a:latin typeface="Pretendard" pitchFamily="34" charset="0"/>
+                <a:ea typeface="Pretendard" pitchFamily="34" charset="-122"/>
+                <a:cs typeface="Pretendard" pitchFamily="34" charset="-120"/>
+              </a:rPr>
+              <a:t>현장 실사 및 임대차계약서 원본 확인을 권장합니다.</a:t>
+            </a:r>
+            <a:endParaRPr lang="en-US" sz="1100" dirty="0"/>
+          </a:p>
+          <a:p>
+            <a:pPr indent="0" marL="0">
+              <a:buNone/>
+            </a:pPr>
+            <a:r>
+              <a:rPr lang="en-US" sz="1100" dirty="0">
+                <a:solidFill>
+                  <a:srgbClr val="10161F"/>
+                </a:solidFill>
+                <a:latin typeface="Pretendard" pitchFamily="34" charset="0"/>
+                <a:ea typeface="Pretendard" pitchFamily="34" charset="-122"/>
+                <a:cs typeface="Pretendard" pitchFamily="34" charset="-120"/>
+              </a:rPr>
+              <a:t>현장 실사 및 임대차계약서 원본 확인을 권장합니다.</a:t>
+            </a:r>
+            <a:endParaRPr lang="en-US" sz="1100" dirty="0"/>
+          </a:p>
+        </p:txBody>
+      </p:sp>
+      <p:sp>
+        <p:nvSpPr>
+          <p:cNvPr id="11" name="Text 9"/>
+          <p:cNvSpPr/>
+          <p:nvPr/>
+        </p:nvSpPr>
+        <p:spPr>
+          <a:xfrm>
+            <a:off x="566928" y="6382512"/>
+            <a:ext cx="7315200" cy="219456"/>
+          </a:xfrm>
+          <a:prstGeom prst="rect">
+            <a:avLst/>
+          </a:prstGeom>
+          <a:noFill/>
+          <a:ln/>
+        </p:spPr>
+        <p:txBody>
+          <a:bodyPr wrap="square" lIns="0" tIns="0" rIns="0" bIns="0" rtlCol="0" anchor="ctr"/>
+          <a:lstStyle/>
+          <a:p>
+            <a:pPr indent="0" marL="0">
+              <a:buNone/>
+            </a:pPr>
+            <a:r>
+              <a:rPr lang="en-US" sz="800" dirty="0">
+                <a:solidFill>
+                  <a:srgbClr val="718096"/>
+                </a:solidFill>
+                <a:latin typeface="Pretendard" pitchFamily="34" charset="0"/>
+                <a:ea typeface="Pretendard" pitchFamily="34" charset="-122"/>
+                <a:cs typeface="Pretendard" pitchFamily="34" charset="-120"/>
+              </a:rPr>
+              <a:t>크리딜   |   </a:t>
+            </a:r>
+            <a:endParaRPr lang="en-US" sz="800" dirty="0"/>
+          </a:p>
+        </p:txBody>
+      </p:sp>
+      <p:sp>
+        <p:nvSpPr>
+          <p:cNvPr id="12" name="Text 10"/>
+          <p:cNvSpPr/>
+          <p:nvPr/>
+        </p:nvSpPr>
+        <p:spPr>
+          <a:xfrm>
+            <a:off x="10710367" y="6382512"/>
+            <a:ext cx="914400" cy="219456"/>
+          </a:xfrm>
+          <a:prstGeom prst="rect">
+            <a:avLst/>
+          </a:prstGeom>
+          <a:noFill/>
+          <a:ln/>
+        </p:spPr>
+        <p:txBody>
+          <a:bodyPr wrap="square" lIns="0" tIns="0" rIns="0" bIns="0" rtlCol="0" anchor="ctr"/>
+          <a:lstStyle/>
+          <a:p>
+            <a:pPr algn="r" indent="0" marL="0">
+              <a:buNone/>
+            </a:pPr>
+            <a:r>
+              <a:rPr lang="en-US" sz="900" b="1" dirty="0">
+                <a:solidFill>
+                  <a:srgbClr val="B98A2E"/>
+                </a:solidFill>
+                <a:latin typeface="Arial" pitchFamily="34" charset="0"/>
+                <a:ea typeface="Arial" pitchFamily="34" charset="-122"/>
+                <a:cs typeface="Arial" pitchFamily="34" charset="-120"/>
+              </a:rPr>
+              <a:t>14</a:t>
+            </a:r>
+            <a:endParaRPr lang="en-US" sz="900" dirty="0"/>
+          </a:p>
+        </p:txBody>
+      </p:sp>
+    </p:spTree>
+  </p:cSld>
+  <p:clrMapOvr>
+    <a:masterClrMapping/>
+  </p:clrMapOvr>
+</p:sld>
+</file>
+
+<file path=ppt/slides/slide16.xml><?xml version="1.0" encoding="utf-8"?>
+<p:sld xmlns:a="http://schemas.openxmlformats.org/drawingml/2006/main" xmlns:r="http://schemas.openxmlformats.org/officeDocument/2006/relationships" xmlns:p="http://schemas.openxmlformats.org/presentationml/2006/main">
+  <p:cSld name="Slide 16">
     <p:bg>
       <p:bgPr>
         <a:solidFill>
@@ -4484,7 +8505,7 @@
                 <a:ea typeface="Arial" pitchFamily="34" charset="-122"/>
                 <a:cs typeface="Arial" pitchFamily="34" charset="-120"/>
               </a:rPr>
-              <a:t>14</a:t>
+              <a:t>15</a:t>
             </a:r>
             <a:endParaRPr lang="en-US" sz="1300" dirty="0"/>
           </a:p>
@@ -4713,7 +8734,7 @@
               <a:buNone/>
             </a:pPr>
             <a:r>
-              <a:rPr lang="en-US" sz="850" dirty="0">
+              <a:rPr lang="en-US" sz="900" dirty="0">
                 <a:solidFill>
                   <a:srgbClr val="A0AEC0"/>
                 </a:solidFill>
@@ -4723,7 +8744,7 @@
               </a:rPr>
               <a:t>담당 중개사에게 초기 관심 표명 및 상담 요청</a:t>
             </a:r>
-            <a:endParaRPr lang="en-US" sz="850" dirty="0"/>
+            <a:endParaRPr lang="en-US" sz="900" dirty="0"/>
           </a:p>
         </p:txBody>
       </p:sp>
@@ -4911,7 +8932,7 @@
               <a:buNone/>
             </a:pPr>
             <a:r>
-              <a:rPr lang="en-US" sz="850" dirty="0">
+              <a:rPr lang="en-US" sz="900" dirty="0">
                 <a:solidFill>
                   <a:srgbClr val="A0AEC0"/>
                 </a:solidFill>
@@ -4921,7 +8942,7 @@
               </a:rPr>
               <a:t>비밀유지계약 후 상세 임대차·재무 자료 제공</a:t>
             </a:r>
-            <a:endParaRPr lang="en-US" sz="850" dirty="0"/>
+            <a:endParaRPr lang="en-US" sz="900" dirty="0"/>
           </a:p>
         </p:txBody>
       </p:sp>
@@ -5109,7 +9130,7 @@
               <a:buNone/>
             </a:pPr>
             <a:r>
-              <a:rPr lang="en-US" sz="850" dirty="0">
+              <a:rPr lang="en-US" sz="900" dirty="0">
                 <a:solidFill>
                   <a:srgbClr val="A0AEC0"/>
                 </a:solidFill>
@@ -5119,7 +9140,7 @@
               </a:rPr>
               <a:t>건물 컨디션 및 설비 직접 확인 후 의향서(LOI) 제출</a:t>
             </a:r>
-            <a:endParaRPr lang="en-US" sz="850" dirty="0"/>
+            <a:endParaRPr lang="en-US" sz="900" dirty="0"/>
           </a:p>
         </p:txBody>
       </p:sp>
@@ -5209,7 +9230,7 @@
               <a:buNone/>
             </a:pPr>
             <a:r>
-              <a:rPr lang="en-US" sz="850" b="1" dirty="0">
+              <a:rPr lang="en-US" sz="900" b="1" dirty="0">
                 <a:solidFill>
                   <a:srgbClr val="FFFFFF"/>
                 </a:solidFill>
@@ -5219,7 +9240,7 @@
               </a:rPr>
               <a:t>✓ 공부확인</a:t>
             </a:r>
-            <a:endParaRPr lang="en-US" sz="850" dirty="0"/>
+            <a:endParaRPr lang="en-US" sz="900" dirty="0"/>
           </a:p>
         </p:txBody>
       </p:sp>
@@ -5309,7 +9330,7 @@
               <a:buNone/>
             </a:pPr>
             <a:r>
-              <a:rPr lang="en-US" sz="850" b="1" dirty="0">
+              <a:rPr lang="en-US" sz="900" b="1" dirty="0">
                 <a:solidFill>
                   <a:srgbClr val="FFFFFF"/>
                 </a:solidFill>
@@ -5319,7 +9340,7 @@
               </a:rPr>
               <a:t>★ 전문가검증</a:t>
             </a:r>
-            <a:endParaRPr lang="en-US" sz="850" dirty="0"/>
+            <a:endParaRPr lang="en-US" sz="900" dirty="0"/>
           </a:p>
         </p:txBody>
       </p:sp>
@@ -5409,7 +9430,7 @@
               <a:buNone/>
             </a:pPr>
             <a:r>
-              <a:rPr lang="en-US" sz="850" b="1" dirty="0">
+              <a:rPr lang="en-US" sz="900" b="1" dirty="0">
                 <a:solidFill>
                   <a:srgbClr val="FFFFFF"/>
                 </a:solidFill>
@@ -5419,7 +9440,7 @@
               </a:rPr>
               <a:t>▲ 매도인고지</a:t>
             </a:r>
-            <a:endParaRPr lang="en-US" sz="850" dirty="0"/>
+            <a:endParaRPr lang="en-US" sz="900" dirty="0"/>
           </a:p>
         </p:txBody>
       </p:sp>
@@ -5509,7 +9530,7 @@
               <a:buNone/>
             </a:pPr>
             <a:r>
-              <a:rPr lang="en-US" sz="850" b="1" dirty="0">
+              <a:rPr lang="en-US" sz="900" b="1" dirty="0">
                 <a:solidFill>
                   <a:srgbClr val="FFFFFF"/>
                 </a:solidFill>
@@ -5519,7 +9540,7 @@
               </a:rPr>
               <a:t>● 중개인입력</a:t>
             </a:r>
-            <a:endParaRPr lang="en-US" sz="850" dirty="0"/>
+            <a:endParaRPr lang="en-US" sz="900" dirty="0"/>
           </a:p>
         </p:txBody>
       </p:sp>
@@ -5609,7 +9630,7 @@
               <a:buNone/>
             </a:pPr>
             <a:r>
-              <a:rPr lang="en-US" sz="850" b="1" dirty="0">
+              <a:rPr lang="en-US" sz="900" b="1" dirty="0">
                 <a:solidFill>
                   <a:srgbClr val="FFFFFF"/>
                 </a:solidFill>
@@ -5619,7 +9640,7 @@
               </a:rPr>
               <a:t>◇ AI추정·가정</a:t>
             </a:r>
-            <a:endParaRPr lang="en-US" sz="850" dirty="0"/>
+            <a:endParaRPr lang="en-US" sz="900" dirty="0"/>
           </a:p>
         </p:txBody>
       </p:sp>
@@ -5751,7 +9772,7 @@
               <a:buNone/>
             </a:pPr>
             <a:r>
-              <a:rPr lang="en-US" sz="850" dirty="0">
+              <a:rPr lang="en-US" sz="900" dirty="0">
                 <a:solidFill>
                   <a:srgbClr val="A0AEC0"/>
                 </a:solidFill>
@@ -5761,7 +9782,7 @@
               </a:rPr>
               <a:t>본 자료는 투자 권유가 아니며, 기재된 정보의 정확성을 보증하지 않습니다.</a:t>
             </a:r>
-            <a:endParaRPr lang="en-US" sz="850" dirty="0"/>
+            <a:endParaRPr lang="en-US" sz="900" dirty="0"/>
           </a:p>
         </p:txBody>
       </p:sp>
@@ -5896,7 +9917,7 @@
                 <a:ea typeface="Arial" pitchFamily="34" charset="-122"/>
                 <a:cs typeface="Arial" pitchFamily="34" charset="-120"/>
               </a:rPr>
-              <a:t>14</a:t>
+              <a:t>15</a:t>
             </a:r>
             <a:endParaRPr lang="en-US" sz="900" dirty="0"/>
           </a:p>
@@ -6207,7 +10228,7 @@
         </p:nvSpPr>
         <p:spPr>
           <a:xfrm>
-            <a:off x="731520" y="2276856"/>
+            <a:off x="731520" y="2313432"/>
             <a:ext cx="2298116" cy="402336"/>
           </a:xfrm>
           <a:prstGeom prst="rect">
@@ -6314,7 +10335,7 @@
         </p:nvSpPr>
         <p:spPr>
           <a:xfrm>
-            <a:off x="3541700" y="2276856"/>
+            <a:off x="3541700" y="2313432"/>
             <a:ext cx="2298116" cy="402336"/>
           </a:xfrm>
           <a:prstGeom prst="rect">
@@ -6421,7 +10442,7 @@
         </p:nvSpPr>
         <p:spPr>
           <a:xfrm>
-            <a:off x="6351880" y="2276856"/>
+            <a:off x="6351880" y="2313432"/>
             <a:ext cx="2298116" cy="402336"/>
           </a:xfrm>
           <a:prstGeom prst="rect">
@@ -6528,7 +10549,7 @@
         </p:nvSpPr>
         <p:spPr>
           <a:xfrm>
-            <a:off x="9162059" y="2276856"/>
+            <a:off x="9162059" y="2313432"/>
             <a:ext cx="2298116" cy="402336"/>
           </a:xfrm>
           <a:prstGeom prst="rect">
@@ -7243,40 +11264,16 @@
           </a:p>
         </p:txBody>
       </p:sp>
-      <p:pic>
-        <p:nvPicPr>
-          <p:cNvPr id="6" name="Image 0" descr="preencoded.png">    </p:cNvPr>
-          <p:cNvPicPr>
-            <a:picLocks noChangeAspect="1"/>
-          </p:cNvPicPr>
-          <p:nvPr/>
-        </p:nvPicPr>
-        <p:blipFill>
-          <a:blip r:embed="rId1"/>
-          <a:stretch>
-            <a:fillRect/>
-          </a:stretch>
-        </p:blipFill>
-        <p:spPr>
-          <a:xfrm>
-            <a:off x="566928" y="1481328"/>
-            <a:ext cx="5120640" cy="4114800"/>
-          </a:xfrm>
-          <a:prstGeom prst="rect">
-            <a:avLst/>
-          </a:prstGeom>
-        </p:spPr>
-      </p:pic>
-      <p:sp>
-        <p:nvSpPr>
-          <p:cNvPr id="7" name="Text 4"/>
-          <p:cNvSpPr/>
-          <p:nvPr/>
-        </p:nvSpPr>
-        <p:spPr>
-          <a:xfrm>
-            <a:off x="6053328" y="1481328"/>
-            <a:ext cx="2117147" cy="493776"/>
+      <p:sp>
+        <p:nvSpPr>
+          <p:cNvPr id="6" name="Text 4"/>
+          <p:cNvSpPr/>
+          <p:nvPr/>
+        </p:nvSpPr>
+        <p:spPr>
+          <a:xfrm>
+            <a:off x="566928" y="6382512"/>
+            <a:ext cx="7315200" cy="219456"/>
           </a:xfrm>
           <a:prstGeom prst="rect">
             <a:avLst/>
@@ -7289,13 +11286,10 @@
           <a:lstStyle/>
           <a:p>
             <a:pPr indent="0" marL="0">
-              <a:lnSpc>
-                <a:spcPct val="120000"/>
-              </a:lnSpc>
-              <a:buNone/>
-            </a:pPr>
-            <a:r>
-              <a:rPr lang="en-US" sz="1300" dirty="0">
+              <a:buNone/>
+            </a:pPr>
+            <a:r>
+              <a:rPr lang="en-US" sz="800" dirty="0">
                 <a:solidFill>
                   <a:srgbClr val="718096"/>
                 </a:solidFill>
@@ -7303,87 +11297,6 @@
                 <a:ea typeface="Pretendard" pitchFamily="34" charset="-122"/>
                 <a:cs typeface="Pretendard" pitchFamily="34" charset="-120"/>
               </a:rPr>
-              <a:t>교통 접근성</a:t>
-            </a:r>
-            <a:endParaRPr lang="en-US" sz="1300" dirty="0"/>
-          </a:p>
-        </p:txBody>
-      </p:sp>
-      <p:sp>
-        <p:nvSpPr>
-          <p:cNvPr id="8" name="Text 5"/>
-          <p:cNvSpPr/>
-          <p:nvPr/>
-        </p:nvSpPr>
-        <p:spPr>
-          <a:xfrm>
-            <a:off x="8170475" y="1481328"/>
-            <a:ext cx="3454292" cy="493776"/>
-          </a:xfrm>
-          <a:prstGeom prst="rect">
-            <a:avLst/>
-          </a:prstGeom>
-          <a:noFill/>
-          <a:ln/>
-        </p:spPr>
-        <p:txBody>
-          <a:bodyPr wrap="square" lIns="0" tIns="0" rIns="0" bIns="0" rtlCol="0" anchor="ctr"/>
-          <a:lstStyle/>
-          <a:p>
-            <a:pPr indent="0" marL="0">
-              <a:lnSpc>
-                <a:spcPct val="120000"/>
-              </a:lnSpc>
-              <a:buNone/>
-            </a:pPr>
-            <a:r>
-              <a:rPr lang="en-US" sz="1300" b="1" dirty="0">
-                <a:solidFill>
-                  <a:srgbClr val="10161F"/>
-                </a:solidFill>
-                <a:latin typeface="Pretendard" pitchFamily="34" charset="0"/>
-                <a:ea typeface="Pretendard" pitchFamily="34" charset="-122"/>
-                <a:cs typeface="Pretendard" pitchFamily="34" charset="-120"/>
-              </a:rPr>
-              <a:t>강남역·양재역 더블역세권 도보 4분 거리에 위치합니다.</a:t>
-            </a:r>
-            <a:endParaRPr lang="en-US" sz="1300" dirty="0"/>
-          </a:p>
-        </p:txBody>
-      </p:sp>
-      <p:sp>
-        <p:nvSpPr>
-          <p:cNvPr id="9" name="Text 6"/>
-          <p:cNvSpPr/>
-          <p:nvPr/>
-        </p:nvSpPr>
-        <p:spPr>
-          <a:xfrm>
-            <a:off x="566928" y="6382512"/>
-            <a:ext cx="7315200" cy="219456"/>
-          </a:xfrm>
-          <a:prstGeom prst="rect">
-            <a:avLst/>
-          </a:prstGeom>
-          <a:noFill/>
-          <a:ln/>
-        </p:spPr>
-        <p:txBody>
-          <a:bodyPr wrap="square" lIns="0" tIns="0" rIns="0" bIns="0" rtlCol="0" anchor="ctr"/>
-          <a:lstStyle/>
-          <a:p>
-            <a:pPr indent="0" marL="0">
-              <a:buNone/>
-            </a:pPr>
-            <a:r>
-              <a:rPr lang="en-US" sz="800" dirty="0">
-                <a:solidFill>
-                  <a:srgbClr val="718096"/>
-                </a:solidFill>
-                <a:latin typeface="Pretendard" pitchFamily="34" charset="0"/>
-                <a:ea typeface="Pretendard" pitchFamily="34" charset="-122"/>
-                <a:cs typeface="Pretendard" pitchFamily="34" charset="-120"/>
-              </a:rPr>
               <a:t>크리딜   |   </a:t>
             </a:r>
             <a:endParaRPr lang="en-US" sz="800" dirty="0"/>
@@ -7392,7 +11305,7 @@
       </p:sp>
       <p:sp>
         <p:nvSpPr>
-          <p:cNvPr id="10" name="Text 7"/>
+          <p:cNvPr id="7" name="Text 5"/>
           <p:cNvSpPr/>
           <p:nvPr/>
         </p:nvSpPr>
@@ -7426,45 +11339,6 @@
               <a:t>3</a:t>
             </a:r>
             <a:endParaRPr lang="en-US" sz="900" dirty="0"/>
-          </a:p>
-        </p:txBody>
-      </p:sp>
-      <p:sp>
-        <p:nvSpPr>
-          <p:cNvPr id="11" name="Text 8"/>
-          <p:cNvSpPr/>
-          <p:nvPr/>
-        </p:nvSpPr>
-        <p:spPr>
-          <a:xfrm>
-            <a:off x="566928" y="1481328"/>
-            <a:ext cx="11057839" cy="237744"/>
-          </a:xfrm>
-          <a:prstGeom prst="rect">
-            <a:avLst/>
-          </a:prstGeom>
-          <a:noFill/>
-          <a:ln/>
-        </p:spPr>
-        <p:txBody>
-          <a:bodyPr wrap="square" lIns="0" tIns="0" rIns="0" bIns="0" rtlCol="0" anchor="t"/>
-          <a:lstStyle/>
-          <a:p>
-            <a:pPr indent="0" marL="0">
-              <a:buNone/>
-            </a:pPr>
-            <a:r>
-              <a:rPr lang="en-US" sz="1000" dirty="0">
-                <a:solidFill>
-                  <a:srgbClr val="10161F"/>
-                </a:solidFill>
-                <a:latin typeface="Pretendard" pitchFamily="34" charset="0"/>
-                <a:ea typeface="Pretendard" pitchFamily="34" charset="-122"/>
-                <a:cs typeface="Pretendard" pitchFamily="34" charset="-120"/>
-              </a:rPr>
-              <a:t>강남역·양재역 더블역세권 도보 4분 거리에 위치합니다.</a:t>
-            </a:r>
-            <a:endParaRPr lang="en-US" sz="1000" dirty="0"/>
           </a:p>
         </p:txBody>
       </p:sp>
@@ -7553,7 +11427,7 @@
                 <a:ea typeface="Arial" pitchFamily="34" charset="-122"/>
                 <a:cs typeface="Arial" pitchFamily="34" charset="-120"/>
               </a:rPr>
-              <a:t>04</a:t>
+              <a:t>03</a:t>
             </a:r>
             <a:endParaRPr lang="en-US" sz="1300" dirty="0"/>
           </a:p>
@@ -7685,7 +11559,7 @@
         <p:spPr>
           <a:xfrm>
             <a:off x="566928" y="1645920"/>
-            <a:ext cx="2606040" cy="402336"/>
+            <a:ext cx="2606040" cy="438912"/>
           </a:xfrm>
           <a:prstGeom prst="rect">
             <a:avLst/>
@@ -7704,7 +11578,7 @@
               <a:buNone/>
             </a:pPr>
             <a:r>
-              <a:rPr lang="en-US" sz="1400" dirty="0">
+              <a:rPr lang="en-US" sz="1350" dirty="0">
                 <a:solidFill>
                   <a:srgbClr val="718096"/>
                 </a:solidFill>
@@ -7714,7 +11588,7 @@
               </a:rPr>
               <a:t>대지면적</a:t>
             </a:r>
-            <a:endParaRPr lang="en-US" sz="1400" dirty="0"/>
+            <a:endParaRPr lang="en-US" sz="1350" dirty="0"/>
           </a:p>
         </p:txBody>
       </p:sp>
@@ -7727,7 +11601,7 @@
         <p:spPr>
           <a:xfrm>
             <a:off x="3172968" y="1645920"/>
-            <a:ext cx="4251960" cy="402336"/>
+            <a:ext cx="4251960" cy="438912"/>
           </a:xfrm>
           <a:prstGeom prst="rect">
             <a:avLst/>
@@ -7746,7 +11620,7 @@
               <a:buNone/>
             </a:pPr>
             <a:r>
-              <a:rPr lang="en-US" sz="1400" b="1" dirty="0">
+              <a:rPr lang="en-US" sz="1350" b="1" dirty="0">
                 <a:solidFill>
                   <a:srgbClr val="10161F"/>
                 </a:solidFill>
@@ -7756,7 +11630,7 @@
               </a:rPr>
               <a:t>142.5평</a:t>
             </a:r>
-            <a:endParaRPr lang="en-US" sz="1400" dirty="0"/>
+            <a:endParaRPr lang="en-US" sz="1350" dirty="0"/>
           </a:p>
         </p:txBody>
       </p:sp>
@@ -7768,7 +11642,7 @@
         </p:nvSpPr>
         <p:spPr>
           <a:xfrm>
-            <a:off x="566928" y="2048256"/>
+            <a:off x="566928" y="2084832"/>
             <a:ext cx="6858000" cy="0"/>
           </a:xfrm>
           <a:prstGeom prst="line">
@@ -7791,8 +11665,8 @@
         </p:nvSpPr>
         <p:spPr>
           <a:xfrm>
-            <a:off x="566928" y="2048256"/>
-            <a:ext cx="2606040" cy="402336"/>
+            <a:off x="566928" y="2084832"/>
+            <a:ext cx="2606040" cy="438912"/>
           </a:xfrm>
           <a:prstGeom prst="rect">
             <a:avLst/>
@@ -7811,7 +11685,7 @@
               <a:buNone/>
             </a:pPr>
             <a:r>
-              <a:rPr lang="en-US" sz="1400" dirty="0">
+              <a:rPr lang="en-US" sz="1350" dirty="0">
                 <a:solidFill>
                   <a:srgbClr val="718096"/>
                 </a:solidFill>
@@ -7821,7 +11695,7 @@
               </a:rPr>
               <a:t>연면적</a:t>
             </a:r>
-            <a:endParaRPr lang="en-US" sz="1400" dirty="0"/>
+            <a:endParaRPr lang="en-US" sz="1350" dirty="0"/>
           </a:p>
         </p:txBody>
       </p:sp>
@@ -7833,8 +11707,8 @@
         </p:nvSpPr>
         <p:spPr>
           <a:xfrm>
-            <a:off x="3172968" y="2048256"/>
-            <a:ext cx="4251960" cy="402336"/>
+            <a:off x="3172968" y="2084832"/>
+            <a:ext cx="4251960" cy="438912"/>
           </a:xfrm>
           <a:prstGeom prst="rect">
             <a:avLst/>
@@ -7853,7 +11727,7 @@
               <a:buNone/>
             </a:pPr>
             <a:r>
-              <a:rPr lang="en-US" sz="1400" b="1" dirty="0">
+              <a:rPr lang="en-US" sz="1350" b="1" dirty="0">
                 <a:solidFill>
                   <a:srgbClr val="10161F"/>
                 </a:solidFill>
@@ -7863,7 +11737,7 @@
               </a:rPr>
               <a:t>620.8평</a:t>
             </a:r>
-            <a:endParaRPr lang="en-US" sz="1400" dirty="0"/>
+            <a:endParaRPr lang="en-US" sz="1350" dirty="0"/>
           </a:p>
         </p:txBody>
       </p:sp>
@@ -7965,7 +11839,7 @@
                 <a:ea typeface="Pretendard" pitchFamily="34" charset="-122"/>
                 <a:cs typeface="Pretendard" pitchFamily="34" charset="-120"/>
               </a:rPr>
-              <a:t>토지 및 건물 분석 포인트</a:t>
+              <a:t>입지 및 권리관계 실사 포인트</a:t>
             </a:r>
             <a:endParaRPr lang="en-US" sz="1050" dirty="0"/>
           </a:p>
@@ -8008,7 +11882,7 @@
                 <a:ea typeface="Pretendard" pitchFamily="34" charset="-122"/>
                 <a:cs typeface="Pretendard" pitchFamily="34" charset="-120"/>
               </a:rPr>
-              <a:t>물건 접면 도로 및 교통 여건은 현장 확인 사항입니다</a:t>
+              <a:t>물건 접면 도로 폭 및 진출입 여건은 현장 실사 확인 사항입니다</a:t>
             </a:r>
             <a:endParaRPr lang="en-US" sz="930" dirty="0"/>
           </a:p>
@@ -8029,7 +11903,7 @@
                 <a:ea typeface="Pretendard" pitchFamily="34" charset="-122"/>
                 <a:cs typeface="Pretendard" pitchFamily="34" charset="-120"/>
               </a:rPr>
-              <a:t>상세 건물 제원은 실사 자료를 참조하시기 바랍니다</a:t>
+              <a:t>등기부등본상 권리관계 및 제한물권 설정 여부를 확인하였습니다</a:t>
             </a:r>
             <a:endParaRPr lang="en-US" sz="930" dirty="0"/>
           </a:p>
@@ -8050,7 +11924,7 @@
                 <a:ea typeface="Pretendard" pitchFamily="34" charset="-122"/>
                 <a:cs typeface="Pretendard" pitchFamily="34" charset="-120"/>
               </a:rPr>
-              <a:t>건물 현황 및 규모는 첨부 대장을 기준으로 합니다</a:t>
+              <a:t>지구단위계획 및 토지이용계획상 허용 용도를 검토하였습니다</a:t>
             </a:r>
             <a:endParaRPr lang="en-US" sz="930" dirty="0"/>
           </a:p>
@@ -8131,7 +12005,7 @@
                 <a:ea typeface="Pretendard" pitchFamily="34" charset="-122"/>
                 <a:cs typeface="Pretendard" pitchFamily="34" charset="-120"/>
               </a:rPr>
-              <a:t>물건 실사 및 관리 상태</a:t>
+              <a:t>임대차 및 운용 관리 상태</a:t>
             </a:r>
             <a:endParaRPr lang="en-US" sz="1050" dirty="0"/>
           </a:p>
@@ -8174,7 +12048,7 @@
                 <a:ea typeface="Pretendard" pitchFamily="34" charset="-122"/>
                 <a:cs typeface="Pretendard" pitchFamily="34" charset="-120"/>
               </a:rPr>
-              <a:t>건물 상태 및 설비 현황은 실사 보고서를 참조하십시오</a:t>
+              <a:t>주요 임차인별 계약 만기 분산 및 렌트롤 실사가 필요합니다</a:t>
             </a:r>
             <a:endParaRPr lang="en-US" sz="930" dirty="0"/>
           </a:p>
@@ -8195,7 +12069,7 @@
                 <a:ea typeface="Pretendard" pitchFamily="34" charset="-122"/>
                 <a:cs typeface="Pretendard" pitchFamily="34" charset="-120"/>
               </a:rPr>
-              <a:t>자금 조달 및 대출 조건은 금융 자문 후 확정됩니다</a:t>
+              <a:t>관리비 정산 내역 및 수선유지비 집행 이력을 점검하였습니다</a:t>
             </a:r>
             <a:endParaRPr lang="en-US" sz="930" dirty="0"/>
           </a:p>
@@ -8216,7 +12090,7 @@
                 <a:ea typeface="Pretendard" pitchFamily="34" charset="-122"/>
                 <a:cs typeface="Pretendard" pitchFamily="34" charset="-120"/>
               </a:rPr>
-              <a:t>상세 실사 단계에서 구체적인 계약 조건 및 세무 검토가 진행됩니다</a:t>
+              <a:t>취득세 감면 및 대출 조달 구조는 금융·세무 자문 후 확정됩니다</a:t>
             </a:r>
             <a:endParaRPr lang="en-US" sz="930" dirty="0"/>
           </a:p>
@@ -8294,7 +12168,7 @@
                 <a:ea typeface="Arial" pitchFamily="34" charset="-122"/>
                 <a:cs typeface="Arial" pitchFamily="34" charset="-120"/>
               </a:rPr>
-              <a:t>4</a:t>
+              <a:t>3</a:t>
             </a:r>
             <a:endParaRPr lang="en-US" sz="900" dirty="0"/>
           </a:p>
@@ -8385,7 +12259,7 @@
                 <a:ea typeface="Arial" pitchFamily="34" charset="-122"/>
                 <a:cs typeface="Arial" pitchFamily="34" charset="-120"/>
               </a:rPr>
-              <a:t>05</a:t>
+              <a:t>04</a:t>
             </a:r>
             <a:endParaRPr lang="en-US" sz="1300" dirty="0"/>
           </a:p>
@@ -8517,7 +12391,7 @@
         <p:spPr>
           <a:xfrm>
             <a:off x="566928" y="1645920"/>
-            <a:ext cx="2606040" cy="402336"/>
+            <a:ext cx="2606040" cy="438912"/>
           </a:xfrm>
           <a:prstGeom prst="rect">
             <a:avLst/>
@@ -8536,7 +12410,7 @@
               <a:buNone/>
             </a:pPr>
             <a:r>
-              <a:rPr lang="en-US" sz="1400" dirty="0">
+              <a:rPr lang="en-US" sz="1350" dirty="0">
                 <a:solidFill>
                   <a:srgbClr val="718096"/>
                 </a:solidFill>
@@ -8546,7 +12420,7 @@
               </a:rPr>
               <a:t>대지면적</a:t>
             </a:r>
-            <a:endParaRPr lang="en-US" sz="1400" dirty="0"/>
+            <a:endParaRPr lang="en-US" sz="1350" dirty="0"/>
           </a:p>
         </p:txBody>
       </p:sp>
@@ -8559,7 +12433,7 @@
         <p:spPr>
           <a:xfrm>
             <a:off x="3172968" y="1645920"/>
-            <a:ext cx="4251960" cy="402336"/>
+            <a:ext cx="4251960" cy="438912"/>
           </a:xfrm>
           <a:prstGeom prst="rect">
             <a:avLst/>
@@ -8578,7 +12452,7 @@
               <a:buNone/>
             </a:pPr>
             <a:r>
-              <a:rPr lang="en-US" sz="1400" b="1" dirty="0">
+              <a:rPr lang="en-US" sz="1350" b="1" dirty="0">
                 <a:solidFill>
                   <a:srgbClr val="10161F"/>
                 </a:solidFill>
@@ -8588,7 +12462,7 @@
               </a:rPr>
               <a:t>142.5평</a:t>
             </a:r>
-            <a:endParaRPr lang="en-US" sz="1400" dirty="0"/>
+            <a:endParaRPr lang="en-US" sz="1350" dirty="0"/>
           </a:p>
         </p:txBody>
       </p:sp>
@@ -8600,7 +12474,7 @@
         </p:nvSpPr>
         <p:spPr>
           <a:xfrm>
-            <a:off x="566928" y="2048256"/>
+            <a:off x="566928" y="2084832"/>
             <a:ext cx="6858000" cy="0"/>
           </a:xfrm>
           <a:prstGeom prst="line">
@@ -8623,8 +12497,8 @@
         </p:nvSpPr>
         <p:spPr>
           <a:xfrm>
-            <a:off x="566928" y="2048256"/>
-            <a:ext cx="2606040" cy="402336"/>
+            <a:off x="566928" y="2084832"/>
+            <a:ext cx="2606040" cy="438912"/>
           </a:xfrm>
           <a:prstGeom prst="rect">
             <a:avLst/>
@@ -8643,7 +12517,7 @@
               <a:buNone/>
             </a:pPr>
             <a:r>
-              <a:rPr lang="en-US" sz="1400" dirty="0">
+              <a:rPr lang="en-US" sz="1350" dirty="0">
                 <a:solidFill>
                   <a:srgbClr val="718096"/>
                 </a:solidFill>
@@ -8653,7 +12527,7 @@
               </a:rPr>
               <a:t>연면적</a:t>
             </a:r>
-            <a:endParaRPr lang="en-US" sz="1400" dirty="0"/>
+            <a:endParaRPr lang="en-US" sz="1350" dirty="0"/>
           </a:p>
         </p:txBody>
       </p:sp>
@@ -8665,8 +12539,8 @@
         </p:nvSpPr>
         <p:spPr>
           <a:xfrm>
-            <a:off x="3172968" y="2048256"/>
-            <a:ext cx="4251960" cy="402336"/>
+            <a:off x="3172968" y="2084832"/>
+            <a:ext cx="4251960" cy="438912"/>
           </a:xfrm>
           <a:prstGeom prst="rect">
             <a:avLst/>
@@ -8685,7 +12559,7 @@
               <a:buNone/>
             </a:pPr>
             <a:r>
-              <a:rPr lang="en-US" sz="1400" b="1" dirty="0">
+              <a:rPr lang="en-US" sz="1350" b="1" dirty="0">
                 <a:solidFill>
                   <a:srgbClr val="10161F"/>
                 </a:solidFill>
@@ -8695,7 +12569,7 @@
               </a:rPr>
               <a:t>620.8평</a:t>
             </a:r>
-            <a:endParaRPr lang="en-US" sz="1400" dirty="0"/>
+            <a:endParaRPr lang="en-US" sz="1350" dirty="0"/>
           </a:p>
         </p:txBody>
       </p:sp>
@@ -8707,7 +12581,7 @@
         </p:nvSpPr>
         <p:spPr>
           <a:xfrm>
-            <a:off x="566928" y="2450592"/>
+            <a:off x="566928" y="2523744"/>
             <a:ext cx="6858000" cy="0"/>
           </a:xfrm>
           <a:prstGeom prst="line">
@@ -8730,8 +12604,8 @@
         </p:nvSpPr>
         <p:spPr>
           <a:xfrm>
-            <a:off x="566928" y="2450592"/>
-            <a:ext cx="2606040" cy="402336"/>
+            <a:off x="566928" y="2523744"/>
+            <a:ext cx="2606040" cy="438912"/>
           </a:xfrm>
           <a:prstGeom prst="rect">
             <a:avLst/>
@@ -8750,7 +12624,7 @@
               <a:buNone/>
             </a:pPr>
             <a:r>
-              <a:rPr lang="en-US" sz="1400" dirty="0">
+              <a:rPr lang="en-US" sz="1350" dirty="0">
                 <a:solidFill>
                   <a:srgbClr val="718096"/>
                 </a:solidFill>
@@ -8760,7 +12634,7 @@
               </a:rPr>
               <a:t>준공</a:t>
             </a:r>
-            <a:endParaRPr lang="en-US" sz="1400" dirty="0"/>
+            <a:endParaRPr lang="en-US" sz="1350" dirty="0"/>
           </a:p>
         </p:txBody>
       </p:sp>
@@ -8772,8 +12646,8 @@
         </p:nvSpPr>
         <p:spPr>
           <a:xfrm>
-            <a:off x="3172968" y="2450592"/>
-            <a:ext cx="4251960" cy="402336"/>
+            <a:off x="3172968" y="2523744"/>
+            <a:ext cx="4251960" cy="438912"/>
           </a:xfrm>
           <a:prstGeom prst="rect">
             <a:avLst/>
@@ -8792,7 +12666,7 @@
               <a:buNone/>
             </a:pPr>
             <a:r>
-              <a:rPr lang="en-US" sz="1400" b="1" dirty="0">
+              <a:rPr lang="en-US" sz="1350" b="1" dirty="0">
                 <a:solidFill>
                   <a:srgbClr val="10161F"/>
                 </a:solidFill>
@@ -8802,7 +12676,7 @@
               </a:rPr>
               <a:t>2017년</a:t>
             </a:r>
-            <a:endParaRPr lang="en-US" sz="1400" dirty="0"/>
+            <a:endParaRPr lang="en-US" sz="1350" dirty="0"/>
           </a:p>
         </p:txBody>
       </p:sp>
@@ -9013,7 +12887,7 @@
                 <a:ea typeface="Arial" pitchFamily="34" charset="-122"/>
                 <a:cs typeface="Arial" pitchFamily="34" charset="-120"/>
               </a:rPr>
-              <a:t>5</a:t>
+              <a:t>4</a:t>
             </a:r>
             <a:endParaRPr lang="en-US" sz="900" dirty="0"/>
           </a:p>
@@ -9104,7 +12978,7 @@
                 <a:ea typeface="Arial" pitchFamily="34" charset="-122"/>
                 <a:cs typeface="Arial" pitchFamily="34" charset="-120"/>
               </a:rPr>
-              <a:t>06</a:t>
+              <a:t>05</a:t>
             </a:r>
             <a:endParaRPr lang="en-US" sz="1300" dirty="0"/>
           </a:p>
@@ -10114,7 +13988,7 @@
                 <a:ea typeface="Arial" pitchFamily="34" charset="-122"/>
                 <a:cs typeface="Arial" pitchFamily="34" charset="-120"/>
               </a:rPr>
-              <a:t>6</a:t>
+              <a:t>5</a:t>
             </a:r>
             <a:endParaRPr lang="en-US" sz="900" dirty="0"/>
           </a:p>
@@ -10205,7 +14079,7 @@
                 <a:ea typeface="Arial" pitchFamily="34" charset="-122"/>
                 <a:cs typeface="Arial" pitchFamily="34" charset="-120"/>
               </a:rPr>
-              <a:t>07</a:t>
+              <a:t>06</a:t>
             </a:r>
             <a:endParaRPr lang="en-US" sz="1300" dirty="0"/>
           </a:p>
@@ -10337,7 +14211,7 @@
         <p:spPr>
           <a:xfrm>
             <a:off x="566928" y="1645920"/>
-            <a:ext cx="2606040" cy="402336"/>
+            <a:ext cx="2606040" cy="438912"/>
           </a:xfrm>
           <a:prstGeom prst="rect">
             <a:avLst/>
@@ -10356,7 +14230,7 @@
               <a:buNone/>
             </a:pPr>
             <a:r>
-              <a:rPr lang="en-US" sz="1400" dirty="0">
+              <a:rPr lang="en-US" sz="1350" dirty="0">
                 <a:solidFill>
                   <a:srgbClr val="718096"/>
                 </a:solidFill>
@@ -10366,7 +14240,7 @@
               </a:rPr>
               <a:t>1F</a:t>
             </a:r>
-            <a:endParaRPr lang="en-US" sz="1400" dirty="0"/>
+            <a:endParaRPr lang="en-US" sz="1350" dirty="0"/>
           </a:p>
         </p:txBody>
       </p:sp>
@@ -10379,7 +14253,7 @@
         <p:spPr>
           <a:xfrm>
             <a:off x="3172968" y="1645920"/>
-            <a:ext cx="4251960" cy="402336"/>
+            <a:ext cx="4251960" cy="438912"/>
           </a:xfrm>
           <a:prstGeom prst="rect">
             <a:avLst/>
@@ -10398,7 +14272,7 @@
               <a:buNone/>
             </a:pPr>
             <a:r>
-              <a:rPr lang="en-US" sz="1400" b="1" dirty="0">
+              <a:rPr lang="en-US" sz="1350" b="1" dirty="0">
                 <a:solidFill>
                   <a:srgbClr val="10161F"/>
                 </a:solidFill>
@@ -10406,9 +14280,9 @@
                 <a:ea typeface="Pretendard" pitchFamily="34" charset="-122"/>
                 <a:cs typeface="Pretendard" pitchFamily="34" charset="-120"/>
               </a:rPr>
-              <a:t>약국</a:t>
-            </a:r>
-            <a:endParaRPr lang="en-US" sz="1400" dirty="0"/>
+              <a:t>약국 (3억)</a:t>
+            </a:r>
+            <a:endParaRPr lang="en-US" sz="1350" dirty="0"/>
           </a:p>
         </p:txBody>
       </p:sp>
@@ -10420,7 +14294,7 @@
         </p:nvSpPr>
         <p:spPr>
           <a:xfrm>
-            <a:off x="566928" y="2048256"/>
+            <a:off x="566928" y="2084832"/>
             <a:ext cx="6858000" cy="0"/>
           </a:xfrm>
           <a:prstGeom prst="line">
@@ -10443,8 +14317,8 @@
         </p:nvSpPr>
         <p:spPr>
           <a:xfrm>
-            <a:off x="566928" y="2048256"/>
-            <a:ext cx="2606040" cy="402336"/>
+            <a:off x="566928" y="2084832"/>
+            <a:ext cx="2606040" cy="438912"/>
           </a:xfrm>
           <a:prstGeom prst="rect">
             <a:avLst/>
@@ -10463,7 +14337,7 @@
               <a:buNone/>
             </a:pPr>
             <a:r>
-              <a:rPr lang="en-US" sz="1400" dirty="0">
+              <a:rPr lang="en-US" sz="1350" dirty="0">
                 <a:solidFill>
                   <a:srgbClr val="718096"/>
                 </a:solidFill>
@@ -10473,7 +14347,7 @@
               </a:rPr>
               <a:t>2F</a:t>
             </a:r>
-            <a:endParaRPr lang="en-US" sz="1400" dirty="0"/>
+            <a:endParaRPr lang="en-US" sz="1350" dirty="0"/>
           </a:p>
         </p:txBody>
       </p:sp>
@@ -10485,8 +14359,8 @@
         </p:nvSpPr>
         <p:spPr>
           <a:xfrm>
-            <a:off x="3172968" y="2048256"/>
-            <a:ext cx="4251960" cy="402336"/>
+            <a:off x="3172968" y="2084832"/>
+            <a:ext cx="4251960" cy="438912"/>
           </a:xfrm>
           <a:prstGeom prst="rect">
             <a:avLst/>
@@ -10505,7 +14379,7 @@
               <a:buNone/>
             </a:pPr>
             <a:r>
-              <a:rPr lang="en-US" sz="1400" b="1" dirty="0">
+              <a:rPr lang="en-US" sz="1350" b="1" dirty="0">
                 <a:solidFill>
                   <a:srgbClr val="10161F"/>
                 </a:solidFill>
@@ -10513,9 +14387,9 @@
                 <a:ea typeface="Pretendard" pitchFamily="34" charset="-122"/>
                 <a:cs typeface="Pretendard" pitchFamily="34" charset="-120"/>
               </a:rPr>
-              <a:t>안과</a:t>
-            </a:r>
-            <a:endParaRPr lang="en-US" sz="1400" dirty="0"/>
+              <a:t>안과 (2억)</a:t>
+            </a:r>
+            <a:endParaRPr lang="en-US" sz="1350" dirty="0"/>
           </a:p>
         </p:txBody>
       </p:sp>
@@ -10726,7 +14600,7 @@
                 <a:ea typeface="Arial" pitchFamily="34" charset="-122"/>
                 <a:cs typeface="Arial" pitchFamily="34" charset="-120"/>
               </a:rPr>
-              <a:t>7</a:t>
+              <a:t>6</a:t>
             </a:r>
             <a:endParaRPr lang="en-US" sz="900" dirty="0"/>
           </a:p>
@@ -10817,7 +14691,7 @@
                 <a:ea typeface="Arial" pitchFamily="34" charset="-122"/>
                 <a:cs typeface="Arial" pitchFamily="34" charset="-120"/>
               </a:rPr>
-              <a:t>08</a:t>
+              <a:t>07</a:t>
             </a:r>
             <a:endParaRPr lang="en-US" sz="1300" dirty="0"/>
           </a:p>
@@ -10932,7 +14806,328 @@
         </p:nvSpPr>
         <p:spPr>
           <a:xfrm>
-            <a:off x="566928" y="1645920"/>
+            <a:off x="566928" y="1554480"/>
+            <a:ext cx="3576218" cy="1188720"/>
+          </a:xfrm>
+          <a:prstGeom prst="roundRect">
+            <a:avLst>
+              <a:gd name="adj" fmla="val 4615"/>
+            </a:avLst>
+          </a:prstGeom>
+          <a:solidFill>
+            <a:srgbClr val="F7FAFC"/>
+          </a:solidFill>
+          <a:ln w="6350">
+            <a:solidFill>
+              <a:srgbClr val="CBD5E0"/>
+            </a:solidFill>
+            <a:prstDash val="solid"/>
+          </a:ln>
+        </p:spPr>
+      </p:sp>
+      <p:sp>
+        <p:nvSpPr>
+          <p:cNvPr id="8" name="Text 6"/>
+          <p:cNvSpPr/>
+          <p:nvPr/>
+        </p:nvSpPr>
+        <p:spPr>
+          <a:xfrm>
+            <a:off x="731520" y="1682496"/>
+            <a:ext cx="3247034" cy="201168"/>
+          </a:xfrm>
+          <a:prstGeom prst="rect">
+            <a:avLst/>
+          </a:prstGeom>
+          <a:noFill/>
+          <a:ln/>
+        </p:spPr>
+        <p:txBody>
+          <a:bodyPr wrap="square" lIns="0" tIns="0" rIns="0" bIns="0" rtlCol="0" anchor="ctr"/>
+          <a:lstStyle/>
+          <a:p>
+            <a:pPr indent="0" marL="0">
+              <a:buNone/>
+            </a:pPr>
+            <a:r>
+              <a:rPr lang="en-US" sz="950" dirty="0">
+                <a:solidFill>
+                  <a:srgbClr val="718096"/>
+                </a:solidFill>
+                <a:latin typeface="Pretendard" pitchFamily="34" charset="0"/>
+                <a:ea typeface="Pretendard" pitchFamily="34" charset="-122"/>
+                <a:cs typeface="Pretendard" pitchFamily="34" charset="-120"/>
+              </a:rPr>
+              <a:t>실투자금</a:t>
+            </a:r>
+            <a:endParaRPr lang="en-US" sz="950" dirty="0"/>
+          </a:p>
+        </p:txBody>
+      </p:sp>
+      <p:sp>
+        <p:nvSpPr>
+          <p:cNvPr id="9" name="Text 7"/>
+          <p:cNvSpPr/>
+          <p:nvPr/>
+        </p:nvSpPr>
+        <p:spPr>
+          <a:xfrm>
+            <a:off x="731520" y="1901952"/>
+            <a:ext cx="3247034" cy="402336"/>
+          </a:xfrm>
+          <a:prstGeom prst="rect">
+            <a:avLst/>
+          </a:prstGeom>
+          <a:noFill/>
+          <a:ln/>
+        </p:spPr>
+        <p:txBody>
+          <a:bodyPr wrap="square" lIns="0" tIns="0" rIns="0" bIns="0" rtlCol="0" anchor="ctr">
+            <a:normAutofit/>
+          </a:bodyPr>
+          <a:lstStyle/>
+          <a:p>
+            <a:pPr indent="0" marL="0">
+              <a:buNone/>
+            </a:pPr>
+            <a:r>
+              <a:rPr lang="en-US" sz="2200" b="1" dirty="0">
+                <a:solidFill>
+                  <a:srgbClr val="10161F"/>
+                </a:solidFill>
+                <a:latin typeface="Pretendard" pitchFamily="34" charset="0"/>
+                <a:ea typeface="Pretendard" pitchFamily="34" charset="-122"/>
+                <a:cs typeface="Pretendard" pitchFamily="34" charset="-120"/>
+              </a:rPr>
+              <a:t>약 69억 원</a:t>
+            </a:r>
+            <a:endParaRPr lang="en-US" sz="2200" dirty="0"/>
+          </a:p>
+        </p:txBody>
+      </p:sp>
+      <p:sp>
+        <p:nvSpPr>
+          <p:cNvPr id="10" name="Shape 8"/>
+          <p:cNvSpPr/>
+          <p:nvPr/>
+        </p:nvSpPr>
+        <p:spPr>
+          <a:xfrm>
+            <a:off x="4307738" y="1554480"/>
+            <a:ext cx="3576218" cy="1188720"/>
+          </a:xfrm>
+          <a:prstGeom prst="roundRect">
+            <a:avLst>
+              <a:gd name="adj" fmla="val 4615"/>
+            </a:avLst>
+          </a:prstGeom>
+          <a:solidFill>
+            <a:srgbClr val="F7FAFC"/>
+          </a:solidFill>
+          <a:ln w="6350">
+            <a:solidFill>
+              <a:srgbClr val="CBD5E0"/>
+            </a:solidFill>
+            <a:prstDash val="solid"/>
+          </a:ln>
+        </p:spPr>
+      </p:sp>
+      <p:sp>
+        <p:nvSpPr>
+          <p:cNvPr id="11" name="Text 9"/>
+          <p:cNvSpPr/>
+          <p:nvPr/>
+        </p:nvSpPr>
+        <p:spPr>
+          <a:xfrm>
+            <a:off x="4472330" y="1682496"/>
+            <a:ext cx="3247034" cy="201168"/>
+          </a:xfrm>
+          <a:prstGeom prst="rect">
+            <a:avLst/>
+          </a:prstGeom>
+          <a:noFill/>
+          <a:ln/>
+        </p:spPr>
+        <p:txBody>
+          <a:bodyPr wrap="square" lIns="0" tIns="0" rIns="0" bIns="0" rtlCol="0" anchor="ctr"/>
+          <a:lstStyle/>
+          <a:p>
+            <a:pPr indent="0" marL="0">
+              <a:buNone/>
+            </a:pPr>
+            <a:r>
+              <a:rPr lang="en-US" sz="950" dirty="0">
+                <a:solidFill>
+                  <a:srgbClr val="718096"/>
+                </a:solidFill>
+                <a:latin typeface="Pretendard" pitchFamily="34" charset="0"/>
+                <a:ea typeface="Pretendard" pitchFamily="34" charset="-122"/>
+                <a:cs typeface="Pretendard" pitchFamily="34" charset="-120"/>
+              </a:rPr>
+              <a:t>순수익(매월)</a:t>
+            </a:r>
+            <a:endParaRPr lang="en-US" sz="950" dirty="0"/>
+          </a:p>
+        </p:txBody>
+      </p:sp>
+      <p:sp>
+        <p:nvSpPr>
+          <p:cNvPr id="12" name="Text 10"/>
+          <p:cNvSpPr/>
+          <p:nvPr/>
+        </p:nvSpPr>
+        <p:spPr>
+          <a:xfrm>
+            <a:off x="4472330" y="1901952"/>
+            <a:ext cx="3247034" cy="402336"/>
+          </a:xfrm>
+          <a:prstGeom prst="rect">
+            <a:avLst/>
+          </a:prstGeom>
+          <a:noFill/>
+          <a:ln/>
+        </p:spPr>
+        <p:txBody>
+          <a:bodyPr wrap="square" lIns="0" tIns="0" rIns="0" bIns="0" rtlCol="0" anchor="ctr">
+            <a:normAutofit/>
+          </a:bodyPr>
+          <a:lstStyle/>
+          <a:p>
+            <a:pPr indent="0" marL="0">
+              <a:buNone/>
+            </a:pPr>
+            <a:r>
+              <a:rPr lang="en-US" sz="2200" b="1" dirty="0">
+                <a:solidFill>
+                  <a:srgbClr val="10161F"/>
+                </a:solidFill>
+                <a:latin typeface="Pretendard" pitchFamily="34" charset="0"/>
+                <a:ea typeface="Pretendard" pitchFamily="34" charset="-122"/>
+                <a:cs typeface="Pretendard" pitchFamily="34" charset="-120"/>
+              </a:rPr>
+              <a:t>약 3,650만 원</a:t>
+            </a:r>
+            <a:endParaRPr lang="en-US" sz="2200" dirty="0"/>
+          </a:p>
+        </p:txBody>
+      </p:sp>
+      <p:sp>
+        <p:nvSpPr>
+          <p:cNvPr id="13" name="Shape 11"/>
+          <p:cNvSpPr/>
+          <p:nvPr/>
+        </p:nvSpPr>
+        <p:spPr>
+          <a:xfrm>
+            <a:off x="8048549" y="1554480"/>
+            <a:ext cx="3576218" cy="1188720"/>
+          </a:xfrm>
+          <a:prstGeom prst="roundRect">
+            <a:avLst>
+              <a:gd name="adj" fmla="val 4615"/>
+            </a:avLst>
+          </a:prstGeom>
+          <a:solidFill>
+            <a:srgbClr val="F7FAFC"/>
+          </a:solidFill>
+          <a:ln w="6350">
+            <a:solidFill>
+              <a:srgbClr val="CBD5E0"/>
+            </a:solidFill>
+            <a:prstDash val="solid"/>
+          </a:ln>
+        </p:spPr>
+      </p:sp>
+      <p:sp>
+        <p:nvSpPr>
+          <p:cNvPr id="14" name="Text 12"/>
+          <p:cNvSpPr/>
+          <p:nvPr/>
+        </p:nvSpPr>
+        <p:spPr>
+          <a:xfrm>
+            <a:off x="8213141" y="1682496"/>
+            <a:ext cx="3247034" cy="201168"/>
+          </a:xfrm>
+          <a:prstGeom prst="rect">
+            <a:avLst/>
+          </a:prstGeom>
+          <a:noFill/>
+          <a:ln/>
+        </p:spPr>
+        <p:txBody>
+          <a:bodyPr wrap="square" lIns="0" tIns="0" rIns="0" bIns="0" rtlCol="0" anchor="ctr"/>
+          <a:lstStyle/>
+          <a:p>
+            <a:pPr indent="0" marL="0">
+              <a:buNone/>
+            </a:pPr>
+            <a:r>
+              <a:rPr lang="en-US" sz="950" dirty="0">
+                <a:solidFill>
+                  <a:srgbClr val="718096"/>
+                </a:solidFill>
+                <a:latin typeface="Pretendard" pitchFamily="34" charset="0"/>
+                <a:ea typeface="Pretendard" pitchFamily="34" charset="-122"/>
+                <a:cs typeface="Pretendard" pitchFamily="34" charset="-120"/>
+              </a:rPr>
+              <a:t>레버리지 수익률</a:t>
+            </a:r>
+            <a:endParaRPr lang="en-US" sz="950" dirty="0"/>
+          </a:p>
+        </p:txBody>
+      </p:sp>
+      <p:sp>
+        <p:nvSpPr>
+          <p:cNvPr id="15" name="Text 13"/>
+          <p:cNvSpPr/>
+          <p:nvPr/>
+        </p:nvSpPr>
+        <p:spPr>
+          <a:xfrm>
+            <a:off x="8213141" y="1901952"/>
+            <a:ext cx="3247034" cy="402336"/>
+          </a:xfrm>
+          <a:prstGeom prst="rect">
+            <a:avLst/>
+          </a:prstGeom>
+          <a:noFill/>
+          <a:ln/>
+        </p:spPr>
+        <p:txBody>
+          <a:bodyPr wrap="square" lIns="0" tIns="0" rIns="0" bIns="0" rtlCol="0" anchor="ctr">
+            <a:normAutofit/>
+          </a:bodyPr>
+          <a:lstStyle/>
+          <a:p>
+            <a:pPr indent="0" marL="0">
+              <a:buNone/>
+            </a:pPr>
+            <a:r>
+              <a:rPr lang="en-US" sz="2200" b="1" dirty="0">
+                <a:solidFill>
+                  <a:srgbClr val="10161F"/>
+                </a:solidFill>
+                <a:latin typeface="Pretendard" pitchFamily="34" charset="0"/>
+                <a:ea typeface="Pretendard" pitchFamily="34" charset="-122"/>
+                <a:cs typeface="Pretendard" pitchFamily="34" charset="-120"/>
+              </a:rPr>
+              <a:t>약 5.8%</a:t>
+            </a:r>
+            <a:endParaRPr lang="en-US" sz="2200" dirty="0"/>
+          </a:p>
+        </p:txBody>
+      </p:sp>
+      <p:sp>
+        <p:nvSpPr>
+          <p:cNvPr id="16" name="Shape 14"/>
+          <p:cNvSpPr/>
+          <p:nvPr/>
+        </p:nvSpPr>
+        <p:spPr>
+          <a:xfrm>
+            <a:off x="566928" y="2999232"/>
             <a:ext cx="11057839" cy="1280160"/>
           </a:xfrm>
           <a:prstGeom prst="roundRect">
@@ -10948,13 +15143,13 @@
       </p:sp>
       <p:sp>
         <p:nvSpPr>
-          <p:cNvPr id="8" name="Shape 6"/>
-          <p:cNvSpPr/>
-          <p:nvPr/>
-        </p:nvSpPr>
-        <p:spPr>
-          <a:xfrm>
-            <a:off x="566928" y="1700784"/>
+          <p:cNvPr id="17" name="Shape 15"/>
+          <p:cNvSpPr/>
+          <p:nvPr/>
+        </p:nvSpPr>
+        <p:spPr>
+          <a:xfrm>
+            <a:off x="566928" y="3054096"/>
             <a:ext cx="36576" cy="1170432"/>
           </a:xfrm>
           <a:prstGeom prst="rect">
@@ -10968,13 +15163,13 @@
       </p:sp>
       <p:sp>
         <p:nvSpPr>
-          <p:cNvPr id="9" name="Text 7"/>
-          <p:cNvSpPr/>
-          <p:nvPr/>
-        </p:nvSpPr>
-        <p:spPr>
-          <a:xfrm>
-            <a:off x="749808" y="1755648"/>
+          <p:cNvPr id="18" name="Text 16"/>
+          <p:cNvSpPr/>
+          <p:nvPr/>
+        </p:nvSpPr>
+        <p:spPr>
+          <a:xfrm>
+            <a:off x="749808" y="3108960"/>
             <a:ext cx="10728655" cy="201168"/>
           </a:xfrm>
           <a:prstGeom prst="rect">
@@ -11007,13 +15202,13 @@
       </p:sp>
       <p:sp>
         <p:nvSpPr>
-          <p:cNvPr id="10" name="Text 8"/>
-          <p:cNvSpPr/>
-          <p:nvPr/>
-        </p:nvSpPr>
-        <p:spPr>
-          <a:xfrm>
-            <a:off x="749808" y="1975104"/>
+          <p:cNvPr id="19" name="Text 17"/>
+          <p:cNvSpPr/>
+          <p:nvPr/>
+        </p:nvSpPr>
+        <p:spPr>
+          <a:xfrm>
+            <a:off x="749808" y="3328416"/>
             <a:ext cx="10728655" cy="877824"/>
           </a:xfrm>
           <a:prstGeom prst="rect">
@@ -11041,7 +15236,7 @@
                 <a:ea typeface="Pretendard" pitchFamily="34" charset="-122"/>
                 <a:cs typeface="Pretendard" pitchFamily="34" charset="-120"/>
               </a:rPr>
-              <a:t>연 순영업소득(NOI) 약 7.14억 원, 매입 Cap Rate 4.62%입니다.</a:t>
+              <a:t>연 순영업소득(NOI) 약 7.14억 원, 매입 Cap Rate 4.62%입니다. 실투자금: 약 69억 원</a:t>
             </a:r>
             <a:endParaRPr lang="en-US" sz="930" dirty="0"/>
           </a:p>
@@ -11049,7 +15244,7 @@
       </p:sp>
       <p:sp>
         <p:nvSpPr>
-          <p:cNvPr id="11" name="Text 9"/>
+          <p:cNvPr id="20" name="Text 18"/>
           <p:cNvSpPr/>
           <p:nvPr/>
         </p:nvSpPr>
@@ -11088,7 +15283,7 @@
       </p:sp>
       <p:sp>
         <p:nvSpPr>
-          <p:cNvPr id="12" name="Text 10"/>
+          <p:cNvPr id="21" name="Text 19"/>
           <p:cNvSpPr/>
           <p:nvPr/>
         </p:nvSpPr>
@@ -11119,7 +15314,7 @@
                 <a:ea typeface="Arial" pitchFamily="34" charset="-122"/>
                 <a:cs typeface="Arial" pitchFamily="34" charset="-120"/>
               </a:rPr>
-              <a:t>8</a:t>
+              <a:t>7</a:t>
             </a:r>
             <a:endParaRPr lang="en-US" sz="900" dirty="0"/>
           </a:p>
@@ -11210,7 +15405,7 @@
                 <a:ea typeface="Arial" pitchFamily="34" charset="-122"/>
                 <a:cs typeface="Arial" pitchFamily="34" charset="-120"/>
               </a:rPr>
-              <a:t>09</a:t>
+              <a:t>08</a:t>
             </a:r>
             <a:endParaRPr lang="en-US" sz="1300" dirty="0"/>
           </a:p>
@@ -11664,7 +15859,7 @@
                 <a:ea typeface="Arial" pitchFamily="34" charset="-122"/>
                 <a:cs typeface="Arial" pitchFamily="34" charset="-120"/>
               </a:rPr>
-              <a:t>9</a:t>
+              <a:t>8</a:t>
             </a:r>
             <a:endParaRPr lang="en-US" sz="900" dirty="0"/>
           </a:p>

--- a/docs/test/stress/e2e-outputs/income_pro_pr02.pptx
+++ b/docs/test/stress/e2e-outputs/income_pro_pr02.pptx
@@ -15236,7 +15236,7 @@
                 <a:ea typeface="Pretendard" pitchFamily="34" charset="-122"/>
                 <a:cs typeface="Pretendard" pitchFamily="34" charset="-120"/>
               </a:rPr>
-              <a:t>연 순영업소득(NOI) 약 7.14억 원, 매입 Cap Rate 4.62%입니다. 실투자금: 약 69억 원</a:t>
+              <a:t>연 순영업소득(NOI) 약 7.14억 원, 매입 Cap Rate 4.62%입니다.</a:t>
             </a:r>
             <a:endParaRPr lang="en-US" sz="930" dirty="0"/>
           </a:p>
